--- a/slides/June-11.pptx
+++ b/slides/June-11.pptx
@@ -4,6 +4,9 @@
   <p:sldMasterIdLst>
     <p:sldMasterId id="2147483648" r:id="rId1"/>
   </p:sldMasterIdLst>
+  <p:notesMasterIdLst>
+    <p:notesMasterId r:id="rId20"/>
+  </p:notesMasterIdLst>
   <p:sldIdLst>
     <p:sldId id="256" r:id="rId2"/>
     <p:sldId id="257" r:id="rId3"/>
@@ -24,9 +27,6 @@
     <p:sldId id="272" r:id="rId18"/>
     <p:sldId id="273" r:id="rId19"/>
   </p:sldIdLst>
-  <p:notesMasterIdLst>
-    <p:notesMasterId r:id="rId20"/>
-  </p:notesMasterIdLst>
   <p:sldSz cx="12192000" cy="6858000"/>
   <p:notesSz cx="6858000" cy="12192000"/>
   <p:defaultTextStyle>
@@ -121,6 +121,11 @@
       </a:defRPr>
     </a:lvl9pPr>
   </p:defaultTextStyle>
+  <p:extLst>
+    <p:ext uri="{EFAFB233-063F-42B5-8137-9DF3F51BA10A}">
+      <p15:sldGuideLst xmlns:p15="http://schemas.microsoft.com/office/powerpoint/2012/main"/>
+    </p:ext>
+  </p:extLst>
 </p:presentation>
 </file>
 
@@ -146,234 +151,10 @@
           <a:chExt cx="0" cy="0"/>
         </a:xfrm>
       </p:grpSpPr>
-      <p:sp>
-        <p:nvSpPr>
-          <p:cNvPr id="2" name="Header Placeholder 1"/>
-          <p:cNvSpPr>
-            <a:spLocks noGrp="1"/>
-          </p:cNvSpPr>
-          <p:nvPr>
-            <p:ph type="hdr" sz="quarter"/>
-          </p:nvPr>
-        </p:nvSpPr>
-        <p:spPr>
-          <a:xfrm>
-            <a:off x="0" y="0"/>
-            <a:ext cx="2971800" cy="458788"/>
-          </a:xfrm>
-          <a:prstGeom prst="rect">
-            <a:avLst/>
-          </a:prstGeom>
-        </p:spPr>
-        <p:txBody>
-          <a:bodyPr vert="horz" lIns="91440" tIns="45720" rIns="91440" bIns="45720" rtlCol="0"/>
-          <a:lstStyle>
-            <a:lvl1pPr algn="l">
-              <a:defRPr sz="1200"/>
-            </a:lvl1pPr>
-          </a:lstStyle>
-          <a:p>
-            <a:endParaRPr lang="en-US"/>
-          </a:p>
-        </p:txBody>
-      </p:sp>
-      <p:sp>
-        <p:nvSpPr>
-          <p:cNvPr id="3" name="Date Placeholder 2"/>
-          <p:cNvSpPr>
-            <a:spLocks noGrp="1"/>
-          </p:cNvSpPr>
-          <p:nvPr>
-            <p:ph type="dt" idx="1"/>
-          </p:nvPr>
-        </p:nvSpPr>
-        <p:spPr>
-          <a:xfrm>
-            <a:off x="3884613" y="0"/>
-            <a:ext cx="2971800" cy="458788"/>
-          </a:xfrm>
-          <a:prstGeom prst="rect">
-            <a:avLst/>
-          </a:prstGeom>
-        </p:spPr>
-        <p:txBody>
-          <a:bodyPr vert="horz" lIns="91440" tIns="45720" rIns="91440" bIns="45720" rtlCol="0"/>
-          <a:lstStyle>
-            <a:lvl1pPr algn="r">
-              <a:defRPr sz="1200"/>
-            </a:lvl1pPr>
-          </a:lstStyle>
-          <a:p>
-            <a:fld id="{5282F153-3F37-0F45-9E97-73ACFA13230C}" type="datetimeFigureOut">
-              <a:rPr lang="en-US"/>
-              <a:t>7/23/19</a:t>
-            </a:fld>
-            <a:endParaRPr lang="en-US"/>
-          </a:p>
-        </p:txBody>
-      </p:sp>
-      <p:sp>
-        <p:nvSpPr>
-          <p:cNvPr id="4" name="Slide Image Placeholder 3"/>
-          <p:cNvSpPr>
-            <a:spLocks noGrp="1" noRot="1" noChangeAspect="1"/>
-          </p:cNvSpPr>
-          <p:nvPr>
-            <p:ph type="sldImg" idx="2"/>
-          </p:nvPr>
-        </p:nvSpPr>
-        <p:spPr>
-          <a:xfrm>
-            <a:off x="685800" y="1143000"/>
-            <a:ext cx="5486400" cy="3086100"/>
-          </a:xfrm>
-          <a:prstGeom prst="rect">
-            <a:avLst/>
-          </a:prstGeom>
-          <a:noFill/>
-          <a:ln w="12700">
-            <a:solidFill>
-              <a:prstClr val="black"/>
-            </a:solidFill>
-          </a:ln>
-        </p:spPr>
-        <p:txBody>
-          <a:bodyPr vert="horz" lIns="91440" tIns="45720" rIns="91440" bIns="45720" rtlCol="0" anchor="ctr"/>
-          <a:lstStyle/>
-          <a:p>
-            <a:endParaRPr lang="en-US"/>
-          </a:p>
-        </p:txBody>
-      </p:sp>
-      <p:sp>
-        <p:nvSpPr>
-          <p:cNvPr id="5" name="Notes Placeholder 4"/>
-          <p:cNvSpPr>
-            <a:spLocks noGrp="1"/>
-          </p:cNvSpPr>
-          <p:nvPr>
-            <p:ph type="body" sz="quarter" idx="3"/>
-          </p:nvPr>
-        </p:nvSpPr>
-        <p:spPr>
-          <a:xfrm>
-            <a:off x="685800" y="4400550"/>
-            <a:ext cx="5486400" cy="3600450"/>
-          </a:xfrm>
-          <a:prstGeom prst="rect">
-            <a:avLst/>
-          </a:prstGeom>
-        </p:spPr>
-        <p:txBody>
-          <a:bodyPr vert="horz" lIns="91440" tIns="45720" rIns="91440" bIns="45720" rtlCol="0"/>
-          <a:lstStyle/>
-          <a:p>
-            <a:pPr lvl="0"/>
-            <a:r>
-              <a:rPr lang="en-US"/>
-              <a:t>Click to edit Master text styles</a:t>
-            </a:r>
-          </a:p>
-          <a:p>
-            <a:pPr lvl="1"/>
-            <a:r>
-              <a:rPr lang="en-US"/>
-              <a:t>Second level</a:t>
-            </a:r>
-          </a:p>
-          <a:p>
-            <a:pPr lvl="2"/>
-            <a:r>
-              <a:rPr lang="en-US"/>
-              <a:t>Third level</a:t>
-            </a:r>
-          </a:p>
-          <a:p>
-            <a:pPr lvl="3"/>
-            <a:r>
-              <a:rPr lang="en-US"/>
-              <a:t>Fourth level</a:t>
-            </a:r>
-          </a:p>
-          <a:p>
-            <a:pPr lvl="4"/>
-            <a:r>
-              <a:rPr lang="en-US"/>
-              <a:t>Fifth level</a:t>
-            </a:r>
-          </a:p>
-        </p:txBody>
-      </p:sp>
-      <p:sp>
-        <p:nvSpPr>
-          <p:cNvPr id="6" name="Footer Placeholder 5"/>
-          <p:cNvSpPr>
-            <a:spLocks noGrp="1"/>
-          </p:cNvSpPr>
-          <p:nvPr>
-            <p:ph type="ftr" sz="quarter" idx="4"/>
-          </p:nvPr>
-        </p:nvSpPr>
-        <p:spPr>
-          <a:xfrm>
-            <a:off x="0" y="8685213"/>
-            <a:ext cx="2971800" cy="458787"/>
-          </a:xfrm>
-          <a:prstGeom prst="rect">
-            <a:avLst/>
-          </a:prstGeom>
-        </p:spPr>
-        <p:txBody>
-          <a:bodyPr vert="horz" lIns="91440" tIns="45720" rIns="91440" bIns="45720" rtlCol="0" anchor="b"/>
-          <a:lstStyle>
-            <a:lvl1pPr algn="l">
-              <a:defRPr sz="1200"/>
-            </a:lvl1pPr>
-          </a:lstStyle>
-          <a:p>
-            <a:endParaRPr lang="en-US"/>
-          </a:p>
-        </p:txBody>
-      </p:sp>
-      <p:sp>
-        <p:nvSpPr>
-          <p:cNvPr id="7" name="Slide Number Placeholder 6"/>
-          <p:cNvSpPr>
-            <a:spLocks noGrp="1"/>
-          </p:cNvSpPr>
-          <p:nvPr>
-            <p:ph type="sldNum" sz="quarter" idx="5"/>
-          </p:nvPr>
-        </p:nvSpPr>
-        <p:spPr>
-          <a:xfrm>
-            <a:off x="3884613" y="8685213"/>
-            <a:ext cx="2971800" cy="458787"/>
-          </a:xfrm>
-          <a:prstGeom prst="rect">
-            <a:avLst/>
-          </a:prstGeom>
-        </p:spPr>
-        <p:txBody>
-          <a:bodyPr vert="horz" lIns="91440" tIns="45720" rIns="91440" bIns="45720" rtlCol="0" anchor="b"/>
-          <a:lstStyle>
-            <a:lvl1pPr algn="r">
-              <a:defRPr sz="1200"/>
-            </a:lvl1pPr>
-          </a:lstStyle>
-          <a:p>
-            <a:fld id="{CE5E9CC1-C706-0F49-92D6-E571CC5EEA8F}" type="slidenum">
-              <a:rPr lang="en-US"/>
-              <a:t>‹#›</a:t>
-            </a:fld>
-            <a:endParaRPr lang="en-US"/>
-          </a:p>
-        </p:txBody>
-      </p:sp>
     </p:spTree>
     <p:extLst>
       <p:ext uri="{BB962C8B-B14F-4D97-AF65-F5344CB8AC3E}">
-        <p14:creationId xmlns:p14="http://schemas.microsoft.com/office/powerpoint/2010/main" val="1024086991"/>
+        <p14:creationId xmlns:p14="http://schemas.microsoft.com/office/powerpoint/2010/main" val="1420526954"/>
       </p:ext>
     </p:extLst>
   </p:cSld>
@@ -517,10 +298,6 @@
           <a:bodyPr/>
           <a:lstStyle/>
           <a:p>
-            <a:r>
-              <a:rPr lang="en-US" dirty="0"/>
-              <a:t/>
-            </a:r>
             <a:endParaRPr lang="en-US" dirty="0"/>
           </a:p>
         </p:txBody>
@@ -605,10 +382,6 @@
           <a:bodyPr/>
           <a:lstStyle/>
           <a:p>
-            <a:r>
-              <a:rPr lang="en-US" dirty="0"/>
-              <a:t/>
-            </a:r>
             <a:endParaRPr lang="en-US" dirty="0"/>
           </a:p>
         </p:txBody>
@@ -693,10 +466,6 @@
           <a:bodyPr/>
           <a:lstStyle/>
           <a:p>
-            <a:r>
-              <a:rPr lang="en-US" dirty="0"/>
-              <a:t/>
-            </a:r>
             <a:endParaRPr lang="en-US" dirty="0"/>
           </a:p>
         </p:txBody>
@@ -781,10 +550,6 @@
           <a:bodyPr/>
           <a:lstStyle/>
           <a:p>
-            <a:r>
-              <a:rPr lang="en-US" dirty="0"/>
-              <a:t/>
-            </a:r>
             <a:endParaRPr lang="en-US" dirty="0"/>
           </a:p>
         </p:txBody>
@@ -869,10 +634,6 @@
           <a:bodyPr/>
           <a:lstStyle/>
           <a:p>
-            <a:r>
-              <a:rPr lang="en-US" dirty="0"/>
-              <a:t/>
-            </a:r>
             <a:endParaRPr lang="en-US" dirty="0"/>
           </a:p>
         </p:txBody>
@@ -957,10 +718,6 @@
           <a:bodyPr/>
           <a:lstStyle/>
           <a:p>
-            <a:r>
-              <a:rPr lang="en-US" dirty="0"/>
-              <a:t/>
-            </a:r>
             <a:endParaRPr lang="en-US" dirty="0"/>
           </a:p>
         </p:txBody>
@@ -1045,10 +802,6 @@
           <a:bodyPr/>
           <a:lstStyle/>
           <a:p>
-            <a:r>
-              <a:rPr lang="en-US" dirty="0"/>
-              <a:t/>
-            </a:r>
             <a:endParaRPr lang="en-US" dirty="0"/>
           </a:p>
         </p:txBody>
@@ -1133,10 +886,6 @@
           <a:bodyPr/>
           <a:lstStyle/>
           <a:p>
-            <a:r>
-              <a:rPr lang="en-US" dirty="0"/>
-              <a:t/>
-            </a:r>
             <a:endParaRPr lang="en-US" dirty="0"/>
           </a:p>
         </p:txBody>
@@ -1221,10 +970,6 @@
           <a:bodyPr/>
           <a:lstStyle/>
           <a:p>
-            <a:r>
-              <a:rPr lang="en-US" dirty="0"/>
-              <a:t/>
-            </a:r>
             <a:endParaRPr lang="en-US" dirty="0"/>
           </a:p>
         </p:txBody>
@@ -1309,10 +1054,6 @@
           <a:bodyPr/>
           <a:lstStyle/>
           <a:p>
-            <a:r>
-              <a:rPr lang="en-US" dirty="0"/>
-              <a:t/>
-            </a:r>
             <a:endParaRPr lang="en-US" dirty="0"/>
           </a:p>
         </p:txBody>
@@ -1397,10 +1138,6 @@
           <a:bodyPr/>
           <a:lstStyle/>
           <a:p>
-            <a:r>
-              <a:rPr lang="en-US" dirty="0"/>
-              <a:t/>
-            </a:r>
             <a:endParaRPr lang="en-US" dirty="0"/>
           </a:p>
         </p:txBody>
@@ -1485,10 +1222,6 @@
           <a:bodyPr/>
           <a:lstStyle/>
           <a:p>
-            <a:r>
-              <a:rPr lang="en-US" dirty="0"/>
-              <a:t/>
-            </a:r>
             <a:endParaRPr lang="en-US" dirty="0"/>
           </a:p>
         </p:txBody>
@@ -1573,10 +1306,6 @@
           <a:bodyPr/>
           <a:lstStyle/>
           <a:p>
-            <a:r>
-              <a:rPr lang="en-US" dirty="0"/>
-              <a:t/>
-            </a:r>
             <a:endParaRPr lang="en-US" dirty="0"/>
           </a:p>
         </p:txBody>
@@ -1661,10 +1390,6 @@
           <a:bodyPr/>
           <a:lstStyle/>
           <a:p>
-            <a:r>
-              <a:rPr lang="en-US" dirty="0"/>
-              <a:t/>
-            </a:r>
             <a:endParaRPr lang="en-US" dirty="0"/>
           </a:p>
         </p:txBody>
@@ -1749,10 +1474,6 @@
           <a:bodyPr/>
           <a:lstStyle/>
           <a:p>
-            <a:r>
-              <a:rPr lang="en-US" dirty="0"/>
-              <a:t/>
-            </a:r>
             <a:endParaRPr lang="en-US" dirty="0"/>
           </a:p>
         </p:txBody>
@@ -1837,10 +1558,6 @@
           <a:bodyPr/>
           <a:lstStyle/>
           <a:p>
-            <a:r>
-              <a:rPr lang="en-US" dirty="0"/>
-              <a:t/>
-            </a:r>
             <a:endParaRPr lang="en-US" dirty="0"/>
           </a:p>
         </p:txBody>
@@ -1925,10 +1642,6 @@
           <a:bodyPr/>
           <a:lstStyle/>
           <a:p>
-            <a:r>
-              <a:rPr lang="en-US" dirty="0"/>
-              <a:t/>
-            </a:r>
             <a:endParaRPr lang="en-US" dirty="0"/>
           </a:p>
         </p:txBody>
@@ -2013,10 +1726,6 @@
           <a:bodyPr/>
           <a:lstStyle/>
           <a:p>
-            <a:r>
-              <a:rPr lang="en-US" dirty="0"/>
-              <a:t/>
-            </a:r>
             <a:endParaRPr lang="en-US" dirty="0"/>
           </a:p>
         </p:txBody>
@@ -2090,6 +1799,11 @@
 <file path=ppt/slideMasters/slideMaster1.xml><?xml version="1.0" encoding="utf-8"?>
 <p:sldMaster xmlns:a="http://schemas.openxmlformats.org/drawingml/2006/main" xmlns:r="http://schemas.openxmlformats.org/officeDocument/2006/relationships" xmlns:p="http://schemas.openxmlformats.org/presentationml/2006/main">
   <p:cSld>
+    <p:bg>
+      <p:bgRef idx="1001">
+        <a:schemeClr val="bg1"/>
+      </p:bgRef>
+    </p:bg>
     <p:spTree>
       <p:nvGrpSpPr>
         <p:cNvPr id="1" name=""/>
@@ -2372,6 +2086,7 @@
         <a:solidFill>
           <a:srgbClr val="F4F8FC"/>
         </a:solidFill>
+        <a:effectLst/>
       </p:bgPr>
     </p:bg>
     <p:spTree>
@@ -2409,7 +2124,7 @@
           <a:bodyPr wrap="square" lIns="0" tIns="0" rIns="0" bIns="0" rtlCol="0" anchor="ctr"/>
           <a:lstStyle/>
           <a:p>
-            <a:pPr algn="r" indent="0" marL="0">
+            <a:pPr marL="0" indent="0" algn="r">
               <a:buNone/>
             </a:pPr>
             <a:r>
@@ -2446,6 +2161,13 @@
           </a:solidFill>
           <a:ln/>
         </p:spPr>
+        <p:txBody>
+          <a:bodyPr/>
+          <a:lstStyle/>
+          <a:p>
+            <a:endParaRPr lang="en-US"/>
+          </a:p>
+        </p:txBody>
       </p:sp>
       <p:sp>
         <p:nvSpPr>
@@ -2466,6 +2188,13 @@
           </a:solidFill>
           <a:ln/>
         </p:spPr>
+        <p:txBody>
+          <a:bodyPr/>
+          <a:lstStyle/>
+          <a:p>
+            <a:endParaRPr lang="en-US"/>
+          </a:p>
+        </p:txBody>
       </p:sp>
       <p:sp>
         <p:nvSpPr>
@@ -2488,11 +2217,11 @@
           <a:bodyPr wrap="square" lIns="0" tIns="0" rIns="0" bIns="0" rtlCol="0" anchor="ctr"/>
           <a:lstStyle/>
           <a:p>
-            <a:pPr indent="0" marL="0">
+            <a:pPr marL="0" indent="0">
               <a:buNone/>
             </a:pPr>
             <a:r>
-              <a:rPr lang="en-US" sz="1500" b="1" spc="300" kern="0" dirty="0">
+              <a:rPr lang="en-US" sz="1500" b="1" kern="0" spc="300" dirty="0">
                 <a:solidFill>
                   <a:srgbClr val="0284C7"/>
                 </a:solidFill>
@@ -2527,7 +2256,7 @@
           <a:bodyPr wrap="square" lIns="0" tIns="0" rIns="0" bIns="0" rtlCol="0" anchor="ctr"/>
           <a:lstStyle/>
           <a:p>
-            <a:pPr indent="0" marL="0">
+            <a:pPr marL="0" indent="0">
               <a:lnSpc>
                 <a:spcPct val="95000"/>
               </a:lnSpc>
@@ -2542,12 +2271,12 @@
                 <a:ea typeface="Arial Black" pitchFamily="34" charset="-122"/>
                 <a:cs typeface="Arial Black" pitchFamily="34" charset="-120"/>
               </a:rPr>
-              <a:t>MCP, Plugins</a:t>
+              <a:t>MCP, Subagents, Plugins</a:t>
             </a:r>
             <a:endParaRPr lang="en-US" sz="5600" dirty="0"/>
           </a:p>
           <a:p>
-            <a:pPr indent="0" marL="0">
+            <a:pPr marL="0" indent="0">
               <a:lnSpc>
                 <a:spcPct val="95000"/>
               </a:lnSpc>
@@ -2589,7 +2318,7 @@
           <a:bodyPr wrap="square" lIns="0" tIns="0" rIns="0" bIns="0" rtlCol="0" anchor="ctr"/>
           <a:lstStyle/>
           <a:p>
-            <a:pPr indent="0" marL="0">
+            <a:pPr marL="0" indent="0">
               <a:buNone/>
             </a:pPr>
             <a:r>
@@ -2603,9 +2332,6 @@
               </a:rPr>
               <a:t>Build a blog </a:t>
             </a:r>
-            <a:pPr indent="0" marL="0">
-              <a:buNone/>
-            </a:pPr>
             <a:r>
               <a:rPr lang="en-US" sz="2200" b="1" dirty="0">
                 <a:solidFill>
@@ -2640,6 +2366,13 @@
           </a:solidFill>
           <a:ln/>
         </p:spPr>
+        <p:txBody>
+          <a:bodyPr/>
+          <a:lstStyle/>
+          <a:p>
+            <a:endParaRPr lang="en-US"/>
+          </a:p>
+        </p:txBody>
       </p:sp>
       <p:sp>
         <p:nvSpPr>
@@ -2662,7 +2395,7 @@
           <a:bodyPr wrap="square" lIns="0" tIns="0" rIns="0" bIns="0" rtlCol="0" anchor="ctr"/>
           <a:lstStyle/>
           <a:p>
-            <a:pPr indent="0" marL="0">
+            <a:pPr marL="0" indent="0">
               <a:buNone/>
             </a:pPr>
             <a:r>
@@ -2696,6 +2429,7 @@
         <a:solidFill>
           <a:srgbClr val="F4F8FC"/>
         </a:solidFill>
+        <a:effectLst/>
       </p:bgPr>
     </p:bg>
     <p:spTree>
@@ -2731,6 +2465,13 @@
           </a:solidFill>
           <a:ln/>
         </p:spPr>
+        <p:txBody>
+          <a:bodyPr/>
+          <a:lstStyle/>
+          <a:p>
+            <a:endParaRPr lang="en-US"/>
+          </a:p>
+        </p:txBody>
       </p:sp>
       <p:sp>
         <p:nvSpPr>
@@ -2751,6 +2492,13 @@
           </a:solidFill>
           <a:ln/>
         </p:spPr>
+        <p:txBody>
+          <a:bodyPr/>
+          <a:lstStyle/>
+          <a:p>
+            <a:endParaRPr lang="en-US"/>
+          </a:p>
+        </p:txBody>
       </p:sp>
       <p:sp>
         <p:nvSpPr>
@@ -2773,11 +2521,11 @@
           <a:bodyPr wrap="square" lIns="0" tIns="0" rIns="0" bIns="0" rtlCol="0" anchor="ctr"/>
           <a:lstStyle/>
           <a:p>
-            <a:pPr indent="0" marL="0">
+            <a:pPr marL="0" indent="0">
               <a:buNone/>
             </a:pPr>
             <a:r>
-              <a:rPr lang="en-US" sz="1200" b="1" spc="300" kern="0" dirty="0">
+              <a:rPr lang="en-US" sz="1200" b="1" kern="0" spc="300" dirty="0">
                 <a:solidFill>
                   <a:srgbClr val="0284C7"/>
                 </a:solidFill>
@@ -2812,7 +2560,7 @@
           <a:bodyPr wrap="square" lIns="0" tIns="0" rIns="0" bIns="0" rtlCol="0" anchor="ctr"/>
           <a:lstStyle/>
           <a:p>
-            <a:pPr indent="0" marL="0">
+            <a:pPr marL="0" indent="0">
               <a:buNone/>
             </a:pPr>
             <a:r>
@@ -2856,13 +2604,20 @@
             <a:prstDash val="solid"/>
           </a:ln>
           <a:effectLst>
-            <a:outerShdw sx="100000" sy="100000" kx="0" ky="0" algn="bl" rotWithShape="0" blurRad="88900" dist="25400" dir="5400000">
+            <a:outerShdw blurRad="88900" dist="25400" dir="5400000" algn="bl" rotWithShape="0">
               <a:srgbClr val="8FA3BC">
                 <a:alpha val="30000"/>
               </a:srgbClr>
             </a:outerShdw>
           </a:effectLst>
         </p:spPr>
+        <p:txBody>
+          <a:bodyPr/>
+          <a:lstStyle/>
+          <a:p>
+            <a:endParaRPr lang="en-US"/>
+          </a:p>
+        </p:txBody>
       </p:sp>
       <p:sp>
         <p:nvSpPr>
@@ -2883,6 +2638,13 @@
           </a:solidFill>
           <a:ln/>
         </p:spPr>
+        <p:txBody>
+          <a:bodyPr/>
+          <a:lstStyle/>
+          <a:p>
+            <a:endParaRPr lang="en-US"/>
+          </a:p>
+        </p:txBody>
       </p:sp>
       <p:sp>
         <p:nvSpPr>
@@ -2905,7 +2667,7 @@
           <a:bodyPr wrap="square" lIns="0" tIns="0" rIns="0" bIns="0" rtlCol="0" anchor="ctr"/>
           <a:lstStyle/>
           <a:p>
-            <a:pPr algn="ctr" indent="0" marL="0">
+            <a:pPr marL="0" indent="0" algn="ctr">
               <a:buNone/>
             </a:pPr>
             <a:r>
@@ -2944,7 +2706,7 @@
           <a:bodyPr wrap="square" lIns="0" tIns="0" rIns="0" bIns="0" rtlCol="0" anchor="ctr"/>
           <a:lstStyle/>
           <a:p>
-            <a:pPr indent="0" marL="0">
+            <a:pPr marL="0" indent="0">
               <a:buNone/>
             </a:pPr>
             <a:r>
@@ -2988,13 +2750,20 @@
             <a:prstDash val="solid"/>
           </a:ln>
           <a:effectLst>
-            <a:outerShdw sx="100000" sy="100000" kx="0" ky="0" algn="bl" rotWithShape="0" blurRad="88900" dist="25400" dir="5400000">
+            <a:outerShdw blurRad="88900" dist="25400" dir="5400000" algn="bl" rotWithShape="0">
               <a:srgbClr val="8FA3BC">
                 <a:alpha val="30000"/>
               </a:srgbClr>
             </a:outerShdw>
           </a:effectLst>
         </p:spPr>
+        <p:txBody>
+          <a:bodyPr/>
+          <a:lstStyle/>
+          <a:p>
+            <a:endParaRPr lang="en-US"/>
+          </a:p>
+        </p:txBody>
       </p:sp>
       <p:sp>
         <p:nvSpPr>
@@ -3015,6 +2784,13 @@
           </a:solidFill>
           <a:ln/>
         </p:spPr>
+        <p:txBody>
+          <a:bodyPr/>
+          <a:lstStyle/>
+          <a:p>
+            <a:endParaRPr lang="en-US"/>
+          </a:p>
+        </p:txBody>
       </p:sp>
       <p:sp>
         <p:nvSpPr>
@@ -3037,7 +2813,7 @@
           <a:bodyPr wrap="square" lIns="0" tIns="0" rIns="0" bIns="0" rtlCol="0" anchor="ctr"/>
           <a:lstStyle/>
           <a:p>
-            <a:pPr algn="ctr" indent="0" marL="0">
+            <a:pPr marL="0" indent="0" algn="ctr">
               <a:buNone/>
             </a:pPr>
             <a:r>
@@ -3076,7 +2852,7 @@
           <a:bodyPr wrap="square" lIns="0" tIns="0" rIns="0" bIns="0" rtlCol="0" anchor="ctr"/>
           <a:lstStyle/>
           <a:p>
-            <a:pPr indent="0" marL="0">
+            <a:pPr marL="0" indent="0">
               <a:buNone/>
             </a:pPr>
             <a:r>
@@ -3120,13 +2896,20 @@
             <a:prstDash val="solid"/>
           </a:ln>
           <a:effectLst>
-            <a:outerShdw sx="100000" sy="100000" kx="0" ky="0" algn="bl" rotWithShape="0" blurRad="88900" dist="25400" dir="5400000">
+            <a:outerShdw blurRad="88900" dist="25400" dir="5400000" algn="bl" rotWithShape="0">
               <a:srgbClr val="8FA3BC">
                 <a:alpha val="30000"/>
               </a:srgbClr>
             </a:outerShdw>
           </a:effectLst>
         </p:spPr>
+        <p:txBody>
+          <a:bodyPr/>
+          <a:lstStyle/>
+          <a:p>
+            <a:endParaRPr lang="en-US"/>
+          </a:p>
+        </p:txBody>
       </p:sp>
       <p:sp>
         <p:nvSpPr>
@@ -3147,6 +2930,13 @@
           </a:solidFill>
           <a:ln/>
         </p:spPr>
+        <p:txBody>
+          <a:bodyPr/>
+          <a:lstStyle/>
+          <a:p>
+            <a:endParaRPr lang="en-US"/>
+          </a:p>
+        </p:txBody>
       </p:sp>
       <p:sp>
         <p:nvSpPr>
@@ -3169,7 +2959,7 @@
           <a:bodyPr wrap="square" lIns="0" tIns="0" rIns="0" bIns="0" rtlCol="0" anchor="ctr"/>
           <a:lstStyle/>
           <a:p>
-            <a:pPr algn="ctr" indent="0" marL="0">
+            <a:pPr marL="0" indent="0" algn="ctr">
               <a:buNone/>
             </a:pPr>
             <a:r>
@@ -3208,7 +2998,7 @@
           <a:bodyPr wrap="square" lIns="0" tIns="0" rIns="0" bIns="0" rtlCol="0" anchor="ctr"/>
           <a:lstStyle/>
           <a:p>
-            <a:pPr indent="0" marL="0">
+            <a:pPr marL="0" indent="0">
               <a:buNone/>
             </a:pPr>
             <a:r>
@@ -3252,13 +3042,20 @@
             <a:prstDash val="solid"/>
           </a:ln>
           <a:effectLst>
-            <a:outerShdw sx="100000" sy="100000" kx="0" ky="0" algn="bl" rotWithShape="0" blurRad="88900" dist="25400" dir="5400000">
+            <a:outerShdw blurRad="88900" dist="25400" dir="5400000" algn="bl" rotWithShape="0">
               <a:srgbClr val="8FA3BC">
                 <a:alpha val="30000"/>
               </a:srgbClr>
             </a:outerShdw>
           </a:effectLst>
         </p:spPr>
+        <p:txBody>
+          <a:bodyPr/>
+          <a:lstStyle/>
+          <a:p>
+            <a:endParaRPr lang="en-US"/>
+          </a:p>
+        </p:txBody>
       </p:sp>
       <p:sp>
         <p:nvSpPr>
@@ -3279,6 +3076,13 @@
           </a:solidFill>
           <a:ln/>
         </p:spPr>
+        <p:txBody>
+          <a:bodyPr/>
+          <a:lstStyle/>
+          <a:p>
+            <a:endParaRPr lang="en-US"/>
+          </a:p>
+        </p:txBody>
       </p:sp>
       <p:sp>
         <p:nvSpPr>
@@ -3301,7 +3105,7 @@
           <a:bodyPr wrap="square" lIns="0" tIns="0" rIns="0" bIns="0" rtlCol="0" anchor="ctr"/>
           <a:lstStyle/>
           <a:p>
-            <a:pPr algn="ctr" indent="0" marL="0">
+            <a:pPr marL="0" indent="0" algn="ctr">
               <a:buNone/>
             </a:pPr>
             <a:r>
@@ -3340,7 +3144,7 @@
           <a:bodyPr wrap="square" lIns="0" tIns="0" rIns="0" bIns="0" rtlCol="0" anchor="ctr"/>
           <a:lstStyle/>
           <a:p>
-            <a:pPr indent="0" marL="0">
+            <a:pPr marL="0" indent="0">
               <a:buNone/>
             </a:pPr>
             <a:r>
@@ -3384,17 +3188,24 @@
             <a:prstDash val="solid"/>
           </a:ln>
         </p:spPr>
+        <p:txBody>
+          <a:bodyPr/>
+          <a:lstStyle/>
+          <a:p>
+            <a:endParaRPr lang="en-US"/>
+          </a:p>
+        </p:txBody>
       </p:sp>
       <p:pic>
         <p:nvPicPr>
-          <p:cNvPr id="23" name="Image 0" descr="bookimg/use_superpowers.png">    </p:cNvPr>
+          <p:cNvPr id="23" name="Image 0" descr="bookimg/use_superpowers.png"/>
           <p:cNvPicPr>
             <a:picLocks noChangeAspect="1"/>
           </p:cNvPicPr>
           <p:nvPr/>
         </p:nvPicPr>
         <p:blipFill>
-          <a:blip r:embed="rId1"/>
+          <a:blip r:embed="rId3"/>
           <a:stretch>
             <a:fillRect/>
           </a:stretch>
@@ -3430,7 +3241,7 @@
           <a:bodyPr wrap="square" lIns="0" tIns="0" rIns="0" bIns="0" rtlCol="0" anchor="ctr"/>
           <a:lstStyle/>
           <a:p>
-            <a:pPr algn="ctr" indent="0" marL="0">
+            <a:pPr marL="0" indent="0" algn="ctr">
               <a:buNone/>
             </a:pPr>
             <a:r>
@@ -3469,7 +3280,7 @@
           <a:bodyPr wrap="square" lIns="0" tIns="0" rIns="0" bIns="0" rtlCol="0" anchor="ctr"/>
           <a:lstStyle/>
           <a:p>
-            <a:pPr algn="l" indent="0" marL="0">
+            <a:pPr marL="0" indent="0" algn="l">
               <a:buNone/>
             </a:pPr>
             <a:r>
@@ -3513,7 +3324,7 @@
                             </p:stCondLst>
                             <p:childTnLst>
                               <p:par>
-                                <p:cTn id="5" presetID="10" presetClass="entr" presetSubtype="0" fill="hold" grpId="0" nodeType="clickEffect">
+                                <p:cTn id="5" presetID="10" presetClass="entr" presetSubtype="0" fill="hold" nodeType="clickEffect">
                                   <p:stCondLst>
                                     <p:cond delay="0"/>
                                   </p:stCondLst>
@@ -3548,7 +3359,7 @@
                                 </p:cTn>
                               </p:par>
                               <p:par>
-                                <p:cTn id="8" presetID="10" presetClass="entr" presetSubtype="0" fill="hold" grpId="0" nodeType="withEffect">
+                                <p:cTn id="8" presetID="10" presetClass="entr" presetSubtype="0" fill="hold" nodeType="withEffect">
                                   <p:stCondLst>
                                     <p:cond delay="0"/>
                                   </p:stCondLst>
@@ -3601,7 +3412,7 @@
                             </p:stCondLst>
                             <p:childTnLst>
                               <p:par>
-                                <p:cTn id="13" presetID="10" presetClass="entr" presetSubtype="0" fill="hold" grpId="1" nodeType="clickEffect">
+                                <p:cTn id="13" presetID="10" presetClass="entr" presetSubtype="0" fill="hold" nodeType="clickEffect">
                                   <p:stCondLst>
                                     <p:cond delay="0"/>
                                   </p:stCondLst>
@@ -3636,7 +3447,7 @@
                                 </p:cTn>
                               </p:par>
                               <p:par>
-                                <p:cTn id="16" presetID="10" presetClass="entr" presetSubtype="0" fill="hold" grpId="1" nodeType="withEffect">
+                                <p:cTn id="16" presetID="10" presetClass="entr" presetSubtype="0" fill="hold" nodeType="withEffect">
                                   <p:stCondLst>
                                     <p:cond delay="0"/>
                                   </p:stCondLst>
@@ -3671,7 +3482,7 @@
                                 </p:cTn>
                               </p:par>
                               <p:par>
-                                <p:cTn id="19" presetID="10" presetClass="entr" presetSubtype="0" fill="hold" grpId="1" nodeType="withEffect">
+                                <p:cTn id="19" presetID="10" presetClass="entr" presetSubtype="0" fill="hold" nodeType="withEffect">
                                   <p:stCondLst>
                                     <p:cond delay="0"/>
                                   </p:stCondLst>
@@ -3706,7 +3517,7 @@
                                 </p:cTn>
                               </p:par>
                               <p:par>
-                                <p:cTn id="22" presetID="10" presetClass="entr" presetSubtype="0" fill="hold" grpId="1" nodeType="withEffect">
+                                <p:cTn id="22" presetID="10" presetClass="entr" presetSubtype="0" fill="hold" nodeType="withEffect">
                                   <p:stCondLst>
                                     <p:cond delay="0"/>
                                   </p:stCondLst>
@@ -3759,7 +3570,7 @@
                             </p:stCondLst>
                             <p:childTnLst>
                               <p:par>
-                                <p:cTn id="27" presetID="10" presetClass="entr" presetSubtype="0" fill="hold" grpId="2" nodeType="clickEffect">
+                                <p:cTn id="27" presetID="10" presetClass="entr" presetSubtype="0" fill="hold" nodeType="clickEffect">
                                   <p:stCondLst>
                                     <p:cond delay="0"/>
                                   </p:stCondLst>
@@ -3794,7 +3605,7 @@
                                 </p:cTn>
                               </p:par>
                               <p:par>
-                                <p:cTn id="30" presetID="10" presetClass="entr" presetSubtype="0" fill="hold" grpId="2" nodeType="withEffect">
+                                <p:cTn id="30" presetID="10" presetClass="entr" presetSubtype="0" fill="hold" nodeType="withEffect">
                                   <p:stCondLst>
                                     <p:cond delay="0"/>
                                   </p:stCondLst>
@@ -3829,7 +3640,7 @@
                                 </p:cTn>
                               </p:par>
                               <p:par>
-                                <p:cTn id="33" presetID="10" presetClass="entr" presetSubtype="0" fill="hold" grpId="2" nodeType="withEffect">
+                                <p:cTn id="33" presetID="10" presetClass="entr" presetSubtype="0" fill="hold" nodeType="withEffect">
                                   <p:stCondLst>
                                     <p:cond delay="0"/>
                                   </p:stCondLst>
@@ -3864,7 +3675,7 @@
                                 </p:cTn>
                               </p:par>
                               <p:par>
-                                <p:cTn id="36" presetID="10" presetClass="entr" presetSubtype="0" fill="hold" grpId="2" nodeType="withEffect">
+                                <p:cTn id="36" presetID="10" presetClass="entr" presetSubtype="0" fill="hold" nodeType="withEffect">
                                   <p:stCondLst>
                                     <p:cond delay="0"/>
                                   </p:stCondLst>
@@ -3917,7 +3728,7 @@
                             </p:stCondLst>
                             <p:childTnLst>
                               <p:par>
-                                <p:cTn id="41" presetID="10" presetClass="entr" presetSubtype="0" fill="hold" grpId="3" nodeType="clickEffect">
+                                <p:cTn id="41" presetID="10" presetClass="entr" presetSubtype="0" fill="hold" nodeType="clickEffect">
                                   <p:stCondLst>
                                     <p:cond delay="0"/>
                                   </p:stCondLst>
@@ -3952,7 +3763,7 @@
                                 </p:cTn>
                               </p:par>
                               <p:par>
-                                <p:cTn id="44" presetID="10" presetClass="entr" presetSubtype="0" fill="hold" grpId="3" nodeType="withEffect">
+                                <p:cTn id="44" presetID="10" presetClass="entr" presetSubtype="0" fill="hold" nodeType="withEffect">
                                   <p:stCondLst>
                                     <p:cond delay="0"/>
                                   </p:stCondLst>
@@ -3987,7 +3798,7 @@
                                 </p:cTn>
                               </p:par>
                               <p:par>
-                                <p:cTn id="47" presetID="10" presetClass="entr" presetSubtype="0" fill="hold" grpId="3" nodeType="withEffect">
+                                <p:cTn id="47" presetID="10" presetClass="entr" presetSubtype="0" fill="hold" nodeType="withEffect">
                                   <p:stCondLst>
                                     <p:cond delay="0"/>
                                   </p:stCondLst>
@@ -4022,7 +3833,7 @@
                                 </p:cTn>
                               </p:par>
                               <p:par>
-                                <p:cTn id="50" presetID="10" presetClass="entr" presetSubtype="0" fill="hold" grpId="3" nodeType="withEffect">
+                                <p:cTn id="50" presetID="10" presetClass="entr" presetSubtype="0" fill="hold" nodeType="withEffect">
                                   <p:stCondLst>
                                     <p:cond delay="0"/>
                                   </p:stCondLst>
@@ -4075,7 +3886,7 @@
                             </p:stCondLst>
                             <p:childTnLst>
                               <p:par>
-                                <p:cTn id="55" presetID="10" presetClass="entr" presetSubtype="0" fill="hold" grpId="4" nodeType="clickEffect">
+                                <p:cTn id="55" presetID="10" presetClass="entr" presetSubtype="0" fill="hold" nodeType="clickEffect">
                                   <p:stCondLst>
                                     <p:cond delay="0"/>
                                   </p:stCondLst>
@@ -4110,7 +3921,7 @@
                                 </p:cTn>
                               </p:par>
                               <p:par>
-                                <p:cTn id="58" presetID="10" presetClass="entr" presetSubtype="0" fill="hold" grpId="4" nodeType="withEffect">
+                                <p:cTn id="58" presetID="10" presetClass="entr" presetSubtype="0" fill="hold" nodeType="withEffect">
                                   <p:stCondLst>
                                     <p:cond delay="0"/>
                                   </p:stCondLst>
@@ -4145,7 +3956,7 @@
                                 </p:cTn>
                               </p:par>
                               <p:par>
-                                <p:cTn id="61" presetID="10" presetClass="entr" presetSubtype="0" fill="hold" grpId="4" nodeType="withEffect">
+                                <p:cTn id="61" presetID="10" presetClass="entr" presetSubtype="0" fill="hold" nodeType="withEffect">
                                   <p:stCondLst>
                                     <p:cond delay="0"/>
                                   </p:stCondLst>
@@ -4180,7 +3991,7 @@
                                 </p:cTn>
                               </p:par>
                               <p:par>
-                                <p:cTn id="64" presetID="10" presetClass="entr" presetSubtype="0" fill="hold" grpId="4" nodeType="withEffect">
+                                <p:cTn id="64" presetID="10" presetClass="entr" presetSubtype="0" fill="hold" nodeType="withEffect">
                                   <p:stCondLst>
                                     <p:cond delay="0"/>
                                   </p:stCondLst>
@@ -4233,7 +4044,7 @@
                             </p:stCondLst>
                             <p:childTnLst>
                               <p:par>
-                                <p:cTn id="69" presetID="10" presetClass="entr" presetSubtype="0" fill="hold" grpId="5" nodeType="clickEffect">
+                                <p:cTn id="69" presetID="10" presetClass="entr" presetSubtype="0" fill="hold" nodeType="clickEffect">
                                   <p:stCondLst>
                                     <p:cond delay="0"/>
                                   </p:stCondLst>
@@ -4306,6 +4117,7 @@
         <a:solidFill>
           <a:srgbClr val="F4F8FC"/>
         </a:solidFill>
+        <a:effectLst/>
       </p:bgPr>
     </p:bg>
     <p:spTree>
@@ -4341,6 +4153,13 @@
           </a:solidFill>
           <a:ln/>
         </p:spPr>
+        <p:txBody>
+          <a:bodyPr/>
+          <a:lstStyle/>
+          <a:p>
+            <a:endParaRPr lang="en-US"/>
+          </a:p>
+        </p:txBody>
       </p:sp>
       <p:sp>
         <p:nvSpPr>
@@ -4361,6 +4180,13 @@
           </a:solidFill>
           <a:ln/>
         </p:spPr>
+        <p:txBody>
+          <a:bodyPr/>
+          <a:lstStyle/>
+          <a:p>
+            <a:endParaRPr lang="en-US"/>
+          </a:p>
+        </p:txBody>
       </p:sp>
       <p:sp>
         <p:nvSpPr>
@@ -4383,11 +4209,11 @@
           <a:bodyPr wrap="square" lIns="0" tIns="0" rIns="0" bIns="0" rtlCol="0" anchor="ctr"/>
           <a:lstStyle/>
           <a:p>
-            <a:pPr indent="0" marL="0">
+            <a:pPr marL="0" indent="0">
               <a:buNone/>
             </a:pPr>
             <a:r>
-              <a:rPr lang="en-US" sz="1200" b="1" spc="300" kern="0" dirty="0">
+              <a:rPr lang="en-US" sz="1200" b="1" kern="0" spc="300" dirty="0">
                 <a:solidFill>
                   <a:srgbClr val="0284C7"/>
                 </a:solidFill>
@@ -4422,7 +4248,7 @@
           <a:bodyPr wrap="square" lIns="0" tIns="0" rIns="0" bIns="0" rtlCol="0" anchor="ctr"/>
           <a:lstStyle/>
           <a:p>
-            <a:pPr indent="0" marL="0">
+            <a:pPr marL="0" indent="0">
               <a:buNone/>
             </a:pPr>
             <a:r>
@@ -4466,13 +4292,20 @@
             <a:prstDash val="solid"/>
           </a:ln>
           <a:effectLst>
-            <a:outerShdw sx="100000" sy="100000" kx="0" ky="0" algn="bl" rotWithShape="0" blurRad="88900" dist="25400" dir="5400000">
+            <a:outerShdw blurRad="88900" dist="25400" dir="5400000" algn="bl" rotWithShape="0">
               <a:srgbClr val="8FA3BC">
                 <a:alpha val="30000"/>
               </a:srgbClr>
             </a:outerShdw>
           </a:effectLst>
         </p:spPr>
+        <p:txBody>
+          <a:bodyPr/>
+          <a:lstStyle/>
+          <a:p>
+            <a:endParaRPr lang="en-US"/>
+          </a:p>
+        </p:txBody>
       </p:sp>
       <p:sp>
         <p:nvSpPr>
@@ -4493,17 +4326,24 @@
           </a:solidFill>
           <a:ln/>
         </p:spPr>
+        <p:txBody>
+          <a:bodyPr/>
+          <a:lstStyle/>
+          <a:p>
+            <a:endParaRPr lang="en-US"/>
+          </a:p>
+        </p:txBody>
       </p:sp>
       <p:pic>
         <p:nvPicPr>
-          <p:cNvPr id="8" name="Image 0" descr="preencoded.png">    </p:cNvPr>
+          <p:cNvPr id="8" name="Image 0" descr="preencoded.png"/>
           <p:cNvPicPr>
             <a:picLocks noChangeAspect="1"/>
           </p:cNvPicPr>
           <p:nvPr/>
         </p:nvPicPr>
         <p:blipFill>
-          <a:blip r:embed="rId1"/>
+          <a:blip r:embed="rId3"/>
           <a:stretch>
             <a:fillRect/>
           </a:stretch>
@@ -4539,7 +4379,7 @@
           <a:bodyPr wrap="square" lIns="0" tIns="0" rIns="0" bIns="0" rtlCol="0" anchor="ctr"/>
           <a:lstStyle/>
           <a:p>
-            <a:pPr algn="ctr" indent="0" marL="0">
+            <a:pPr marL="0" indent="0" algn="ctr">
               <a:buNone/>
             </a:pPr>
             <a:r>
@@ -4578,7 +4418,7 @@
           <a:bodyPr wrap="square" lIns="0" tIns="0" rIns="0" bIns="0" rtlCol="0" anchor="ctr"/>
           <a:lstStyle/>
           <a:p>
-            <a:pPr algn="ctr" indent="0" marL="0">
+            <a:pPr marL="0" indent="0" algn="ctr">
               <a:buNone/>
             </a:pPr>
             <a:r>
@@ -4615,17 +4455,24 @@
           </a:solidFill>
           <a:ln/>
         </p:spPr>
+        <p:txBody>
+          <a:bodyPr/>
+          <a:lstStyle/>
+          <a:p>
+            <a:endParaRPr lang="en-US"/>
+          </a:p>
+        </p:txBody>
       </p:sp>
       <p:pic>
         <p:nvPicPr>
-          <p:cNvPr id="12" name="Image 1" descr="preencoded.png">    </p:cNvPr>
+          <p:cNvPr id="12" name="Image 1" descr="preencoded.png"/>
           <p:cNvPicPr>
             <a:picLocks noChangeAspect="1"/>
           </p:cNvPicPr>
           <p:nvPr/>
         </p:nvPicPr>
         <p:blipFill>
-          <a:blip r:embed="rId2"/>
+          <a:blip r:embed="rId4"/>
           <a:stretch>
             <a:fillRect/>
           </a:stretch>
@@ -4666,13 +4513,20 @@
             <a:prstDash val="solid"/>
           </a:ln>
           <a:effectLst>
-            <a:outerShdw sx="100000" sy="100000" kx="0" ky="0" algn="bl" rotWithShape="0" blurRad="88900" dist="25400" dir="5400000">
+            <a:outerShdw blurRad="88900" dist="25400" dir="5400000" algn="bl" rotWithShape="0">
               <a:srgbClr val="8FA3BC">
                 <a:alpha val="30000"/>
               </a:srgbClr>
             </a:outerShdw>
           </a:effectLst>
         </p:spPr>
+        <p:txBody>
+          <a:bodyPr/>
+          <a:lstStyle/>
+          <a:p>
+            <a:endParaRPr lang="en-US"/>
+          </a:p>
+        </p:txBody>
       </p:sp>
       <p:sp>
         <p:nvSpPr>
@@ -4693,17 +4547,24 @@
           </a:solidFill>
           <a:ln/>
         </p:spPr>
+        <p:txBody>
+          <a:bodyPr/>
+          <a:lstStyle/>
+          <a:p>
+            <a:endParaRPr lang="en-US"/>
+          </a:p>
+        </p:txBody>
       </p:sp>
       <p:pic>
         <p:nvPicPr>
-          <p:cNvPr id="15" name="Image 2" descr="preencoded.png">    </p:cNvPr>
+          <p:cNvPr id="15" name="Image 2" descr="preencoded.png"/>
           <p:cNvPicPr>
             <a:picLocks noChangeAspect="1"/>
           </p:cNvPicPr>
           <p:nvPr/>
         </p:nvPicPr>
         <p:blipFill>
-          <a:blip r:embed="rId3"/>
+          <a:blip r:embed="rId5"/>
           <a:stretch>
             <a:fillRect/>
           </a:stretch>
@@ -4739,7 +4600,7 @@
           <a:bodyPr wrap="square" lIns="0" tIns="0" rIns="0" bIns="0" rtlCol="0" anchor="ctr"/>
           <a:lstStyle/>
           <a:p>
-            <a:pPr algn="ctr" indent="0" marL="0">
+            <a:pPr marL="0" indent="0" algn="ctr">
               <a:buNone/>
             </a:pPr>
             <a:r>
@@ -4778,7 +4639,7 @@
           <a:bodyPr wrap="square" lIns="0" tIns="0" rIns="0" bIns="0" rtlCol="0" anchor="ctr"/>
           <a:lstStyle/>
           <a:p>
-            <a:pPr algn="ctr" indent="0" marL="0">
+            <a:pPr marL="0" indent="0" algn="ctr">
               <a:buNone/>
             </a:pPr>
             <a:r>
@@ -4815,10 +4676,17 @@
           </a:solidFill>
           <a:ln/>
         </p:spPr>
+        <p:txBody>
+          <a:bodyPr/>
+          <a:lstStyle/>
+          <a:p>
+            <a:endParaRPr lang="en-US"/>
+          </a:p>
+        </p:txBody>
       </p:sp>
       <p:pic>
         <p:nvPicPr>
-          <p:cNvPr id="19" name="Image 3" descr="preencoded.png">    </p:cNvPr>
+          <p:cNvPr id="19" name="Image 3" descr="preencoded.png"/>
           <p:cNvPicPr>
             <a:picLocks noChangeAspect="1"/>
           </p:cNvPicPr>
@@ -4866,13 +4734,20 @@
             <a:prstDash val="solid"/>
           </a:ln>
           <a:effectLst>
-            <a:outerShdw sx="100000" sy="100000" kx="0" ky="0" algn="bl" rotWithShape="0" blurRad="88900" dist="25400" dir="5400000">
+            <a:outerShdw blurRad="88900" dist="25400" dir="5400000" algn="bl" rotWithShape="0">
               <a:srgbClr val="8FA3BC">
                 <a:alpha val="30000"/>
               </a:srgbClr>
             </a:outerShdw>
           </a:effectLst>
         </p:spPr>
+        <p:txBody>
+          <a:bodyPr/>
+          <a:lstStyle/>
+          <a:p>
+            <a:endParaRPr lang="en-US"/>
+          </a:p>
+        </p:txBody>
       </p:sp>
       <p:sp>
         <p:nvSpPr>
@@ -4893,17 +4768,24 @@
           </a:solidFill>
           <a:ln/>
         </p:spPr>
+        <p:txBody>
+          <a:bodyPr/>
+          <a:lstStyle/>
+          <a:p>
+            <a:endParaRPr lang="en-US"/>
+          </a:p>
+        </p:txBody>
       </p:sp>
       <p:pic>
         <p:nvPicPr>
-          <p:cNvPr id="22" name="Image 4" descr="preencoded.png">    </p:cNvPr>
+          <p:cNvPr id="22" name="Image 4" descr="preencoded.png"/>
           <p:cNvPicPr>
             <a:picLocks noChangeAspect="1"/>
           </p:cNvPicPr>
           <p:nvPr/>
         </p:nvPicPr>
         <p:blipFill>
-          <a:blip r:embed="rId5"/>
+          <a:blip r:embed="rId6"/>
           <a:stretch>
             <a:fillRect/>
           </a:stretch>
@@ -4939,7 +4821,7 @@
           <a:bodyPr wrap="square" lIns="0" tIns="0" rIns="0" bIns="0" rtlCol="0" anchor="ctr"/>
           <a:lstStyle/>
           <a:p>
-            <a:pPr algn="ctr" indent="0" marL="0">
+            <a:pPr marL="0" indent="0" algn="ctr">
               <a:buNone/>
             </a:pPr>
             <a:r>
@@ -4978,7 +4860,7 @@
           <a:bodyPr wrap="square" lIns="0" tIns="0" rIns="0" bIns="0" rtlCol="0" anchor="ctr"/>
           <a:lstStyle/>
           <a:p>
-            <a:pPr algn="ctr" indent="0" marL="0">
+            <a:pPr marL="0" indent="0" algn="ctr">
               <a:buNone/>
             </a:pPr>
             <a:r>
@@ -5015,17 +4897,24 @@
           </a:solidFill>
           <a:ln/>
         </p:spPr>
+        <p:txBody>
+          <a:bodyPr/>
+          <a:lstStyle/>
+          <a:p>
+            <a:endParaRPr lang="en-US"/>
+          </a:p>
+        </p:txBody>
       </p:sp>
       <p:pic>
         <p:nvPicPr>
-          <p:cNvPr id="26" name="Image 5" descr="preencoded.png">    </p:cNvPr>
+          <p:cNvPr id="26" name="Image 5" descr="preencoded.png"/>
           <p:cNvPicPr>
             <a:picLocks noChangeAspect="1"/>
           </p:cNvPicPr>
           <p:nvPr/>
         </p:nvPicPr>
         <p:blipFill>
-          <a:blip r:embed="rId6"/>
+          <a:blip r:embed="rId4"/>
           <a:stretch>
             <a:fillRect/>
           </a:stretch>
@@ -5066,13 +4955,20 @@
             <a:prstDash val="solid"/>
           </a:ln>
           <a:effectLst>
-            <a:outerShdw sx="100000" sy="100000" kx="0" ky="0" algn="bl" rotWithShape="0" blurRad="88900" dist="25400" dir="5400000">
+            <a:outerShdw blurRad="88900" dist="25400" dir="5400000" algn="bl" rotWithShape="0">
               <a:srgbClr val="8FA3BC">
                 <a:alpha val="30000"/>
               </a:srgbClr>
             </a:outerShdw>
           </a:effectLst>
         </p:spPr>
+        <p:txBody>
+          <a:bodyPr/>
+          <a:lstStyle/>
+          <a:p>
+            <a:endParaRPr lang="en-US"/>
+          </a:p>
+        </p:txBody>
       </p:sp>
       <p:sp>
         <p:nvSpPr>
@@ -5093,10 +4989,17 @@
           </a:solidFill>
           <a:ln/>
         </p:spPr>
+        <p:txBody>
+          <a:bodyPr/>
+          <a:lstStyle/>
+          <a:p>
+            <a:endParaRPr lang="en-US"/>
+          </a:p>
+        </p:txBody>
       </p:sp>
       <p:pic>
         <p:nvPicPr>
-          <p:cNvPr id="29" name="Image 6" descr="preencoded.png">    </p:cNvPr>
+          <p:cNvPr id="29" name="Image 6" descr="preencoded.png"/>
           <p:cNvPicPr>
             <a:picLocks noChangeAspect="1"/>
           </p:cNvPicPr>
@@ -5139,7 +5042,7 @@
           <a:bodyPr wrap="square" lIns="0" tIns="0" rIns="0" bIns="0" rtlCol="0" anchor="ctr"/>
           <a:lstStyle/>
           <a:p>
-            <a:pPr algn="ctr" indent="0" marL="0">
+            <a:pPr marL="0" indent="0" algn="ctr">
               <a:buNone/>
             </a:pPr>
             <a:r>
@@ -5178,7 +5081,7 @@
           <a:bodyPr wrap="square" lIns="0" tIns="0" rIns="0" bIns="0" rtlCol="0" anchor="ctr"/>
           <a:lstStyle/>
           <a:p>
-            <a:pPr algn="ctr" indent="0" marL="0">
+            <a:pPr marL="0" indent="0" algn="ctr">
               <a:buNone/>
             </a:pPr>
             <a:r>
@@ -5217,7 +5120,7 @@
           <a:bodyPr wrap="square" lIns="0" tIns="0" rIns="0" bIns="0" rtlCol="0" anchor="ctr"/>
           <a:lstStyle/>
           <a:p>
-            <a:pPr algn="ctr" indent="0" marL="0">
+            <a:pPr marL="0" indent="0" algn="ctr">
               <a:buNone/>
             </a:pPr>
             <a:r>
@@ -5256,7 +5159,7 @@
           <a:bodyPr wrap="square" lIns="0" tIns="0" rIns="0" bIns="0" rtlCol="0" anchor="ctr"/>
           <a:lstStyle/>
           <a:p>
-            <a:pPr algn="l" indent="0" marL="0">
+            <a:pPr marL="0" indent="0" algn="l">
               <a:buNone/>
             </a:pPr>
             <a:r>
@@ -5300,7 +5203,7 @@
                             </p:stCondLst>
                             <p:childTnLst>
                               <p:par>
-                                <p:cTn id="5" presetID="10" presetClass="entr" presetSubtype="0" fill="hold" grpId="0" nodeType="clickEffect">
+                                <p:cTn id="5" presetID="10" presetClass="entr" presetSubtype="0" fill="hold" nodeType="clickEffect">
                                   <p:stCondLst>
                                     <p:cond delay="0"/>
                                   </p:stCondLst>
@@ -5335,7 +5238,7 @@
                                 </p:cTn>
                               </p:par>
                               <p:par>
-                                <p:cTn id="8" presetID="10" presetClass="entr" presetSubtype="0" fill="hold" grpId="0" nodeType="withEffect">
+                                <p:cTn id="8" presetID="10" presetClass="entr" presetSubtype="0" fill="hold" nodeType="withEffect">
                                   <p:stCondLst>
                                     <p:cond delay="0"/>
                                   </p:stCondLst>
@@ -5370,7 +5273,7 @@
                                 </p:cTn>
                               </p:par>
                               <p:par>
-                                <p:cTn id="11" presetID="10" presetClass="entr" presetSubtype="0" fill="hold" grpId="0" nodeType="withEffect">
+                                <p:cTn id="11" presetID="10" presetClass="entr" presetSubtype="0" fill="hold" nodeType="withEffect">
                                   <p:stCondLst>
                                     <p:cond delay="0"/>
                                   </p:stCondLst>
@@ -5405,7 +5308,7 @@
                                 </p:cTn>
                               </p:par>
                               <p:par>
-                                <p:cTn id="14" presetID="10" presetClass="entr" presetSubtype="0" fill="hold" grpId="0" nodeType="withEffect">
+                                <p:cTn id="14" presetID="10" presetClass="entr" presetSubtype="0" fill="hold" nodeType="withEffect">
                                   <p:stCondLst>
                                     <p:cond delay="0"/>
                                   </p:stCondLst>
@@ -5440,7 +5343,7 @@
                                 </p:cTn>
                               </p:par>
                               <p:par>
-                                <p:cTn id="17" presetID="10" presetClass="entr" presetSubtype="0" fill="hold" grpId="0" nodeType="withEffect">
+                                <p:cTn id="17" presetID="10" presetClass="entr" presetSubtype="0" fill="hold" nodeType="withEffect">
                                   <p:stCondLst>
                                     <p:cond delay="0"/>
                                   </p:stCondLst>
@@ -5493,7 +5396,7 @@
                             </p:stCondLst>
                             <p:childTnLst>
                               <p:par>
-                                <p:cTn id="22" presetID="10" presetClass="entr" presetSubtype="0" fill="hold" grpId="1" nodeType="clickEffect">
+                                <p:cTn id="22" presetID="10" presetClass="entr" presetSubtype="0" fill="hold" nodeType="clickEffect">
                                   <p:stCondLst>
                                     <p:cond delay="0"/>
                                   </p:stCondLst>
@@ -5528,7 +5431,7 @@
                                 </p:cTn>
                               </p:par>
                               <p:par>
-                                <p:cTn id="25" presetID="10" presetClass="entr" presetSubtype="0" fill="hold" grpId="1" nodeType="withEffect">
+                                <p:cTn id="25" presetID="10" presetClass="entr" presetSubtype="0" fill="hold" nodeType="withEffect">
                                   <p:stCondLst>
                                     <p:cond delay="0"/>
                                   </p:stCondLst>
@@ -5563,7 +5466,7 @@
                                 </p:cTn>
                               </p:par>
                               <p:par>
-                                <p:cTn id="28" presetID="10" presetClass="entr" presetSubtype="0" fill="hold" grpId="1" nodeType="withEffect">
+                                <p:cTn id="28" presetID="10" presetClass="entr" presetSubtype="0" fill="hold" nodeType="withEffect">
                                   <p:stCondLst>
                                     <p:cond delay="0"/>
                                   </p:stCondLst>
@@ -5598,7 +5501,7 @@
                                 </p:cTn>
                               </p:par>
                               <p:par>
-                                <p:cTn id="31" presetID="10" presetClass="entr" presetSubtype="0" fill="hold" grpId="1" nodeType="withEffect">
+                                <p:cTn id="31" presetID="10" presetClass="entr" presetSubtype="0" fill="hold" nodeType="withEffect">
                                   <p:stCondLst>
                                     <p:cond delay="0"/>
                                   </p:stCondLst>
@@ -5633,7 +5536,7 @@
                                 </p:cTn>
                               </p:par>
                               <p:par>
-                                <p:cTn id="34" presetID="10" presetClass="entr" presetSubtype="0" fill="hold" grpId="1" nodeType="withEffect">
+                                <p:cTn id="34" presetID="10" presetClass="entr" presetSubtype="0" fill="hold" nodeType="withEffect">
                                   <p:stCondLst>
                                     <p:cond delay="0"/>
                                   </p:stCondLst>
@@ -5668,7 +5571,7 @@
                                 </p:cTn>
                               </p:par>
                               <p:par>
-                                <p:cTn id="37" presetID="10" presetClass="entr" presetSubtype="0" fill="hold" grpId="1" nodeType="withEffect">
+                                <p:cTn id="37" presetID="10" presetClass="entr" presetSubtype="0" fill="hold" nodeType="withEffect">
                                   <p:stCondLst>
                                     <p:cond delay="0"/>
                                   </p:stCondLst>
@@ -5703,7 +5606,7 @@
                                 </p:cTn>
                               </p:par>
                               <p:par>
-                                <p:cTn id="40" presetID="10" presetClass="entr" presetSubtype="0" fill="hold" grpId="1" nodeType="withEffect">
+                                <p:cTn id="40" presetID="10" presetClass="entr" presetSubtype="0" fill="hold" nodeType="withEffect">
                                   <p:stCondLst>
                                     <p:cond delay="0"/>
                                   </p:stCondLst>
@@ -5756,7 +5659,7 @@
                             </p:stCondLst>
                             <p:childTnLst>
                               <p:par>
-                                <p:cTn id="45" presetID="10" presetClass="entr" presetSubtype="0" fill="hold" grpId="2" nodeType="clickEffect">
+                                <p:cTn id="45" presetID="10" presetClass="entr" presetSubtype="0" fill="hold" nodeType="clickEffect">
                                   <p:stCondLst>
                                     <p:cond delay="0"/>
                                   </p:stCondLst>
@@ -5791,7 +5694,7 @@
                                 </p:cTn>
                               </p:par>
                               <p:par>
-                                <p:cTn id="48" presetID="10" presetClass="entr" presetSubtype="0" fill="hold" grpId="2" nodeType="withEffect">
+                                <p:cTn id="48" presetID="10" presetClass="entr" presetSubtype="0" fill="hold" nodeType="withEffect">
                                   <p:stCondLst>
                                     <p:cond delay="0"/>
                                   </p:stCondLst>
@@ -5826,7 +5729,7 @@
                                 </p:cTn>
                               </p:par>
                               <p:par>
-                                <p:cTn id="51" presetID="10" presetClass="entr" presetSubtype="0" fill="hold" grpId="2" nodeType="withEffect">
+                                <p:cTn id="51" presetID="10" presetClass="entr" presetSubtype="0" fill="hold" nodeType="withEffect">
                                   <p:stCondLst>
                                     <p:cond delay="0"/>
                                   </p:stCondLst>
@@ -5861,7 +5764,7 @@
                                 </p:cTn>
                               </p:par>
                               <p:par>
-                                <p:cTn id="54" presetID="10" presetClass="entr" presetSubtype="0" fill="hold" grpId="2" nodeType="withEffect">
+                                <p:cTn id="54" presetID="10" presetClass="entr" presetSubtype="0" fill="hold" nodeType="withEffect">
                                   <p:stCondLst>
                                     <p:cond delay="0"/>
                                   </p:stCondLst>
@@ -5896,7 +5799,7 @@
                                 </p:cTn>
                               </p:par>
                               <p:par>
-                                <p:cTn id="57" presetID="10" presetClass="entr" presetSubtype="0" fill="hold" grpId="2" nodeType="withEffect">
+                                <p:cTn id="57" presetID="10" presetClass="entr" presetSubtype="0" fill="hold" nodeType="withEffect">
                                   <p:stCondLst>
                                     <p:cond delay="0"/>
                                   </p:stCondLst>
@@ -5931,7 +5834,7 @@
                                 </p:cTn>
                               </p:par>
                               <p:par>
-                                <p:cTn id="60" presetID="10" presetClass="entr" presetSubtype="0" fill="hold" grpId="2" nodeType="withEffect">
+                                <p:cTn id="60" presetID="10" presetClass="entr" presetSubtype="0" fill="hold" nodeType="withEffect">
                                   <p:stCondLst>
                                     <p:cond delay="0"/>
                                   </p:stCondLst>
@@ -5966,7 +5869,7 @@
                                 </p:cTn>
                               </p:par>
                               <p:par>
-                                <p:cTn id="63" presetID="10" presetClass="entr" presetSubtype="0" fill="hold" grpId="2" nodeType="withEffect">
+                                <p:cTn id="63" presetID="10" presetClass="entr" presetSubtype="0" fill="hold" nodeType="withEffect">
                                   <p:stCondLst>
                                     <p:cond delay="0"/>
                                   </p:stCondLst>
@@ -6019,7 +5922,7 @@
                             </p:stCondLst>
                             <p:childTnLst>
                               <p:par>
-                                <p:cTn id="68" presetID="10" presetClass="entr" presetSubtype="0" fill="hold" grpId="3" nodeType="clickEffect">
+                                <p:cTn id="68" presetID="10" presetClass="entr" presetSubtype="0" fill="hold" nodeType="clickEffect">
                                   <p:stCondLst>
                                     <p:cond delay="0"/>
                                   </p:stCondLst>
@@ -6054,7 +5957,7 @@
                                 </p:cTn>
                               </p:par>
                               <p:par>
-                                <p:cTn id="71" presetID="10" presetClass="entr" presetSubtype="0" fill="hold" grpId="3" nodeType="withEffect">
+                                <p:cTn id="71" presetID="10" presetClass="entr" presetSubtype="0" fill="hold" nodeType="withEffect">
                                   <p:stCondLst>
                                     <p:cond delay="0"/>
                                   </p:stCondLst>
@@ -6089,7 +5992,7 @@
                                 </p:cTn>
                               </p:par>
                               <p:par>
-                                <p:cTn id="74" presetID="10" presetClass="entr" presetSubtype="0" fill="hold" grpId="3" nodeType="withEffect">
+                                <p:cTn id="74" presetID="10" presetClass="entr" presetSubtype="0" fill="hold" nodeType="withEffect">
                                   <p:stCondLst>
                                     <p:cond delay="0"/>
                                   </p:stCondLst>
@@ -6124,7 +6027,7 @@
                                 </p:cTn>
                               </p:par>
                               <p:par>
-                                <p:cTn id="77" presetID="10" presetClass="entr" presetSubtype="0" fill="hold" grpId="3" nodeType="withEffect">
+                                <p:cTn id="77" presetID="10" presetClass="entr" presetSubtype="0" fill="hold" nodeType="withEffect">
                                   <p:stCondLst>
                                     <p:cond delay="0"/>
                                   </p:stCondLst>
@@ -6159,7 +6062,7 @@
                                 </p:cTn>
                               </p:par>
                               <p:par>
-                                <p:cTn id="80" presetID="10" presetClass="entr" presetSubtype="0" fill="hold" grpId="3" nodeType="withEffect">
+                                <p:cTn id="80" presetID="10" presetClass="entr" presetSubtype="0" fill="hold" nodeType="withEffect">
                                   <p:stCondLst>
                                     <p:cond delay="0"/>
                                   </p:stCondLst>
@@ -6194,7 +6097,7 @@
                                 </p:cTn>
                               </p:par>
                               <p:par>
-                                <p:cTn id="83" presetID="10" presetClass="entr" presetSubtype="0" fill="hold" grpId="3" nodeType="withEffect">
+                                <p:cTn id="83" presetID="10" presetClass="entr" presetSubtype="0" fill="hold" nodeType="withEffect">
                                   <p:stCondLst>
                                     <p:cond delay="0"/>
                                   </p:stCondLst>
@@ -6229,7 +6132,7 @@
                                 </p:cTn>
                               </p:par>
                               <p:par>
-                                <p:cTn id="86" presetID="10" presetClass="entr" presetSubtype="0" fill="hold" grpId="3" nodeType="withEffect">
+                                <p:cTn id="86" presetID="10" presetClass="entr" presetSubtype="0" fill="hold" nodeType="withEffect">
                                   <p:stCondLst>
                                     <p:cond delay="0"/>
                                   </p:stCondLst>
@@ -6282,7 +6185,7 @@
                             </p:stCondLst>
                             <p:childTnLst>
                               <p:par>
-                                <p:cTn id="91" presetID="10" presetClass="entr" presetSubtype="0" fill="hold" grpId="4" nodeType="clickEffect">
+                                <p:cTn id="91" presetID="10" presetClass="entr" presetSubtype="0" fill="hold" nodeType="clickEffect">
                                   <p:stCondLst>
                                     <p:cond delay="0"/>
                                   </p:stCondLst>
@@ -6355,6 +6258,7 @@
         <a:solidFill>
           <a:srgbClr val="F4F8FC"/>
         </a:solidFill>
+        <a:effectLst/>
       </p:bgPr>
     </p:bg>
     <p:spTree>
@@ -6390,6 +6294,13 @@
           </a:solidFill>
           <a:ln/>
         </p:spPr>
+        <p:txBody>
+          <a:bodyPr/>
+          <a:lstStyle/>
+          <a:p>
+            <a:endParaRPr lang="en-US"/>
+          </a:p>
+        </p:txBody>
       </p:sp>
       <p:sp>
         <p:nvSpPr>
@@ -6410,6 +6321,13 @@
           </a:solidFill>
           <a:ln/>
         </p:spPr>
+        <p:txBody>
+          <a:bodyPr/>
+          <a:lstStyle/>
+          <a:p>
+            <a:endParaRPr lang="en-US"/>
+          </a:p>
+        </p:txBody>
       </p:sp>
       <p:sp>
         <p:nvSpPr>
@@ -6432,11 +6350,11 @@
           <a:bodyPr wrap="square" lIns="0" tIns="0" rIns="0" bIns="0" rtlCol="0" anchor="ctr"/>
           <a:lstStyle/>
           <a:p>
-            <a:pPr indent="0" marL="0">
+            <a:pPr marL="0" indent="0">
               <a:buNone/>
             </a:pPr>
             <a:r>
-              <a:rPr lang="en-US" sz="1200" b="1" spc="300" kern="0" dirty="0">
+              <a:rPr lang="en-US" sz="1200" b="1" kern="0" spc="300" dirty="0">
                 <a:solidFill>
                   <a:srgbClr val="0284C7"/>
                 </a:solidFill>
@@ -6471,7 +6389,7 @@
           <a:bodyPr wrap="square" lIns="0" tIns="0" rIns="0" bIns="0" rtlCol="0" anchor="ctr"/>
           <a:lstStyle/>
           <a:p>
-            <a:pPr indent="0" marL="0">
+            <a:pPr marL="0" indent="0">
               <a:buNone/>
             </a:pPr>
             <a:r>
@@ -6510,7 +6428,7 @@
           <a:bodyPr wrap="square" lIns="0" tIns="0" rIns="0" bIns="0" rtlCol="0" anchor="ctr"/>
           <a:lstStyle/>
           <a:p>
-            <a:pPr indent="0" marL="0">
+            <a:pPr marL="0" indent="0">
               <a:buNone/>
             </a:pPr>
             <a:r>
@@ -6554,13 +6472,20 @@
             <a:prstDash val="solid"/>
           </a:ln>
           <a:effectLst>
-            <a:outerShdw sx="100000" sy="100000" kx="0" ky="0" algn="bl" rotWithShape="0" blurRad="88900" dist="25400" dir="5400000">
+            <a:outerShdw blurRad="88900" dist="25400" dir="5400000" algn="bl" rotWithShape="0">
               <a:srgbClr val="8FA3BC">
                 <a:alpha val="30000"/>
               </a:srgbClr>
             </a:outerShdw>
           </a:effectLst>
         </p:spPr>
+        <p:txBody>
+          <a:bodyPr/>
+          <a:lstStyle/>
+          <a:p>
+            <a:endParaRPr lang="en-US"/>
+          </a:p>
+        </p:txBody>
       </p:sp>
       <p:sp>
         <p:nvSpPr>
@@ -6581,17 +6506,24 @@
           </a:solidFill>
           <a:ln/>
         </p:spPr>
+        <p:txBody>
+          <a:bodyPr/>
+          <a:lstStyle/>
+          <a:p>
+            <a:endParaRPr lang="en-US"/>
+          </a:p>
+        </p:txBody>
       </p:sp>
       <p:pic>
         <p:nvPicPr>
-          <p:cNvPr id="9" name="Image 0" descr="preencoded.png">    </p:cNvPr>
+          <p:cNvPr id="9" name="Image 0" descr="preencoded.png"/>
           <p:cNvPicPr>
             <a:picLocks noChangeAspect="1"/>
           </p:cNvPicPr>
           <p:nvPr/>
         </p:nvPicPr>
         <p:blipFill>
-          <a:blip r:embed="rId1"/>
+          <a:blip r:embed="rId3"/>
           <a:stretch>
             <a:fillRect/>
           </a:stretch>
@@ -6627,7 +6559,7 @@
           <a:bodyPr wrap="square" lIns="0" tIns="0" rIns="0" bIns="0" rtlCol="0" anchor="ctr"/>
           <a:lstStyle/>
           <a:p>
-            <a:pPr indent="0" marL="0">
+            <a:pPr marL="0" indent="0">
               <a:buNone/>
             </a:pPr>
             <a:r>
@@ -6671,13 +6603,20 @@
             <a:prstDash val="solid"/>
           </a:ln>
           <a:effectLst>
-            <a:outerShdw sx="100000" sy="100000" kx="0" ky="0" algn="bl" rotWithShape="0" blurRad="88900" dist="25400" dir="5400000">
+            <a:outerShdw blurRad="88900" dist="25400" dir="5400000" algn="bl" rotWithShape="0">
               <a:srgbClr val="8FA3BC">
                 <a:alpha val="30000"/>
               </a:srgbClr>
             </a:outerShdw>
           </a:effectLst>
         </p:spPr>
+        <p:txBody>
+          <a:bodyPr/>
+          <a:lstStyle/>
+          <a:p>
+            <a:endParaRPr lang="en-US"/>
+          </a:p>
+        </p:txBody>
       </p:sp>
       <p:sp>
         <p:nvSpPr>
@@ -6698,17 +6637,24 @@
           </a:solidFill>
           <a:ln/>
         </p:spPr>
+        <p:txBody>
+          <a:bodyPr/>
+          <a:lstStyle/>
+          <a:p>
+            <a:endParaRPr lang="en-US"/>
+          </a:p>
+        </p:txBody>
       </p:sp>
       <p:pic>
         <p:nvPicPr>
-          <p:cNvPr id="13" name="Image 1" descr="preencoded.png">    </p:cNvPr>
+          <p:cNvPr id="13" name="Image 1" descr="preencoded.png"/>
           <p:cNvPicPr>
             <a:picLocks noChangeAspect="1"/>
           </p:cNvPicPr>
           <p:nvPr/>
         </p:nvPicPr>
         <p:blipFill>
-          <a:blip r:embed="rId2"/>
+          <a:blip r:embed="rId3"/>
           <a:stretch>
             <a:fillRect/>
           </a:stretch>
@@ -6744,7 +6690,7 @@
           <a:bodyPr wrap="square" lIns="0" tIns="0" rIns="0" bIns="0" rtlCol="0" anchor="ctr"/>
           <a:lstStyle/>
           <a:p>
-            <a:pPr indent="0" marL="0">
+            <a:pPr marL="0" indent="0">
               <a:buNone/>
             </a:pPr>
             <a:r>
@@ -6788,13 +6734,20 @@
             <a:prstDash val="solid"/>
           </a:ln>
           <a:effectLst>
-            <a:outerShdw sx="100000" sy="100000" kx="0" ky="0" algn="bl" rotWithShape="0" blurRad="88900" dist="25400" dir="5400000">
+            <a:outerShdw blurRad="88900" dist="25400" dir="5400000" algn="bl" rotWithShape="0">
               <a:srgbClr val="8FA3BC">
                 <a:alpha val="30000"/>
               </a:srgbClr>
             </a:outerShdw>
           </a:effectLst>
         </p:spPr>
+        <p:txBody>
+          <a:bodyPr/>
+          <a:lstStyle/>
+          <a:p>
+            <a:endParaRPr lang="en-US"/>
+          </a:p>
+        </p:txBody>
       </p:sp>
       <p:sp>
         <p:nvSpPr>
@@ -6815,10 +6768,17 @@
           </a:solidFill>
           <a:ln/>
         </p:spPr>
+        <p:txBody>
+          <a:bodyPr/>
+          <a:lstStyle/>
+          <a:p>
+            <a:endParaRPr lang="en-US"/>
+          </a:p>
+        </p:txBody>
       </p:sp>
       <p:pic>
         <p:nvPicPr>
-          <p:cNvPr id="17" name="Image 2" descr="preencoded.png">    </p:cNvPr>
+          <p:cNvPr id="17" name="Image 2" descr="preencoded.png"/>
           <p:cNvPicPr>
             <a:picLocks noChangeAspect="1"/>
           </p:cNvPicPr>
@@ -6861,7 +6821,7 @@
           <a:bodyPr wrap="square" lIns="0" tIns="0" rIns="0" bIns="0" rtlCol="0" anchor="ctr"/>
           <a:lstStyle/>
           <a:p>
-            <a:pPr indent="0" marL="0">
+            <a:pPr marL="0" indent="0">
               <a:buNone/>
             </a:pPr>
             <a:r>
@@ -6905,13 +6865,20 @@
             <a:prstDash val="solid"/>
           </a:ln>
           <a:effectLst>
-            <a:outerShdw sx="100000" sy="100000" kx="0" ky="0" algn="bl" rotWithShape="0" blurRad="88900" dist="25400" dir="5400000">
+            <a:outerShdw blurRad="88900" dist="25400" dir="5400000" algn="bl" rotWithShape="0">
               <a:srgbClr val="8FA3BC">
                 <a:alpha val="30000"/>
               </a:srgbClr>
             </a:outerShdw>
           </a:effectLst>
         </p:spPr>
+        <p:txBody>
+          <a:bodyPr/>
+          <a:lstStyle/>
+          <a:p>
+            <a:endParaRPr lang="en-US"/>
+          </a:p>
+        </p:txBody>
       </p:sp>
       <p:sp>
         <p:nvSpPr>
@@ -6932,17 +6899,24 @@
           </a:solidFill>
           <a:ln/>
         </p:spPr>
+        <p:txBody>
+          <a:bodyPr/>
+          <a:lstStyle/>
+          <a:p>
+            <a:endParaRPr lang="en-US"/>
+          </a:p>
+        </p:txBody>
       </p:sp>
       <p:pic>
         <p:nvPicPr>
-          <p:cNvPr id="21" name="Image 3" descr="preencoded.png">    </p:cNvPr>
+          <p:cNvPr id="21" name="Image 3" descr="preencoded.png"/>
           <p:cNvPicPr>
             <a:picLocks noChangeAspect="1"/>
           </p:cNvPicPr>
           <p:nvPr/>
         </p:nvPicPr>
         <p:blipFill>
-          <a:blip r:embed="rId4"/>
+          <a:blip r:embed="rId3"/>
           <a:stretch>
             <a:fillRect/>
           </a:stretch>
@@ -6978,7 +6952,7 @@
           <a:bodyPr wrap="square" lIns="0" tIns="0" rIns="0" bIns="0" rtlCol="0" anchor="ctr"/>
           <a:lstStyle/>
           <a:p>
-            <a:pPr indent="0" marL="0">
+            <a:pPr marL="0" indent="0">
               <a:buNone/>
             </a:pPr>
             <a:r>
@@ -7022,13 +6996,20 @@
             <a:prstDash val="solid"/>
           </a:ln>
           <a:effectLst>
-            <a:outerShdw sx="100000" sy="100000" kx="0" ky="0" algn="bl" rotWithShape="0" blurRad="88900" dist="25400" dir="5400000">
+            <a:outerShdw blurRad="88900" dist="25400" dir="5400000" algn="bl" rotWithShape="0">
               <a:srgbClr val="8FA3BC">
                 <a:alpha val="30000"/>
               </a:srgbClr>
             </a:outerShdw>
           </a:effectLst>
         </p:spPr>
+        <p:txBody>
+          <a:bodyPr/>
+          <a:lstStyle/>
+          <a:p>
+            <a:endParaRPr lang="en-US"/>
+          </a:p>
+        </p:txBody>
       </p:sp>
       <p:sp>
         <p:nvSpPr>
@@ -7049,17 +7030,24 @@
           </a:solidFill>
           <a:ln/>
         </p:spPr>
+        <p:txBody>
+          <a:bodyPr/>
+          <a:lstStyle/>
+          <a:p>
+            <a:endParaRPr lang="en-US"/>
+          </a:p>
+        </p:txBody>
       </p:sp>
       <p:pic>
         <p:nvPicPr>
-          <p:cNvPr id="25" name="Image 4" descr="preencoded.png">    </p:cNvPr>
+          <p:cNvPr id="25" name="Image 4" descr="preencoded.png"/>
           <p:cNvPicPr>
             <a:picLocks noChangeAspect="1"/>
           </p:cNvPicPr>
           <p:nvPr/>
         </p:nvPicPr>
         <p:blipFill>
-          <a:blip r:embed="rId5"/>
+          <a:blip r:embed="rId3"/>
           <a:stretch>
             <a:fillRect/>
           </a:stretch>
@@ -7095,7 +7083,7 @@
           <a:bodyPr wrap="square" lIns="0" tIns="0" rIns="0" bIns="0" rtlCol="0" anchor="ctr"/>
           <a:lstStyle/>
           <a:p>
-            <a:pPr indent="0" marL="0">
+            <a:pPr marL="0" indent="0">
               <a:buNone/>
             </a:pPr>
             <a:r>
@@ -7139,13 +7127,20 @@
             <a:prstDash val="solid"/>
           </a:ln>
           <a:effectLst>
-            <a:outerShdw sx="100000" sy="100000" kx="0" ky="0" algn="bl" rotWithShape="0" blurRad="88900" dist="25400" dir="5400000">
+            <a:outerShdw blurRad="88900" dist="25400" dir="5400000" algn="bl" rotWithShape="0">
               <a:srgbClr val="8FA3BC">
                 <a:alpha val="30000"/>
               </a:srgbClr>
             </a:outerShdw>
           </a:effectLst>
         </p:spPr>
+        <p:txBody>
+          <a:bodyPr/>
+          <a:lstStyle/>
+          <a:p>
+            <a:endParaRPr lang="en-US"/>
+          </a:p>
+        </p:txBody>
       </p:sp>
       <p:sp>
         <p:nvSpPr>
@@ -7166,17 +7161,24 @@
           </a:solidFill>
           <a:ln/>
         </p:spPr>
+        <p:txBody>
+          <a:bodyPr/>
+          <a:lstStyle/>
+          <a:p>
+            <a:endParaRPr lang="en-US"/>
+          </a:p>
+        </p:txBody>
       </p:sp>
       <p:pic>
         <p:nvPicPr>
-          <p:cNvPr id="29" name="Image 5" descr="preencoded.png">    </p:cNvPr>
+          <p:cNvPr id="29" name="Image 5" descr="preencoded.png"/>
           <p:cNvPicPr>
             <a:picLocks noChangeAspect="1"/>
           </p:cNvPicPr>
           <p:nvPr/>
         </p:nvPicPr>
         <p:blipFill>
-          <a:blip r:embed="rId6"/>
+          <a:blip r:embed="rId3"/>
           <a:stretch>
             <a:fillRect/>
           </a:stretch>
@@ -7212,7 +7214,7 @@
           <a:bodyPr wrap="square" lIns="0" tIns="0" rIns="0" bIns="0" rtlCol="0" anchor="ctr"/>
           <a:lstStyle/>
           <a:p>
-            <a:pPr indent="0" marL="0">
+            <a:pPr marL="0" indent="0">
               <a:buNone/>
             </a:pPr>
             <a:r>
@@ -7256,13 +7258,20 @@
             <a:prstDash val="solid"/>
           </a:ln>
           <a:effectLst>
-            <a:outerShdw sx="100000" sy="100000" kx="0" ky="0" algn="bl" rotWithShape="0" blurRad="88900" dist="25400" dir="5400000">
+            <a:outerShdw blurRad="88900" dist="25400" dir="5400000" algn="bl" rotWithShape="0">
               <a:srgbClr val="8FA3BC">
                 <a:alpha val="30000"/>
               </a:srgbClr>
             </a:outerShdw>
           </a:effectLst>
         </p:spPr>
+        <p:txBody>
+          <a:bodyPr/>
+          <a:lstStyle/>
+          <a:p>
+            <a:endParaRPr lang="en-US"/>
+          </a:p>
+        </p:txBody>
       </p:sp>
       <p:sp>
         <p:nvSpPr>
@@ -7283,17 +7292,24 @@
           </a:solidFill>
           <a:ln/>
         </p:spPr>
+        <p:txBody>
+          <a:bodyPr/>
+          <a:lstStyle/>
+          <a:p>
+            <a:endParaRPr lang="en-US"/>
+          </a:p>
+        </p:txBody>
       </p:sp>
       <p:pic>
         <p:nvPicPr>
-          <p:cNvPr id="33" name="Image 6" descr="preencoded.png">    </p:cNvPr>
+          <p:cNvPr id="33" name="Image 6" descr="preencoded.png"/>
           <p:cNvPicPr>
             <a:picLocks noChangeAspect="1"/>
           </p:cNvPicPr>
           <p:nvPr/>
         </p:nvPicPr>
         <p:blipFill>
-          <a:blip r:embed="rId7"/>
+          <a:blip r:embed="rId3"/>
           <a:stretch>
             <a:fillRect/>
           </a:stretch>
@@ -7329,7 +7345,7 @@
           <a:bodyPr wrap="square" lIns="0" tIns="0" rIns="0" bIns="0" rtlCol="0" anchor="ctr"/>
           <a:lstStyle/>
           <a:p>
-            <a:pPr indent="0" marL="0">
+            <a:pPr marL="0" indent="0">
               <a:buNone/>
             </a:pPr>
             <a:r>
@@ -7373,13 +7389,20 @@
             <a:prstDash val="solid"/>
           </a:ln>
           <a:effectLst>
-            <a:outerShdw sx="100000" sy="100000" kx="0" ky="0" algn="bl" rotWithShape="0" blurRad="88900" dist="25400" dir="5400000">
+            <a:outerShdw blurRad="88900" dist="25400" dir="5400000" algn="bl" rotWithShape="0">
               <a:srgbClr val="8FA3BC">
                 <a:alpha val="30000"/>
               </a:srgbClr>
             </a:outerShdw>
           </a:effectLst>
         </p:spPr>
+        <p:txBody>
+          <a:bodyPr/>
+          <a:lstStyle/>
+          <a:p>
+            <a:endParaRPr lang="en-US"/>
+          </a:p>
+        </p:txBody>
       </p:sp>
       <p:sp>
         <p:nvSpPr>
@@ -7400,17 +7423,24 @@
           </a:solidFill>
           <a:ln/>
         </p:spPr>
+        <p:txBody>
+          <a:bodyPr/>
+          <a:lstStyle/>
+          <a:p>
+            <a:endParaRPr lang="en-US"/>
+          </a:p>
+        </p:txBody>
       </p:sp>
       <p:pic>
         <p:nvPicPr>
-          <p:cNvPr id="37" name="Image 7" descr="preencoded.png">    </p:cNvPr>
+          <p:cNvPr id="37" name="Image 7" descr="preencoded.png"/>
           <p:cNvPicPr>
             <a:picLocks noChangeAspect="1"/>
           </p:cNvPicPr>
           <p:nvPr/>
         </p:nvPicPr>
         <p:blipFill>
-          <a:blip r:embed="rId8"/>
+          <a:blip r:embed="rId3"/>
           <a:stretch>
             <a:fillRect/>
           </a:stretch>
@@ -7446,7 +7476,7 @@
           <a:bodyPr wrap="square" lIns="0" tIns="0" rIns="0" bIns="0" rtlCol="0" anchor="ctr"/>
           <a:lstStyle/>
           <a:p>
-            <a:pPr indent="0" marL="0">
+            <a:pPr marL="0" indent="0">
               <a:buNone/>
             </a:pPr>
             <a:r>
@@ -7485,7 +7515,7 @@
           <a:bodyPr wrap="square" lIns="0" tIns="0" rIns="0" bIns="0" rtlCol="0" anchor="ctr"/>
           <a:lstStyle/>
           <a:p>
-            <a:pPr algn="ctr" indent="0" marL="0">
+            <a:pPr marL="0" indent="0" algn="ctr">
               <a:buNone/>
             </a:pPr>
             <a:r>
@@ -7499,9 +7529,6 @@
               </a:rPr>
               <a:t>Tip:  </a:t>
             </a:r>
-            <a:pPr algn="ctr" indent="0" marL="0">
-              <a:buNone/>
-            </a:pPr>
             <a:r>
               <a:rPr lang="en-US" sz="1450" b="1" dirty="0">
                 <a:solidFill>
@@ -7538,7 +7565,7 @@
           <a:bodyPr wrap="square" lIns="0" tIns="0" rIns="0" bIns="0" rtlCol="0" anchor="ctr"/>
           <a:lstStyle/>
           <a:p>
-            <a:pPr algn="l" indent="0" marL="0">
+            <a:pPr marL="0" indent="0" algn="l">
               <a:buNone/>
             </a:pPr>
             <a:r>
@@ -7582,7 +7609,7 @@
                             </p:stCondLst>
                             <p:childTnLst>
                               <p:par>
-                                <p:cTn id="5" presetID="10" presetClass="entr" presetSubtype="0" fill="hold" grpId="0" nodeType="clickEffect">
+                                <p:cTn id="5" presetID="10" presetClass="entr" presetSubtype="0" fill="hold" nodeType="clickEffect">
                                   <p:stCondLst>
                                     <p:cond delay="0"/>
                                   </p:stCondLst>
@@ -7635,7 +7662,7 @@
                             </p:stCondLst>
                             <p:childTnLst>
                               <p:par>
-                                <p:cTn id="10" presetID="10" presetClass="entr" presetSubtype="0" fill="hold" grpId="1" nodeType="clickEffect">
+                                <p:cTn id="10" presetID="10" presetClass="entr" presetSubtype="0" fill="hold" nodeType="clickEffect">
                                   <p:stCondLst>
                                     <p:cond delay="0"/>
                                   </p:stCondLst>
@@ -7670,7 +7697,7 @@
                                 </p:cTn>
                               </p:par>
                               <p:par>
-                                <p:cTn id="13" presetID="10" presetClass="entr" presetSubtype="0" fill="hold" grpId="1" nodeType="withEffect">
+                                <p:cTn id="13" presetID="10" presetClass="entr" presetSubtype="0" fill="hold" nodeType="withEffect">
                                   <p:stCondLst>
                                     <p:cond delay="0"/>
                                   </p:stCondLst>
@@ -7705,7 +7732,7 @@
                                 </p:cTn>
                               </p:par>
                               <p:par>
-                                <p:cTn id="16" presetID="10" presetClass="entr" presetSubtype="0" fill="hold" grpId="1" nodeType="withEffect">
+                                <p:cTn id="16" presetID="10" presetClass="entr" presetSubtype="0" fill="hold" nodeType="withEffect">
                                   <p:stCondLst>
                                     <p:cond delay="0"/>
                                   </p:stCondLst>
@@ -7740,7 +7767,7 @@
                                 </p:cTn>
                               </p:par>
                               <p:par>
-                                <p:cTn id="19" presetID="10" presetClass="entr" presetSubtype="0" fill="hold" grpId="1" nodeType="withEffect">
+                                <p:cTn id="19" presetID="10" presetClass="entr" presetSubtype="0" fill="hold" nodeType="withEffect">
                                   <p:stCondLst>
                                     <p:cond delay="0"/>
                                   </p:stCondLst>
@@ -7775,7 +7802,7 @@
                                 </p:cTn>
                               </p:par>
                               <p:par>
-                                <p:cTn id="22" presetID="10" presetClass="entr" presetSubtype="0" fill="hold" grpId="1" nodeType="withEffect">
+                                <p:cTn id="22" presetID="10" presetClass="entr" presetSubtype="0" fill="hold" nodeType="withEffect">
                                   <p:stCondLst>
                                     <p:cond delay="0"/>
                                   </p:stCondLst>
@@ -7810,7 +7837,7 @@
                                 </p:cTn>
                               </p:par>
                               <p:par>
-                                <p:cTn id="25" presetID="10" presetClass="entr" presetSubtype="0" fill="hold" grpId="1" nodeType="withEffect">
+                                <p:cTn id="25" presetID="10" presetClass="entr" presetSubtype="0" fill="hold" nodeType="withEffect">
                                   <p:stCondLst>
                                     <p:cond delay="0"/>
                                   </p:stCondLst>
@@ -7845,7 +7872,7 @@
                                 </p:cTn>
                               </p:par>
                               <p:par>
-                                <p:cTn id="28" presetID="10" presetClass="entr" presetSubtype="0" fill="hold" grpId="1" nodeType="withEffect">
+                                <p:cTn id="28" presetID="10" presetClass="entr" presetSubtype="0" fill="hold" nodeType="withEffect">
                                   <p:stCondLst>
                                     <p:cond delay="0"/>
                                   </p:stCondLst>
@@ -7880,7 +7907,7 @@
                                 </p:cTn>
                               </p:par>
                               <p:par>
-                                <p:cTn id="31" presetID="10" presetClass="entr" presetSubtype="0" fill="hold" grpId="1" nodeType="withEffect">
+                                <p:cTn id="31" presetID="10" presetClass="entr" presetSubtype="0" fill="hold" nodeType="withEffect">
                                   <p:stCondLst>
                                     <p:cond delay="0"/>
                                   </p:stCondLst>
@@ -7933,7 +7960,7 @@
                             </p:stCondLst>
                             <p:childTnLst>
                               <p:par>
-                                <p:cTn id="36" presetID="10" presetClass="entr" presetSubtype="0" fill="hold" grpId="2" nodeType="clickEffect">
+                                <p:cTn id="36" presetID="10" presetClass="entr" presetSubtype="0" fill="hold" nodeType="clickEffect">
                                   <p:stCondLst>
                                     <p:cond delay="0"/>
                                   </p:stCondLst>
@@ -7968,7 +7995,7 @@
                                 </p:cTn>
                               </p:par>
                               <p:par>
-                                <p:cTn id="39" presetID="10" presetClass="entr" presetSubtype="0" fill="hold" grpId="2" nodeType="withEffect">
+                                <p:cTn id="39" presetID="10" presetClass="entr" presetSubtype="0" fill="hold" nodeType="withEffect">
                                   <p:stCondLst>
                                     <p:cond delay="0"/>
                                   </p:stCondLst>
@@ -8003,7 +8030,7 @@
                                 </p:cTn>
                               </p:par>
                               <p:par>
-                                <p:cTn id="42" presetID="10" presetClass="entr" presetSubtype="0" fill="hold" grpId="2" nodeType="withEffect">
+                                <p:cTn id="42" presetID="10" presetClass="entr" presetSubtype="0" fill="hold" nodeType="withEffect">
                                   <p:stCondLst>
                                     <p:cond delay="0"/>
                                   </p:stCondLst>
@@ -8038,7 +8065,7 @@
                                 </p:cTn>
                               </p:par>
                               <p:par>
-                                <p:cTn id="45" presetID="10" presetClass="entr" presetSubtype="0" fill="hold" grpId="2" nodeType="withEffect">
+                                <p:cTn id="45" presetID="10" presetClass="entr" presetSubtype="0" fill="hold" nodeType="withEffect">
                                   <p:stCondLst>
                                     <p:cond delay="0"/>
                                   </p:stCondLst>
@@ -8073,7 +8100,7 @@
                                 </p:cTn>
                               </p:par>
                               <p:par>
-                                <p:cTn id="48" presetID="10" presetClass="entr" presetSubtype="0" fill="hold" grpId="2" nodeType="withEffect">
+                                <p:cTn id="48" presetID="10" presetClass="entr" presetSubtype="0" fill="hold" nodeType="withEffect">
                                   <p:stCondLst>
                                     <p:cond delay="0"/>
                                   </p:stCondLst>
@@ -8108,7 +8135,7 @@
                                 </p:cTn>
                               </p:par>
                               <p:par>
-                                <p:cTn id="51" presetID="10" presetClass="entr" presetSubtype="0" fill="hold" grpId="2" nodeType="withEffect">
+                                <p:cTn id="51" presetID="10" presetClass="entr" presetSubtype="0" fill="hold" nodeType="withEffect">
                                   <p:stCondLst>
                                     <p:cond delay="0"/>
                                   </p:stCondLst>
@@ -8143,7 +8170,7 @@
                                 </p:cTn>
                               </p:par>
                               <p:par>
-                                <p:cTn id="54" presetID="10" presetClass="entr" presetSubtype="0" fill="hold" grpId="2" nodeType="withEffect">
+                                <p:cTn id="54" presetID="10" presetClass="entr" presetSubtype="0" fill="hold" nodeType="withEffect">
                                   <p:stCondLst>
                                     <p:cond delay="0"/>
                                   </p:stCondLst>
@@ -8178,7 +8205,7 @@
                                 </p:cTn>
                               </p:par>
                               <p:par>
-                                <p:cTn id="57" presetID="10" presetClass="entr" presetSubtype="0" fill="hold" grpId="2" nodeType="withEffect">
+                                <p:cTn id="57" presetID="10" presetClass="entr" presetSubtype="0" fill="hold" nodeType="withEffect">
                                   <p:stCondLst>
                                     <p:cond delay="0"/>
                                   </p:stCondLst>
@@ -8231,7 +8258,7 @@
                             </p:stCondLst>
                             <p:childTnLst>
                               <p:par>
-                                <p:cTn id="62" presetID="10" presetClass="entr" presetSubtype="0" fill="hold" grpId="3" nodeType="clickEffect">
+                                <p:cTn id="62" presetID="10" presetClass="entr" presetSubtype="0" fill="hold" nodeType="clickEffect">
                                   <p:stCondLst>
                                     <p:cond delay="0"/>
                                   </p:stCondLst>
@@ -8266,7 +8293,7 @@
                                 </p:cTn>
                               </p:par>
                               <p:par>
-                                <p:cTn id="65" presetID="10" presetClass="entr" presetSubtype="0" fill="hold" grpId="3" nodeType="withEffect">
+                                <p:cTn id="65" presetID="10" presetClass="entr" presetSubtype="0" fill="hold" nodeType="withEffect">
                                   <p:stCondLst>
                                     <p:cond delay="0"/>
                                   </p:stCondLst>
@@ -8301,7 +8328,7 @@
                                 </p:cTn>
                               </p:par>
                               <p:par>
-                                <p:cTn id="68" presetID="10" presetClass="entr" presetSubtype="0" fill="hold" grpId="3" nodeType="withEffect">
+                                <p:cTn id="68" presetID="10" presetClass="entr" presetSubtype="0" fill="hold" nodeType="withEffect">
                                   <p:stCondLst>
                                     <p:cond delay="0"/>
                                   </p:stCondLst>
@@ -8336,7 +8363,7 @@
                                 </p:cTn>
                               </p:par>
                               <p:par>
-                                <p:cTn id="71" presetID="10" presetClass="entr" presetSubtype="0" fill="hold" grpId="3" nodeType="withEffect">
+                                <p:cTn id="71" presetID="10" presetClass="entr" presetSubtype="0" fill="hold" nodeType="withEffect">
                                   <p:stCondLst>
                                     <p:cond delay="0"/>
                                   </p:stCondLst>
@@ -8371,7 +8398,7 @@
                                 </p:cTn>
                               </p:par>
                               <p:par>
-                                <p:cTn id="74" presetID="10" presetClass="entr" presetSubtype="0" fill="hold" grpId="3" nodeType="withEffect">
+                                <p:cTn id="74" presetID="10" presetClass="entr" presetSubtype="0" fill="hold" nodeType="withEffect">
                                   <p:stCondLst>
                                     <p:cond delay="0"/>
                                   </p:stCondLst>
@@ -8406,7 +8433,7 @@
                                 </p:cTn>
                               </p:par>
                               <p:par>
-                                <p:cTn id="77" presetID="10" presetClass="entr" presetSubtype="0" fill="hold" grpId="3" nodeType="withEffect">
+                                <p:cTn id="77" presetID="10" presetClass="entr" presetSubtype="0" fill="hold" nodeType="withEffect">
                                   <p:stCondLst>
                                     <p:cond delay="0"/>
                                   </p:stCondLst>
@@ -8441,7 +8468,7 @@
                                 </p:cTn>
                               </p:par>
                               <p:par>
-                                <p:cTn id="80" presetID="10" presetClass="entr" presetSubtype="0" fill="hold" grpId="3" nodeType="withEffect">
+                                <p:cTn id="80" presetID="10" presetClass="entr" presetSubtype="0" fill="hold" nodeType="withEffect">
                                   <p:stCondLst>
                                     <p:cond delay="0"/>
                                   </p:stCondLst>
@@ -8476,7 +8503,7 @@
                                 </p:cTn>
                               </p:par>
                               <p:par>
-                                <p:cTn id="83" presetID="10" presetClass="entr" presetSubtype="0" fill="hold" grpId="3" nodeType="withEffect">
+                                <p:cTn id="83" presetID="10" presetClass="entr" presetSubtype="0" fill="hold" nodeType="withEffect">
                                   <p:stCondLst>
                                     <p:cond delay="0"/>
                                   </p:stCondLst>
@@ -8529,7 +8556,7 @@
                             </p:stCondLst>
                             <p:childTnLst>
                               <p:par>
-                                <p:cTn id="88" presetID="10" presetClass="entr" presetSubtype="0" fill="hold" grpId="4" nodeType="clickEffect">
+                                <p:cTn id="88" presetID="10" presetClass="entr" presetSubtype="0" fill="hold" nodeType="clickEffect">
                                   <p:stCondLst>
                                     <p:cond delay="0"/>
                                   </p:stCondLst>
@@ -8564,7 +8591,7 @@
                                 </p:cTn>
                               </p:par>
                               <p:par>
-                                <p:cTn id="91" presetID="10" presetClass="entr" presetSubtype="0" fill="hold" grpId="4" nodeType="withEffect">
+                                <p:cTn id="91" presetID="10" presetClass="entr" presetSubtype="0" fill="hold" nodeType="withEffect">
                                   <p:stCondLst>
                                     <p:cond delay="0"/>
                                   </p:stCondLst>
@@ -8599,7 +8626,7 @@
                                 </p:cTn>
                               </p:par>
                               <p:par>
-                                <p:cTn id="94" presetID="10" presetClass="entr" presetSubtype="0" fill="hold" grpId="4" nodeType="withEffect">
+                                <p:cTn id="94" presetID="10" presetClass="entr" presetSubtype="0" fill="hold" nodeType="withEffect">
                                   <p:stCondLst>
                                     <p:cond delay="0"/>
                                   </p:stCondLst>
@@ -8634,7 +8661,7 @@
                                 </p:cTn>
                               </p:par>
                               <p:par>
-                                <p:cTn id="97" presetID="10" presetClass="entr" presetSubtype="0" fill="hold" grpId="4" nodeType="withEffect">
+                                <p:cTn id="97" presetID="10" presetClass="entr" presetSubtype="0" fill="hold" nodeType="withEffect">
                                   <p:stCondLst>
                                     <p:cond delay="0"/>
                                   </p:stCondLst>
@@ -8669,7 +8696,7 @@
                                 </p:cTn>
                               </p:par>
                               <p:par>
-                                <p:cTn id="100" presetID="10" presetClass="entr" presetSubtype="0" fill="hold" grpId="4" nodeType="withEffect">
+                                <p:cTn id="100" presetID="10" presetClass="entr" presetSubtype="0" fill="hold" nodeType="withEffect">
                                   <p:stCondLst>
                                     <p:cond delay="0"/>
                                   </p:stCondLst>
@@ -8704,7 +8731,7 @@
                                 </p:cTn>
                               </p:par>
                               <p:par>
-                                <p:cTn id="103" presetID="10" presetClass="entr" presetSubtype="0" fill="hold" grpId="4" nodeType="withEffect">
+                                <p:cTn id="103" presetID="10" presetClass="entr" presetSubtype="0" fill="hold" nodeType="withEffect">
                                   <p:stCondLst>
                                     <p:cond delay="0"/>
                                   </p:stCondLst>
@@ -8739,7 +8766,7 @@
                                 </p:cTn>
                               </p:par>
                               <p:par>
-                                <p:cTn id="106" presetID="10" presetClass="entr" presetSubtype="0" fill="hold" grpId="4" nodeType="withEffect">
+                                <p:cTn id="106" presetID="10" presetClass="entr" presetSubtype="0" fill="hold" nodeType="withEffect">
                                   <p:stCondLst>
                                     <p:cond delay="0"/>
                                   </p:stCondLst>
@@ -8774,7 +8801,7 @@
                                 </p:cTn>
                               </p:par>
                               <p:par>
-                                <p:cTn id="109" presetID="10" presetClass="entr" presetSubtype="0" fill="hold" grpId="4" nodeType="withEffect">
+                                <p:cTn id="109" presetID="10" presetClass="entr" presetSubtype="0" fill="hold" nodeType="withEffect">
                                   <p:stCondLst>
                                     <p:cond delay="0"/>
                                   </p:stCondLst>
@@ -8827,7 +8854,7 @@
                             </p:stCondLst>
                             <p:childTnLst>
                               <p:par>
-                                <p:cTn id="114" presetID="10" presetClass="entr" presetSubtype="0" fill="hold" grpId="5" nodeType="clickEffect">
+                                <p:cTn id="114" presetID="10" presetClass="entr" presetSubtype="0" fill="hold" nodeType="clickEffect">
                                   <p:stCondLst>
                                     <p:cond delay="0"/>
                                   </p:stCondLst>
@@ -8900,6 +8927,7 @@
         <a:solidFill>
           <a:srgbClr val="F4F8FC"/>
         </a:solidFill>
+        <a:effectLst/>
       </p:bgPr>
     </p:bg>
     <p:spTree>
@@ -8935,6 +8963,13 @@
           </a:solidFill>
           <a:ln/>
         </p:spPr>
+        <p:txBody>
+          <a:bodyPr/>
+          <a:lstStyle/>
+          <a:p>
+            <a:endParaRPr lang="en-US"/>
+          </a:p>
+        </p:txBody>
       </p:sp>
       <p:sp>
         <p:nvSpPr>
@@ -8955,6 +8990,13 @@
           </a:solidFill>
           <a:ln/>
         </p:spPr>
+        <p:txBody>
+          <a:bodyPr/>
+          <a:lstStyle/>
+          <a:p>
+            <a:endParaRPr lang="en-US"/>
+          </a:p>
+        </p:txBody>
       </p:sp>
       <p:sp>
         <p:nvSpPr>
@@ -8977,11 +9019,11 @@
           <a:bodyPr wrap="square" lIns="0" tIns="0" rIns="0" bIns="0" rtlCol="0" anchor="ctr"/>
           <a:lstStyle/>
           <a:p>
-            <a:pPr indent="0" marL="0">
+            <a:pPr marL="0" indent="0">
               <a:buNone/>
             </a:pPr>
             <a:r>
-              <a:rPr lang="en-US" sz="1200" b="1" spc="300" kern="0" dirty="0">
+              <a:rPr lang="en-US" sz="1200" b="1" kern="0" spc="300" dirty="0">
                 <a:solidFill>
                   <a:srgbClr val="0284C7"/>
                 </a:solidFill>
@@ -9016,7 +9058,7 @@
           <a:bodyPr wrap="square" lIns="0" tIns="0" rIns="0" bIns="0" rtlCol="0" anchor="ctr"/>
           <a:lstStyle/>
           <a:p>
-            <a:pPr indent="0" marL="0">
+            <a:pPr marL="0" indent="0">
               <a:buNone/>
             </a:pPr>
             <a:r>
@@ -9060,13 +9102,20 @@
             <a:prstDash val="solid"/>
           </a:ln>
           <a:effectLst>
-            <a:outerShdw sx="100000" sy="100000" kx="0" ky="0" algn="bl" rotWithShape="0" blurRad="88900" dist="25400" dir="5400000">
+            <a:outerShdw blurRad="88900" dist="25400" dir="5400000" algn="bl" rotWithShape="0">
               <a:srgbClr val="8FA3BC">
                 <a:alpha val="30000"/>
               </a:srgbClr>
             </a:outerShdw>
           </a:effectLst>
         </p:spPr>
+        <p:txBody>
+          <a:bodyPr/>
+          <a:lstStyle/>
+          <a:p>
+            <a:endParaRPr lang="en-US"/>
+          </a:p>
+        </p:txBody>
       </p:sp>
       <p:sp>
         <p:nvSpPr>
@@ -9087,17 +9136,24 @@
           </a:solidFill>
           <a:ln/>
         </p:spPr>
+        <p:txBody>
+          <a:bodyPr/>
+          <a:lstStyle/>
+          <a:p>
+            <a:endParaRPr lang="en-US"/>
+          </a:p>
+        </p:txBody>
       </p:sp>
       <p:pic>
         <p:nvPicPr>
-          <p:cNvPr id="8" name="Image 0" descr="preencoded.png">    </p:cNvPr>
+          <p:cNvPr id="8" name="Image 0" descr="preencoded.png"/>
           <p:cNvPicPr>
             <a:picLocks noChangeAspect="1"/>
           </p:cNvPicPr>
           <p:nvPr/>
         </p:nvPicPr>
         <p:blipFill>
-          <a:blip r:embed="rId1"/>
+          <a:blip r:embed="rId3"/>
           <a:stretch>
             <a:fillRect/>
           </a:stretch>
@@ -9133,7 +9189,7 @@
           <a:bodyPr wrap="square" lIns="0" tIns="0" rIns="0" bIns="0" rtlCol="0" anchor="ctr"/>
           <a:lstStyle/>
           <a:p>
-            <a:pPr algn="ctr" indent="0" marL="0">
+            <a:pPr marL="0" indent="0" algn="ctr">
               <a:buNone/>
             </a:pPr>
             <a:r>
@@ -9150,7 +9206,7 @@
             <a:endParaRPr lang="en-US" sz="1900" dirty="0"/>
           </a:p>
           <a:p>
-            <a:pPr algn="ctr" indent="0" marL="0">
+            <a:pPr marL="0" indent="0" algn="ctr">
               <a:buNone/>
             </a:pPr>
             <a:r>
@@ -9194,13 +9250,20 @@
             <a:prstDash val="solid"/>
           </a:ln>
           <a:effectLst>
-            <a:outerShdw sx="100000" sy="100000" kx="0" ky="0" algn="bl" rotWithShape="0" blurRad="88900" dist="25400" dir="5400000">
+            <a:outerShdw blurRad="88900" dist="25400" dir="5400000" algn="bl" rotWithShape="0">
               <a:srgbClr val="8FA3BC">
                 <a:alpha val="30000"/>
               </a:srgbClr>
             </a:outerShdw>
           </a:effectLst>
         </p:spPr>
+        <p:txBody>
+          <a:bodyPr/>
+          <a:lstStyle/>
+          <a:p>
+            <a:endParaRPr lang="en-US"/>
+          </a:p>
+        </p:txBody>
       </p:sp>
       <p:sp>
         <p:nvSpPr>
@@ -9221,6 +9284,13 @@
           </a:solidFill>
           <a:ln/>
         </p:spPr>
+        <p:txBody>
+          <a:bodyPr/>
+          <a:lstStyle/>
+          <a:p>
+            <a:endParaRPr lang="en-US"/>
+          </a:p>
+        </p:txBody>
       </p:sp>
       <p:sp>
         <p:nvSpPr>
@@ -9243,7 +9313,7 @@
           <a:bodyPr wrap="square" lIns="0" tIns="0" rIns="0" bIns="0" rtlCol="0" anchor="ctr"/>
           <a:lstStyle/>
           <a:p>
-            <a:pPr algn="ctr" indent="0" marL="0">
+            <a:pPr marL="0" indent="0" algn="ctr">
               <a:buNone/>
             </a:pPr>
             <a:r>
@@ -9282,7 +9352,7 @@
           <a:bodyPr wrap="square" lIns="0" tIns="0" rIns="0" bIns="0" rtlCol="0" anchor="ctr"/>
           <a:lstStyle/>
           <a:p>
-            <a:pPr indent="0" marL="0">
+            <a:pPr marL="0" indent="0">
               <a:buNone/>
             </a:pPr>
             <a:r>
@@ -9326,13 +9396,20 @@
             <a:prstDash val="solid"/>
           </a:ln>
           <a:effectLst>
-            <a:outerShdw sx="100000" sy="100000" kx="0" ky="0" algn="bl" rotWithShape="0" blurRad="88900" dist="25400" dir="5400000">
+            <a:outerShdw blurRad="88900" dist="25400" dir="5400000" algn="bl" rotWithShape="0">
               <a:srgbClr val="8FA3BC">
                 <a:alpha val="30000"/>
               </a:srgbClr>
             </a:outerShdw>
           </a:effectLst>
         </p:spPr>
+        <p:txBody>
+          <a:bodyPr/>
+          <a:lstStyle/>
+          <a:p>
+            <a:endParaRPr lang="en-US"/>
+          </a:p>
+        </p:txBody>
       </p:sp>
       <p:sp>
         <p:nvSpPr>
@@ -9353,6 +9430,13 @@
           </a:solidFill>
           <a:ln/>
         </p:spPr>
+        <p:txBody>
+          <a:bodyPr/>
+          <a:lstStyle/>
+          <a:p>
+            <a:endParaRPr lang="en-US"/>
+          </a:p>
+        </p:txBody>
       </p:sp>
       <p:sp>
         <p:nvSpPr>
@@ -9375,7 +9459,7 @@
           <a:bodyPr wrap="square" lIns="0" tIns="0" rIns="0" bIns="0" rtlCol="0" anchor="ctr"/>
           <a:lstStyle/>
           <a:p>
-            <a:pPr algn="ctr" indent="0" marL="0">
+            <a:pPr marL="0" indent="0" algn="ctr">
               <a:buNone/>
             </a:pPr>
             <a:r>
@@ -9414,7 +9498,7 @@
           <a:bodyPr wrap="square" lIns="0" tIns="0" rIns="0" bIns="0" rtlCol="0" anchor="ctr"/>
           <a:lstStyle/>
           <a:p>
-            <a:pPr indent="0" marL="0">
+            <a:pPr marL="0" indent="0">
               <a:buNone/>
             </a:pPr>
             <a:r>
@@ -9458,13 +9542,20 @@
             <a:prstDash val="solid"/>
           </a:ln>
           <a:effectLst>
-            <a:outerShdw sx="100000" sy="100000" kx="0" ky="0" algn="bl" rotWithShape="0" blurRad="88900" dist="25400" dir="5400000">
+            <a:outerShdw blurRad="88900" dist="25400" dir="5400000" algn="bl" rotWithShape="0">
               <a:srgbClr val="8FA3BC">
                 <a:alpha val="30000"/>
               </a:srgbClr>
             </a:outerShdw>
           </a:effectLst>
         </p:spPr>
+        <p:txBody>
+          <a:bodyPr/>
+          <a:lstStyle/>
+          <a:p>
+            <a:endParaRPr lang="en-US"/>
+          </a:p>
+        </p:txBody>
       </p:sp>
       <p:sp>
         <p:nvSpPr>
@@ -9485,6 +9576,13 @@
           </a:solidFill>
           <a:ln/>
         </p:spPr>
+        <p:txBody>
+          <a:bodyPr/>
+          <a:lstStyle/>
+          <a:p>
+            <a:endParaRPr lang="en-US"/>
+          </a:p>
+        </p:txBody>
       </p:sp>
       <p:sp>
         <p:nvSpPr>
@@ -9507,7 +9605,7 @@
           <a:bodyPr wrap="square" lIns="0" tIns="0" rIns="0" bIns="0" rtlCol="0" anchor="ctr"/>
           <a:lstStyle/>
           <a:p>
-            <a:pPr algn="ctr" indent="0" marL="0">
+            <a:pPr marL="0" indent="0" algn="ctr">
               <a:buNone/>
             </a:pPr>
             <a:r>
@@ -9546,7 +9644,7 @@
           <a:bodyPr wrap="square" lIns="0" tIns="0" rIns="0" bIns="0" rtlCol="0" anchor="ctr"/>
           <a:lstStyle/>
           <a:p>
-            <a:pPr indent="0" marL="0">
+            <a:pPr marL="0" indent="0">
               <a:buNone/>
             </a:pPr>
             <a:r>
@@ -9590,13 +9688,20 @@
             <a:prstDash val="solid"/>
           </a:ln>
           <a:effectLst>
-            <a:outerShdw sx="100000" sy="100000" kx="0" ky="0" algn="bl" rotWithShape="0" blurRad="88900" dist="25400" dir="5400000">
+            <a:outerShdw blurRad="88900" dist="25400" dir="5400000" algn="bl" rotWithShape="0">
               <a:srgbClr val="8FA3BC">
                 <a:alpha val="30000"/>
               </a:srgbClr>
             </a:outerShdw>
           </a:effectLst>
         </p:spPr>
+        <p:txBody>
+          <a:bodyPr/>
+          <a:lstStyle/>
+          <a:p>
+            <a:endParaRPr lang="en-US"/>
+          </a:p>
+        </p:txBody>
       </p:sp>
       <p:sp>
         <p:nvSpPr>
@@ -9617,6 +9722,13 @@
           </a:solidFill>
           <a:ln/>
         </p:spPr>
+        <p:txBody>
+          <a:bodyPr/>
+          <a:lstStyle/>
+          <a:p>
+            <a:endParaRPr lang="en-US"/>
+          </a:p>
+        </p:txBody>
       </p:sp>
       <p:sp>
         <p:nvSpPr>
@@ -9639,7 +9751,7 @@
           <a:bodyPr wrap="square" lIns="0" tIns="0" rIns="0" bIns="0" rtlCol="0" anchor="ctr"/>
           <a:lstStyle/>
           <a:p>
-            <a:pPr algn="ctr" indent="0" marL="0">
+            <a:pPr marL="0" indent="0" algn="ctr">
               <a:buNone/>
             </a:pPr>
             <a:r>
@@ -9678,7 +9790,7 @@
           <a:bodyPr wrap="square" lIns="0" tIns="0" rIns="0" bIns="0" rtlCol="0" anchor="ctr"/>
           <a:lstStyle/>
           <a:p>
-            <a:pPr indent="0" marL="0">
+            <a:pPr marL="0" indent="0">
               <a:buNone/>
             </a:pPr>
             <a:r>
@@ -9722,13 +9834,20 @@
             <a:prstDash val="solid"/>
           </a:ln>
           <a:effectLst>
-            <a:outerShdw sx="100000" sy="100000" kx="0" ky="0" algn="bl" rotWithShape="0" blurRad="88900" dist="25400" dir="5400000">
+            <a:outerShdw blurRad="88900" dist="25400" dir="5400000" algn="bl" rotWithShape="0">
               <a:srgbClr val="8FA3BC">
                 <a:alpha val="30000"/>
               </a:srgbClr>
             </a:outerShdw>
           </a:effectLst>
         </p:spPr>
+        <p:txBody>
+          <a:bodyPr/>
+          <a:lstStyle/>
+          <a:p>
+            <a:endParaRPr lang="en-US"/>
+          </a:p>
+        </p:txBody>
       </p:sp>
       <p:sp>
         <p:nvSpPr>
@@ -9749,6 +9868,13 @@
           </a:solidFill>
           <a:ln/>
         </p:spPr>
+        <p:txBody>
+          <a:bodyPr/>
+          <a:lstStyle/>
+          <a:p>
+            <a:endParaRPr lang="en-US"/>
+          </a:p>
+        </p:txBody>
       </p:sp>
       <p:sp>
         <p:nvSpPr>
@@ -9771,7 +9897,7 @@
           <a:bodyPr wrap="square" lIns="0" tIns="0" rIns="0" bIns="0" rtlCol="0" anchor="ctr"/>
           <a:lstStyle/>
           <a:p>
-            <a:pPr algn="ctr" indent="0" marL="0">
+            <a:pPr marL="0" indent="0" algn="ctr">
               <a:buNone/>
             </a:pPr>
             <a:r>
@@ -9810,7 +9936,7 @@
           <a:bodyPr wrap="square" lIns="0" tIns="0" rIns="0" bIns="0" rtlCol="0" anchor="ctr"/>
           <a:lstStyle/>
           <a:p>
-            <a:pPr indent="0" marL="0">
+            <a:pPr marL="0" indent="0">
               <a:buNone/>
             </a:pPr>
             <a:r>
@@ -9849,7 +9975,7 @@
           <a:bodyPr wrap="square" lIns="0" tIns="0" rIns="0" bIns="0" rtlCol="0" anchor="ctr"/>
           <a:lstStyle/>
           <a:p>
-            <a:pPr algn="ctr" indent="0" marL="0">
+            <a:pPr marL="0" indent="0" algn="ctr">
               <a:buNone/>
             </a:pPr>
             <a:r>
@@ -9863,9 +9989,6 @@
               </a:rPr>
               <a:t>Save the whole design in </a:t>
             </a:r>
-            <a:pPr algn="ctr" indent="0" marL="0">
-              <a:buNone/>
-            </a:pPr>
             <a:r>
               <a:rPr lang="en-US" sz="1350" b="1" dirty="0">
                 <a:solidFill>
@@ -9877,9 +10000,6 @@
               </a:rPr>
               <a:t>task-11.md</a:t>
             </a:r>
-            <a:pPr algn="ctr" indent="0" marL="0">
-              <a:buNone/>
-            </a:pPr>
             <a:r>
               <a:rPr lang="en-US" sz="1350" b="1" dirty="0">
                 <a:solidFill>
@@ -9916,7 +10036,7 @@
           <a:bodyPr wrap="square" lIns="0" tIns="0" rIns="0" bIns="0" rtlCol="0" anchor="ctr"/>
           <a:lstStyle/>
           <a:p>
-            <a:pPr algn="l" indent="0" marL="0">
+            <a:pPr marL="0" indent="0" algn="l">
               <a:buNone/>
             </a:pPr>
             <a:r>
@@ -9960,7 +10080,7 @@
                             </p:stCondLst>
                             <p:childTnLst>
                               <p:par>
-                                <p:cTn id="5" presetID="10" presetClass="entr" presetSubtype="0" fill="hold" grpId="0" nodeType="clickEffect">
+                                <p:cTn id="5" presetID="10" presetClass="entr" presetSubtype="0" fill="hold" nodeType="clickEffect">
                                   <p:stCondLst>
                                     <p:cond delay="0"/>
                                   </p:stCondLst>
@@ -9995,7 +10115,7 @@
                                 </p:cTn>
                               </p:par>
                               <p:par>
-                                <p:cTn id="8" presetID="10" presetClass="entr" presetSubtype="0" fill="hold" grpId="0" nodeType="withEffect">
+                                <p:cTn id="8" presetID="10" presetClass="entr" presetSubtype="0" fill="hold" nodeType="withEffect">
                                   <p:stCondLst>
                                     <p:cond delay="0"/>
                                   </p:stCondLst>
@@ -10030,7 +10150,7 @@
                                 </p:cTn>
                               </p:par>
                               <p:par>
-                                <p:cTn id="11" presetID="10" presetClass="entr" presetSubtype="0" fill="hold" grpId="0" nodeType="withEffect">
+                                <p:cTn id="11" presetID="10" presetClass="entr" presetSubtype="0" fill="hold" nodeType="withEffect">
                                   <p:stCondLst>
                                     <p:cond delay="0"/>
                                   </p:stCondLst>
@@ -10065,7 +10185,7 @@
                                 </p:cTn>
                               </p:par>
                               <p:par>
-                                <p:cTn id="14" presetID="10" presetClass="entr" presetSubtype="0" fill="hold" grpId="0" nodeType="withEffect">
+                                <p:cTn id="14" presetID="10" presetClass="entr" presetSubtype="0" fill="hold" nodeType="withEffect">
                                   <p:stCondLst>
                                     <p:cond delay="0"/>
                                   </p:stCondLst>
@@ -10118,7 +10238,7 @@
                             </p:stCondLst>
                             <p:childTnLst>
                               <p:par>
-                                <p:cTn id="19" presetID="10" presetClass="entr" presetSubtype="0" fill="hold" grpId="1" nodeType="clickEffect">
+                                <p:cTn id="19" presetID="10" presetClass="entr" presetSubtype="0" fill="hold" nodeType="clickEffect">
                                   <p:stCondLst>
                                     <p:cond delay="0"/>
                                   </p:stCondLst>
@@ -10153,7 +10273,7 @@
                                 </p:cTn>
                               </p:par>
                               <p:par>
-                                <p:cTn id="22" presetID="10" presetClass="entr" presetSubtype="0" fill="hold" grpId="1" nodeType="withEffect">
+                                <p:cTn id="22" presetID="10" presetClass="entr" presetSubtype="0" fill="hold" nodeType="withEffect">
                                   <p:stCondLst>
                                     <p:cond delay="0"/>
                                   </p:stCondLst>
@@ -10188,7 +10308,7 @@
                                 </p:cTn>
                               </p:par>
                               <p:par>
-                                <p:cTn id="25" presetID="10" presetClass="entr" presetSubtype="0" fill="hold" grpId="1" nodeType="withEffect">
+                                <p:cTn id="25" presetID="10" presetClass="entr" presetSubtype="0" fill="hold" nodeType="withEffect">
                                   <p:stCondLst>
                                     <p:cond delay="0"/>
                                   </p:stCondLst>
@@ -10223,7 +10343,7 @@
                                 </p:cTn>
                               </p:par>
                               <p:par>
-                                <p:cTn id="28" presetID="10" presetClass="entr" presetSubtype="0" fill="hold" grpId="1" nodeType="withEffect">
+                                <p:cTn id="28" presetID="10" presetClass="entr" presetSubtype="0" fill="hold" nodeType="withEffect">
                                   <p:stCondLst>
                                     <p:cond delay="0"/>
                                   </p:stCondLst>
@@ -10276,7 +10396,7 @@
                             </p:stCondLst>
                             <p:childTnLst>
                               <p:par>
-                                <p:cTn id="33" presetID="10" presetClass="entr" presetSubtype="0" fill="hold" grpId="2" nodeType="clickEffect">
+                                <p:cTn id="33" presetID="10" presetClass="entr" presetSubtype="0" fill="hold" nodeType="clickEffect">
                                   <p:stCondLst>
                                     <p:cond delay="0"/>
                                   </p:stCondLst>
@@ -10311,7 +10431,7 @@
                                 </p:cTn>
                               </p:par>
                               <p:par>
-                                <p:cTn id="36" presetID="10" presetClass="entr" presetSubtype="0" fill="hold" grpId="2" nodeType="withEffect">
+                                <p:cTn id="36" presetID="10" presetClass="entr" presetSubtype="0" fill="hold" nodeType="withEffect">
                                   <p:stCondLst>
                                     <p:cond delay="0"/>
                                   </p:stCondLst>
@@ -10346,7 +10466,7 @@
                                 </p:cTn>
                               </p:par>
                               <p:par>
-                                <p:cTn id="39" presetID="10" presetClass="entr" presetSubtype="0" fill="hold" grpId="2" nodeType="withEffect">
+                                <p:cTn id="39" presetID="10" presetClass="entr" presetSubtype="0" fill="hold" nodeType="withEffect">
                                   <p:stCondLst>
                                     <p:cond delay="0"/>
                                   </p:stCondLst>
@@ -10381,7 +10501,7 @@
                                 </p:cTn>
                               </p:par>
                               <p:par>
-                                <p:cTn id="42" presetID="10" presetClass="entr" presetSubtype="0" fill="hold" grpId="2" nodeType="withEffect">
+                                <p:cTn id="42" presetID="10" presetClass="entr" presetSubtype="0" fill="hold" nodeType="withEffect">
                                   <p:stCondLst>
                                     <p:cond delay="0"/>
                                   </p:stCondLst>
@@ -10434,7 +10554,7 @@
                             </p:stCondLst>
                             <p:childTnLst>
                               <p:par>
-                                <p:cTn id="47" presetID="10" presetClass="entr" presetSubtype="0" fill="hold" grpId="3" nodeType="clickEffect">
+                                <p:cTn id="47" presetID="10" presetClass="entr" presetSubtype="0" fill="hold" nodeType="clickEffect">
                                   <p:stCondLst>
                                     <p:cond delay="0"/>
                                   </p:stCondLst>
@@ -10469,7 +10589,7 @@
                                 </p:cTn>
                               </p:par>
                               <p:par>
-                                <p:cTn id="50" presetID="10" presetClass="entr" presetSubtype="0" fill="hold" grpId="3" nodeType="withEffect">
+                                <p:cTn id="50" presetID="10" presetClass="entr" presetSubtype="0" fill="hold" nodeType="withEffect">
                                   <p:stCondLst>
                                     <p:cond delay="0"/>
                                   </p:stCondLst>
@@ -10504,7 +10624,7 @@
                                 </p:cTn>
                               </p:par>
                               <p:par>
-                                <p:cTn id="53" presetID="10" presetClass="entr" presetSubtype="0" fill="hold" grpId="3" nodeType="withEffect">
+                                <p:cTn id="53" presetID="10" presetClass="entr" presetSubtype="0" fill="hold" nodeType="withEffect">
                                   <p:stCondLst>
                                     <p:cond delay="0"/>
                                   </p:stCondLst>
@@ -10539,7 +10659,7 @@
                                 </p:cTn>
                               </p:par>
                               <p:par>
-                                <p:cTn id="56" presetID="10" presetClass="entr" presetSubtype="0" fill="hold" grpId="3" nodeType="withEffect">
+                                <p:cTn id="56" presetID="10" presetClass="entr" presetSubtype="0" fill="hold" nodeType="withEffect">
                                   <p:stCondLst>
                                     <p:cond delay="0"/>
                                   </p:stCondLst>
@@ -10592,7 +10712,7 @@
                             </p:stCondLst>
                             <p:childTnLst>
                               <p:par>
-                                <p:cTn id="61" presetID="10" presetClass="entr" presetSubtype="0" fill="hold" grpId="4" nodeType="clickEffect">
+                                <p:cTn id="61" presetID="10" presetClass="entr" presetSubtype="0" fill="hold" nodeType="clickEffect">
                                   <p:stCondLst>
                                     <p:cond delay="0"/>
                                   </p:stCondLst>
@@ -10627,7 +10747,7 @@
                                 </p:cTn>
                               </p:par>
                               <p:par>
-                                <p:cTn id="64" presetID="10" presetClass="entr" presetSubtype="0" fill="hold" grpId="4" nodeType="withEffect">
+                                <p:cTn id="64" presetID="10" presetClass="entr" presetSubtype="0" fill="hold" nodeType="withEffect">
                                   <p:stCondLst>
                                     <p:cond delay="0"/>
                                   </p:stCondLst>
@@ -10662,7 +10782,7 @@
                                 </p:cTn>
                               </p:par>
                               <p:par>
-                                <p:cTn id="67" presetID="10" presetClass="entr" presetSubtype="0" fill="hold" grpId="4" nodeType="withEffect">
+                                <p:cTn id="67" presetID="10" presetClass="entr" presetSubtype="0" fill="hold" nodeType="withEffect">
                                   <p:stCondLst>
                                     <p:cond delay="0"/>
                                   </p:stCondLst>
@@ -10697,7 +10817,7 @@
                                 </p:cTn>
                               </p:par>
                               <p:par>
-                                <p:cTn id="70" presetID="10" presetClass="entr" presetSubtype="0" fill="hold" grpId="4" nodeType="withEffect">
+                                <p:cTn id="70" presetID="10" presetClass="entr" presetSubtype="0" fill="hold" nodeType="withEffect">
                                   <p:stCondLst>
                                     <p:cond delay="0"/>
                                   </p:stCondLst>
@@ -10750,7 +10870,7 @@
                             </p:stCondLst>
                             <p:childTnLst>
                               <p:par>
-                                <p:cTn id="75" presetID="10" presetClass="entr" presetSubtype="0" fill="hold" grpId="5" nodeType="clickEffect">
+                                <p:cTn id="75" presetID="10" presetClass="entr" presetSubtype="0" fill="hold" nodeType="clickEffect">
                                   <p:stCondLst>
                                     <p:cond delay="0"/>
                                   </p:stCondLst>
@@ -10785,7 +10905,7 @@
                                 </p:cTn>
                               </p:par>
                               <p:par>
-                                <p:cTn id="78" presetID="10" presetClass="entr" presetSubtype="0" fill="hold" grpId="5" nodeType="withEffect">
+                                <p:cTn id="78" presetID="10" presetClass="entr" presetSubtype="0" fill="hold" nodeType="withEffect">
                                   <p:stCondLst>
                                     <p:cond delay="0"/>
                                   </p:stCondLst>
@@ -10820,7 +10940,7 @@
                                 </p:cTn>
                               </p:par>
                               <p:par>
-                                <p:cTn id="81" presetID="10" presetClass="entr" presetSubtype="0" fill="hold" grpId="5" nodeType="withEffect">
+                                <p:cTn id="81" presetID="10" presetClass="entr" presetSubtype="0" fill="hold" nodeType="withEffect">
                                   <p:stCondLst>
                                     <p:cond delay="0"/>
                                   </p:stCondLst>
@@ -10855,7 +10975,7 @@
                                 </p:cTn>
                               </p:par>
                               <p:par>
-                                <p:cTn id="84" presetID="10" presetClass="entr" presetSubtype="0" fill="hold" grpId="5" nodeType="withEffect">
+                                <p:cTn id="84" presetID="10" presetClass="entr" presetSubtype="0" fill="hold" nodeType="withEffect">
                                   <p:stCondLst>
                                     <p:cond delay="0"/>
                                   </p:stCondLst>
@@ -10908,7 +11028,7 @@
                             </p:stCondLst>
                             <p:childTnLst>
                               <p:par>
-                                <p:cTn id="89" presetID="10" presetClass="entr" presetSubtype="0" fill="hold" grpId="6" nodeType="clickEffect">
+                                <p:cTn id="89" presetID="10" presetClass="entr" presetSubtype="0" fill="hold" nodeType="clickEffect">
                                   <p:stCondLst>
                                     <p:cond delay="0"/>
                                   </p:stCondLst>
@@ -10981,6 +11101,7 @@
         <a:solidFill>
           <a:srgbClr val="F4F8FC"/>
         </a:solidFill>
+        <a:effectLst/>
       </p:bgPr>
     </p:bg>
     <p:spTree>
@@ -11016,6 +11137,13 @@
           </a:solidFill>
           <a:ln/>
         </p:spPr>
+        <p:txBody>
+          <a:bodyPr/>
+          <a:lstStyle/>
+          <a:p>
+            <a:endParaRPr lang="en-US"/>
+          </a:p>
+        </p:txBody>
       </p:sp>
       <p:sp>
         <p:nvSpPr>
@@ -11036,6 +11164,13 @@
           </a:solidFill>
           <a:ln/>
         </p:spPr>
+        <p:txBody>
+          <a:bodyPr/>
+          <a:lstStyle/>
+          <a:p>
+            <a:endParaRPr lang="en-US"/>
+          </a:p>
+        </p:txBody>
       </p:sp>
       <p:sp>
         <p:nvSpPr>
@@ -11058,11 +11193,11 @@
           <a:bodyPr wrap="square" lIns="0" tIns="0" rIns="0" bIns="0" rtlCol="0" anchor="ctr"/>
           <a:lstStyle/>
           <a:p>
-            <a:pPr indent="0" marL="0">
+            <a:pPr marL="0" indent="0">
               <a:buNone/>
             </a:pPr>
             <a:r>
-              <a:rPr lang="en-US" sz="1200" b="1" spc="300" kern="0" dirty="0">
+              <a:rPr lang="en-US" sz="1200" b="1" kern="0" spc="300" dirty="0">
                 <a:solidFill>
                   <a:srgbClr val="0284C7"/>
                 </a:solidFill>
@@ -11097,7 +11232,7 @@
           <a:bodyPr wrap="square" lIns="0" tIns="0" rIns="0" bIns="0" rtlCol="0" anchor="ctr"/>
           <a:lstStyle/>
           <a:p>
-            <a:pPr indent="0" marL="0">
+            <a:pPr marL="0" indent="0">
               <a:buNone/>
             </a:pPr>
             <a:r>
@@ -11141,6 +11276,13 @@
             <a:prstDash val="solid"/>
           </a:ln>
         </p:spPr>
+        <p:txBody>
+          <a:bodyPr/>
+          <a:lstStyle/>
+          <a:p>
+            <a:endParaRPr lang="en-US"/>
+          </a:p>
+        </p:txBody>
       </p:sp>
       <p:sp>
         <p:nvSpPr>
@@ -11163,7 +11305,7 @@
           <a:bodyPr wrap="square" lIns="0" tIns="0" rIns="0" bIns="0" rtlCol="0" anchor="t"/>
           <a:lstStyle/>
           <a:p>
-            <a:pPr indent="0" marL="0">
+            <a:pPr marL="0" indent="0">
               <a:lnSpc>
                 <a:spcPct val="112000"/>
               </a:lnSpc>
@@ -11183,7 +11325,7 @@
             <a:endParaRPr lang="en-US" sz="1250" dirty="0"/>
           </a:p>
           <a:p>
-            <a:pPr indent="0" marL="0">
+            <a:pPr marL="0" indent="0">
               <a:lnSpc>
                 <a:spcPct val="112000"/>
               </a:lnSpc>
@@ -11203,7 +11345,7 @@
             <a:endParaRPr lang="en-US" sz="1250" dirty="0"/>
           </a:p>
           <a:p>
-            <a:pPr indent="0" marL="0">
+            <a:pPr marL="0" indent="0">
               <a:lnSpc>
                 <a:spcPct val="112000"/>
               </a:lnSpc>
@@ -11223,7 +11365,7 @@
             <a:endParaRPr lang="en-US" sz="1250" dirty="0"/>
           </a:p>
           <a:p>
-            <a:pPr indent="0" marL="0">
+            <a:pPr marL="0" indent="0">
               <a:lnSpc>
                 <a:spcPct val="112000"/>
               </a:lnSpc>
@@ -11243,7 +11385,7 @@
             <a:endParaRPr lang="en-US" sz="1250" dirty="0"/>
           </a:p>
           <a:p>
-            <a:pPr indent="0" marL="0">
+            <a:pPr marL="0" indent="0">
               <a:lnSpc>
                 <a:spcPct val="112000"/>
               </a:lnSpc>
@@ -11263,7 +11405,7 @@
             <a:endParaRPr lang="en-US" sz="1250" dirty="0"/>
           </a:p>
           <a:p>
-            <a:pPr indent="0" marL="0">
+            <a:pPr marL="0" indent="0">
               <a:lnSpc>
                 <a:spcPct val="112000"/>
               </a:lnSpc>
@@ -11283,7 +11425,7 @@
             <a:endParaRPr lang="en-US" sz="1250" dirty="0"/>
           </a:p>
           <a:p>
-            <a:pPr indent="0" marL="0">
+            <a:pPr marL="0" indent="0">
               <a:lnSpc>
                 <a:spcPct val="112000"/>
               </a:lnSpc>
@@ -11303,7 +11445,7 @@
             <a:endParaRPr lang="en-US" sz="1250" dirty="0"/>
           </a:p>
           <a:p>
-            <a:pPr indent="0" marL="0">
+            <a:pPr marL="0" indent="0">
               <a:lnSpc>
                 <a:spcPct val="112000"/>
               </a:lnSpc>
@@ -11323,7 +11465,7 @@
             <a:endParaRPr lang="en-US" sz="1250" dirty="0"/>
           </a:p>
           <a:p>
-            <a:pPr indent="0" marL="0">
+            <a:pPr marL="0" indent="0">
               <a:lnSpc>
                 <a:spcPct val="112000"/>
               </a:lnSpc>
@@ -11343,7 +11485,7 @@
             <a:endParaRPr lang="en-US" sz="1250" dirty="0"/>
           </a:p>
           <a:p>
-            <a:pPr indent="0" marL="0">
+            <a:pPr marL="0" indent="0">
               <a:lnSpc>
                 <a:spcPct val="112000"/>
               </a:lnSpc>
@@ -11363,7 +11505,7 @@
             <a:endParaRPr lang="en-US" sz="1250" dirty="0"/>
           </a:p>
           <a:p>
-            <a:pPr indent="0" marL="0">
+            <a:pPr marL="0" indent="0">
               <a:lnSpc>
                 <a:spcPct val="112000"/>
               </a:lnSpc>
@@ -11383,7 +11525,7 @@
             <a:endParaRPr lang="en-US" sz="1250" dirty="0"/>
           </a:p>
           <a:p>
-            <a:pPr indent="0" marL="0">
+            <a:pPr marL="0" indent="0">
               <a:lnSpc>
                 <a:spcPct val="112000"/>
               </a:lnSpc>
@@ -11425,7 +11567,7 @@
           <a:bodyPr wrap="square" lIns="0" tIns="0" rIns="0" bIns="0" rtlCol="0" anchor="ctr"/>
           <a:lstStyle/>
           <a:p>
-            <a:pPr indent="0" marL="0">
+            <a:pPr marL="0" indent="0">
               <a:buNone/>
             </a:pPr>
             <a:r>
@@ -11462,6 +11604,13 @@
           </a:solidFill>
           <a:ln/>
         </p:spPr>
+        <p:txBody>
+          <a:bodyPr/>
+          <a:lstStyle/>
+          <a:p>
+            <a:endParaRPr lang="en-US"/>
+          </a:p>
+        </p:txBody>
       </p:sp>
       <p:sp>
         <p:nvSpPr>
@@ -11484,7 +11633,7 @@
           <a:bodyPr wrap="square" lIns="0" tIns="0" rIns="0" bIns="0" rtlCol="0" anchor="ctr"/>
           <a:lstStyle/>
           <a:p>
-            <a:pPr indent="0" marL="0">
+            <a:pPr marL="0" indent="0">
               <a:buNone/>
             </a:pPr>
             <a:r>
@@ -11521,6 +11670,13 @@
           </a:solidFill>
           <a:ln/>
         </p:spPr>
+        <p:txBody>
+          <a:bodyPr/>
+          <a:lstStyle/>
+          <a:p>
+            <a:endParaRPr lang="en-US"/>
+          </a:p>
+        </p:txBody>
       </p:sp>
       <p:sp>
         <p:nvSpPr>
@@ -11543,7 +11699,7 @@
           <a:bodyPr wrap="square" lIns="0" tIns="0" rIns="0" bIns="0" rtlCol="0" anchor="ctr"/>
           <a:lstStyle/>
           <a:p>
-            <a:pPr indent="0" marL="0">
+            <a:pPr marL="0" indent="0">
               <a:buNone/>
             </a:pPr>
             <a:r>
@@ -11580,6 +11736,13 @@
           </a:solidFill>
           <a:ln/>
         </p:spPr>
+        <p:txBody>
+          <a:bodyPr/>
+          <a:lstStyle/>
+          <a:p>
+            <a:endParaRPr lang="en-US"/>
+          </a:p>
+        </p:txBody>
       </p:sp>
       <p:sp>
         <p:nvSpPr>
@@ -11602,7 +11765,7 @@
           <a:bodyPr wrap="square" lIns="0" tIns="0" rIns="0" bIns="0" rtlCol="0" anchor="ctr"/>
           <a:lstStyle/>
           <a:p>
-            <a:pPr indent="0" marL="0">
+            <a:pPr marL="0" indent="0">
               <a:buNone/>
             </a:pPr>
             <a:r>
@@ -11639,6 +11802,13 @@
           </a:solidFill>
           <a:ln/>
         </p:spPr>
+        <p:txBody>
+          <a:bodyPr/>
+          <a:lstStyle/>
+          <a:p>
+            <a:endParaRPr lang="en-US"/>
+          </a:p>
+        </p:txBody>
       </p:sp>
       <p:sp>
         <p:nvSpPr>
@@ -11661,7 +11831,7 @@
           <a:bodyPr wrap="square" lIns="0" tIns="0" rIns="0" bIns="0" rtlCol="0" anchor="ctr"/>
           <a:lstStyle/>
           <a:p>
-            <a:pPr indent="0" marL="0">
+            <a:pPr marL="0" indent="0">
               <a:buNone/>
             </a:pPr>
             <a:r>
@@ -11698,6 +11868,13 @@
           </a:solidFill>
           <a:ln/>
         </p:spPr>
+        <p:txBody>
+          <a:bodyPr/>
+          <a:lstStyle/>
+          <a:p>
+            <a:endParaRPr lang="en-US"/>
+          </a:p>
+        </p:txBody>
       </p:sp>
       <p:sp>
         <p:nvSpPr>
@@ -11720,7 +11897,7 @@
           <a:bodyPr wrap="square" lIns="0" tIns="0" rIns="0" bIns="0" rtlCol="0" anchor="ctr"/>
           <a:lstStyle/>
           <a:p>
-            <a:pPr indent="0" marL="0">
+            <a:pPr marL="0" indent="0">
               <a:buNone/>
             </a:pPr>
             <a:r>
@@ -11757,6 +11934,13 @@
           </a:solidFill>
           <a:ln/>
         </p:spPr>
+        <p:txBody>
+          <a:bodyPr/>
+          <a:lstStyle/>
+          <a:p>
+            <a:endParaRPr lang="en-US"/>
+          </a:p>
+        </p:txBody>
       </p:sp>
       <p:sp>
         <p:nvSpPr>
@@ -11779,7 +11963,7 @@
           <a:bodyPr wrap="square" lIns="0" tIns="0" rIns="0" bIns="0" rtlCol="0" anchor="ctr"/>
           <a:lstStyle/>
           <a:p>
-            <a:pPr indent="0" marL="0">
+            <a:pPr marL="0" indent="0">
               <a:buNone/>
             </a:pPr>
             <a:r>
@@ -11818,7 +12002,7 @@
           <a:bodyPr wrap="square" lIns="0" tIns="0" rIns="0" bIns="0" rtlCol="0" anchor="ctr"/>
           <a:lstStyle/>
           <a:p>
-            <a:pPr algn="l" indent="0" marL="0">
+            <a:pPr marL="0" indent="0" algn="l">
               <a:buNone/>
             </a:pPr>
             <a:r>
@@ -11862,7 +12046,7 @@
                             </p:stCondLst>
                             <p:childTnLst>
                               <p:par>
-                                <p:cTn id="5" presetID="10" presetClass="entr" presetSubtype="0" fill="hold" grpId="0" nodeType="clickEffect">
+                                <p:cTn id="5" presetID="10" presetClass="entr" presetSubtype="0" fill="hold" nodeType="clickEffect">
                                   <p:stCondLst>
                                     <p:cond delay="0"/>
                                   </p:stCondLst>
@@ -11897,7 +12081,7 @@
                                 </p:cTn>
                               </p:par>
                               <p:par>
-                                <p:cTn id="8" presetID="10" presetClass="entr" presetSubtype="0" fill="hold" grpId="0" nodeType="withEffect">
+                                <p:cTn id="8" presetID="10" presetClass="entr" presetSubtype="0" fill="hold" nodeType="withEffect">
                                   <p:stCondLst>
                                     <p:cond delay="0"/>
                                   </p:stCondLst>
@@ -11932,7 +12116,7 @@
                                 </p:cTn>
                               </p:par>
                               <p:par>
-                                <p:cTn id="11" presetID="10" presetClass="entr" presetSubtype="0" fill="hold" grpId="0" nodeType="withEffect">
+                                <p:cTn id="11" presetID="10" presetClass="entr" presetSubtype="0" fill="hold" nodeType="withEffect">
                                   <p:stCondLst>
                                     <p:cond delay="0"/>
                                   </p:stCondLst>
@@ -11985,7 +12169,7 @@
                             </p:stCondLst>
                             <p:childTnLst>
                               <p:par>
-                                <p:cTn id="16" presetID="10" presetClass="entr" presetSubtype="0" fill="hold" grpId="1" nodeType="clickEffect">
+                                <p:cTn id="16" presetID="10" presetClass="entr" presetSubtype="0" fill="hold" nodeType="clickEffect">
                                   <p:stCondLst>
                                     <p:cond delay="0"/>
                                   </p:stCondLst>
@@ -12020,7 +12204,7 @@
                                 </p:cTn>
                               </p:par>
                               <p:par>
-                                <p:cTn id="19" presetID="10" presetClass="entr" presetSubtype="0" fill="hold" grpId="1" nodeType="withEffect">
+                                <p:cTn id="19" presetID="10" presetClass="entr" presetSubtype="0" fill="hold" nodeType="withEffect">
                                   <p:stCondLst>
                                     <p:cond delay="0"/>
                                   </p:stCondLst>
@@ -12073,7 +12257,7 @@
                             </p:stCondLst>
                             <p:childTnLst>
                               <p:par>
-                                <p:cTn id="24" presetID="10" presetClass="entr" presetSubtype="0" fill="hold" grpId="2" nodeType="clickEffect">
+                                <p:cTn id="24" presetID="10" presetClass="entr" presetSubtype="0" fill="hold" nodeType="clickEffect">
                                   <p:stCondLst>
                                     <p:cond delay="0"/>
                                   </p:stCondLst>
@@ -12108,7 +12292,7 @@
                                 </p:cTn>
                               </p:par>
                               <p:par>
-                                <p:cTn id="27" presetID="10" presetClass="entr" presetSubtype="0" fill="hold" grpId="2" nodeType="withEffect">
+                                <p:cTn id="27" presetID="10" presetClass="entr" presetSubtype="0" fill="hold" nodeType="withEffect">
                                   <p:stCondLst>
                                     <p:cond delay="0"/>
                                   </p:stCondLst>
@@ -12161,7 +12345,7 @@
                             </p:stCondLst>
                             <p:childTnLst>
                               <p:par>
-                                <p:cTn id="32" presetID="10" presetClass="entr" presetSubtype="0" fill="hold" grpId="3" nodeType="clickEffect">
+                                <p:cTn id="32" presetID="10" presetClass="entr" presetSubtype="0" fill="hold" nodeType="clickEffect">
                                   <p:stCondLst>
                                     <p:cond delay="0"/>
                                   </p:stCondLst>
@@ -12196,7 +12380,7 @@
                                 </p:cTn>
                               </p:par>
                               <p:par>
-                                <p:cTn id="35" presetID="10" presetClass="entr" presetSubtype="0" fill="hold" grpId="3" nodeType="withEffect">
+                                <p:cTn id="35" presetID="10" presetClass="entr" presetSubtype="0" fill="hold" nodeType="withEffect">
                                   <p:stCondLst>
                                     <p:cond delay="0"/>
                                   </p:stCondLst>
@@ -12249,7 +12433,7 @@
                             </p:stCondLst>
                             <p:childTnLst>
                               <p:par>
-                                <p:cTn id="40" presetID="10" presetClass="entr" presetSubtype="0" fill="hold" grpId="4" nodeType="clickEffect">
+                                <p:cTn id="40" presetID="10" presetClass="entr" presetSubtype="0" fill="hold" nodeType="clickEffect">
                                   <p:stCondLst>
                                     <p:cond delay="0"/>
                                   </p:stCondLst>
@@ -12284,7 +12468,7 @@
                                 </p:cTn>
                               </p:par>
                               <p:par>
-                                <p:cTn id="43" presetID="10" presetClass="entr" presetSubtype="0" fill="hold" grpId="4" nodeType="withEffect">
+                                <p:cTn id="43" presetID="10" presetClass="entr" presetSubtype="0" fill="hold" nodeType="withEffect">
                                   <p:stCondLst>
                                     <p:cond delay="0"/>
                                   </p:stCondLst>
@@ -12337,7 +12521,7 @@
                             </p:stCondLst>
                             <p:childTnLst>
                               <p:par>
-                                <p:cTn id="48" presetID="10" presetClass="entr" presetSubtype="0" fill="hold" grpId="5" nodeType="clickEffect">
+                                <p:cTn id="48" presetID="10" presetClass="entr" presetSubtype="0" fill="hold" nodeType="clickEffect">
                                   <p:stCondLst>
                                     <p:cond delay="0"/>
                                   </p:stCondLst>
@@ -12372,7 +12556,7 @@
                                 </p:cTn>
                               </p:par>
                               <p:par>
-                                <p:cTn id="51" presetID="10" presetClass="entr" presetSubtype="0" fill="hold" grpId="5" nodeType="withEffect">
+                                <p:cTn id="51" presetID="10" presetClass="entr" presetSubtype="0" fill="hold" nodeType="withEffect">
                                   <p:stCondLst>
                                     <p:cond delay="0"/>
                                   </p:stCondLst>
@@ -12425,7 +12609,7 @@
                             </p:stCondLst>
                             <p:childTnLst>
                               <p:par>
-                                <p:cTn id="56" presetID="10" presetClass="entr" presetSubtype="0" fill="hold" grpId="6" nodeType="clickEffect">
+                                <p:cTn id="56" presetID="10" presetClass="entr" presetSubtype="0" fill="hold" nodeType="clickEffect">
                                   <p:stCondLst>
                                     <p:cond delay="0"/>
                                   </p:stCondLst>
@@ -12460,7 +12644,7 @@
                                 </p:cTn>
                               </p:par>
                               <p:par>
-                                <p:cTn id="59" presetID="10" presetClass="entr" presetSubtype="0" fill="hold" grpId="6" nodeType="withEffect">
+                                <p:cTn id="59" presetID="10" presetClass="entr" presetSubtype="0" fill="hold" nodeType="withEffect">
                                   <p:stCondLst>
                                     <p:cond delay="0"/>
                                   </p:stCondLst>
@@ -12533,6 +12717,7 @@
         <a:solidFill>
           <a:srgbClr val="F4F8FC"/>
         </a:solidFill>
+        <a:effectLst/>
       </p:bgPr>
     </p:bg>
     <p:spTree>
@@ -12568,6 +12753,13 @@
           </a:solidFill>
           <a:ln/>
         </p:spPr>
+        <p:txBody>
+          <a:bodyPr/>
+          <a:lstStyle/>
+          <a:p>
+            <a:endParaRPr lang="en-US"/>
+          </a:p>
+        </p:txBody>
       </p:sp>
       <p:sp>
         <p:nvSpPr>
@@ -12588,6 +12780,13 @@
           </a:solidFill>
           <a:ln/>
         </p:spPr>
+        <p:txBody>
+          <a:bodyPr/>
+          <a:lstStyle/>
+          <a:p>
+            <a:endParaRPr lang="en-US"/>
+          </a:p>
+        </p:txBody>
       </p:sp>
       <p:sp>
         <p:nvSpPr>
@@ -12610,11 +12809,11 @@
           <a:bodyPr wrap="square" lIns="0" tIns="0" rIns="0" bIns="0" rtlCol="0" anchor="ctr"/>
           <a:lstStyle/>
           <a:p>
-            <a:pPr indent="0" marL="0">
+            <a:pPr marL="0" indent="0">
               <a:buNone/>
             </a:pPr>
             <a:r>
-              <a:rPr lang="en-US" sz="1200" b="1" spc="300" kern="0" dirty="0">
+              <a:rPr lang="en-US" sz="1200" b="1" kern="0" spc="300" dirty="0">
                 <a:solidFill>
                   <a:srgbClr val="0284C7"/>
                 </a:solidFill>
@@ -12649,7 +12848,7 @@
           <a:bodyPr wrap="square" lIns="0" tIns="0" rIns="0" bIns="0" rtlCol="0" anchor="ctr"/>
           <a:lstStyle/>
           <a:p>
-            <a:pPr indent="0" marL="0">
+            <a:pPr marL="0" indent="0">
               <a:buNone/>
             </a:pPr>
             <a:r>
@@ -12693,13 +12892,20 @@
             <a:prstDash val="solid"/>
           </a:ln>
           <a:effectLst>
-            <a:outerShdw sx="100000" sy="100000" kx="0" ky="0" algn="bl" rotWithShape="0" blurRad="88900" dist="25400" dir="5400000">
+            <a:outerShdw blurRad="88900" dist="25400" dir="5400000" algn="bl" rotWithShape="0">
               <a:srgbClr val="8FA3BC">
                 <a:alpha val="30000"/>
               </a:srgbClr>
             </a:outerShdw>
           </a:effectLst>
         </p:spPr>
+        <p:txBody>
+          <a:bodyPr/>
+          <a:lstStyle/>
+          <a:p>
+            <a:endParaRPr lang="en-US"/>
+          </a:p>
+        </p:txBody>
       </p:sp>
       <p:sp>
         <p:nvSpPr>
@@ -12720,17 +12926,24 @@
           </a:solidFill>
           <a:ln/>
         </p:spPr>
+        <p:txBody>
+          <a:bodyPr/>
+          <a:lstStyle/>
+          <a:p>
+            <a:endParaRPr lang="en-US"/>
+          </a:p>
+        </p:txBody>
       </p:sp>
       <p:pic>
         <p:nvPicPr>
-          <p:cNvPr id="8" name="Image 0" descr="preencoded.png">    </p:cNvPr>
+          <p:cNvPr id="8" name="Image 0" descr="preencoded.png"/>
           <p:cNvPicPr>
             <a:picLocks noChangeAspect="1"/>
           </p:cNvPicPr>
           <p:nvPr/>
         </p:nvPicPr>
         <p:blipFill>
-          <a:blip r:embed="rId1"/>
+          <a:blip r:embed="rId3"/>
           <a:stretch>
             <a:fillRect/>
           </a:stretch>
@@ -12766,7 +12979,7 @@
           <a:bodyPr wrap="square" lIns="0" tIns="0" rIns="0" bIns="0" rtlCol="0" anchor="ctr"/>
           <a:lstStyle/>
           <a:p>
-            <a:pPr indent="0" marL="0">
+            <a:pPr marL="0" indent="0">
               <a:buNone/>
             </a:pPr>
             <a:r>
@@ -12805,7 +13018,7 @@
           <a:bodyPr wrap="square" lIns="0" tIns="0" rIns="0" bIns="0" rtlCol="0" anchor="ctr"/>
           <a:lstStyle/>
           <a:p>
-            <a:pPr indent="0" marL="0">
+            <a:pPr marL="0" indent="0">
               <a:buNone/>
             </a:pPr>
             <a:r>
@@ -12849,13 +13062,20 @@
             <a:prstDash val="solid"/>
           </a:ln>
           <a:effectLst>
-            <a:outerShdw sx="100000" sy="100000" kx="0" ky="0" algn="bl" rotWithShape="0" blurRad="88900" dist="25400" dir="5400000">
+            <a:outerShdw blurRad="88900" dist="25400" dir="5400000" algn="bl" rotWithShape="0">
               <a:srgbClr val="8FA3BC">
                 <a:alpha val="30000"/>
               </a:srgbClr>
             </a:outerShdw>
           </a:effectLst>
         </p:spPr>
+        <p:txBody>
+          <a:bodyPr/>
+          <a:lstStyle/>
+          <a:p>
+            <a:endParaRPr lang="en-US"/>
+          </a:p>
+        </p:txBody>
       </p:sp>
       <p:sp>
         <p:nvSpPr>
@@ -12876,17 +13096,24 @@
           </a:solidFill>
           <a:ln/>
         </p:spPr>
+        <p:txBody>
+          <a:bodyPr/>
+          <a:lstStyle/>
+          <a:p>
+            <a:endParaRPr lang="en-US"/>
+          </a:p>
+        </p:txBody>
       </p:sp>
       <p:pic>
         <p:nvPicPr>
-          <p:cNvPr id="13" name="Image 1" descr="preencoded.png">    </p:cNvPr>
+          <p:cNvPr id="13" name="Image 1" descr="preencoded.png"/>
           <p:cNvPicPr>
             <a:picLocks noChangeAspect="1"/>
           </p:cNvPicPr>
           <p:nvPr/>
         </p:nvPicPr>
         <p:blipFill>
-          <a:blip r:embed="rId2"/>
+          <a:blip r:embed="rId4"/>
           <a:stretch>
             <a:fillRect/>
           </a:stretch>
@@ -12922,7 +13149,7 @@
           <a:bodyPr wrap="square" lIns="0" tIns="0" rIns="0" bIns="0" rtlCol="0" anchor="ctr"/>
           <a:lstStyle/>
           <a:p>
-            <a:pPr indent="0" marL="0">
+            <a:pPr marL="0" indent="0">
               <a:buNone/>
             </a:pPr>
             <a:r>
@@ -12961,7 +13188,7 @@
           <a:bodyPr wrap="square" lIns="0" tIns="0" rIns="0" bIns="0" rtlCol="0" anchor="ctr"/>
           <a:lstStyle/>
           <a:p>
-            <a:pPr indent="0" marL="0">
+            <a:pPr marL="0" indent="0">
               <a:buNone/>
             </a:pPr>
             <a:r>
@@ -13005,13 +13232,20 @@
             <a:prstDash val="solid"/>
           </a:ln>
           <a:effectLst>
-            <a:outerShdw sx="100000" sy="100000" kx="0" ky="0" algn="bl" rotWithShape="0" blurRad="88900" dist="25400" dir="5400000">
+            <a:outerShdw blurRad="88900" dist="25400" dir="5400000" algn="bl" rotWithShape="0">
               <a:srgbClr val="8FA3BC">
                 <a:alpha val="30000"/>
               </a:srgbClr>
             </a:outerShdw>
           </a:effectLst>
         </p:spPr>
+        <p:txBody>
+          <a:bodyPr/>
+          <a:lstStyle/>
+          <a:p>
+            <a:endParaRPr lang="en-US"/>
+          </a:p>
+        </p:txBody>
       </p:sp>
       <p:sp>
         <p:nvSpPr>
@@ -13032,17 +13266,24 @@
           </a:solidFill>
           <a:ln/>
         </p:spPr>
+        <p:txBody>
+          <a:bodyPr/>
+          <a:lstStyle/>
+          <a:p>
+            <a:endParaRPr lang="en-US"/>
+          </a:p>
+        </p:txBody>
       </p:sp>
       <p:pic>
         <p:nvPicPr>
-          <p:cNvPr id="18" name="Image 2" descr="preencoded.png">    </p:cNvPr>
+          <p:cNvPr id="18" name="Image 2" descr="preencoded.png"/>
           <p:cNvPicPr>
             <a:picLocks noChangeAspect="1"/>
           </p:cNvPicPr>
           <p:nvPr/>
         </p:nvPicPr>
         <p:blipFill>
-          <a:blip r:embed="rId3"/>
+          <a:blip r:embed="rId5"/>
           <a:stretch>
             <a:fillRect/>
           </a:stretch>
@@ -13078,7 +13319,7 @@
           <a:bodyPr wrap="square" lIns="0" tIns="0" rIns="0" bIns="0" rtlCol="0" anchor="ctr"/>
           <a:lstStyle/>
           <a:p>
-            <a:pPr indent="0" marL="0">
+            <a:pPr marL="0" indent="0">
               <a:buNone/>
             </a:pPr>
             <a:r>
@@ -13117,7 +13358,7 @@
           <a:bodyPr wrap="square" lIns="0" tIns="0" rIns="0" bIns="0" rtlCol="0" anchor="ctr"/>
           <a:lstStyle/>
           <a:p>
-            <a:pPr indent="0" marL="0">
+            <a:pPr marL="0" indent="0">
               <a:buNone/>
             </a:pPr>
             <a:r>
@@ -13161,13 +13402,20 @@
             <a:prstDash val="solid"/>
           </a:ln>
           <a:effectLst>
-            <a:outerShdw sx="100000" sy="100000" kx="0" ky="0" algn="bl" rotWithShape="0" blurRad="88900" dist="25400" dir="5400000">
+            <a:outerShdw blurRad="88900" dist="25400" dir="5400000" algn="bl" rotWithShape="0">
               <a:srgbClr val="8FA3BC">
                 <a:alpha val="30000"/>
               </a:srgbClr>
             </a:outerShdw>
           </a:effectLst>
         </p:spPr>
+        <p:txBody>
+          <a:bodyPr/>
+          <a:lstStyle/>
+          <a:p>
+            <a:endParaRPr lang="en-US"/>
+          </a:p>
+        </p:txBody>
       </p:sp>
       <p:sp>
         <p:nvSpPr>
@@ -13188,17 +13436,24 @@
           </a:solidFill>
           <a:ln/>
         </p:spPr>
+        <p:txBody>
+          <a:bodyPr/>
+          <a:lstStyle/>
+          <a:p>
+            <a:endParaRPr lang="en-US"/>
+          </a:p>
+        </p:txBody>
       </p:sp>
       <p:pic>
         <p:nvPicPr>
-          <p:cNvPr id="23" name="Image 3" descr="preencoded.png">    </p:cNvPr>
+          <p:cNvPr id="23" name="Image 3" descr="preencoded.png"/>
           <p:cNvPicPr>
             <a:picLocks noChangeAspect="1"/>
           </p:cNvPicPr>
           <p:nvPr/>
         </p:nvPicPr>
         <p:blipFill>
-          <a:blip r:embed="rId4"/>
+          <a:blip r:embed="rId6"/>
           <a:stretch>
             <a:fillRect/>
           </a:stretch>
@@ -13234,7 +13489,7 @@
           <a:bodyPr wrap="square" lIns="0" tIns="0" rIns="0" bIns="0" rtlCol="0" anchor="ctr"/>
           <a:lstStyle/>
           <a:p>
-            <a:pPr indent="0" marL="0">
+            <a:pPr marL="0" indent="0">
               <a:buNone/>
             </a:pPr>
             <a:r>
@@ -13273,7 +13528,7 @@
           <a:bodyPr wrap="square" lIns="0" tIns="0" rIns="0" bIns="0" rtlCol="0" anchor="ctr"/>
           <a:lstStyle/>
           <a:p>
-            <a:pPr indent="0" marL="0">
+            <a:pPr marL="0" indent="0">
               <a:buNone/>
             </a:pPr>
             <a:r>
@@ -13312,7 +13567,7 @@
           <a:bodyPr wrap="square" lIns="0" tIns="0" rIns="0" bIns="0" rtlCol="0" anchor="ctr"/>
           <a:lstStyle/>
           <a:p>
-            <a:pPr algn="ctr" indent="0" marL="0">
+            <a:pPr marL="0" indent="0" algn="ctr">
               <a:buNone/>
             </a:pPr>
             <a:r>
@@ -13351,7 +13606,7 @@
           <a:bodyPr wrap="square" lIns="0" tIns="0" rIns="0" bIns="0" rtlCol="0" anchor="ctr"/>
           <a:lstStyle/>
           <a:p>
-            <a:pPr algn="l" indent="0" marL="0">
+            <a:pPr marL="0" indent="0" algn="l">
               <a:buNone/>
             </a:pPr>
             <a:r>
@@ -13395,7 +13650,7 @@
                             </p:stCondLst>
                             <p:childTnLst>
                               <p:par>
-                                <p:cTn id="5" presetID="10" presetClass="entr" presetSubtype="0" fill="hold" grpId="0" nodeType="clickEffect">
+                                <p:cTn id="5" presetID="10" presetClass="entr" presetSubtype="0" fill="hold" nodeType="clickEffect">
                                   <p:stCondLst>
                                     <p:cond delay="0"/>
                                   </p:stCondLst>
@@ -13430,7 +13685,7 @@
                                 </p:cTn>
                               </p:par>
                               <p:par>
-                                <p:cTn id="8" presetID="10" presetClass="entr" presetSubtype="0" fill="hold" grpId="0" nodeType="withEffect">
+                                <p:cTn id="8" presetID="10" presetClass="entr" presetSubtype="0" fill="hold" nodeType="withEffect">
                                   <p:stCondLst>
                                     <p:cond delay="0"/>
                                   </p:stCondLst>
@@ -13465,7 +13720,7 @@
                                 </p:cTn>
                               </p:par>
                               <p:par>
-                                <p:cTn id="11" presetID="10" presetClass="entr" presetSubtype="0" fill="hold" grpId="0" nodeType="withEffect">
+                                <p:cTn id="11" presetID="10" presetClass="entr" presetSubtype="0" fill="hold" nodeType="withEffect">
                                   <p:stCondLst>
                                     <p:cond delay="0"/>
                                   </p:stCondLst>
@@ -13500,7 +13755,7 @@
                                 </p:cTn>
                               </p:par>
                               <p:par>
-                                <p:cTn id="14" presetID="10" presetClass="entr" presetSubtype="0" fill="hold" grpId="0" nodeType="withEffect">
+                                <p:cTn id="14" presetID="10" presetClass="entr" presetSubtype="0" fill="hold" nodeType="withEffect">
                                   <p:stCondLst>
                                     <p:cond delay="0"/>
                                   </p:stCondLst>
@@ -13535,7 +13790,7 @@
                                 </p:cTn>
                               </p:par>
                               <p:par>
-                                <p:cTn id="17" presetID="10" presetClass="entr" presetSubtype="0" fill="hold" grpId="0" nodeType="withEffect">
+                                <p:cTn id="17" presetID="10" presetClass="entr" presetSubtype="0" fill="hold" nodeType="withEffect">
                                   <p:stCondLst>
                                     <p:cond delay="0"/>
                                   </p:stCondLst>
@@ -13588,7 +13843,7 @@
                             </p:stCondLst>
                             <p:childTnLst>
                               <p:par>
-                                <p:cTn id="22" presetID="10" presetClass="entr" presetSubtype="0" fill="hold" grpId="1" nodeType="clickEffect">
+                                <p:cTn id="22" presetID="10" presetClass="entr" presetSubtype="0" fill="hold" nodeType="clickEffect">
                                   <p:stCondLst>
                                     <p:cond delay="0"/>
                                   </p:stCondLst>
@@ -13623,7 +13878,7 @@
                                 </p:cTn>
                               </p:par>
                               <p:par>
-                                <p:cTn id="25" presetID="10" presetClass="entr" presetSubtype="0" fill="hold" grpId="1" nodeType="withEffect">
+                                <p:cTn id="25" presetID="10" presetClass="entr" presetSubtype="0" fill="hold" nodeType="withEffect">
                                   <p:stCondLst>
                                     <p:cond delay="0"/>
                                   </p:stCondLst>
@@ -13658,7 +13913,7 @@
                                 </p:cTn>
                               </p:par>
                               <p:par>
-                                <p:cTn id="28" presetID="10" presetClass="entr" presetSubtype="0" fill="hold" grpId="1" nodeType="withEffect">
+                                <p:cTn id="28" presetID="10" presetClass="entr" presetSubtype="0" fill="hold" nodeType="withEffect">
                                   <p:stCondLst>
                                     <p:cond delay="0"/>
                                   </p:stCondLst>
@@ -13693,7 +13948,7 @@
                                 </p:cTn>
                               </p:par>
                               <p:par>
-                                <p:cTn id="31" presetID="10" presetClass="entr" presetSubtype="0" fill="hold" grpId="1" nodeType="withEffect">
+                                <p:cTn id="31" presetID="10" presetClass="entr" presetSubtype="0" fill="hold" nodeType="withEffect">
                                   <p:stCondLst>
                                     <p:cond delay="0"/>
                                   </p:stCondLst>
@@ -13728,7 +13983,7 @@
                                 </p:cTn>
                               </p:par>
                               <p:par>
-                                <p:cTn id="34" presetID="10" presetClass="entr" presetSubtype="0" fill="hold" grpId="1" nodeType="withEffect">
+                                <p:cTn id="34" presetID="10" presetClass="entr" presetSubtype="0" fill="hold" nodeType="withEffect">
                                   <p:stCondLst>
                                     <p:cond delay="0"/>
                                   </p:stCondLst>
@@ -13781,7 +14036,7 @@
                             </p:stCondLst>
                             <p:childTnLst>
                               <p:par>
-                                <p:cTn id="39" presetID="10" presetClass="entr" presetSubtype="0" fill="hold" grpId="2" nodeType="clickEffect">
+                                <p:cTn id="39" presetID="10" presetClass="entr" presetSubtype="0" fill="hold" nodeType="clickEffect">
                                   <p:stCondLst>
                                     <p:cond delay="0"/>
                                   </p:stCondLst>
@@ -13816,7 +14071,7 @@
                                 </p:cTn>
                               </p:par>
                               <p:par>
-                                <p:cTn id="42" presetID="10" presetClass="entr" presetSubtype="0" fill="hold" grpId="2" nodeType="withEffect">
+                                <p:cTn id="42" presetID="10" presetClass="entr" presetSubtype="0" fill="hold" nodeType="withEffect">
                                   <p:stCondLst>
                                     <p:cond delay="0"/>
                                   </p:stCondLst>
@@ -13851,7 +14106,7 @@
                                 </p:cTn>
                               </p:par>
                               <p:par>
-                                <p:cTn id="45" presetID="10" presetClass="entr" presetSubtype="0" fill="hold" grpId="2" nodeType="withEffect">
+                                <p:cTn id="45" presetID="10" presetClass="entr" presetSubtype="0" fill="hold" nodeType="withEffect">
                                   <p:stCondLst>
                                     <p:cond delay="0"/>
                                   </p:stCondLst>
@@ -13886,7 +14141,7 @@
                                 </p:cTn>
                               </p:par>
                               <p:par>
-                                <p:cTn id="48" presetID="10" presetClass="entr" presetSubtype="0" fill="hold" grpId="2" nodeType="withEffect">
+                                <p:cTn id="48" presetID="10" presetClass="entr" presetSubtype="0" fill="hold" nodeType="withEffect">
                                   <p:stCondLst>
                                     <p:cond delay="0"/>
                                   </p:stCondLst>
@@ -13921,7 +14176,7 @@
                                 </p:cTn>
                               </p:par>
                               <p:par>
-                                <p:cTn id="51" presetID="10" presetClass="entr" presetSubtype="0" fill="hold" grpId="2" nodeType="withEffect">
+                                <p:cTn id="51" presetID="10" presetClass="entr" presetSubtype="0" fill="hold" nodeType="withEffect">
                                   <p:stCondLst>
                                     <p:cond delay="0"/>
                                   </p:stCondLst>
@@ -13974,7 +14229,7 @@
                             </p:stCondLst>
                             <p:childTnLst>
                               <p:par>
-                                <p:cTn id="56" presetID="10" presetClass="entr" presetSubtype="0" fill="hold" grpId="3" nodeType="clickEffect">
+                                <p:cTn id="56" presetID="10" presetClass="entr" presetSubtype="0" fill="hold" nodeType="clickEffect">
                                   <p:stCondLst>
                                     <p:cond delay="0"/>
                                   </p:stCondLst>
@@ -14009,7 +14264,7 @@
                                 </p:cTn>
                               </p:par>
                               <p:par>
-                                <p:cTn id="59" presetID="10" presetClass="entr" presetSubtype="0" fill="hold" grpId="3" nodeType="withEffect">
+                                <p:cTn id="59" presetID="10" presetClass="entr" presetSubtype="0" fill="hold" nodeType="withEffect">
                                   <p:stCondLst>
                                     <p:cond delay="0"/>
                                   </p:stCondLst>
@@ -14044,7 +14299,7 @@
                                 </p:cTn>
                               </p:par>
                               <p:par>
-                                <p:cTn id="62" presetID="10" presetClass="entr" presetSubtype="0" fill="hold" grpId="3" nodeType="withEffect">
+                                <p:cTn id="62" presetID="10" presetClass="entr" presetSubtype="0" fill="hold" nodeType="withEffect">
                                   <p:stCondLst>
                                     <p:cond delay="0"/>
                                   </p:stCondLst>
@@ -14079,7 +14334,7 @@
                                 </p:cTn>
                               </p:par>
                               <p:par>
-                                <p:cTn id="65" presetID="10" presetClass="entr" presetSubtype="0" fill="hold" grpId="3" nodeType="withEffect">
+                                <p:cTn id="65" presetID="10" presetClass="entr" presetSubtype="0" fill="hold" nodeType="withEffect">
                                   <p:stCondLst>
                                     <p:cond delay="0"/>
                                   </p:stCondLst>
@@ -14114,7 +14369,7 @@
                                 </p:cTn>
                               </p:par>
                               <p:par>
-                                <p:cTn id="68" presetID="10" presetClass="entr" presetSubtype="0" fill="hold" grpId="3" nodeType="withEffect">
+                                <p:cTn id="68" presetID="10" presetClass="entr" presetSubtype="0" fill="hold" nodeType="withEffect">
                                   <p:stCondLst>
                                     <p:cond delay="0"/>
                                   </p:stCondLst>
@@ -14167,7 +14422,7 @@
                             </p:stCondLst>
                             <p:childTnLst>
                               <p:par>
-                                <p:cTn id="73" presetID="10" presetClass="entr" presetSubtype="0" fill="hold" grpId="4" nodeType="clickEffect">
+                                <p:cTn id="73" presetID="10" presetClass="entr" presetSubtype="0" fill="hold" nodeType="clickEffect">
                                   <p:stCondLst>
                                     <p:cond delay="0"/>
                                   </p:stCondLst>
@@ -14240,6 +14495,7 @@
         <a:solidFill>
           <a:srgbClr val="F4F8FC"/>
         </a:solidFill>
+        <a:effectLst/>
       </p:bgPr>
     </p:bg>
     <p:spTree>
@@ -14275,6 +14531,13 @@
           </a:solidFill>
           <a:ln/>
         </p:spPr>
+        <p:txBody>
+          <a:bodyPr/>
+          <a:lstStyle/>
+          <a:p>
+            <a:endParaRPr lang="en-US"/>
+          </a:p>
+        </p:txBody>
       </p:sp>
       <p:sp>
         <p:nvSpPr>
@@ -14295,6 +14558,13 @@
           </a:solidFill>
           <a:ln/>
         </p:spPr>
+        <p:txBody>
+          <a:bodyPr/>
+          <a:lstStyle/>
+          <a:p>
+            <a:endParaRPr lang="en-US"/>
+          </a:p>
+        </p:txBody>
       </p:sp>
       <p:sp>
         <p:nvSpPr>
@@ -14317,11 +14587,11 @@
           <a:bodyPr wrap="square" lIns="0" tIns="0" rIns="0" bIns="0" rtlCol="0" anchor="ctr"/>
           <a:lstStyle/>
           <a:p>
-            <a:pPr indent="0" marL="0">
+            <a:pPr marL="0" indent="0">
               <a:buNone/>
             </a:pPr>
             <a:r>
-              <a:rPr lang="en-US" sz="1200" b="1" spc="300" kern="0" dirty="0">
+              <a:rPr lang="en-US" sz="1200" b="1" kern="0" spc="300" dirty="0">
                 <a:solidFill>
                   <a:srgbClr val="0284C7"/>
                 </a:solidFill>
@@ -14356,7 +14626,7 @@
           <a:bodyPr wrap="square" lIns="0" tIns="0" rIns="0" bIns="0" rtlCol="0" anchor="ctr"/>
           <a:lstStyle/>
           <a:p>
-            <a:pPr indent="0" marL="0">
+            <a:pPr marL="0" indent="0">
               <a:buNone/>
             </a:pPr>
             <a:r>
@@ -14400,13 +14670,20 @@
             <a:prstDash val="solid"/>
           </a:ln>
           <a:effectLst>
-            <a:outerShdw sx="100000" sy="100000" kx="0" ky="0" algn="bl" rotWithShape="0" blurRad="88900" dist="25400" dir="5400000">
+            <a:outerShdw blurRad="88900" dist="25400" dir="5400000" algn="bl" rotWithShape="0">
               <a:srgbClr val="8FA3BC">
                 <a:alpha val="30000"/>
               </a:srgbClr>
             </a:outerShdw>
           </a:effectLst>
         </p:spPr>
+        <p:txBody>
+          <a:bodyPr/>
+          <a:lstStyle/>
+          <a:p>
+            <a:endParaRPr lang="en-US"/>
+          </a:p>
+        </p:txBody>
       </p:sp>
       <p:sp>
         <p:nvSpPr>
@@ -14427,6 +14704,13 @@
           </a:solidFill>
           <a:ln/>
         </p:spPr>
+        <p:txBody>
+          <a:bodyPr/>
+          <a:lstStyle/>
+          <a:p>
+            <a:endParaRPr lang="en-US"/>
+          </a:p>
+        </p:txBody>
       </p:sp>
       <p:sp>
         <p:nvSpPr>
@@ -14449,7 +14733,7 @@
           <a:bodyPr wrap="square" lIns="0" tIns="0" rIns="0" bIns="0" rtlCol="0" anchor="ctr"/>
           <a:lstStyle/>
           <a:p>
-            <a:pPr algn="ctr" indent="0" marL="0">
+            <a:pPr marL="0" indent="0" algn="ctr">
               <a:buNone/>
             </a:pPr>
             <a:r>
@@ -14488,7 +14772,7 @@
           <a:bodyPr wrap="square" lIns="0" tIns="0" rIns="0" bIns="0" rtlCol="0" anchor="ctr"/>
           <a:lstStyle/>
           <a:p>
-            <a:pPr algn="ctr" indent="0" marL="0">
+            <a:pPr marL="0" indent="0" algn="ctr">
               <a:buNone/>
             </a:pPr>
             <a:r>
@@ -14505,7 +14789,7 @@
             <a:endParaRPr lang="en-US" sz="1300" dirty="0"/>
           </a:p>
           <a:p>
-            <a:pPr algn="ctr" indent="0" marL="0">
+            <a:pPr marL="0" indent="0" algn="ctr">
               <a:buNone/>
             </a:pPr>
             <a:r>
@@ -14542,17 +14826,24 @@
           </a:solidFill>
           <a:ln/>
         </p:spPr>
+        <p:txBody>
+          <a:bodyPr/>
+          <a:lstStyle/>
+          <a:p>
+            <a:endParaRPr lang="en-US"/>
+          </a:p>
+        </p:txBody>
       </p:sp>
       <p:pic>
         <p:nvPicPr>
-          <p:cNvPr id="11" name="Image 0" descr="preencoded.png">    </p:cNvPr>
+          <p:cNvPr id="11" name="Image 0" descr="preencoded.png"/>
           <p:cNvPicPr>
             <a:picLocks noChangeAspect="1"/>
           </p:cNvPicPr>
           <p:nvPr/>
         </p:nvPicPr>
         <p:blipFill>
-          <a:blip r:embed="rId1"/>
+          <a:blip r:embed="rId3"/>
           <a:stretch>
             <a:fillRect/>
           </a:stretch>
@@ -14593,13 +14884,20 @@
             <a:prstDash val="solid"/>
           </a:ln>
           <a:effectLst>
-            <a:outerShdw sx="100000" sy="100000" kx="0" ky="0" algn="bl" rotWithShape="0" blurRad="88900" dist="25400" dir="5400000">
+            <a:outerShdw blurRad="88900" dist="25400" dir="5400000" algn="bl" rotWithShape="0">
               <a:srgbClr val="8FA3BC">
                 <a:alpha val="30000"/>
               </a:srgbClr>
             </a:outerShdw>
           </a:effectLst>
         </p:spPr>
+        <p:txBody>
+          <a:bodyPr/>
+          <a:lstStyle/>
+          <a:p>
+            <a:endParaRPr lang="en-US"/>
+          </a:p>
+        </p:txBody>
       </p:sp>
       <p:sp>
         <p:nvSpPr>
@@ -14620,6 +14918,13 @@
           </a:solidFill>
           <a:ln/>
         </p:spPr>
+        <p:txBody>
+          <a:bodyPr/>
+          <a:lstStyle/>
+          <a:p>
+            <a:endParaRPr lang="en-US"/>
+          </a:p>
+        </p:txBody>
       </p:sp>
       <p:sp>
         <p:nvSpPr>
@@ -14642,7 +14947,7 @@
           <a:bodyPr wrap="square" lIns="0" tIns="0" rIns="0" bIns="0" rtlCol="0" anchor="ctr"/>
           <a:lstStyle/>
           <a:p>
-            <a:pPr algn="ctr" indent="0" marL="0">
+            <a:pPr marL="0" indent="0" algn="ctr">
               <a:buNone/>
             </a:pPr>
             <a:r>
@@ -14681,7 +14986,7 @@
           <a:bodyPr wrap="square" lIns="0" tIns="0" rIns="0" bIns="0" rtlCol="0" anchor="ctr"/>
           <a:lstStyle/>
           <a:p>
-            <a:pPr algn="ctr" indent="0" marL="0">
+            <a:pPr marL="0" indent="0" algn="ctr">
               <a:buNone/>
             </a:pPr>
             <a:r>
@@ -14698,7 +15003,7 @@
             <a:endParaRPr lang="en-US" sz="1300" dirty="0"/>
           </a:p>
           <a:p>
-            <a:pPr algn="ctr" indent="0" marL="0">
+            <a:pPr marL="0" indent="0" algn="ctr">
               <a:buNone/>
             </a:pPr>
             <a:r>
@@ -14735,17 +15040,24 @@
           </a:solidFill>
           <a:ln/>
         </p:spPr>
+        <p:txBody>
+          <a:bodyPr/>
+          <a:lstStyle/>
+          <a:p>
+            <a:endParaRPr lang="en-US"/>
+          </a:p>
+        </p:txBody>
       </p:sp>
       <p:pic>
         <p:nvPicPr>
-          <p:cNvPr id="17" name="Image 1" descr="preencoded.png">    </p:cNvPr>
+          <p:cNvPr id="17" name="Image 1" descr="preencoded.png"/>
           <p:cNvPicPr>
             <a:picLocks noChangeAspect="1"/>
           </p:cNvPicPr>
           <p:nvPr/>
         </p:nvPicPr>
         <p:blipFill>
-          <a:blip r:embed="rId2"/>
+          <a:blip r:embed="rId3"/>
           <a:stretch>
             <a:fillRect/>
           </a:stretch>
@@ -14786,13 +15098,20 @@
             <a:prstDash val="solid"/>
           </a:ln>
           <a:effectLst>
-            <a:outerShdw sx="100000" sy="100000" kx="0" ky="0" algn="bl" rotWithShape="0" blurRad="88900" dist="25400" dir="5400000">
+            <a:outerShdw blurRad="88900" dist="25400" dir="5400000" algn="bl" rotWithShape="0">
               <a:srgbClr val="8FA3BC">
                 <a:alpha val="30000"/>
               </a:srgbClr>
             </a:outerShdw>
           </a:effectLst>
         </p:spPr>
+        <p:txBody>
+          <a:bodyPr/>
+          <a:lstStyle/>
+          <a:p>
+            <a:endParaRPr lang="en-US"/>
+          </a:p>
+        </p:txBody>
       </p:sp>
       <p:sp>
         <p:nvSpPr>
@@ -14813,6 +15132,13 @@
           </a:solidFill>
           <a:ln/>
         </p:spPr>
+        <p:txBody>
+          <a:bodyPr/>
+          <a:lstStyle/>
+          <a:p>
+            <a:endParaRPr lang="en-US"/>
+          </a:p>
+        </p:txBody>
       </p:sp>
       <p:sp>
         <p:nvSpPr>
@@ -14835,7 +15161,7 @@
           <a:bodyPr wrap="square" lIns="0" tIns="0" rIns="0" bIns="0" rtlCol="0" anchor="ctr"/>
           <a:lstStyle/>
           <a:p>
-            <a:pPr algn="ctr" indent="0" marL="0">
+            <a:pPr marL="0" indent="0" algn="ctr">
               <a:buNone/>
             </a:pPr>
             <a:r>
@@ -14874,7 +15200,7 @@
           <a:bodyPr wrap="square" lIns="0" tIns="0" rIns="0" bIns="0" rtlCol="0" anchor="ctr"/>
           <a:lstStyle/>
           <a:p>
-            <a:pPr algn="ctr" indent="0" marL="0">
+            <a:pPr marL="0" indent="0" algn="ctr">
               <a:buNone/>
             </a:pPr>
             <a:r>
@@ -14891,7 +15217,7 @@
             <a:endParaRPr lang="en-US" sz="1300" dirty="0"/>
           </a:p>
           <a:p>
-            <a:pPr algn="ctr" indent="0" marL="0">
+            <a:pPr marL="0" indent="0" algn="ctr">
               <a:buNone/>
             </a:pPr>
             <a:r>
@@ -14930,7 +15256,7 @@
           <a:bodyPr wrap="square" lIns="0" tIns="0" rIns="0" bIns="0" rtlCol="0" anchor="ctr"/>
           <a:lstStyle/>
           <a:p>
-            <a:pPr algn="ctr" indent="0" marL="0">
+            <a:pPr marL="0" indent="0" algn="ctr">
               <a:buNone/>
             </a:pPr>
             <a:r>
@@ -14944,9 +15270,6 @@
               </a:rPr>
               <a:t>Test everything:  </a:t>
             </a:r>
-            <a:pPr algn="ctr" indent="0" marL="0">
-              <a:buNone/>
-            </a:pPr>
             <a:r>
               <a:rPr lang="en-US" sz="1600" b="1" dirty="0">
                 <a:solidFill>
@@ -14983,7 +15306,7 @@
           <a:bodyPr wrap="square" lIns="0" tIns="0" rIns="0" bIns="0" rtlCol="0" anchor="ctr"/>
           <a:lstStyle/>
           <a:p>
-            <a:pPr algn="l" indent="0" marL="0">
+            <a:pPr marL="0" indent="0" algn="l">
               <a:buNone/>
             </a:pPr>
             <a:r>
@@ -15027,7 +15350,7 @@
                             </p:stCondLst>
                             <p:childTnLst>
                               <p:par>
-                                <p:cTn id="5" presetID="10" presetClass="entr" presetSubtype="0" fill="hold" grpId="0" nodeType="clickEffect">
+                                <p:cTn id="5" presetID="10" presetClass="entr" presetSubtype="0" fill="hold" nodeType="clickEffect">
                                   <p:stCondLst>
                                     <p:cond delay="0"/>
                                   </p:stCondLst>
@@ -15062,7 +15385,7 @@
                                 </p:cTn>
                               </p:par>
                               <p:par>
-                                <p:cTn id="8" presetID="10" presetClass="entr" presetSubtype="0" fill="hold" grpId="0" nodeType="withEffect">
+                                <p:cTn id="8" presetID="10" presetClass="entr" presetSubtype="0" fill="hold" nodeType="withEffect">
                                   <p:stCondLst>
                                     <p:cond delay="0"/>
                                   </p:stCondLst>
@@ -15097,7 +15420,7 @@
                                 </p:cTn>
                               </p:par>
                               <p:par>
-                                <p:cTn id="11" presetID="10" presetClass="entr" presetSubtype="0" fill="hold" grpId="0" nodeType="withEffect">
+                                <p:cTn id="11" presetID="10" presetClass="entr" presetSubtype="0" fill="hold" nodeType="withEffect">
                                   <p:stCondLst>
                                     <p:cond delay="0"/>
                                   </p:stCondLst>
@@ -15132,7 +15455,7 @@
                                 </p:cTn>
                               </p:par>
                               <p:par>
-                                <p:cTn id="14" presetID="10" presetClass="entr" presetSubtype="0" fill="hold" grpId="0" nodeType="withEffect">
+                                <p:cTn id="14" presetID="10" presetClass="entr" presetSubtype="0" fill="hold" nodeType="withEffect">
                                   <p:stCondLst>
                                     <p:cond delay="0"/>
                                   </p:stCondLst>
@@ -15185,7 +15508,7 @@
                             </p:stCondLst>
                             <p:childTnLst>
                               <p:par>
-                                <p:cTn id="19" presetID="10" presetClass="entr" presetSubtype="0" fill="hold" grpId="1" nodeType="clickEffect">
+                                <p:cTn id="19" presetID="10" presetClass="entr" presetSubtype="0" fill="hold" nodeType="clickEffect">
                                   <p:stCondLst>
                                     <p:cond delay="0"/>
                                   </p:stCondLst>
@@ -15220,7 +15543,7 @@
                                 </p:cTn>
                               </p:par>
                               <p:par>
-                                <p:cTn id="22" presetID="10" presetClass="entr" presetSubtype="0" fill="hold" grpId="1" nodeType="withEffect">
+                                <p:cTn id="22" presetID="10" presetClass="entr" presetSubtype="0" fill="hold" nodeType="withEffect">
                                   <p:stCondLst>
                                     <p:cond delay="0"/>
                                   </p:stCondLst>
@@ -15255,7 +15578,7 @@
                                 </p:cTn>
                               </p:par>
                               <p:par>
-                                <p:cTn id="25" presetID="10" presetClass="entr" presetSubtype="0" fill="hold" grpId="1" nodeType="withEffect">
+                                <p:cTn id="25" presetID="10" presetClass="entr" presetSubtype="0" fill="hold" nodeType="withEffect">
                                   <p:stCondLst>
                                     <p:cond delay="0"/>
                                   </p:stCondLst>
@@ -15290,7 +15613,7 @@
                                 </p:cTn>
                               </p:par>
                               <p:par>
-                                <p:cTn id="28" presetID="10" presetClass="entr" presetSubtype="0" fill="hold" grpId="1" nodeType="withEffect">
+                                <p:cTn id="28" presetID="10" presetClass="entr" presetSubtype="0" fill="hold" nodeType="withEffect">
                                   <p:stCondLst>
                                     <p:cond delay="0"/>
                                   </p:stCondLst>
@@ -15343,7 +15666,7 @@
                             </p:stCondLst>
                             <p:childTnLst>
                               <p:par>
-                                <p:cTn id="33" presetID="10" presetClass="entr" presetSubtype="0" fill="hold" grpId="2" nodeType="clickEffect">
+                                <p:cTn id="33" presetID="10" presetClass="entr" presetSubtype="0" fill="hold" nodeType="clickEffect">
                                   <p:stCondLst>
                                     <p:cond delay="0"/>
                                   </p:stCondLst>
@@ -15378,7 +15701,7 @@
                                 </p:cTn>
                               </p:par>
                               <p:par>
-                                <p:cTn id="36" presetID="10" presetClass="entr" presetSubtype="0" fill="hold" grpId="2" nodeType="withEffect">
+                                <p:cTn id="36" presetID="10" presetClass="entr" presetSubtype="0" fill="hold" nodeType="withEffect">
                                   <p:stCondLst>
                                     <p:cond delay="0"/>
                                   </p:stCondLst>
@@ -15413,7 +15736,7 @@
                                 </p:cTn>
                               </p:par>
                               <p:par>
-                                <p:cTn id="39" presetID="10" presetClass="entr" presetSubtype="0" fill="hold" grpId="2" nodeType="withEffect">
+                                <p:cTn id="39" presetID="10" presetClass="entr" presetSubtype="0" fill="hold" nodeType="withEffect">
                                   <p:stCondLst>
                                     <p:cond delay="0"/>
                                   </p:stCondLst>
@@ -15448,7 +15771,7 @@
                                 </p:cTn>
                               </p:par>
                               <p:par>
-                                <p:cTn id="42" presetID="10" presetClass="entr" presetSubtype="0" fill="hold" grpId="2" nodeType="withEffect">
+                                <p:cTn id="42" presetID="10" presetClass="entr" presetSubtype="0" fill="hold" nodeType="withEffect">
                                   <p:stCondLst>
                                     <p:cond delay="0"/>
                                   </p:stCondLst>
@@ -15501,7 +15824,7 @@
                             </p:stCondLst>
                             <p:childTnLst>
                               <p:par>
-                                <p:cTn id="47" presetID="10" presetClass="entr" presetSubtype="0" fill="hold" grpId="3" nodeType="clickEffect">
+                                <p:cTn id="47" presetID="10" presetClass="entr" presetSubtype="0" fill="hold" nodeType="clickEffect">
                                   <p:stCondLst>
                                     <p:cond delay="0"/>
                                   </p:stCondLst>
@@ -15536,7 +15859,7 @@
                                 </p:cTn>
                               </p:par>
                               <p:par>
-                                <p:cTn id="50" presetID="10" presetClass="entr" presetSubtype="0" fill="hold" grpId="3" nodeType="withEffect">
+                                <p:cTn id="50" presetID="10" presetClass="entr" presetSubtype="0" fill="hold" nodeType="withEffect">
                                   <p:stCondLst>
                                     <p:cond delay="0"/>
                                   </p:stCondLst>
@@ -15589,7 +15912,7 @@
                             </p:stCondLst>
                             <p:childTnLst>
                               <p:par>
-                                <p:cTn id="55" presetID="10" presetClass="entr" presetSubtype="0" fill="hold" grpId="4" nodeType="clickEffect">
+                                <p:cTn id="55" presetID="10" presetClass="entr" presetSubtype="0" fill="hold" nodeType="clickEffect">
                                   <p:stCondLst>
                                     <p:cond delay="0"/>
                                   </p:stCondLst>
@@ -15624,7 +15947,7 @@
                                 </p:cTn>
                               </p:par>
                               <p:par>
-                                <p:cTn id="58" presetID="10" presetClass="entr" presetSubtype="0" fill="hold" grpId="4" nodeType="withEffect">
+                                <p:cTn id="58" presetID="10" presetClass="entr" presetSubtype="0" fill="hold" nodeType="withEffect">
                                   <p:stCondLst>
                                     <p:cond delay="0"/>
                                   </p:stCondLst>
@@ -15677,7 +16000,7 @@
                             </p:stCondLst>
                             <p:childTnLst>
                               <p:par>
-                                <p:cTn id="63" presetID="10" presetClass="entr" presetSubtype="0" fill="hold" grpId="5" nodeType="clickEffect">
+                                <p:cTn id="63" presetID="10" presetClass="entr" presetSubtype="0" fill="hold" nodeType="clickEffect">
                                   <p:stCondLst>
                                     <p:cond delay="0"/>
                                   </p:stCondLst>
@@ -15750,6 +16073,7 @@
         <a:solidFill>
           <a:srgbClr val="F4F8FC"/>
         </a:solidFill>
+        <a:effectLst/>
       </p:bgPr>
     </p:bg>
     <p:spTree>
@@ -15785,6 +16109,13 @@
           </a:solidFill>
           <a:ln/>
         </p:spPr>
+        <p:txBody>
+          <a:bodyPr/>
+          <a:lstStyle/>
+          <a:p>
+            <a:endParaRPr lang="en-US"/>
+          </a:p>
+        </p:txBody>
       </p:sp>
       <p:sp>
         <p:nvSpPr>
@@ -15805,6 +16136,13 @@
           </a:solidFill>
           <a:ln/>
         </p:spPr>
+        <p:txBody>
+          <a:bodyPr/>
+          <a:lstStyle/>
+          <a:p>
+            <a:endParaRPr lang="en-US"/>
+          </a:p>
+        </p:txBody>
       </p:sp>
       <p:sp>
         <p:nvSpPr>
@@ -15827,11 +16165,11 @@
           <a:bodyPr wrap="square" lIns="0" tIns="0" rIns="0" bIns="0" rtlCol="0" anchor="ctr"/>
           <a:lstStyle/>
           <a:p>
-            <a:pPr indent="0" marL="0">
+            <a:pPr marL="0" indent="0">
               <a:buNone/>
             </a:pPr>
             <a:r>
-              <a:rPr lang="en-US" sz="1200" b="1" spc="300" kern="0" dirty="0">
+              <a:rPr lang="en-US" sz="1200" b="1" kern="0" spc="300" dirty="0">
                 <a:solidFill>
                   <a:srgbClr val="0284C7"/>
                 </a:solidFill>
@@ -15866,7 +16204,7 @@
           <a:bodyPr wrap="square" lIns="0" tIns="0" rIns="0" bIns="0" rtlCol="0" anchor="ctr"/>
           <a:lstStyle/>
           <a:p>
-            <a:pPr indent="0" marL="0">
+            <a:pPr marL="0" indent="0">
               <a:buNone/>
             </a:pPr>
             <a:r>
@@ -15905,7 +16243,7 @@
           <a:bodyPr wrap="square" lIns="0" tIns="0" rIns="0" bIns="0" rtlCol="0" anchor="ctr"/>
           <a:lstStyle/>
           <a:p>
-            <a:pPr indent="0" marL="0">
+            <a:pPr marL="0" indent="0">
               <a:buNone/>
             </a:pPr>
             <a:r>
@@ -15949,6 +16287,13 @@
             <a:prstDash val="solid"/>
           </a:ln>
         </p:spPr>
+        <p:txBody>
+          <a:bodyPr/>
+          <a:lstStyle/>
+          <a:p>
+            <a:endParaRPr lang="en-US"/>
+          </a:p>
+        </p:txBody>
       </p:sp>
       <p:sp>
         <p:nvSpPr>
@@ -15969,17 +16314,24 @@
           </a:solidFill>
           <a:ln/>
         </p:spPr>
+        <p:txBody>
+          <a:bodyPr/>
+          <a:lstStyle/>
+          <a:p>
+            <a:endParaRPr lang="en-US"/>
+          </a:p>
+        </p:txBody>
       </p:sp>
       <p:pic>
         <p:nvPicPr>
-          <p:cNvPr id="9" name="Image 0" descr="preencoded.png">    </p:cNvPr>
+          <p:cNvPr id="9" name="Image 0" descr="preencoded.png"/>
           <p:cNvPicPr>
             <a:picLocks noChangeAspect="1"/>
           </p:cNvPicPr>
           <p:nvPr/>
         </p:nvPicPr>
         <p:blipFill>
-          <a:blip r:embed="rId1"/>
+          <a:blip r:embed="rId3"/>
           <a:stretch>
             <a:fillRect/>
           </a:stretch>
@@ -16015,7 +16367,7 @@
           <a:bodyPr wrap="square" lIns="0" tIns="0" rIns="0" bIns="0" rtlCol="0" anchor="ctr"/>
           <a:lstStyle/>
           <a:p>
-            <a:pPr indent="0" marL="0">
+            <a:pPr marL="0" indent="0">
               <a:lnSpc>
                 <a:spcPct val="112000"/>
               </a:lnSpc>
@@ -16032,12 +16384,6 @@
               </a:rPr>
               <a:t>“Build a blog with Flask + SQLite. Use the Superpowers workflow: </a:t>
             </a:r>
-            <a:pPr indent="0" marL="0">
-              <a:lnSpc>
-                <a:spcPct val="112000"/>
-              </a:lnSpc>
-              <a:buNone/>
-            </a:pPr>
             <a:r>
               <a:rPr lang="en-US" sz="1650" b="1" dirty="0">
                 <a:solidFill>
@@ -16049,12 +16395,6 @@
               </a:rPr>
               <a:t>brainstorm</a:t>
             </a:r>
-            <a:pPr indent="0" marL="0">
-              <a:lnSpc>
-                <a:spcPct val="112000"/>
-              </a:lnSpc>
-              <a:buNone/>
-            </a:pPr>
             <a:r>
               <a:rPr lang="en-US" sz="1650" dirty="0">
                 <a:solidFill>
@@ -16066,12 +16406,6 @@
               </a:rPr>
               <a:t> the requirements with me, write the design to </a:t>
             </a:r>
-            <a:pPr indent="0" marL="0">
-              <a:lnSpc>
-                <a:spcPct val="112000"/>
-              </a:lnSpc>
-              <a:buNone/>
-            </a:pPr>
             <a:r>
               <a:rPr lang="en-US" sz="1650" b="1" dirty="0">
                 <a:solidFill>
@@ -16083,12 +16417,6 @@
               </a:rPr>
               <a:t>task-11.md</a:t>
             </a:r>
-            <a:pPr indent="0" marL="0">
-              <a:lnSpc>
-                <a:spcPct val="112000"/>
-              </a:lnSpc>
-              <a:buNone/>
-            </a:pPr>
             <a:r>
               <a:rPr lang="en-US" sz="1650" dirty="0">
                 <a:solidFill>
@@ -16100,12 +16428,6 @@
               </a:rPr>
               <a:t>, then </a:t>
             </a:r>
-            <a:pPr indent="0" marL="0">
-              <a:lnSpc>
-                <a:spcPct val="112000"/>
-              </a:lnSpc>
-              <a:buNone/>
-            </a:pPr>
             <a:r>
               <a:rPr lang="en-US" sz="1650" b="1" dirty="0">
                 <a:solidFill>
@@ -16117,12 +16439,6 @@
               </a:rPr>
               <a:t>build it task by task with tests first</a:t>
             </a:r>
-            <a:pPr indent="0" marL="0">
-              <a:lnSpc>
-                <a:spcPct val="112000"/>
-              </a:lnSpc>
-              <a:buNone/>
-            </a:pPr>
             <a:r>
               <a:rPr lang="en-US" sz="1650" dirty="0">
                 <a:solidFill>
@@ -16134,12 +16450,6 @@
               </a:rPr>
               <a:t>. Features: sign up / log in / log out, write/edit/delete posts, a home list, post pages, comments, likes, and a light/dark theme. </a:t>
             </a:r>
-            <a:pPr indent="0" marL="0">
-              <a:lnSpc>
-                <a:spcPct val="112000"/>
-              </a:lnSpc>
-              <a:buNone/>
-            </a:pPr>
             <a:r>
               <a:rPr lang="en-US" sz="1650" b="1" dirty="0">
                 <a:solidFill>
@@ -16151,12 +16461,6 @@
               </a:rPr>
               <a:t>Commit after each passing test</a:t>
             </a:r>
-            <a:pPr indent="0" marL="0">
-              <a:lnSpc>
-                <a:spcPct val="112000"/>
-              </a:lnSpc>
-              <a:buNone/>
-            </a:pPr>
             <a:r>
               <a:rPr lang="en-US" sz="1650" dirty="0">
                 <a:solidFill>
@@ -16193,7 +16497,7 @@
           <a:bodyPr wrap="square" lIns="0" tIns="0" rIns="0" bIns="0" rtlCol="0" anchor="ctr"/>
           <a:lstStyle/>
           <a:p>
-            <a:pPr algn="ctr" indent="0" marL="0">
+            <a:pPr marL="0" indent="0" algn="ctr">
               <a:buNone/>
             </a:pPr>
             <a:r>
@@ -16207,9 +16511,6 @@
               </a:rPr>
               <a:t>Then just answer its questions and </a:t>
             </a:r>
-            <a:pPr algn="ctr" indent="0" marL="0">
-              <a:buNone/>
-            </a:pPr>
             <a:r>
               <a:rPr lang="en-US" sz="1600" b="1" dirty="0">
                 <a:solidFill>
@@ -16246,7 +16547,7 @@
           <a:bodyPr wrap="square" lIns="0" tIns="0" rIns="0" bIns="0" rtlCol="0" anchor="ctr"/>
           <a:lstStyle/>
           <a:p>
-            <a:pPr algn="l" indent="0" marL="0">
+            <a:pPr marL="0" indent="0" algn="l">
               <a:buNone/>
             </a:pPr>
             <a:r>
@@ -16290,7 +16591,7 @@
                             </p:stCondLst>
                             <p:childTnLst>
                               <p:par>
-                                <p:cTn id="5" presetID="10" presetClass="entr" presetSubtype="0" fill="hold" grpId="0" nodeType="clickEffect">
+                                <p:cTn id="5" presetID="10" presetClass="entr" presetSubtype="0" fill="hold" nodeType="clickEffect">
                                   <p:stCondLst>
                                     <p:cond delay="0"/>
                                   </p:stCondLst>
@@ -16343,7 +16644,7 @@
                             </p:stCondLst>
                             <p:childTnLst>
                               <p:par>
-                                <p:cTn id="10" presetID="10" presetClass="entr" presetSubtype="0" fill="hold" grpId="1" nodeType="clickEffect">
+                                <p:cTn id="10" presetID="10" presetClass="entr" presetSubtype="0" fill="hold" nodeType="clickEffect">
                                   <p:stCondLst>
                                     <p:cond delay="0"/>
                                   </p:stCondLst>
@@ -16378,7 +16679,7 @@
                                 </p:cTn>
                               </p:par>
                               <p:par>
-                                <p:cTn id="13" presetID="10" presetClass="entr" presetSubtype="0" fill="hold" grpId="1" nodeType="withEffect">
+                                <p:cTn id="13" presetID="10" presetClass="entr" presetSubtype="0" fill="hold" nodeType="withEffect">
                                   <p:stCondLst>
                                     <p:cond delay="0"/>
                                   </p:stCondLst>
@@ -16413,7 +16714,7 @@
                                 </p:cTn>
                               </p:par>
                               <p:par>
-                                <p:cTn id="16" presetID="10" presetClass="entr" presetSubtype="0" fill="hold" grpId="1" nodeType="withEffect">
+                                <p:cTn id="16" presetID="10" presetClass="entr" presetSubtype="0" fill="hold" nodeType="withEffect">
                                   <p:stCondLst>
                                     <p:cond delay="0"/>
                                   </p:stCondLst>
@@ -16448,7 +16749,7 @@
                                 </p:cTn>
                               </p:par>
                               <p:par>
-                                <p:cTn id="19" presetID="10" presetClass="entr" presetSubtype="0" fill="hold" grpId="1" nodeType="withEffect">
+                                <p:cTn id="19" presetID="10" presetClass="entr" presetSubtype="0" fill="hold" nodeType="withEffect">
                                   <p:stCondLst>
                                     <p:cond delay="0"/>
                                   </p:stCondLst>
@@ -16501,7 +16802,7 @@
                             </p:stCondLst>
                             <p:childTnLst>
                               <p:par>
-                                <p:cTn id="24" presetID="10" presetClass="entr" presetSubtype="0" fill="hold" grpId="2" nodeType="clickEffect">
+                                <p:cTn id="24" presetID="10" presetClass="entr" presetSubtype="0" fill="hold" nodeType="clickEffect">
                                   <p:stCondLst>
                                     <p:cond delay="0"/>
                                   </p:stCondLst>
@@ -16574,6 +16875,7 @@
         <a:solidFill>
           <a:srgbClr val="F4F8FC"/>
         </a:solidFill>
+        <a:effectLst/>
       </p:bgPr>
     </p:bg>
     <p:spTree>
@@ -16611,7 +16913,7 @@
           <a:bodyPr wrap="square" lIns="0" tIns="0" rIns="0" bIns="0" rtlCol="0" anchor="ctr"/>
           <a:lstStyle/>
           <a:p>
-            <a:pPr algn="r" indent="0" marL="0">
+            <a:pPr marL="0" indent="0" algn="r">
               <a:buNone/>
             </a:pPr>
             <a:r>
@@ -16648,17 +16950,24 @@
           </a:solidFill>
           <a:ln/>
         </p:spPr>
+        <p:txBody>
+          <a:bodyPr/>
+          <a:lstStyle/>
+          <a:p>
+            <a:endParaRPr lang="en-US"/>
+          </a:p>
+        </p:txBody>
       </p:sp>
       <p:pic>
         <p:nvPicPr>
-          <p:cNvPr id="4" name="Image 0" descr="preencoded.png">    </p:cNvPr>
+          <p:cNvPr id="4" name="Image 0" descr="preencoded.png"/>
           <p:cNvPicPr>
             <a:picLocks noChangeAspect="1"/>
           </p:cNvPicPr>
           <p:nvPr/>
         </p:nvPicPr>
         <p:blipFill>
-          <a:blip r:embed="rId1"/>
+          <a:blip r:embed="rId3"/>
           <a:stretch>
             <a:fillRect/>
           </a:stretch>
@@ -16694,7 +17003,7 @@
           <a:bodyPr wrap="square" lIns="0" tIns="0" rIns="0" bIns="0" rtlCol="0" anchor="ctr"/>
           <a:lstStyle/>
           <a:p>
-            <a:pPr indent="0" marL="0">
+            <a:pPr marL="0" indent="0">
               <a:buNone/>
             </a:pPr>
             <a:r>
@@ -16733,7 +17042,7 @@
           <a:bodyPr wrap="square" lIns="0" tIns="0" rIns="0" bIns="0" rtlCol="0" anchor="ctr"/>
           <a:lstStyle/>
           <a:p>
-            <a:pPr indent="0" marL="0">
+            <a:pPr marL="0" indent="0">
               <a:buNone/>
             </a:pPr>
             <a:r>
@@ -16747,9 +17056,6 @@
               </a:rPr>
               <a:t>Plan it.  Test it.  </a:t>
             </a:r>
-            <a:pPr indent="0" marL="0">
-              <a:buNone/>
-            </a:pPr>
             <a:r>
               <a:rPr lang="en-US" sz="2200" b="1" dirty="0">
                 <a:solidFill>
@@ -16784,6 +17090,13 @@
           </a:solidFill>
           <a:ln/>
         </p:spPr>
+        <p:txBody>
+          <a:bodyPr/>
+          <a:lstStyle/>
+          <a:p>
+            <a:endParaRPr lang="en-US"/>
+          </a:p>
+        </p:txBody>
       </p:sp>
       <p:sp>
         <p:nvSpPr>
@@ -16804,6 +17117,13 @@
           </a:solidFill>
           <a:ln/>
         </p:spPr>
+        <p:txBody>
+          <a:bodyPr/>
+          <a:lstStyle/>
+          <a:p>
+            <a:endParaRPr lang="en-US"/>
+          </a:p>
+        </p:txBody>
       </p:sp>
       <p:sp>
         <p:nvSpPr>
@@ -16826,7 +17146,7 @@
           <a:bodyPr wrap="square" lIns="0" tIns="0" rIns="0" bIns="0" rtlCol="0" anchor="ctr"/>
           <a:lstStyle/>
           <a:p>
-            <a:pPr indent="0" marL="0">
+            <a:pPr marL="0" indent="0">
               <a:buNone/>
             </a:pPr>
             <a:r>
@@ -16860,6 +17180,7 @@
         <a:solidFill>
           <a:srgbClr val="F4F8FC"/>
         </a:solidFill>
+        <a:effectLst/>
       </p:bgPr>
     </p:bg>
     <p:spTree>
@@ -16895,6 +17216,13 @@
           </a:solidFill>
           <a:ln/>
         </p:spPr>
+        <p:txBody>
+          <a:bodyPr/>
+          <a:lstStyle/>
+          <a:p>
+            <a:endParaRPr lang="en-US"/>
+          </a:p>
+        </p:txBody>
       </p:sp>
       <p:sp>
         <p:nvSpPr>
@@ -16915,6 +17243,13 @@
           </a:solidFill>
           <a:ln/>
         </p:spPr>
+        <p:txBody>
+          <a:bodyPr/>
+          <a:lstStyle/>
+          <a:p>
+            <a:endParaRPr lang="en-US"/>
+          </a:p>
+        </p:txBody>
       </p:sp>
       <p:sp>
         <p:nvSpPr>
@@ -16937,11 +17272,11 @@
           <a:bodyPr wrap="square" lIns="0" tIns="0" rIns="0" bIns="0" rtlCol="0" anchor="ctr"/>
           <a:lstStyle/>
           <a:p>
-            <a:pPr indent="0" marL="0">
+            <a:pPr marL="0" indent="0">
               <a:buNone/>
             </a:pPr>
             <a:r>
-              <a:rPr lang="en-US" sz="1200" b="1" spc="300" kern="0" dirty="0">
+              <a:rPr lang="en-US" sz="1200" b="1" kern="0" spc="300" dirty="0">
                 <a:solidFill>
                   <a:srgbClr val="0284C7"/>
                 </a:solidFill>
@@ -16976,7 +17311,7 @@
           <a:bodyPr wrap="square" lIns="0" tIns="0" rIns="0" bIns="0" rtlCol="0" anchor="ctr"/>
           <a:lstStyle/>
           <a:p>
-            <a:pPr indent="0" marL="0">
+            <a:pPr marL="0" indent="0">
               <a:buNone/>
             </a:pPr>
             <a:r>
@@ -17020,13 +17355,20 @@
             <a:prstDash val="solid"/>
           </a:ln>
           <a:effectLst>
-            <a:outerShdw sx="100000" sy="100000" kx="0" ky="0" algn="bl" rotWithShape="0" blurRad="88900" dist="25400" dir="5400000">
+            <a:outerShdw blurRad="88900" dist="25400" dir="5400000" algn="bl" rotWithShape="0">
               <a:srgbClr val="8FA3BC">
                 <a:alpha val="30000"/>
               </a:srgbClr>
             </a:outerShdw>
           </a:effectLst>
         </p:spPr>
+        <p:txBody>
+          <a:bodyPr/>
+          <a:lstStyle/>
+          <a:p>
+            <a:endParaRPr lang="en-US"/>
+          </a:p>
+        </p:txBody>
       </p:sp>
       <p:sp>
         <p:nvSpPr>
@@ -17047,17 +17389,24 @@
           </a:solidFill>
           <a:ln/>
         </p:spPr>
+        <p:txBody>
+          <a:bodyPr/>
+          <a:lstStyle/>
+          <a:p>
+            <a:endParaRPr lang="en-US"/>
+          </a:p>
+        </p:txBody>
       </p:sp>
       <p:pic>
         <p:nvPicPr>
-          <p:cNvPr id="8" name="Image 0" descr="preencoded.png">    </p:cNvPr>
+          <p:cNvPr id="8" name="Image 0" descr="preencoded.png"/>
           <p:cNvPicPr>
             <a:picLocks noChangeAspect="1"/>
           </p:cNvPicPr>
           <p:nvPr/>
         </p:nvPicPr>
         <p:blipFill>
-          <a:blip r:embed="rId1"/>
+          <a:blip r:embed="rId3"/>
           <a:stretch>
             <a:fillRect/>
           </a:stretch>
@@ -17093,7 +17442,7 @@
           <a:bodyPr wrap="square" lIns="0" tIns="0" rIns="0" bIns="0" rtlCol="0" anchor="ctr"/>
           <a:lstStyle/>
           <a:p>
-            <a:pPr indent="0" marL="0">
+            <a:pPr marL="0" indent="0">
               <a:buNone/>
             </a:pPr>
             <a:r>
@@ -17264,13 +17613,20 @@
             <a:prstDash val="solid"/>
           </a:ln>
           <a:effectLst>
-            <a:outerShdw sx="100000" sy="100000" kx="0" ky="0" algn="bl" rotWithShape="0" blurRad="88900" dist="25400" dir="5400000">
+            <a:outerShdw blurRad="88900" dist="25400" dir="5400000" algn="bl" rotWithShape="0">
               <a:srgbClr val="8FA3BC">
                 <a:alpha val="30000"/>
               </a:srgbClr>
             </a:outerShdw>
           </a:effectLst>
         </p:spPr>
+        <p:txBody>
+          <a:bodyPr/>
+          <a:lstStyle/>
+          <a:p>
+            <a:endParaRPr lang="en-US"/>
+          </a:p>
+        </p:txBody>
       </p:sp>
       <p:sp>
         <p:nvSpPr>
@@ -17291,17 +17647,24 @@
           </a:solidFill>
           <a:ln/>
         </p:spPr>
+        <p:txBody>
+          <a:bodyPr/>
+          <a:lstStyle/>
+          <a:p>
+            <a:endParaRPr lang="en-US"/>
+          </a:p>
+        </p:txBody>
       </p:sp>
       <p:pic>
         <p:nvPicPr>
-          <p:cNvPr id="13" name="Image 1" descr="preencoded.png">    </p:cNvPr>
+          <p:cNvPr id="13" name="Image 1" descr="preencoded.png"/>
           <p:cNvPicPr>
             <a:picLocks noChangeAspect="1"/>
           </p:cNvPicPr>
           <p:nvPr/>
         </p:nvPicPr>
         <p:blipFill>
-          <a:blip r:embed="rId2"/>
+          <a:blip r:embed="rId4"/>
           <a:stretch>
             <a:fillRect/>
           </a:stretch>
@@ -17337,7 +17700,7 @@
           <a:bodyPr wrap="square" lIns="0" tIns="0" rIns="0" bIns="0" rtlCol="0" anchor="ctr"/>
           <a:lstStyle/>
           <a:p>
-            <a:pPr indent="0" marL="0">
+            <a:pPr marL="0" indent="0">
               <a:buNone/>
             </a:pPr>
             <a:r>
@@ -17503,7 +17866,7 @@
           <a:bodyPr wrap="square" lIns="0" tIns="0" rIns="0" bIns="0" rtlCol="0" anchor="ctr"/>
           <a:lstStyle/>
           <a:p>
-            <a:pPr algn="l" indent="0" marL="0">
+            <a:pPr marL="0" indent="0" algn="l">
               <a:buNone/>
             </a:pPr>
             <a:r>
@@ -17547,7 +17910,7 @@
                             </p:stCondLst>
                             <p:childTnLst>
                               <p:par>
-                                <p:cTn id="5" presetID="10" presetClass="entr" presetSubtype="0" fill="hold" grpId="0" nodeType="clickEffect">
+                                <p:cTn id="5" presetID="10" presetClass="entr" presetSubtype="0" fill="hold" nodeType="clickEffect">
                                   <p:stCondLst>
                                     <p:cond delay="0"/>
                                   </p:stCondLst>
@@ -17582,7 +17945,7 @@
                                 </p:cTn>
                               </p:par>
                               <p:par>
-                                <p:cTn id="8" presetID="10" presetClass="entr" presetSubtype="0" fill="hold" grpId="0" nodeType="withEffect">
+                                <p:cTn id="8" presetID="10" presetClass="entr" presetSubtype="0" fill="hold" nodeType="withEffect">
                                   <p:stCondLst>
                                     <p:cond delay="0"/>
                                   </p:stCondLst>
@@ -17617,7 +17980,7 @@
                                 </p:cTn>
                               </p:par>
                               <p:par>
-                                <p:cTn id="11" presetID="10" presetClass="entr" presetSubtype="0" fill="hold" grpId="0" nodeType="withEffect">
+                                <p:cTn id="11" presetID="10" presetClass="entr" presetSubtype="0" fill="hold" nodeType="withEffect">
                                   <p:stCondLst>
                                     <p:cond delay="0"/>
                                   </p:stCondLst>
@@ -17652,7 +18015,7 @@
                                 </p:cTn>
                               </p:par>
                               <p:par>
-                                <p:cTn id="14" presetID="10" presetClass="entr" presetSubtype="0" fill="hold" grpId="0" nodeType="withEffect">
+                                <p:cTn id="14" presetID="10" presetClass="entr" presetSubtype="0" fill="hold" nodeType="withEffect">
                                   <p:stCondLst>
                                     <p:cond delay="0"/>
                                   </p:stCondLst>
@@ -17687,7 +18050,7 @@
                                 </p:cTn>
                               </p:par>
                               <p:par>
-                                <p:cTn id="17" presetID="10" presetClass="entr" presetSubtype="0" fill="hold" grpId="0" nodeType="withEffect">
+                                <p:cTn id="17" presetID="10" presetClass="entr" presetSubtype="0" fill="hold" nodeType="withEffect">
                                   <p:stCondLst>
                                     <p:cond delay="0"/>
                                   </p:stCondLst>
@@ -17740,7 +18103,7 @@
                             </p:stCondLst>
                             <p:childTnLst>
                               <p:par>
-                                <p:cTn id="22" presetID="10" presetClass="entr" presetSubtype="0" fill="hold" grpId="1" nodeType="clickEffect">
+                                <p:cTn id="22" presetID="10" presetClass="entr" presetSubtype="0" fill="hold" nodeType="clickEffect">
                                   <p:stCondLst>
                                     <p:cond delay="0"/>
                                   </p:stCondLst>
@@ -17775,7 +18138,7 @@
                                 </p:cTn>
                               </p:par>
                               <p:par>
-                                <p:cTn id="25" presetID="10" presetClass="entr" presetSubtype="0" fill="hold" grpId="1" nodeType="withEffect">
+                                <p:cTn id="25" presetID="10" presetClass="entr" presetSubtype="0" fill="hold" nodeType="withEffect">
                                   <p:stCondLst>
                                     <p:cond delay="0"/>
                                   </p:stCondLst>
@@ -17810,7 +18173,7 @@
                                 </p:cTn>
                               </p:par>
                               <p:par>
-                                <p:cTn id="28" presetID="10" presetClass="entr" presetSubtype="0" fill="hold" grpId="1" nodeType="withEffect">
+                                <p:cTn id="28" presetID="10" presetClass="entr" presetSubtype="0" fill="hold" nodeType="withEffect">
                                   <p:stCondLst>
                                     <p:cond delay="0"/>
                                   </p:stCondLst>
@@ -17845,7 +18208,7 @@
                                 </p:cTn>
                               </p:par>
                               <p:par>
-                                <p:cTn id="31" presetID="10" presetClass="entr" presetSubtype="0" fill="hold" grpId="1" nodeType="withEffect">
+                                <p:cTn id="31" presetID="10" presetClass="entr" presetSubtype="0" fill="hold" nodeType="withEffect">
                                   <p:stCondLst>
                                     <p:cond delay="0"/>
                                   </p:stCondLst>
@@ -17880,7 +18243,7 @@
                                 </p:cTn>
                               </p:par>
                               <p:par>
-                                <p:cTn id="34" presetID="10" presetClass="entr" presetSubtype="0" fill="hold" grpId="1" nodeType="withEffect">
+                                <p:cTn id="34" presetID="10" presetClass="entr" presetSubtype="0" fill="hold" nodeType="withEffect">
                                   <p:stCondLst>
                                     <p:cond delay="0"/>
                                   </p:stCondLst>
@@ -17953,6 +18316,7 @@
         <a:solidFill>
           <a:srgbClr val="F4F8FC"/>
         </a:solidFill>
+        <a:effectLst/>
       </p:bgPr>
     </p:bg>
     <p:spTree>
@@ -17988,6 +18352,13 @@
           </a:solidFill>
           <a:ln/>
         </p:spPr>
+        <p:txBody>
+          <a:bodyPr/>
+          <a:lstStyle/>
+          <a:p>
+            <a:endParaRPr lang="en-US"/>
+          </a:p>
+        </p:txBody>
       </p:sp>
       <p:sp>
         <p:nvSpPr>
@@ -18008,6 +18379,13 @@
           </a:solidFill>
           <a:ln/>
         </p:spPr>
+        <p:txBody>
+          <a:bodyPr/>
+          <a:lstStyle/>
+          <a:p>
+            <a:endParaRPr lang="en-US"/>
+          </a:p>
+        </p:txBody>
       </p:sp>
       <p:sp>
         <p:nvSpPr>
@@ -18030,11 +18408,11 @@
           <a:bodyPr wrap="square" lIns="0" tIns="0" rIns="0" bIns="0" rtlCol="0" anchor="ctr"/>
           <a:lstStyle/>
           <a:p>
-            <a:pPr indent="0" marL="0">
+            <a:pPr marL="0" indent="0">
               <a:buNone/>
             </a:pPr>
             <a:r>
-              <a:rPr lang="en-US" sz="1200" b="1" spc="300" kern="0" dirty="0">
+              <a:rPr lang="en-US" sz="1200" b="1" kern="0" spc="300" dirty="0">
                 <a:solidFill>
                   <a:srgbClr val="0284C7"/>
                 </a:solidFill>
@@ -18069,7 +18447,7 @@
           <a:bodyPr wrap="square" lIns="0" tIns="0" rIns="0" bIns="0" rtlCol="0" anchor="ctr"/>
           <a:lstStyle/>
           <a:p>
-            <a:pPr indent="0" marL="0">
+            <a:pPr marL="0" indent="0">
               <a:buNone/>
             </a:pPr>
             <a:r>
@@ -18113,13 +18491,20 @@
             <a:prstDash val="solid"/>
           </a:ln>
           <a:effectLst>
-            <a:outerShdw sx="100000" sy="100000" kx="0" ky="0" algn="bl" rotWithShape="0" blurRad="88900" dist="25400" dir="5400000">
+            <a:outerShdw blurRad="88900" dist="25400" dir="5400000" algn="bl" rotWithShape="0">
               <a:srgbClr val="8FA3BC">
                 <a:alpha val="30000"/>
               </a:srgbClr>
             </a:outerShdw>
           </a:effectLst>
         </p:spPr>
+        <p:txBody>
+          <a:bodyPr/>
+          <a:lstStyle/>
+          <a:p>
+            <a:endParaRPr lang="en-US"/>
+          </a:p>
+        </p:txBody>
       </p:sp>
       <p:sp>
         <p:nvSpPr>
@@ -18140,17 +18525,24 @@
           </a:solidFill>
           <a:ln/>
         </p:spPr>
+        <p:txBody>
+          <a:bodyPr/>
+          <a:lstStyle/>
+          <a:p>
+            <a:endParaRPr lang="en-US"/>
+          </a:p>
+        </p:txBody>
       </p:sp>
       <p:pic>
         <p:nvPicPr>
-          <p:cNvPr id="8" name="Image 0" descr="preencoded.png">    </p:cNvPr>
+          <p:cNvPr id="8" name="Image 0" descr="preencoded.png"/>
           <p:cNvPicPr>
             <a:picLocks noChangeAspect="1"/>
           </p:cNvPicPr>
           <p:nvPr/>
         </p:nvPicPr>
         <p:blipFill>
-          <a:blip r:embed="rId1"/>
+          <a:blip r:embed="rId3"/>
           <a:stretch>
             <a:fillRect/>
           </a:stretch>
@@ -18186,7 +18578,7 @@
           <a:bodyPr wrap="square" lIns="0" tIns="0" rIns="0" bIns="0" rtlCol="0" anchor="ctr"/>
           <a:lstStyle/>
           <a:p>
-            <a:pPr algn="ctr" indent="0" marL="0">
+            <a:pPr marL="0" indent="0" algn="ctr">
               <a:buNone/>
             </a:pPr>
             <a:r>
@@ -18203,7 +18595,7 @@
             <a:endParaRPr lang="en-US" sz="2200" dirty="0"/>
           </a:p>
           <a:p>
-            <a:pPr algn="ctr" indent="0" marL="0">
+            <a:pPr marL="0" indent="0" algn="ctr">
               <a:buNone/>
             </a:pPr>
             <a:r>
@@ -18247,13 +18639,20 @@
             <a:prstDash val="solid"/>
           </a:ln>
           <a:effectLst>
-            <a:outerShdw sx="100000" sy="100000" kx="0" ky="0" algn="bl" rotWithShape="0" blurRad="88900" dist="25400" dir="5400000">
+            <a:outerShdw blurRad="88900" dist="25400" dir="5400000" algn="bl" rotWithShape="0">
               <a:srgbClr val="8FA3BC">
                 <a:alpha val="30000"/>
               </a:srgbClr>
             </a:outerShdw>
           </a:effectLst>
         </p:spPr>
+        <p:txBody>
+          <a:bodyPr/>
+          <a:lstStyle/>
+          <a:p>
+            <a:endParaRPr lang="en-US"/>
+          </a:p>
+        </p:txBody>
       </p:sp>
       <p:sp>
         <p:nvSpPr>
@@ -18274,17 +18673,24 @@
           </a:solidFill>
           <a:ln/>
         </p:spPr>
+        <p:txBody>
+          <a:bodyPr/>
+          <a:lstStyle/>
+          <a:p>
+            <a:endParaRPr lang="en-US"/>
+          </a:p>
+        </p:txBody>
       </p:sp>
       <p:pic>
         <p:nvPicPr>
-          <p:cNvPr id="12" name="Image 1" descr="preencoded.png">    </p:cNvPr>
+          <p:cNvPr id="12" name="Image 1" descr="preencoded.png"/>
           <p:cNvPicPr>
             <a:picLocks noChangeAspect="1"/>
           </p:cNvPicPr>
           <p:nvPr/>
         </p:nvPicPr>
         <p:blipFill>
-          <a:blip r:embed="rId2"/>
+          <a:blip r:embed="rId4"/>
           <a:stretch>
             <a:fillRect/>
           </a:stretch>
@@ -18320,7 +18726,7 @@
           <a:bodyPr wrap="square" lIns="0" tIns="0" rIns="0" bIns="0" rtlCol="0" anchor="ctr"/>
           <a:lstStyle/>
           <a:p>
-            <a:pPr indent="0" marL="0">
+            <a:pPr marL="0" indent="0">
               <a:buNone/>
             </a:pPr>
             <a:r>
@@ -18359,7 +18765,7 @@
           <a:bodyPr wrap="square" lIns="0" tIns="0" rIns="0" bIns="0" rtlCol="0" anchor="ctr"/>
           <a:lstStyle/>
           <a:p>
-            <a:pPr indent="0" marL="0">
+            <a:pPr marL="0" indent="0">
               <a:buNone/>
             </a:pPr>
             <a:r>
@@ -18403,13 +18809,20 @@
             <a:prstDash val="solid"/>
           </a:ln>
           <a:effectLst>
-            <a:outerShdw sx="100000" sy="100000" kx="0" ky="0" algn="bl" rotWithShape="0" blurRad="88900" dist="25400" dir="5400000">
+            <a:outerShdw blurRad="88900" dist="25400" dir="5400000" algn="bl" rotWithShape="0">
               <a:srgbClr val="8FA3BC">
                 <a:alpha val="30000"/>
               </a:srgbClr>
             </a:outerShdw>
           </a:effectLst>
         </p:spPr>
+        <p:txBody>
+          <a:bodyPr/>
+          <a:lstStyle/>
+          <a:p>
+            <a:endParaRPr lang="en-US"/>
+          </a:p>
+        </p:txBody>
       </p:sp>
       <p:sp>
         <p:nvSpPr>
@@ -18430,17 +18843,24 @@
           </a:solidFill>
           <a:ln/>
         </p:spPr>
+        <p:txBody>
+          <a:bodyPr/>
+          <a:lstStyle/>
+          <a:p>
+            <a:endParaRPr lang="en-US"/>
+          </a:p>
+        </p:txBody>
       </p:sp>
       <p:pic>
         <p:nvPicPr>
-          <p:cNvPr id="17" name="Image 2" descr="preencoded.png">    </p:cNvPr>
+          <p:cNvPr id="17" name="Image 2" descr="preencoded.png"/>
           <p:cNvPicPr>
             <a:picLocks noChangeAspect="1"/>
           </p:cNvPicPr>
           <p:nvPr/>
         </p:nvPicPr>
         <p:blipFill>
-          <a:blip r:embed="rId3"/>
+          <a:blip r:embed="rId5"/>
           <a:stretch>
             <a:fillRect/>
           </a:stretch>
@@ -18476,7 +18896,7 @@
           <a:bodyPr wrap="square" lIns="0" tIns="0" rIns="0" bIns="0" rtlCol="0" anchor="ctr"/>
           <a:lstStyle/>
           <a:p>
-            <a:pPr indent="0" marL="0">
+            <a:pPr marL="0" indent="0">
               <a:buNone/>
             </a:pPr>
             <a:r>
@@ -18515,7 +18935,7 @@
           <a:bodyPr wrap="square" lIns="0" tIns="0" rIns="0" bIns="0" rtlCol="0" anchor="ctr"/>
           <a:lstStyle/>
           <a:p>
-            <a:pPr indent="0" marL="0">
+            <a:pPr marL="0" indent="0">
               <a:buNone/>
             </a:pPr>
             <a:r>
@@ -18559,13 +18979,20 @@
             <a:prstDash val="solid"/>
           </a:ln>
           <a:effectLst>
-            <a:outerShdw sx="100000" sy="100000" kx="0" ky="0" algn="bl" rotWithShape="0" blurRad="88900" dist="25400" dir="5400000">
+            <a:outerShdw blurRad="88900" dist="25400" dir="5400000" algn="bl" rotWithShape="0">
               <a:srgbClr val="8FA3BC">
                 <a:alpha val="30000"/>
               </a:srgbClr>
             </a:outerShdw>
           </a:effectLst>
         </p:spPr>
+        <p:txBody>
+          <a:bodyPr/>
+          <a:lstStyle/>
+          <a:p>
+            <a:endParaRPr lang="en-US"/>
+          </a:p>
+        </p:txBody>
       </p:sp>
       <p:sp>
         <p:nvSpPr>
@@ -18586,17 +19013,24 @@
           </a:solidFill>
           <a:ln/>
         </p:spPr>
+        <p:txBody>
+          <a:bodyPr/>
+          <a:lstStyle/>
+          <a:p>
+            <a:endParaRPr lang="en-US"/>
+          </a:p>
+        </p:txBody>
       </p:sp>
       <p:pic>
         <p:nvPicPr>
-          <p:cNvPr id="22" name="Image 3" descr="preencoded.png">    </p:cNvPr>
+          <p:cNvPr id="22" name="Image 3" descr="preencoded.png"/>
           <p:cNvPicPr>
             <a:picLocks noChangeAspect="1"/>
           </p:cNvPicPr>
           <p:nvPr/>
         </p:nvPicPr>
         <p:blipFill>
-          <a:blip r:embed="rId4"/>
+          <a:blip r:embed="rId6"/>
           <a:stretch>
             <a:fillRect/>
           </a:stretch>
@@ -18632,7 +19066,7 @@
           <a:bodyPr wrap="square" lIns="0" tIns="0" rIns="0" bIns="0" rtlCol="0" anchor="ctr"/>
           <a:lstStyle/>
           <a:p>
-            <a:pPr indent="0" marL="0">
+            <a:pPr marL="0" indent="0">
               <a:buNone/>
             </a:pPr>
             <a:r>
@@ -18671,7 +19105,7 @@
           <a:bodyPr wrap="square" lIns="0" tIns="0" rIns="0" bIns="0" rtlCol="0" anchor="ctr"/>
           <a:lstStyle/>
           <a:p>
-            <a:pPr indent="0" marL="0">
+            <a:pPr marL="0" indent="0">
               <a:buNone/>
             </a:pPr>
             <a:r>
@@ -18710,7 +19144,7 @@
           <a:bodyPr wrap="square" lIns="0" tIns="0" rIns="0" bIns="0" rtlCol="0" anchor="ctr"/>
           <a:lstStyle/>
           <a:p>
-            <a:pPr algn="ctr" indent="0" marL="0">
+            <a:pPr marL="0" indent="0" algn="ctr">
               <a:buNone/>
             </a:pPr>
             <a:r>
@@ -18724,9 +19158,6 @@
               </a:rPr>
               <a:t>Made by Anthropic.  </a:t>
             </a:r>
-            <a:pPr algn="ctr" indent="0" marL="0">
-              <a:buNone/>
-            </a:pPr>
             <a:r>
               <a:rPr lang="en-US" sz="1400" b="1" dirty="0">
                 <a:solidFill>
@@ -18763,7 +19194,7 @@
           <a:bodyPr wrap="square" lIns="0" tIns="0" rIns="0" bIns="0" rtlCol="0" anchor="ctr"/>
           <a:lstStyle/>
           <a:p>
-            <a:pPr algn="l" indent="0" marL="0">
+            <a:pPr marL="0" indent="0" algn="l">
               <a:buNone/>
             </a:pPr>
             <a:r>
@@ -18807,7 +19238,7 @@
                             </p:stCondLst>
                             <p:childTnLst>
                               <p:par>
-                                <p:cTn id="5" presetID="10" presetClass="entr" presetSubtype="0" fill="hold" grpId="0" nodeType="clickEffect">
+                                <p:cTn id="5" presetID="10" presetClass="entr" presetSubtype="0" fill="hold" nodeType="clickEffect">
                                   <p:stCondLst>
                                     <p:cond delay="0"/>
                                   </p:stCondLst>
@@ -18842,7 +19273,7 @@
                                 </p:cTn>
                               </p:par>
                               <p:par>
-                                <p:cTn id="8" presetID="10" presetClass="entr" presetSubtype="0" fill="hold" grpId="0" nodeType="withEffect">
+                                <p:cTn id="8" presetID="10" presetClass="entr" presetSubtype="0" fill="hold" nodeType="withEffect">
                                   <p:stCondLst>
                                     <p:cond delay="0"/>
                                   </p:stCondLst>
@@ -18877,7 +19308,7 @@
                                 </p:cTn>
                               </p:par>
                               <p:par>
-                                <p:cTn id="11" presetID="10" presetClass="entr" presetSubtype="0" fill="hold" grpId="0" nodeType="withEffect">
+                                <p:cTn id="11" presetID="10" presetClass="entr" presetSubtype="0" fill="hold" nodeType="withEffect">
                                   <p:stCondLst>
                                     <p:cond delay="0"/>
                                   </p:stCondLst>
@@ -18912,7 +19343,7 @@
                                 </p:cTn>
                               </p:par>
                               <p:par>
-                                <p:cTn id="14" presetID="10" presetClass="entr" presetSubtype="0" fill="hold" grpId="0" nodeType="withEffect">
+                                <p:cTn id="14" presetID="10" presetClass="entr" presetSubtype="0" fill="hold" nodeType="withEffect">
                                   <p:stCondLst>
                                     <p:cond delay="0"/>
                                   </p:stCondLst>
@@ -18965,7 +19396,7 @@
                             </p:stCondLst>
                             <p:childTnLst>
                               <p:par>
-                                <p:cTn id="19" presetID="10" presetClass="entr" presetSubtype="0" fill="hold" grpId="1" nodeType="clickEffect">
+                                <p:cTn id="19" presetID="10" presetClass="entr" presetSubtype="0" fill="hold" nodeType="clickEffect">
                                   <p:stCondLst>
                                     <p:cond delay="0"/>
                                   </p:stCondLst>
@@ -19000,7 +19431,7 @@
                                 </p:cTn>
                               </p:par>
                               <p:par>
-                                <p:cTn id="22" presetID="10" presetClass="entr" presetSubtype="0" fill="hold" grpId="1" nodeType="withEffect">
+                                <p:cTn id="22" presetID="10" presetClass="entr" presetSubtype="0" fill="hold" nodeType="withEffect">
                                   <p:stCondLst>
                                     <p:cond delay="0"/>
                                   </p:stCondLst>
@@ -19035,7 +19466,7 @@
                                 </p:cTn>
                               </p:par>
                               <p:par>
-                                <p:cTn id="25" presetID="10" presetClass="entr" presetSubtype="0" fill="hold" grpId="1" nodeType="withEffect">
+                                <p:cTn id="25" presetID="10" presetClass="entr" presetSubtype="0" fill="hold" nodeType="withEffect">
                                   <p:stCondLst>
                                     <p:cond delay="0"/>
                                   </p:stCondLst>
@@ -19070,7 +19501,7 @@
                                 </p:cTn>
                               </p:par>
                               <p:par>
-                                <p:cTn id="28" presetID="10" presetClass="entr" presetSubtype="0" fill="hold" grpId="1" nodeType="withEffect">
+                                <p:cTn id="28" presetID="10" presetClass="entr" presetSubtype="0" fill="hold" nodeType="withEffect">
                                   <p:stCondLst>
                                     <p:cond delay="0"/>
                                   </p:stCondLst>
@@ -19105,7 +19536,7 @@
                                 </p:cTn>
                               </p:par>
                               <p:par>
-                                <p:cTn id="31" presetID="10" presetClass="entr" presetSubtype="0" fill="hold" grpId="1" nodeType="withEffect">
+                                <p:cTn id="31" presetID="10" presetClass="entr" presetSubtype="0" fill="hold" nodeType="withEffect">
                                   <p:stCondLst>
                                     <p:cond delay="0"/>
                                   </p:stCondLst>
@@ -19158,7 +19589,7 @@
                             </p:stCondLst>
                             <p:childTnLst>
                               <p:par>
-                                <p:cTn id="36" presetID="10" presetClass="entr" presetSubtype="0" fill="hold" grpId="2" nodeType="clickEffect">
+                                <p:cTn id="36" presetID="10" presetClass="entr" presetSubtype="0" fill="hold" nodeType="clickEffect">
                                   <p:stCondLst>
                                     <p:cond delay="0"/>
                                   </p:stCondLst>
@@ -19193,7 +19624,7 @@
                                 </p:cTn>
                               </p:par>
                               <p:par>
-                                <p:cTn id="39" presetID="10" presetClass="entr" presetSubtype="0" fill="hold" grpId="2" nodeType="withEffect">
+                                <p:cTn id="39" presetID="10" presetClass="entr" presetSubtype="0" fill="hold" nodeType="withEffect">
                                   <p:stCondLst>
                                     <p:cond delay="0"/>
                                   </p:stCondLst>
@@ -19228,7 +19659,7 @@
                                 </p:cTn>
                               </p:par>
                               <p:par>
-                                <p:cTn id="42" presetID="10" presetClass="entr" presetSubtype="0" fill="hold" grpId="2" nodeType="withEffect">
+                                <p:cTn id="42" presetID="10" presetClass="entr" presetSubtype="0" fill="hold" nodeType="withEffect">
                                   <p:stCondLst>
                                     <p:cond delay="0"/>
                                   </p:stCondLst>
@@ -19263,7 +19694,7 @@
                                 </p:cTn>
                               </p:par>
                               <p:par>
-                                <p:cTn id="45" presetID="10" presetClass="entr" presetSubtype="0" fill="hold" grpId="2" nodeType="withEffect">
+                                <p:cTn id="45" presetID="10" presetClass="entr" presetSubtype="0" fill="hold" nodeType="withEffect">
                                   <p:stCondLst>
                                     <p:cond delay="0"/>
                                   </p:stCondLst>
@@ -19298,7 +19729,7 @@
                                 </p:cTn>
                               </p:par>
                               <p:par>
-                                <p:cTn id="48" presetID="10" presetClass="entr" presetSubtype="0" fill="hold" grpId="2" nodeType="withEffect">
+                                <p:cTn id="48" presetID="10" presetClass="entr" presetSubtype="0" fill="hold" nodeType="withEffect">
                                   <p:stCondLst>
                                     <p:cond delay="0"/>
                                   </p:stCondLst>
@@ -19351,7 +19782,7 @@
                             </p:stCondLst>
                             <p:childTnLst>
                               <p:par>
-                                <p:cTn id="53" presetID="10" presetClass="entr" presetSubtype="0" fill="hold" grpId="3" nodeType="clickEffect">
+                                <p:cTn id="53" presetID="10" presetClass="entr" presetSubtype="0" fill="hold" nodeType="clickEffect">
                                   <p:stCondLst>
                                     <p:cond delay="0"/>
                                   </p:stCondLst>
@@ -19386,7 +19817,7 @@
                                 </p:cTn>
                               </p:par>
                               <p:par>
-                                <p:cTn id="56" presetID="10" presetClass="entr" presetSubtype="0" fill="hold" grpId="3" nodeType="withEffect">
+                                <p:cTn id="56" presetID="10" presetClass="entr" presetSubtype="0" fill="hold" nodeType="withEffect">
                                   <p:stCondLst>
                                     <p:cond delay="0"/>
                                   </p:stCondLst>
@@ -19421,7 +19852,7 @@
                                 </p:cTn>
                               </p:par>
                               <p:par>
-                                <p:cTn id="59" presetID="10" presetClass="entr" presetSubtype="0" fill="hold" grpId="3" nodeType="withEffect">
+                                <p:cTn id="59" presetID="10" presetClass="entr" presetSubtype="0" fill="hold" nodeType="withEffect">
                                   <p:stCondLst>
                                     <p:cond delay="0"/>
                                   </p:stCondLst>
@@ -19456,7 +19887,7 @@
                                 </p:cTn>
                               </p:par>
                               <p:par>
-                                <p:cTn id="62" presetID="10" presetClass="entr" presetSubtype="0" fill="hold" grpId="3" nodeType="withEffect">
+                                <p:cTn id="62" presetID="10" presetClass="entr" presetSubtype="0" fill="hold" nodeType="withEffect">
                                   <p:stCondLst>
                                     <p:cond delay="0"/>
                                   </p:stCondLst>
@@ -19491,7 +19922,7 @@
                                 </p:cTn>
                               </p:par>
                               <p:par>
-                                <p:cTn id="65" presetID="10" presetClass="entr" presetSubtype="0" fill="hold" grpId="3" nodeType="withEffect">
+                                <p:cTn id="65" presetID="10" presetClass="entr" presetSubtype="0" fill="hold" nodeType="withEffect">
                                   <p:stCondLst>
                                     <p:cond delay="0"/>
                                   </p:stCondLst>
@@ -19544,7 +19975,7 @@
                             </p:stCondLst>
                             <p:childTnLst>
                               <p:par>
-                                <p:cTn id="70" presetID="10" presetClass="entr" presetSubtype="0" fill="hold" grpId="4" nodeType="clickEffect">
+                                <p:cTn id="70" presetID="10" presetClass="entr" presetSubtype="0" fill="hold" nodeType="clickEffect">
                                   <p:stCondLst>
                                     <p:cond delay="0"/>
                                   </p:stCondLst>
@@ -19617,6 +20048,7 @@
         <a:solidFill>
           <a:srgbClr val="F4F8FC"/>
         </a:solidFill>
+        <a:effectLst/>
       </p:bgPr>
     </p:bg>
     <p:spTree>
@@ -19652,6 +20084,13 @@
           </a:solidFill>
           <a:ln/>
         </p:spPr>
+        <p:txBody>
+          <a:bodyPr/>
+          <a:lstStyle/>
+          <a:p>
+            <a:endParaRPr lang="en-US"/>
+          </a:p>
+        </p:txBody>
       </p:sp>
       <p:sp>
         <p:nvSpPr>
@@ -19672,6 +20111,13 @@
           </a:solidFill>
           <a:ln/>
         </p:spPr>
+        <p:txBody>
+          <a:bodyPr/>
+          <a:lstStyle/>
+          <a:p>
+            <a:endParaRPr lang="en-US"/>
+          </a:p>
+        </p:txBody>
       </p:sp>
       <p:sp>
         <p:nvSpPr>
@@ -19694,11 +20140,11 @@
           <a:bodyPr wrap="square" lIns="0" tIns="0" rIns="0" bIns="0" rtlCol="0" anchor="ctr"/>
           <a:lstStyle/>
           <a:p>
-            <a:pPr indent="0" marL="0">
+            <a:pPr marL="0" indent="0">
               <a:buNone/>
             </a:pPr>
             <a:r>
-              <a:rPr lang="en-US" sz="1200" b="1" spc="300" kern="0" dirty="0">
+              <a:rPr lang="en-US" sz="1200" b="1" kern="0" spc="300" dirty="0">
                 <a:solidFill>
                   <a:srgbClr val="0284C7"/>
                 </a:solidFill>
@@ -19733,7 +20179,7 @@
           <a:bodyPr wrap="square" lIns="0" tIns="0" rIns="0" bIns="0" rtlCol="0" anchor="ctr"/>
           <a:lstStyle/>
           <a:p>
-            <a:pPr indent="0" marL="0">
+            <a:pPr marL="0" indent="0">
               <a:buNone/>
             </a:pPr>
             <a:r>
@@ -19777,13 +20223,20 @@
             <a:prstDash val="solid"/>
           </a:ln>
           <a:effectLst>
-            <a:outerShdw sx="100000" sy="100000" kx="0" ky="0" algn="bl" rotWithShape="0" blurRad="88900" dist="25400" dir="5400000">
+            <a:outerShdw blurRad="88900" dist="25400" dir="5400000" algn="bl" rotWithShape="0">
               <a:srgbClr val="8FA3BC">
                 <a:alpha val="30000"/>
               </a:srgbClr>
             </a:outerShdw>
           </a:effectLst>
         </p:spPr>
+        <p:txBody>
+          <a:bodyPr/>
+          <a:lstStyle/>
+          <a:p>
+            <a:endParaRPr lang="en-US"/>
+          </a:p>
+        </p:txBody>
       </p:sp>
       <p:sp>
         <p:nvSpPr>
@@ -19804,6 +20257,13 @@
           </a:solidFill>
           <a:ln/>
         </p:spPr>
+        <p:txBody>
+          <a:bodyPr/>
+          <a:lstStyle/>
+          <a:p>
+            <a:endParaRPr lang="en-US"/>
+          </a:p>
+        </p:txBody>
       </p:sp>
       <p:sp>
         <p:nvSpPr>
@@ -19824,17 +20284,24 @@
           </a:solidFill>
           <a:ln/>
         </p:spPr>
+        <p:txBody>
+          <a:bodyPr/>
+          <a:lstStyle/>
+          <a:p>
+            <a:endParaRPr lang="en-US"/>
+          </a:p>
+        </p:txBody>
       </p:sp>
       <p:pic>
         <p:nvPicPr>
-          <p:cNvPr id="9" name="Image 0" descr="preencoded.png">    </p:cNvPr>
+          <p:cNvPr id="9" name="Image 0" descr="preencoded.png"/>
           <p:cNvPicPr>
             <a:picLocks noChangeAspect="1"/>
           </p:cNvPicPr>
           <p:nvPr/>
         </p:nvPicPr>
         <p:blipFill>
-          <a:blip r:embed="rId1"/>
+          <a:blip r:embed="rId3"/>
           <a:stretch>
             <a:fillRect/>
           </a:stretch>
@@ -19870,7 +20337,7 @@
           <a:bodyPr wrap="square" lIns="0" tIns="0" rIns="0" bIns="0" rtlCol="0" anchor="ctr"/>
           <a:lstStyle/>
           <a:p>
-            <a:pPr algn="ctr" indent="0" marL="0">
+            <a:pPr marL="0" indent="0" algn="ctr">
               <a:buNone/>
             </a:pPr>
             <a:r>
@@ -19909,7 +20376,7 @@
           <a:bodyPr wrap="square" lIns="0" tIns="0" rIns="0" bIns="0" rtlCol="0" anchor="ctr"/>
           <a:lstStyle/>
           <a:p>
-            <a:pPr algn="ctr" indent="0" marL="0">
+            <a:pPr marL="0" indent="0" algn="ctr">
               <a:buNone/>
             </a:pPr>
             <a:r>
@@ -19926,7 +20393,7 @@
             <a:endParaRPr lang="en-US" sz="1350" dirty="0"/>
           </a:p>
           <a:p>
-            <a:pPr algn="ctr" indent="0" marL="0">
+            <a:pPr marL="0" indent="0" algn="ctr">
               <a:buNone/>
             </a:pPr>
             <a:r>
@@ -19970,13 +20437,20 @@
             <a:prstDash val="solid"/>
           </a:ln>
           <a:effectLst>
-            <a:outerShdw sx="100000" sy="100000" kx="0" ky="0" algn="bl" rotWithShape="0" blurRad="88900" dist="25400" dir="5400000">
+            <a:outerShdw blurRad="88900" dist="25400" dir="5400000" algn="bl" rotWithShape="0">
               <a:srgbClr val="8FA3BC">
                 <a:alpha val="30000"/>
               </a:srgbClr>
             </a:outerShdw>
           </a:effectLst>
         </p:spPr>
+        <p:txBody>
+          <a:bodyPr/>
+          <a:lstStyle/>
+          <a:p>
+            <a:endParaRPr lang="en-US"/>
+          </a:p>
+        </p:txBody>
       </p:sp>
       <p:sp>
         <p:nvSpPr>
@@ -19997,6 +20471,13 @@
           </a:solidFill>
           <a:ln/>
         </p:spPr>
+        <p:txBody>
+          <a:bodyPr/>
+          <a:lstStyle/>
+          <a:p>
+            <a:endParaRPr lang="en-US"/>
+          </a:p>
+        </p:txBody>
       </p:sp>
       <p:sp>
         <p:nvSpPr>
@@ -20017,17 +20498,24 @@
           </a:solidFill>
           <a:ln/>
         </p:spPr>
+        <p:txBody>
+          <a:bodyPr/>
+          <a:lstStyle/>
+          <a:p>
+            <a:endParaRPr lang="en-US"/>
+          </a:p>
+        </p:txBody>
       </p:sp>
       <p:pic>
         <p:nvPicPr>
-          <p:cNvPr id="15" name="Image 1" descr="preencoded.png">    </p:cNvPr>
+          <p:cNvPr id="15" name="Image 1" descr="preencoded.png"/>
           <p:cNvPicPr>
             <a:picLocks noChangeAspect="1"/>
           </p:cNvPicPr>
           <p:nvPr/>
         </p:nvPicPr>
         <p:blipFill>
-          <a:blip r:embed="rId2"/>
+          <a:blip r:embed="rId4"/>
           <a:stretch>
             <a:fillRect/>
           </a:stretch>
@@ -20063,7 +20551,7 @@
           <a:bodyPr wrap="square" lIns="0" tIns="0" rIns="0" bIns="0" rtlCol="0" anchor="ctr"/>
           <a:lstStyle/>
           <a:p>
-            <a:pPr algn="ctr" indent="0" marL="0">
+            <a:pPr marL="0" indent="0" algn="ctr">
               <a:buNone/>
             </a:pPr>
             <a:r>
@@ -20102,7 +20590,7 @@
           <a:bodyPr wrap="square" lIns="0" tIns="0" rIns="0" bIns="0" rtlCol="0" anchor="ctr"/>
           <a:lstStyle/>
           <a:p>
-            <a:pPr algn="ctr" indent="0" marL="0">
+            <a:pPr marL="0" indent="0" algn="ctr">
               <a:buNone/>
             </a:pPr>
             <a:r>
@@ -20119,7 +20607,7 @@
             <a:endParaRPr lang="en-US" sz="1350" dirty="0"/>
           </a:p>
           <a:p>
-            <a:pPr algn="ctr" indent="0" marL="0">
+            <a:pPr marL="0" indent="0" algn="ctr">
               <a:buNone/>
             </a:pPr>
             <a:r>
@@ -20163,13 +20651,20 @@
             <a:prstDash val="solid"/>
           </a:ln>
           <a:effectLst>
-            <a:outerShdw sx="100000" sy="100000" kx="0" ky="0" algn="bl" rotWithShape="0" blurRad="88900" dist="25400" dir="5400000">
+            <a:outerShdw blurRad="88900" dist="25400" dir="5400000" algn="bl" rotWithShape="0">
               <a:srgbClr val="8FA3BC">
                 <a:alpha val="30000"/>
               </a:srgbClr>
             </a:outerShdw>
           </a:effectLst>
         </p:spPr>
+        <p:txBody>
+          <a:bodyPr/>
+          <a:lstStyle/>
+          <a:p>
+            <a:endParaRPr lang="en-US"/>
+          </a:p>
+        </p:txBody>
       </p:sp>
       <p:sp>
         <p:nvSpPr>
@@ -20190,6 +20685,13 @@
           </a:solidFill>
           <a:ln/>
         </p:spPr>
+        <p:txBody>
+          <a:bodyPr/>
+          <a:lstStyle/>
+          <a:p>
+            <a:endParaRPr lang="en-US"/>
+          </a:p>
+        </p:txBody>
       </p:sp>
       <p:sp>
         <p:nvSpPr>
@@ -20210,17 +20712,24 @@
           </a:solidFill>
           <a:ln/>
         </p:spPr>
+        <p:txBody>
+          <a:bodyPr/>
+          <a:lstStyle/>
+          <a:p>
+            <a:endParaRPr lang="en-US"/>
+          </a:p>
+        </p:txBody>
       </p:sp>
       <p:pic>
         <p:nvPicPr>
-          <p:cNvPr id="21" name="Image 2" descr="preencoded.png">    </p:cNvPr>
+          <p:cNvPr id="21" name="Image 2" descr="preencoded.png"/>
           <p:cNvPicPr>
             <a:picLocks noChangeAspect="1"/>
           </p:cNvPicPr>
           <p:nvPr/>
         </p:nvPicPr>
         <p:blipFill>
-          <a:blip r:embed="rId3"/>
+          <a:blip r:embed="rId5"/>
           <a:stretch>
             <a:fillRect/>
           </a:stretch>
@@ -20256,7 +20765,7 @@
           <a:bodyPr wrap="square" lIns="0" tIns="0" rIns="0" bIns="0" rtlCol="0" anchor="ctr"/>
           <a:lstStyle/>
           <a:p>
-            <a:pPr algn="ctr" indent="0" marL="0">
+            <a:pPr marL="0" indent="0" algn="ctr">
               <a:buNone/>
             </a:pPr>
             <a:r>
@@ -20295,7 +20804,7 @@
           <a:bodyPr wrap="square" lIns="0" tIns="0" rIns="0" bIns="0" rtlCol="0" anchor="ctr"/>
           <a:lstStyle/>
           <a:p>
-            <a:pPr algn="ctr" indent="0" marL="0">
+            <a:pPr marL="0" indent="0" algn="ctr">
               <a:buNone/>
             </a:pPr>
             <a:r>
@@ -20312,7 +20821,7 @@
             <a:endParaRPr lang="en-US" sz="1350" dirty="0"/>
           </a:p>
           <a:p>
-            <a:pPr algn="ctr" indent="0" marL="0">
+            <a:pPr marL="0" indent="0" algn="ctr">
               <a:buNone/>
             </a:pPr>
             <a:r>
@@ -20356,13 +20865,20 @@
             <a:prstDash val="solid"/>
           </a:ln>
           <a:effectLst>
-            <a:outerShdw sx="100000" sy="100000" kx="0" ky="0" algn="bl" rotWithShape="0" blurRad="88900" dist="25400" dir="5400000">
+            <a:outerShdw blurRad="88900" dist="25400" dir="5400000" algn="bl" rotWithShape="0">
               <a:srgbClr val="8FA3BC">
                 <a:alpha val="30000"/>
               </a:srgbClr>
             </a:outerShdw>
           </a:effectLst>
         </p:spPr>
+        <p:txBody>
+          <a:bodyPr/>
+          <a:lstStyle/>
+          <a:p>
+            <a:endParaRPr lang="en-US"/>
+          </a:p>
+        </p:txBody>
       </p:sp>
       <p:sp>
         <p:nvSpPr>
@@ -20383,6 +20899,13 @@
           </a:solidFill>
           <a:ln/>
         </p:spPr>
+        <p:txBody>
+          <a:bodyPr/>
+          <a:lstStyle/>
+          <a:p>
+            <a:endParaRPr lang="en-US"/>
+          </a:p>
+        </p:txBody>
       </p:sp>
       <p:sp>
         <p:nvSpPr>
@@ -20403,17 +20926,24 @@
           </a:solidFill>
           <a:ln/>
         </p:spPr>
+        <p:txBody>
+          <a:bodyPr/>
+          <a:lstStyle/>
+          <a:p>
+            <a:endParaRPr lang="en-US"/>
+          </a:p>
+        </p:txBody>
       </p:sp>
       <p:pic>
         <p:nvPicPr>
-          <p:cNvPr id="27" name="Image 3" descr="preencoded.png">    </p:cNvPr>
+          <p:cNvPr id="27" name="Image 3" descr="preencoded.png"/>
           <p:cNvPicPr>
             <a:picLocks noChangeAspect="1"/>
           </p:cNvPicPr>
           <p:nvPr/>
         </p:nvPicPr>
         <p:blipFill>
-          <a:blip r:embed="rId4"/>
+          <a:blip r:embed="rId6"/>
           <a:stretch>
             <a:fillRect/>
           </a:stretch>
@@ -20449,7 +20979,7 @@
           <a:bodyPr wrap="square" lIns="0" tIns="0" rIns="0" bIns="0" rtlCol="0" anchor="ctr"/>
           <a:lstStyle/>
           <a:p>
-            <a:pPr algn="ctr" indent="0" marL="0">
+            <a:pPr marL="0" indent="0" algn="ctr">
               <a:buNone/>
             </a:pPr>
             <a:r>
@@ -20488,7 +21018,7 @@
           <a:bodyPr wrap="square" lIns="0" tIns="0" rIns="0" bIns="0" rtlCol="0" anchor="ctr"/>
           <a:lstStyle/>
           <a:p>
-            <a:pPr algn="ctr" indent="0" marL="0">
+            <a:pPr marL="0" indent="0" algn="ctr">
               <a:buNone/>
             </a:pPr>
             <a:r>
@@ -20505,7 +21035,7 @@
             <a:endParaRPr lang="en-US" sz="1350" dirty="0"/>
           </a:p>
           <a:p>
-            <a:pPr algn="ctr" indent="0" marL="0">
+            <a:pPr marL="0" indent="0" algn="ctr">
               <a:buNone/>
             </a:pPr>
             <a:r>
@@ -20544,7 +21074,7 @@
           <a:bodyPr wrap="square" lIns="0" tIns="0" rIns="0" bIns="0" rtlCol="0" anchor="ctr"/>
           <a:lstStyle/>
           <a:p>
-            <a:pPr algn="l" indent="0" marL="0">
+            <a:pPr marL="0" indent="0" algn="l">
               <a:buNone/>
             </a:pPr>
             <a:r>
@@ -20588,7 +21118,7 @@
                             </p:stCondLst>
                             <p:childTnLst>
                               <p:par>
-                                <p:cTn id="5" presetID="10" presetClass="entr" presetSubtype="0" fill="hold" grpId="0" nodeType="clickEffect">
+                                <p:cTn id="5" presetID="10" presetClass="entr" presetSubtype="0" fill="hold" nodeType="clickEffect">
                                   <p:stCondLst>
                                     <p:cond delay="0"/>
                                   </p:stCondLst>
@@ -20623,7 +21153,7 @@
                                 </p:cTn>
                               </p:par>
                               <p:par>
-                                <p:cTn id="8" presetID="10" presetClass="entr" presetSubtype="0" fill="hold" grpId="0" nodeType="withEffect">
+                                <p:cTn id="8" presetID="10" presetClass="entr" presetSubtype="0" fill="hold" nodeType="withEffect">
                                   <p:stCondLst>
                                     <p:cond delay="0"/>
                                   </p:stCondLst>
@@ -20658,7 +21188,7 @@
                                 </p:cTn>
                               </p:par>
                               <p:par>
-                                <p:cTn id="11" presetID="10" presetClass="entr" presetSubtype="0" fill="hold" grpId="0" nodeType="withEffect">
+                                <p:cTn id="11" presetID="10" presetClass="entr" presetSubtype="0" fill="hold" nodeType="withEffect">
                                   <p:stCondLst>
                                     <p:cond delay="0"/>
                                   </p:stCondLst>
@@ -20693,7 +21223,7 @@
                                 </p:cTn>
                               </p:par>
                               <p:par>
-                                <p:cTn id="14" presetID="10" presetClass="entr" presetSubtype="0" fill="hold" grpId="0" nodeType="withEffect">
+                                <p:cTn id="14" presetID="10" presetClass="entr" presetSubtype="0" fill="hold" nodeType="withEffect">
                                   <p:stCondLst>
                                     <p:cond delay="0"/>
                                   </p:stCondLst>
@@ -20728,7 +21258,7 @@
                                 </p:cTn>
                               </p:par>
                               <p:par>
-                                <p:cTn id="17" presetID="10" presetClass="entr" presetSubtype="0" fill="hold" grpId="0" nodeType="withEffect">
+                                <p:cTn id="17" presetID="10" presetClass="entr" presetSubtype="0" fill="hold" nodeType="withEffect">
                                   <p:stCondLst>
                                     <p:cond delay="0"/>
                                   </p:stCondLst>
@@ -20763,7 +21293,7 @@
                                 </p:cTn>
                               </p:par>
                               <p:par>
-                                <p:cTn id="20" presetID="10" presetClass="entr" presetSubtype="0" fill="hold" grpId="0" nodeType="withEffect">
+                                <p:cTn id="20" presetID="10" presetClass="entr" presetSubtype="0" fill="hold" nodeType="withEffect">
                                   <p:stCondLst>
                                     <p:cond delay="0"/>
                                   </p:stCondLst>
@@ -20816,7 +21346,7 @@
                             </p:stCondLst>
                             <p:childTnLst>
                               <p:par>
-                                <p:cTn id="25" presetID="10" presetClass="entr" presetSubtype="0" fill="hold" grpId="1" nodeType="clickEffect">
+                                <p:cTn id="25" presetID="10" presetClass="entr" presetSubtype="0" fill="hold" nodeType="clickEffect">
                                   <p:stCondLst>
                                     <p:cond delay="0"/>
                                   </p:stCondLst>
@@ -20851,7 +21381,7 @@
                                 </p:cTn>
                               </p:par>
                               <p:par>
-                                <p:cTn id="28" presetID="10" presetClass="entr" presetSubtype="0" fill="hold" grpId="1" nodeType="withEffect">
+                                <p:cTn id="28" presetID="10" presetClass="entr" presetSubtype="0" fill="hold" nodeType="withEffect">
                                   <p:stCondLst>
                                     <p:cond delay="0"/>
                                   </p:stCondLst>
@@ -20886,7 +21416,7 @@
                                 </p:cTn>
                               </p:par>
                               <p:par>
-                                <p:cTn id="31" presetID="10" presetClass="entr" presetSubtype="0" fill="hold" grpId="1" nodeType="withEffect">
+                                <p:cTn id="31" presetID="10" presetClass="entr" presetSubtype="0" fill="hold" nodeType="withEffect">
                                   <p:stCondLst>
                                     <p:cond delay="0"/>
                                   </p:stCondLst>
@@ -20921,7 +21451,7 @@
                                 </p:cTn>
                               </p:par>
                               <p:par>
-                                <p:cTn id="34" presetID="10" presetClass="entr" presetSubtype="0" fill="hold" grpId="1" nodeType="withEffect">
+                                <p:cTn id="34" presetID="10" presetClass="entr" presetSubtype="0" fill="hold" nodeType="withEffect">
                                   <p:stCondLst>
                                     <p:cond delay="0"/>
                                   </p:stCondLst>
@@ -20956,7 +21486,7 @@
                                 </p:cTn>
                               </p:par>
                               <p:par>
-                                <p:cTn id="37" presetID="10" presetClass="entr" presetSubtype="0" fill="hold" grpId="1" nodeType="withEffect">
+                                <p:cTn id="37" presetID="10" presetClass="entr" presetSubtype="0" fill="hold" nodeType="withEffect">
                                   <p:stCondLst>
                                     <p:cond delay="0"/>
                                   </p:stCondLst>
@@ -20991,7 +21521,7 @@
                                 </p:cTn>
                               </p:par>
                               <p:par>
-                                <p:cTn id="40" presetID="10" presetClass="entr" presetSubtype="0" fill="hold" grpId="1" nodeType="withEffect">
+                                <p:cTn id="40" presetID="10" presetClass="entr" presetSubtype="0" fill="hold" nodeType="withEffect">
                                   <p:stCondLst>
                                     <p:cond delay="0"/>
                                   </p:stCondLst>
@@ -21044,7 +21574,7 @@
                             </p:stCondLst>
                             <p:childTnLst>
                               <p:par>
-                                <p:cTn id="45" presetID="10" presetClass="entr" presetSubtype="0" fill="hold" grpId="2" nodeType="clickEffect">
+                                <p:cTn id="45" presetID="10" presetClass="entr" presetSubtype="0" fill="hold" nodeType="clickEffect">
                                   <p:stCondLst>
                                     <p:cond delay="0"/>
                                   </p:stCondLst>
@@ -21079,7 +21609,7 @@
                                 </p:cTn>
                               </p:par>
                               <p:par>
-                                <p:cTn id="48" presetID="10" presetClass="entr" presetSubtype="0" fill="hold" grpId="2" nodeType="withEffect">
+                                <p:cTn id="48" presetID="10" presetClass="entr" presetSubtype="0" fill="hold" nodeType="withEffect">
                                   <p:stCondLst>
                                     <p:cond delay="0"/>
                                   </p:stCondLst>
@@ -21114,7 +21644,7 @@
                                 </p:cTn>
                               </p:par>
                               <p:par>
-                                <p:cTn id="51" presetID="10" presetClass="entr" presetSubtype="0" fill="hold" grpId="2" nodeType="withEffect">
+                                <p:cTn id="51" presetID="10" presetClass="entr" presetSubtype="0" fill="hold" nodeType="withEffect">
                                   <p:stCondLst>
                                     <p:cond delay="0"/>
                                   </p:stCondLst>
@@ -21149,7 +21679,7 @@
                                 </p:cTn>
                               </p:par>
                               <p:par>
-                                <p:cTn id="54" presetID="10" presetClass="entr" presetSubtype="0" fill="hold" grpId="2" nodeType="withEffect">
+                                <p:cTn id="54" presetID="10" presetClass="entr" presetSubtype="0" fill="hold" nodeType="withEffect">
                                   <p:stCondLst>
                                     <p:cond delay="0"/>
                                   </p:stCondLst>
@@ -21184,7 +21714,7 @@
                                 </p:cTn>
                               </p:par>
                               <p:par>
-                                <p:cTn id="57" presetID="10" presetClass="entr" presetSubtype="0" fill="hold" grpId="2" nodeType="withEffect">
+                                <p:cTn id="57" presetID="10" presetClass="entr" presetSubtype="0" fill="hold" nodeType="withEffect">
                                   <p:stCondLst>
                                     <p:cond delay="0"/>
                                   </p:stCondLst>
@@ -21219,7 +21749,7 @@
                                 </p:cTn>
                               </p:par>
                               <p:par>
-                                <p:cTn id="60" presetID="10" presetClass="entr" presetSubtype="0" fill="hold" grpId="2" nodeType="withEffect">
+                                <p:cTn id="60" presetID="10" presetClass="entr" presetSubtype="0" fill="hold" nodeType="withEffect">
                                   <p:stCondLst>
                                     <p:cond delay="0"/>
                                   </p:stCondLst>
@@ -21272,7 +21802,7 @@
                             </p:stCondLst>
                             <p:childTnLst>
                               <p:par>
-                                <p:cTn id="65" presetID="10" presetClass="entr" presetSubtype="0" fill="hold" grpId="3" nodeType="clickEffect">
+                                <p:cTn id="65" presetID="10" presetClass="entr" presetSubtype="0" fill="hold" nodeType="clickEffect">
                                   <p:stCondLst>
                                     <p:cond delay="0"/>
                                   </p:stCondLst>
@@ -21307,7 +21837,7 @@
                                 </p:cTn>
                               </p:par>
                               <p:par>
-                                <p:cTn id="68" presetID="10" presetClass="entr" presetSubtype="0" fill="hold" grpId="3" nodeType="withEffect">
+                                <p:cTn id="68" presetID="10" presetClass="entr" presetSubtype="0" fill="hold" nodeType="withEffect">
                                   <p:stCondLst>
                                     <p:cond delay="0"/>
                                   </p:stCondLst>
@@ -21342,7 +21872,7 @@
                                 </p:cTn>
                               </p:par>
                               <p:par>
-                                <p:cTn id="71" presetID="10" presetClass="entr" presetSubtype="0" fill="hold" grpId="3" nodeType="withEffect">
+                                <p:cTn id="71" presetID="10" presetClass="entr" presetSubtype="0" fill="hold" nodeType="withEffect">
                                   <p:stCondLst>
                                     <p:cond delay="0"/>
                                   </p:stCondLst>
@@ -21377,7 +21907,7 @@
                                 </p:cTn>
                               </p:par>
                               <p:par>
-                                <p:cTn id="74" presetID="10" presetClass="entr" presetSubtype="0" fill="hold" grpId="3" nodeType="withEffect">
+                                <p:cTn id="74" presetID="10" presetClass="entr" presetSubtype="0" fill="hold" nodeType="withEffect">
                                   <p:stCondLst>
                                     <p:cond delay="0"/>
                                   </p:stCondLst>
@@ -21412,7 +21942,7 @@
                                 </p:cTn>
                               </p:par>
                               <p:par>
-                                <p:cTn id="77" presetID="10" presetClass="entr" presetSubtype="0" fill="hold" grpId="3" nodeType="withEffect">
+                                <p:cTn id="77" presetID="10" presetClass="entr" presetSubtype="0" fill="hold" nodeType="withEffect">
                                   <p:stCondLst>
                                     <p:cond delay="0"/>
                                   </p:stCondLst>
@@ -21447,7 +21977,7 @@
                                 </p:cTn>
                               </p:par>
                               <p:par>
-                                <p:cTn id="80" presetID="10" presetClass="entr" presetSubtype="0" fill="hold" grpId="3" nodeType="withEffect">
+                                <p:cTn id="80" presetID="10" presetClass="entr" presetSubtype="0" fill="hold" nodeType="withEffect">
                                   <p:stCondLst>
                                     <p:cond delay="0"/>
                                   </p:stCondLst>
@@ -21520,6 +22050,7 @@
         <a:solidFill>
           <a:srgbClr val="F4F8FC"/>
         </a:solidFill>
+        <a:effectLst/>
       </p:bgPr>
     </p:bg>
     <p:spTree>
@@ -21555,6 +22086,13 @@
           </a:solidFill>
           <a:ln/>
         </p:spPr>
+        <p:txBody>
+          <a:bodyPr/>
+          <a:lstStyle/>
+          <a:p>
+            <a:endParaRPr lang="en-US"/>
+          </a:p>
+        </p:txBody>
       </p:sp>
       <p:sp>
         <p:nvSpPr>
@@ -21575,6 +22113,13 @@
           </a:solidFill>
           <a:ln/>
         </p:spPr>
+        <p:txBody>
+          <a:bodyPr/>
+          <a:lstStyle/>
+          <a:p>
+            <a:endParaRPr lang="en-US"/>
+          </a:p>
+        </p:txBody>
       </p:sp>
       <p:sp>
         <p:nvSpPr>
@@ -21597,11 +22142,11 @@
           <a:bodyPr wrap="square" lIns="0" tIns="0" rIns="0" bIns="0" rtlCol="0" anchor="ctr"/>
           <a:lstStyle/>
           <a:p>
-            <a:pPr indent="0" marL="0">
+            <a:pPr marL="0" indent="0">
               <a:buNone/>
             </a:pPr>
             <a:r>
-              <a:rPr lang="en-US" sz="1200" b="1" spc="300" kern="0" dirty="0">
+              <a:rPr lang="en-US" sz="1200" b="1" kern="0" spc="300" dirty="0">
                 <a:solidFill>
                   <a:srgbClr val="0284C7"/>
                 </a:solidFill>
@@ -21636,7 +22181,7 @@
           <a:bodyPr wrap="square" lIns="0" tIns="0" rIns="0" bIns="0" rtlCol="0" anchor="ctr"/>
           <a:lstStyle/>
           <a:p>
-            <a:pPr indent="0" marL="0">
+            <a:pPr marL="0" indent="0">
               <a:buNone/>
             </a:pPr>
             <a:r>
@@ -21675,7 +22220,7 @@
           <a:bodyPr wrap="square" lIns="0" tIns="0" rIns="0" bIns="0" rtlCol="0" anchor="ctr"/>
           <a:lstStyle/>
           <a:p>
-            <a:pPr indent="0" marL="0">
+            <a:pPr marL="0" indent="0">
               <a:buNone/>
             </a:pPr>
             <a:r>
@@ -21719,13 +22264,20 @@
             <a:prstDash val="solid"/>
           </a:ln>
           <a:effectLst>
-            <a:outerShdw sx="100000" sy="100000" kx="0" ky="0" algn="bl" rotWithShape="0" blurRad="88900" dist="25400" dir="5400000">
+            <a:outerShdw blurRad="88900" dist="25400" dir="5400000" algn="bl" rotWithShape="0">
               <a:srgbClr val="8FA3BC">
                 <a:alpha val="30000"/>
               </a:srgbClr>
             </a:outerShdw>
           </a:effectLst>
         </p:spPr>
+        <p:txBody>
+          <a:bodyPr/>
+          <a:lstStyle/>
+          <a:p>
+            <a:endParaRPr lang="en-US"/>
+          </a:p>
+        </p:txBody>
       </p:sp>
       <p:sp>
         <p:nvSpPr>
@@ -21746,17 +22298,24 @@
           </a:solidFill>
           <a:ln/>
         </p:spPr>
+        <p:txBody>
+          <a:bodyPr/>
+          <a:lstStyle/>
+          <a:p>
+            <a:endParaRPr lang="en-US"/>
+          </a:p>
+        </p:txBody>
       </p:sp>
       <p:pic>
         <p:nvPicPr>
-          <p:cNvPr id="9" name="Image 0" descr="preencoded.png">    </p:cNvPr>
+          <p:cNvPr id="9" name="Image 0" descr="preencoded.png"/>
           <p:cNvPicPr>
             <a:picLocks noChangeAspect="1"/>
           </p:cNvPicPr>
           <p:nvPr/>
         </p:nvPicPr>
         <p:blipFill>
-          <a:blip r:embed="rId1"/>
+          <a:blip r:embed="rId3"/>
           <a:stretch>
             <a:fillRect/>
           </a:stretch>
@@ -21792,7 +22351,7 @@
           <a:bodyPr wrap="square" lIns="0" tIns="0" rIns="0" bIns="0" rtlCol="0" anchor="ctr"/>
           <a:lstStyle/>
           <a:p>
-            <a:pPr algn="ctr" indent="0" marL="0">
+            <a:pPr marL="0" indent="0" algn="ctr">
               <a:buNone/>
             </a:pPr>
             <a:r>
@@ -21831,7 +22390,7 @@
           <a:bodyPr wrap="square" lIns="0" tIns="0" rIns="0" bIns="0" rtlCol="0" anchor="ctr"/>
           <a:lstStyle/>
           <a:p>
-            <a:pPr algn="ctr" indent="0" marL="0">
+            <a:pPr marL="0" indent="0" algn="ctr">
               <a:buNone/>
             </a:pPr>
             <a:r>
@@ -21848,7 +22407,7 @@
             <a:endParaRPr lang="en-US" sz="1400" dirty="0"/>
           </a:p>
           <a:p>
-            <a:pPr algn="ctr" indent="0" marL="0">
+            <a:pPr marL="0" indent="0" algn="ctr">
               <a:buNone/>
             </a:pPr>
             <a:r>
@@ -21885,17 +22444,24 @@
           </a:solidFill>
           <a:ln/>
         </p:spPr>
+        <p:txBody>
+          <a:bodyPr/>
+          <a:lstStyle/>
+          <a:p>
+            <a:endParaRPr lang="en-US"/>
+          </a:p>
+        </p:txBody>
       </p:sp>
       <p:pic>
         <p:nvPicPr>
-          <p:cNvPr id="13" name="Image 1" descr="preencoded.png">    </p:cNvPr>
+          <p:cNvPr id="13" name="Image 1" descr="preencoded.png"/>
           <p:cNvPicPr>
             <a:picLocks noChangeAspect="1"/>
           </p:cNvPicPr>
           <p:nvPr/>
         </p:nvPicPr>
         <p:blipFill>
-          <a:blip r:embed="rId2"/>
+          <a:blip r:embed="rId4"/>
           <a:stretch>
             <a:fillRect/>
           </a:stretch>
@@ -21936,13 +22502,20 @@
             <a:prstDash val="solid"/>
           </a:ln>
           <a:effectLst>
-            <a:outerShdw sx="100000" sy="100000" kx="0" ky="0" algn="bl" rotWithShape="0" blurRad="88900" dist="25400" dir="5400000">
+            <a:outerShdw blurRad="88900" dist="25400" dir="5400000" algn="bl" rotWithShape="0">
               <a:srgbClr val="8FA3BC">
                 <a:alpha val="30000"/>
               </a:srgbClr>
             </a:outerShdw>
           </a:effectLst>
         </p:spPr>
+        <p:txBody>
+          <a:bodyPr/>
+          <a:lstStyle/>
+          <a:p>
+            <a:endParaRPr lang="en-US"/>
+          </a:p>
+        </p:txBody>
       </p:sp>
       <p:sp>
         <p:nvSpPr>
@@ -21963,17 +22536,24 @@
           </a:solidFill>
           <a:ln/>
         </p:spPr>
+        <p:txBody>
+          <a:bodyPr/>
+          <a:lstStyle/>
+          <a:p>
+            <a:endParaRPr lang="en-US"/>
+          </a:p>
+        </p:txBody>
       </p:sp>
       <p:pic>
         <p:nvPicPr>
-          <p:cNvPr id="16" name="Image 2" descr="preencoded.png">    </p:cNvPr>
+          <p:cNvPr id="16" name="Image 2" descr="preencoded.png"/>
           <p:cNvPicPr>
             <a:picLocks noChangeAspect="1"/>
           </p:cNvPicPr>
           <p:nvPr/>
         </p:nvPicPr>
         <p:blipFill>
-          <a:blip r:embed="rId3"/>
+          <a:blip r:embed="rId5"/>
           <a:stretch>
             <a:fillRect/>
           </a:stretch>
@@ -22009,7 +22589,7 @@
           <a:bodyPr wrap="square" lIns="0" tIns="0" rIns="0" bIns="0" rtlCol="0" anchor="ctr"/>
           <a:lstStyle/>
           <a:p>
-            <a:pPr indent="0" marL="0">
+            <a:pPr marL="0" indent="0">
               <a:buNone/>
             </a:pPr>
             <a:r>
@@ -22023,9 +22603,6 @@
               </a:rPr>
               <a:t>Test writer    </a:t>
             </a:r>
-            <a:pPr indent="0" marL="0">
-              <a:buNone/>
-            </a:pPr>
             <a:r>
               <a:rPr lang="en-US" sz="1500" dirty="0">
                 <a:solidFill>
@@ -22067,13 +22644,20 @@
             <a:prstDash val="solid"/>
           </a:ln>
           <a:effectLst>
-            <a:outerShdw sx="100000" sy="100000" kx="0" ky="0" algn="bl" rotWithShape="0" blurRad="88900" dist="25400" dir="5400000">
+            <a:outerShdw blurRad="88900" dist="25400" dir="5400000" algn="bl" rotWithShape="0">
               <a:srgbClr val="8FA3BC">
                 <a:alpha val="30000"/>
               </a:srgbClr>
             </a:outerShdw>
           </a:effectLst>
         </p:spPr>
+        <p:txBody>
+          <a:bodyPr/>
+          <a:lstStyle/>
+          <a:p>
+            <a:endParaRPr lang="en-US"/>
+          </a:p>
+        </p:txBody>
       </p:sp>
       <p:sp>
         <p:nvSpPr>
@@ -22094,17 +22678,24 @@
           </a:solidFill>
           <a:ln/>
         </p:spPr>
+        <p:txBody>
+          <a:bodyPr/>
+          <a:lstStyle/>
+          <a:p>
+            <a:endParaRPr lang="en-US"/>
+          </a:p>
+        </p:txBody>
       </p:sp>
       <p:pic>
         <p:nvPicPr>
-          <p:cNvPr id="20" name="Image 3" descr="preencoded.png">    </p:cNvPr>
+          <p:cNvPr id="20" name="Image 3" descr="preencoded.png"/>
           <p:cNvPicPr>
             <a:picLocks noChangeAspect="1"/>
           </p:cNvPicPr>
           <p:nvPr/>
         </p:nvPicPr>
         <p:blipFill>
-          <a:blip r:embed="rId4"/>
+          <a:blip r:embed="rId6"/>
           <a:stretch>
             <a:fillRect/>
           </a:stretch>
@@ -22140,7 +22731,7 @@
           <a:bodyPr wrap="square" lIns="0" tIns="0" rIns="0" bIns="0" rtlCol="0" anchor="ctr"/>
           <a:lstStyle/>
           <a:p>
-            <a:pPr indent="0" marL="0">
+            <a:pPr marL="0" indent="0">
               <a:buNone/>
             </a:pPr>
             <a:r>
@@ -22154,9 +22745,6 @@
               </a:rPr>
               <a:t>Code reviewer    </a:t>
             </a:r>
-            <a:pPr indent="0" marL="0">
-              <a:buNone/>
-            </a:pPr>
             <a:r>
               <a:rPr lang="en-US" sz="1500" dirty="0">
                 <a:solidFill>
@@ -22198,13 +22786,20 @@
             <a:prstDash val="solid"/>
           </a:ln>
           <a:effectLst>
-            <a:outerShdw sx="100000" sy="100000" kx="0" ky="0" algn="bl" rotWithShape="0" blurRad="88900" dist="25400" dir="5400000">
+            <a:outerShdw blurRad="88900" dist="25400" dir="5400000" algn="bl" rotWithShape="0">
               <a:srgbClr val="8FA3BC">
                 <a:alpha val="30000"/>
               </a:srgbClr>
             </a:outerShdw>
           </a:effectLst>
         </p:spPr>
+        <p:txBody>
+          <a:bodyPr/>
+          <a:lstStyle/>
+          <a:p>
+            <a:endParaRPr lang="en-US"/>
+          </a:p>
+        </p:txBody>
       </p:sp>
       <p:sp>
         <p:nvSpPr>
@@ -22225,17 +22820,24 @@
           </a:solidFill>
           <a:ln/>
         </p:spPr>
+        <p:txBody>
+          <a:bodyPr/>
+          <a:lstStyle/>
+          <a:p>
+            <a:endParaRPr lang="en-US"/>
+          </a:p>
+        </p:txBody>
       </p:sp>
       <p:pic>
         <p:nvPicPr>
-          <p:cNvPr id="24" name="Image 4" descr="preencoded.png">    </p:cNvPr>
+          <p:cNvPr id="24" name="Image 4" descr="preencoded.png"/>
           <p:cNvPicPr>
             <a:picLocks noChangeAspect="1"/>
           </p:cNvPicPr>
           <p:nvPr/>
         </p:nvPicPr>
         <p:blipFill>
-          <a:blip r:embed="rId5"/>
+          <a:blip r:embed="rId7"/>
           <a:stretch>
             <a:fillRect/>
           </a:stretch>
@@ -22271,7 +22873,7 @@
           <a:bodyPr wrap="square" lIns="0" tIns="0" rIns="0" bIns="0" rtlCol="0" anchor="ctr"/>
           <a:lstStyle/>
           <a:p>
-            <a:pPr indent="0" marL="0">
+            <a:pPr marL="0" indent="0">
               <a:buNone/>
             </a:pPr>
             <a:r>
@@ -22285,9 +22887,6 @@
               </a:rPr>
               <a:t>Searcher    </a:t>
             </a:r>
-            <a:pPr indent="0" marL="0">
-              <a:buNone/>
-            </a:pPr>
             <a:r>
               <a:rPr lang="en-US" sz="1500" dirty="0">
                 <a:solidFill>
@@ -22324,7 +22923,7 @@
           <a:bodyPr wrap="square" lIns="0" tIns="0" rIns="0" bIns="0" rtlCol="0" anchor="ctr"/>
           <a:lstStyle/>
           <a:p>
-            <a:pPr algn="ctr" indent="0" marL="0">
+            <a:pPr marL="0" indent="0" algn="ctr">
               <a:buNone/>
             </a:pPr>
             <a:r>
@@ -22338,9 +22937,6 @@
               </a:rPr>
               <a:t>Each works in its own space, </a:t>
             </a:r>
-            <a:pPr algn="ctr" indent="0" marL="0">
-              <a:buNone/>
-            </a:pPr>
             <a:r>
               <a:rPr lang="en-US" sz="1600" b="1" dirty="0">
                 <a:solidFill>
@@ -22377,7 +22973,7 @@
           <a:bodyPr wrap="square" lIns="0" tIns="0" rIns="0" bIns="0" rtlCol="0" anchor="ctr"/>
           <a:lstStyle/>
           <a:p>
-            <a:pPr algn="l" indent="0" marL="0">
+            <a:pPr marL="0" indent="0" algn="l">
               <a:buNone/>
             </a:pPr>
             <a:r>
@@ -22421,7 +23017,7 @@
                             </p:stCondLst>
                             <p:childTnLst>
                               <p:par>
-                                <p:cTn id="5" presetID="10" presetClass="entr" presetSubtype="0" fill="hold" grpId="0" nodeType="clickEffect">
+                                <p:cTn id="5" presetID="10" presetClass="entr" presetSubtype="0" fill="hold" nodeType="clickEffect">
                                   <p:stCondLst>
                                     <p:cond delay="0"/>
                                   </p:stCondLst>
@@ -22474,7 +23070,7 @@
                             </p:stCondLst>
                             <p:childTnLst>
                               <p:par>
-                                <p:cTn id="10" presetID="10" presetClass="entr" presetSubtype="0" fill="hold" grpId="1" nodeType="clickEffect">
+                                <p:cTn id="10" presetID="10" presetClass="entr" presetSubtype="0" fill="hold" nodeType="clickEffect">
                                   <p:stCondLst>
                                     <p:cond delay="0"/>
                                   </p:stCondLst>
@@ -22509,7 +23105,7 @@
                                 </p:cTn>
                               </p:par>
                               <p:par>
-                                <p:cTn id="13" presetID="10" presetClass="entr" presetSubtype="0" fill="hold" grpId="1" nodeType="withEffect">
+                                <p:cTn id="13" presetID="10" presetClass="entr" presetSubtype="0" fill="hold" nodeType="withEffect">
                                   <p:stCondLst>
                                     <p:cond delay="0"/>
                                   </p:stCondLst>
@@ -22544,7 +23140,7 @@
                                 </p:cTn>
                               </p:par>
                               <p:par>
-                                <p:cTn id="16" presetID="10" presetClass="entr" presetSubtype="0" fill="hold" grpId="1" nodeType="withEffect">
+                                <p:cTn id="16" presetID="10" presetClass="entr" presetSubtype="0" fill="hold" nodeType="withEffect">
                                   <p:stCondLst>
                                     <p:cond delay="0"/>
                                   </p:stCondLst>
@@ -22579,7 +23175,7 @@
                                 </p:cTn>
                               </p:par>
                               <p:par>
-                                <p:cTn id="19" presetID="10" presetClass="entr" presetSubtype="0" fill="hold" grpId="1" nodeType="withEffect">
+                                <p:cTn id="19" presetID="10" presetClass="entr" presetSubtype="0" fill="hold" nodeType="withEffect">
                                   <p:stCondLst>
                                     <p:cond delay="0"/>
                                   </p:stCondLst>
@@ -22614,7 +23210,7 @@
                                 </p:cTn>
                               </p:par>
                               <p:par>
-                                <p:cTn id="22" presetID="10" presetClass="entr" presetSubtype="0" fill="hold" grpId="1" nodeType="withEffect">
+                                <p:cTn id="22" presetID="10" presetClass="entr" presetSubtype="0" fill="hold" nodeType="withEffect">
                                   <p:stCondLst>
                                     <p:cond delay="0"/>
                                   </p:stCondLst>
@@ -22667,7 +23263,7 @@
                             </p:stCondLst>
                             <p:childTnLst>
                               <p:par>
-                                <p:cTn id="27" presetID="10" presetClass="entr" presetSubtype="0" fill="hold" grpId="2" nodeType="clickEffect">
+                                <p:cTn id="27" presetID="10" presetClass="entr" presetSubtype="0" fill="hold" nodeType="clickEffect">
                                   <p:stCondLst>
                                     <p:cond delay="0"/>
                                   </p:stCondLst>
@@ -22702,7 +23298,7 @@
                                 </p:cTn>
                               </p:par>
                               <p:par>
-                                <p:cTn id="30" presetID="10" presetClass="entr" presetSubtype="0" fill="hold" grpId="2" nodeType="withEffect">
+                                <p:cTn id="30" presetID="10" presetClass="entr" presetSubtype="0" fill="hold" nodeType="withEffect">
                                   <p:stCondLst>
                                     <p:cond delay="0"/>
                                   </p:stCondLst>
@@ -22737,7 +23333,7 @@
                                 </p:cTn>
                               </p:par>
                               <p:par>
-                                <p:cTn id="33" presetID="10" presetClass="entr" presetSubtype="0" fill="hold" grpId="2" nodeType="withEffect">
+                                <p:cTn id="33" presetID="10" presetClass="entr" presetSubtype="0" fill="hold" nodeType="withEffect">
                                   <p:stCondLst>
                                     <p:cond delay="0"/>
                                   </p:stCondLst>
@@ -22772,7 +23368,7 @@
                                 </p:cTn>
                               </p:par>
                               <p:par>
-                                <p:cTn id="36" presetID="10" presetClass="entr" presetSubtype="0" fill="hold" grpId="2" nodeType="withEffect">
+                                <p:cTn id="36" presetID="10" presetClass="entr" presetSubtype="0" fill="hold" nodeType="withEffect">
                                   <p:stCondLst>
                                     <p:cond delay="0"/>
                                   </p:stCondLst>
@@ -22825,7 +23421,7 @@
                             </p:stCondLst>
                             <p:childTnLst>
                               <p:par>
-                                <p:cTn id="41" presetID="10" presetClass="entr" presetSubtype="0" fill="hold" grpId="3" nodeType="clickEffect">
+                                <p:cTn id="41" presetID="10" presetClass="entr" presetSubtype="0" fill="hold" nodeType="clickEffect">
                                   <p:stCondLst>
                                     <p:cond delay="0"/>
                                   </p:stCondLst>
@@ -22860,7 +23456,7 @@
                                 </p:cTn>
                               </p:par>
                               <p:par>
-                                <p:cTn id="44" presetID="10" presetClass="entr" presetSubtype="0" fill="hold" grpId="3" nodeType="withEffect">
+                                <p:cTn id="44" presetID="10" presetClass="entr" presetSubtype="0" fill="hold" nodeType="withEffect">
                                   <p:stCondLst>
                                     <p:cond delay="0"/>
                                   </p:stCondLst>
@@ -22895,7 +23491,7 @@
                                 </p:cTn>
                               </p:par>
                               <p:par>
-                                <p:cTn id="47" presetID="10" presetClass="entr" presetSubtype="0" fill="hold" grpId="3" nodeType="withEffect">
+                                <p:cTn id="47" presetID="10" presetClass="entr" presetSubtype="0" fill="hold" nodeType="withEffect">
                                   <p:stCondLst>
                                     <p:cond delay="0"/>
                                   </p:stCondLst>
@@ -22930,7 +23526,7 @@
                                 </p:cTn>
                               </p:par>
                               <p:par>
-                                <p:cTn id="50" presetID="10" presetClass="entr" presetSubtype="0" fill="hold" grpId="3" nodeType="withEffect">
+                                <p:cTn id="50" presetID="10" presetClass="entr" presetSubtype="0" fill="hold" nodeType="withEffect">
                                   <p:stCondLst>
                                     <p:cond delay="0"/>
                                   </p:stCondLst>
@@ -22983,7 +23579,7 @@
                             </p:stCondLst>
                             <p:childTnLst>
                               <p:par>
-                                <p:cTn id="55" presetID="10" presetClass="entr" presetSubtype="0" fill="hold" grpId="4" nodeType="clickEffect">
+                                <p:cTn id="55" presetID="10" presetClass="entr" presetSubtype="0" fill="hold" nodeType="clickEffect">
                                   <p:stCondLst>
                                     <p:cond delay="0"/>
                                   </p:stCondLst>
@@ -23018,7 +23614,7 @@
                                 </p:cTn>
                               </p:par>
                               <p:par>
-                                <p:cTn id="58" presetID="10" presetClass="entr" presetSubtype="0" fill="hold" grpId="4" nodeType="withEffect">
+                                <p:cTn id="58" presetID="10" presetClass="entr" presetSubtype="0" fill="hold" nodeType="withEffect">
                                   <p:stCondLst>
                                     <p:cond delay="0"/>
                                   </p:stCondLst>
@@ -23071,7 +23667,7 @@
                             </p:stCondLst>
                             <p:childTnLst>
                               <p:par>
-                                <p:cTn id="63" presetID="10" presetClass="entr" presetSubtype="0" fill="hold" grpId="5" nodeType="clickEffect">
+                                <p:cTn id="63" presetID="10" presetClass="entr" presetSubtype="0" fill="hold" nodeType="clickEffect">
                                   <p:stCondLst>
                                     <p:cond delay="0"/>
                                   </p:stCondLst>
@@ -23106,7 +23702,7 @@
                                 </p:cTn>
                               </p:par>
                               <p:par>
-                                <p:cTn id="66" presetID="10" presetClass="entr" presetSubtype="0" fill="hold" grpId="5" nodeType="withEffect">
+                                <p:cTn id="66" presetID="10" presetClass="entr" presetSubtype="0" fill="hold" nodeType="withEffect">
                                   <p:stCondLst>
                                     <p:cond delay="0"/>
                                   </p:stCondLst>
@@ -23141,7 +23737,7 @@
                                 </p:cTn>
                               </p:par>
                               <p:par>
-                                <p:cTn id="69" presetID="10" presetClass="entr" presetSubtype="0" fill="hold" grpId="5" nodeType="withEffect">
+                                <p:cTn id="69" presetID="10" presetClass="entr" presetSubtype="0" fill="hold" nodeType="withEffect">
                                   <p:stCondLst>
                                     <p:cond delay="0"/>
                                   </p:stCondLst>
@@ -23176,7 +23772,7 @@
                                 </p:cTn>
                               </p:par>
                               <p:par>
-                                <p:cTn id="72" presetID="10" presetClass="entr" presetSubtype="0" fill="hold" grpId="5" nodeType="withEffect">
+                                <p:cTn id="72" presetID="10" presetClass="entr" presetSubtype="0" fill="hold" nodeType="withEffect">
                                   <p:stCondLst>
                                     <p:cond delay="0"/>
                                   </p:stCondLst>
@@ -23229,7 +23825,7 @@
                             </p:stCondLst>
                             <p:childTnLst>
                               <p:par>
-                                <p:cTn id="77" presetID="10" presetClass="entr" presetSubtype="0" fill="hold" grpId="6" nodeType="clickEffect">
+                                <p:cTn id="77" presetID="10" presetClass="entr" presetSubtype="0" fill="hold" nodeType="clickEffect">
                                   <p:stCondLst>
                                     <p:cond delay="0"/>
                                   </p:stCondLst>
@@ -23302,6 +23898,7 @@
         <a:solidFill>
           <a:srgbClr val="F4F8FC"/>
         </a:solidFill>
+        <a:effectLst/>
       </p:bgPr>
     </p:bg>
     <p:spTree>
@@ -23337,6 +23934,13 @@
           </a:solidFill>
           <a:ln/>
         </p:spPr>
+        <p:txBody>
+          <a:bodyPr/>
+          <a:lstStyle/>
+          <a:p>
+            <a:endParaRPr lang="en-US"/>
+          </a:p>
+        </p:txBody>
       </p:sp>
       <p:sp>
         <p:nvSpPr>
@@ -23357,6 +23961,13 @@
           </a:solidFill>
           <a:ln/>
         </p:spPr>
+        <p:txBody>
+          <a:bodyPr/>
+          <a:lstStyle/>
+          <a:p>
+            <a:endParaRPr lang="en-US"/>
+          </a:p>
+        </p:txBody>
       </p:sp>
       <p:sp>
         <p:nvSpPr>
@@ -23379,11 +23990,11 @@
           <a:bodyPr wrap="square" lIns="0" tIns="0" rIns="0" bIns="0" rtlCol="0" anchor="ctr"/>
           <a:lstStyle/>
           <a:p>
-            <a:pPr indent="0" marL="0">
+            <a:pPr marL="0" indent="0">
               <a:buNone/>
             </a:pPr>
             <a:r>
-              <a:rPr lang="en-US" sz="1200" b="1" spc="300" kern="0" dirty="0">
+              <a:rPr lang="en-US" sz="1200" b="1" kern="0" spc="300" dirty="0">
                 <a:solidFill>
                   <a:srgbClr val="0284C7"/>
                 </a:solidFill>
@@ -23418,7 +24029,7 @@
           <a:bodyPr wrap="square" lIns="0" tIns="0" rIns="0" bIns="0" rtlCol="0" anchor="ctr"/>
           <a:lstStyle/>
           <a:p>
-            <a:pPr indent="0" marL="0">
+            <a:pPr marL="0" indent="0">
               <a:buNone/>
             </a:pPr>
             <a:r>
@@ -23462,13 +24073,20 @@
             <a:prstDash val="solid"/>
           </a:ln>
           <a:effectLst>
-            <a:outerShdw sx="100000" sy="100000" kx="0" ky="0" algn="bl" rotWithShape="0" blurRad="88900" dist="25400" dir="5400000">
+            <a:outerShdw blurRad="88900" dist="25400" dir="5400000" algn="bl" rotWithShape="0">
               <a:srgbClr val="8FA3BC">
                 <a:alpha val="30000"/>
               </a:srgbClr>
             </a:outerShdw>
           </a:effectLst>
         </p:spPr>
+        <p:txBody>
+          <a:bodyPr/>
+          <a:lstStyle/>
+          <a:p>
+            <a:endParaRPr lang="en-US"/>
+          </a:p>
+        </p:txBody>
       </p:sp>
       <p:sp>
         <p:nvSpPr>
@@ -23489,6 +24107,13 @@
           </a:solidFill>
           <a:ln/>
         </p:spPr>
+        <p:txBody>
+          <a:bodyPr/>
+          <a:lstStyle/>
+          <a:p>
+            <a:endParaRPr lang="en-US"/>
+          </a:p>
+        </p:txBody>
       </p:sp>
       <p:sp>
         <p:nvSpPr>
@@ -23509,17 +24134,24 @@
           </a:solidFill>
           <a:ln/>
         </p:spPr>
+        <p:txBody>
+          <a:bodyPr/>
+          <a:lstStyle/>
+          <a:p>
+            <a:endParaRPr lang="en-US"/>
+          </a:p>
+        </p:txBody>
       </p:sp>
       <p:pic>
         <p:nvPicPr>
-          <p:cNvPr id="9" name="Image 0" descr="preencoded.png">    </p:cNvPr>
+          <p:cNvPr id="9" name="Image 0" descr="preencoded.png"/>
           <p:cNvPicPr>
             <a:picLocks noChangeAspect="1"/>
           </p:cNvPicPr>
           <p:nvPr/>
         </p:nvPicPr>
         <p:blipFill>
-          <a:blip r:embed="rId1"/>
+          <a:blip r:embed="rId3"/>
           <a:stretch>
             <a:fillRect/>
           </a:stretch>
@@ -23555,7 +24187,7 @@
           <a:bodyPr wrap="square" lIns="0" tIns="0" rIns="0" bIns="0" rtlCol="0" anchor="ctr"/>
           <a:lstStyle/>
           <a:p>
-            <a:pPr algn="ctr" indent="0" marL="0">
+            <a:pPr marL="0" indent="0" algn="ctr">
               <a:buNone/>
             </a:pPr>
             <a:r>
@@ -23594,7 +24226,7 @@
           <a:bodyPr wrap="square" lIns="0" tIns="0" rIns="0" bIns="0" rtlCol="0" anchor="ctr"/>
           <a:lstStyle/>
           <a:p>
-            <a:pPr algn="ctr" indent="0" marL="0">
+            <a:pPr marL="0" indent="0" algn="ctr">
               <a:buNone/>
             </a:pPr>
             <a:r>
@@ -23611,7 +24243,7 @@
             <a:endParaRPr lang="en-US" sz="1350" dirty="0"/>
           </a:p>
           <a:p>
-            <a:pPr algn="ctr" indent="0" marL="0">
+            <a:pPr marL="0" indent="0" algn="ctr">
               <a:buNone/>
             </a:pPr>
             <a:r>
@@ -23655,13 +24287,20 @@
             <a:prstDash val="solid"/>
           </a:ln>
           <a:effectLst>
-            <a:outerShdw sx="100000" sy="100000" kx="0" ky="0" algn="bl" rotWithShape="0" blurRad="88900" dist="25400" dir="5400000">
+            <a:outerShdw blurRad="88900" dist="25400" dir="5400000" algn="bl" rotWithShape="0">
               <a:srgbClr val="8FA3BC">
                 <a:alpha val="30000"/>
               </a:srgbClr>
             </a:outerShdw>
           </a:effectLst>
         </p:spPr>
+        <p:txBody>
+          <a:bodyPr/>
+          <a:lstStyle/>
+          <a:p>
+            <a:endParaRPr lang="en-US"/>
+          </a:p>
+        </p:txBody>
       </p:sp>
       <p:sp>
         <p:nvSpPr>
@@ -23682,6 +24321,13 @@
           </a:solidFill>
           <a:ln/>
         </p:spPr>
+        <p:txBody>
+          <a:bodyPr/>
+          <a:lstStyle/>
+          <a:p>
+            <a:endParaRPr lang="en-US"/>
+          </a:p>
+        </p:txBody>
       </p:sp>
       <p:sp>
         <p:nvSpPr>
@@ -23702,17 +24348,24 @@
           </a:solidFill>
           <a:ln/>
         </p:spPr>
+        <p:txBody>
+          <a:bodyPr/>
+          <a:lstStyle/>
+          <a:p>
+            <a:endParaRPr lang="en-US"/>
+          </a:p>
+        </p:txBody>
       </p:sp>
       <p:pic>
         <p:nvPicPr>
-          <p:cNvPr id="15" name="Image 1" descr="preencoded.png">    </p:cNvPr>
+          <p:cNvPr id="15" name="Image 1" descr="preencoded.png"/>
           <p:cNvPicPr>
             <a:picLocks noChangeAspect="1"/>
           </p:cNvPicPr>
           <p:nvPr/>
         </p:nvPicPr>
         <p:blipFill>
-          <a:blip r:embed="rId2"/>
+          <a:blip r:embed="rId4"/>
           <a:stretch>
             <a:fillRect/>
           </a:stretch>
@@ -23748,7 +24401,7 @@
           <a:bodyPr wrap="square" lIns="0" tIns="0" rIns="0" bIns="0" rtlCol="0" anchor="ctr"/>
           <a:lstStyle/>
           <a:p>
-            <a:pPr algn="ctr" indent="0" marL="0">
+            <a:pPr marL="0" indent="0" algn="ctr">
               <a:buNone/>
             </a:pPr>
             <a:r>
@@ -23787,7 +24440,7 @@
           <a:bodyPr wrap="square" lIns="0" tIns="0" rIns="0" bIns="0" rtlCol="0" anchor="ctr"/>
           <a:lstStyle/>
           <a:p>
-            <a:pPr algn="ctr" indent="0" marL="0">
+            <a:pPr marL="0" indent="0" algn="ctr">
               <a:buNone/>
             </a:pPr>
             <a:r>
@@ -23804,7 +24457,7 @@
             <a:endParaRPr lang="en-US" sz="1350" dirty="0"/>
           </a:p>
           <a:p>
-            <a:pPr algn="ctr" indent="0" marL="0">
+            <a:pPr marL="0" indent="0" algn="ctr">
               <a:buNone/>
             </a:pPr>
             <a:r>
@@ -23848,13 +24501,20 @@
             <a:prstDash val="solid"/>
           </a:ln>
           <a:effectLst>
-            <a:outerShdw sx="100000" sy="100000" kx="0" ky="0" algn="bl" rotWithShape="0" blurRad="88900" dist="25400" dir="5400000">
+            <a:outerShdw blurRad="88900" dist="25400" dir="5400000" algn="bl" rotWithShape="0">
               <a:srgbClr val="8FA3BC">
                 <a:alpha val="30000"/>
               </a:srgbClr>
             </a:outerShdw>
           </a:effectLst>
         </p:spPr>
+        <p:txBody>
+          <a:bodyPr/>
+          <a:lstStyle/>
+          <a:p>
+            <a:endParaRPr lang="en-US"/>
+          </a:p>
+        </p:txBody>
       </p:sp>
       <p:sp>
         <p:nvSpPr>
@@ -23875,6 +24535,13 @@
           </a:solidFill>
           <a:ln/>
         </p:spPr>
+        <p:txBody>
+          <a:bodyPr/>
+          <a:lstStyle/>
+          <a:p>
+            <a:endParaRPr lang="en-US"/>
+          </a:p>
+        </p:txBody>
       </p:sp>
       <p:sp>
         <p:nvSpPr>
@@ -23895,17 +24562,24 @@
           </a:solidFill>
           <a:ln/>
         </p:spPr>
+        <p:txBody>
+          <a:bodyPr/>
+          <a:lstStyle/>
+          <a:p>
+            <a:endParaRPr lang="en-US"/>
+          </a:p>
+        </p:txBody>
       </p:sp>
       <p:pic>
         <p:nvPicPr>
-          <p:cNvPr id="21" name="Image 2" descr="preencoded.png">    </p:cNvPr>
+          <p:cNvPr id="21" name="Image 2" descr="preencoded.png"/>
           <p:cNvPicPr>
             <a:picLocks noChangeAspect="1"/>
           </p:cNvPicPr>
           <p:nvPr/>
         </p:nvPicPr>
         <p:blipFill>
-          <a:blip r:embed="rId3"/>
+          <a:blip r:embed="rId5"/>
           <a:stretch>
             <a:fillRect/>
           </a:stretch>
@@ -23941,7 +24615,7 @@
           <a:bodyPr wrap="square" lIns="0" tIns="0" rIns="0" bIns="0" rtlCol="0" anchor="ctr"/>
           <a:lstStyle/>
           <a:p>
-            <a:pPr algn="ctr" indent="0" marL="0">
+            <a:pPr marL="0" indent="0" algn="ctr">
               <a:buNone/>
             </a:pPr>
             <a:r>
@@ -23980,7 +24654,7 @@
           <a:bodyPr wrap="square" lIns="0" tIns="0" rIns="0" bIns="0" rtlCol="0" anchor="ctr"/>
           <a:lstStyle/>
           <a:p>
-            <a:pPr algn="ctr" indent="0" marL="0">
+            <a:pPr marL="0" indent="0" algn="ctr">
               <a:buNone/>
             </a:pPr>
             <a:r>
@@ -23997,7 +24671,7 @@
             <a:endParaRPr lang="en-US" sz="1350" dirty="0"/>
           </a:p>
           <a:p>
-            <a:pPr algn="ctr" indent="0" marL="0">
+            <a:pPr marL="0" indent="0" algn="ctr">
               <a:buNone/>
             </a:pPr>
             <a:r>
@@ -24041,13 +24715,20 @@
             <a:prstDash val="solid"/>
           </a:ln>
           <a:effectLst>
-            <a:outerShdw sx="100000" sy="100000" kx="0" ky="0" algn="bl" rotWithShape="0" blurRad="88900" dist="25400" dir="5400000">
+            <a:outerShdw blurRad="88900" dist="25400" dir="5400000" algn="bl" rotWithShape="0">
               <a:srgbClr val="8FA3BC">
                 <a:alpha val="30000"/>
               </a:srgbClr>
             </a:outerShdw>
           </a:effectLst>
         </p:spPr>
+        <p:txBody>
+          <a:bodyPr/>
+          <a:lstStyle/>
+          <a:p>
+            <a:endParaRPr lang="en-US"/>
+          </a:p>
+        </p:txBody>
       </p:sp>
       <p:sp>
         <p:nvSpPr>
@@ -24068,6 +24749,13 @@
           </a:solidFill>
           <a:ln/>
         </p:spPr>
+        <p:txBody>
+          <a:bodyPr/>
+          <a:lstStyle/>
+          <a:p>
+            <a:endParaRPr lang="en-US"/>
+          </a:p>
+        </p:txBody>
       </p:sp>
       <p:sp>
         <p:nvSpPr>
@@ -24088,17 +24776,24 @@
           </a:solidFill>
           <a:ln/>
         </p:spPr>
+        <p:txBody>
+          <a:bodyPr/>
+          <a:lstStyle/>
+          <a:p>
+            <a:endParaRPr lang="en-US"/>
+          </a:p>
+        </p:txBody>
       </p:sp>
       <p:pic>
         <p:nvPicPr>
-          <p:cNvPr id="27" name="Image 3" descr="preencoded.png">    </p:cNvPr>
+          <p:cNvPr id="27" name="Image 3" descr="preencoded.png"/>
           <p:cNvPicPr>
             <a:picLocks noChangeAspect="1"/>
           </p:cNvPicPr>
           <p:nvPr/>
         </p:nvPicPr>
         <p:blipFill>
-          <a:blip r:embed="rId4"/>
+          <a:blip r:embed="rId6"/>
           <a:stretch>
             <a:fillRect/>
           </a:stretch>
@@ -24134,7 +24829,7 @@
           <a:bodyPr wrap="square" lIns="0" tIns="0" rIns="0" bIns="0" rtlCol="0" anchor="ctr"/>
           <a:lstStyle/>
           <a:p>
-            <a:pPr algn="ctr" indent="0" marL="0">
+            <a:pPr marL="0" indent="0" algn="ctr">
               <a:buNone/>
             </a:pPr>
             <a:r>
@@ -24173,7 +24868,7 @@
           <a:bodyPr wrap="square" lIns="0" tIns="0" rIns="0" bIns="0" rtlCol="0" anchor="ctr"/>
           <a:lstStyle/>
           <a:p>
-            <a:pPr algn="ctr" indent="0" marL="0">
+            <a:pPr marL="0" indent="0" algn="ctr">
               <a:buNone/>
             </a:pPr>
             <a:r>
@@ -24190,7 +24885,7 @@
             <a:endParaRPr lang="en-US" sz="1350" dirty="0"/>
           </a:p>
           <a:p>
-            <a:pPr algn="ctr" indent="0" marL="0">
+            <a:pPr marL="0" indent="0" algn="ctr">
               <a:buNone/>
             </a:pPr>
             <a:r>
@@ -24229,7 +24924,7 @@
           <a:bodyPr wrap="square" lIns="0" tIns="0" rIns="0" bIns="0" rtlCol="0" anchor="ctr"/>
           <a:lstStyle/>
           <a:p>
-            <a:pPr algn="ctr" indent="0" marL="0">
+            <a:pPr marL="0" indent="0" algn="ctr">
               <a:buNone/>
             </a:pPr>
             <a:r>
@@ -24243,9 +24938,6 @@
               </a:rPr>
               <a:t>Superpowers uses this:  </a:t>
             </a:r>
-            <a:pPr algn="ctr" indent="0" marL="0">
-              <a:buNone/>
-            </a:pPr>
             <a:r>
               <a:rPr lang="en-US" sz="1500" b="1" dirty="0">
                 <a:solidFill>
@@ -24282,7 +24974,7 @@
           <a:bodyPr wrap="square" lIns="0" tIns="0" rIns="0" bIns="0" rtlCol="0" anchor="ctr"/>
           <a:lstStyle/>
           <a:p>
-            <a:pPr algn="l" indent="0" marL="0">
+            <a:pPr marL="0" indent="0" algn="l">
               <a:buNone/>
             </a:pPr>
             <a:r>
@@ -24326,7 +25018,7 @@
                             </p:stCondLst>
                             <p:childTnLst>
                               <p:par>
-                                <p:cTn id="5" presetID="10" presetClass="entr" presetSubtype="0" fill="hold" grpId="0" nodeType="clickEffect">
+                                <p:cTn id="5" presetID="10" presetClass="entr" presetSubtype="0" fill="hold" nodeType="clickEffect">
                                   <p:stCondLst>
                                     <p:cond delay="0"/>
                                   </p:stCondLst>
@@ -24361,7 +25053,7 @@
                                 </p:cTn>
                               </p:par>
                               <p:par>
-                                <p:cTn id="8" presetID="10" presetClass="entr" presetSubtype="0" fill="hold" grpId="0" nodeType="withEffect">
+                                <p:cTn id="8" presetID="10" presetClass="entr" presetSubtype="0" fill="hold" nodeType="withEffect">
                                   <p:stCondLst>
                                     <p:cond delay="0"/>
                                   </p:stCondLst>
@@ -24396,7 +25088,7 @@
                                 </p:cTn>
                               </p:par>
                               <p:par>
-                                <p:cTn id="11" presetID="10" presetClass="entr" presetSubtype="0" fill="hold" grpId="0" nodeType="withEffect">
+                                <p:cTn id="11" presetID="10" presetClass="entr" presetSubtype="0" fill="hold" nodeType="withEffect">
                                   <p:stCondLst>
                                     <p:cond delay="0"/>
                                   </p:stCondLst>
@@ -24431,7 +25123,7 @@
                                 </p:cTn>
                               </p:par>
                               <p:par>
-                                <p:cTn id="14" presetID="10" presetClass="entr" presetSubtype="0" fill="hold" grpId="0" nodeType="withEffect">
+                                <p:cTn id="14" presetID="10" presetClass="entr" presetSubtype="0" fill="hold" nodeType="withEffect">
                                   <p:stCondLst>
                                     <p:cond delay="0"/>
                                   </p:stCondLst>
@@ -24466,7 +25158,7 @@
                                 </p:cTn>
                               </p:par>
                               <p:par>
-                                <p:cTn id="17" presetID="10" presetClass="entr" presetSubtype="0" fill="hold" grpId="0" nodeType="withEffect">
+                                <p:cTn id="17" presetID="10" presetClass="entr" presetSubtype="0" fill="hold" nodeType="withEffect">
                                   <p:stCondLst>
                                     <p:cond delay="0"/>
                                   </p:stCondLst>
@@ -24501,7 +25193,7 @@
                                 </p:cTn>
                               </p:par>
                               <p:par>
-                                <p:cTn id="20" presetID="10" presetClass="entr" presetSubtype="0" fill="hold" grpId="0" nodeType="withEffect">
+                                <p:cTn id="20" presetID="10" presetClass="entr" presetSubtype="0" fill="hold" nodeType="withEffect">
                                   <p:stCondLst>
                                     <p:cond delay="0"/>
                                   </p:stCondLst>
@@ -24554,7 +25246,7 @@
                             </p:stCondLst>
                             <p:childTnLst>
                               <p:par>
-                                <p:cTn id="25" presetID="10" presetClass="entr" presetSubtype="0" fill="hold" grpId="1" nodeType="clickEffect">
+                                <p:cTn id="25" presetID="10" presetClass="entr" presetSubtype="0" fill="hold" nodeType="clickEffect">
                                   <p:stCondLst>
                                     <p:cond delay="0"/>
                                   </p:stCondLst>
@@ -24589,7 +25281,7 @@
                                 </p:cTn>
                               </p:par>
                               <p:par>
-                                <p:cTn id="28" presetID="10" presetClass="entr" presetSubtype="0" fill="hold" grpId="1" nodeType="withEffect">
+                                <p:cTn id="28" presetID="10" presetClass="entr" presetSubtype="0" fill="hold" nodeType="withEffect">
                                   <p:stCondLst>
                                     <p:cond delay="0"/>
                                   </p:stCondLst>
@@ -24624,7 +25316,7 @@
                                 </p:cTn>
                               </p:par>
                               <p:par>
-                                <p:cTn id="31" presetID="10" presetClass="entr" presetSubtype="0" fill="hold" grpId="1" nodeType="withEffect">
+                                <p:cTn id="31" presetID="10" presetClass="entr" presetSubtype="0" fill="hold" nodeType="withEffect">
                                   <p:stCondLst>
                                     <p:cond delay="0"/>
                                   </p:stCondLst>
@@ -24659,7 +25351,7 @@
                                 </p:cTn>
                               </p:par>
                               <p:par>
-                                <p:cTn id="34" presetID="10" presetClass="entr" presetSubtype="0" fill="hold" grpId="1" nodeType="withEffect">
+                                <p:cTn id="34" presetID="10" presetClass="entr" presetSubtype="0" fill="hold" nodeType="withEffect">
                                   <p:stCondLst>
                                     <p:cond delay="0"/>
                                   </p:stCondLst>
@@ -24694,7 +25386,7 @@
                                 </p:cTn>
                               </p:par>
                               <p:par>
-                                <p:cTn id="37" presetID="10" presetClass="entr" presetSubtype="0" fill="hold" grpId="1" nodeType="withEffect">
+                                <p:cTn id="37" presetID="10" presetClass="entr" presetSubtype="0" fill="hold" nodeType="withEffect">
                                   <p:stCondLst>
                                     <p:cond delay="0"/>
                                   </p:stCondLst>
@@ -24729,7 +25421,7 @@
                                 </p:cTn>
                               </p:par>
                               <p:par>
-                                <p:cTn id="40" presetID="10" presetClass="entr" presetSubtype="0" fill="hold" grpId="1" nodeType="withEffect">
+                                <p:cTn id="40" presetID="10" presetClass="entr" presetSubtype="0" fill="hold" nodeType="withEffect">
                                   <p:stCondLst>
                                     <p:cond delay="0"/>
                                   </p:stCondLst>
@@ -24782,7 +25474,7 @@
                             </p:stCondLst>
                             <p:childTnLst>
                               <p:par>
-                                <p:cTn id="45" presetID="10" presetClass="entr" presetSubtype="0" fill="hold" grpId="2" nodeType="clickEffect">
+                                <p:cTn id="45" presetID="10" presetClass="entr" presetSubtype="0" fill="hold" nodeType="clickEffect">
                                   <p:stCondLst>
                                     <p:cond delay="0"/>
                                   </p:stCondLst>
@@ -24817,7 +25509,7 @@
                                 </p:cTn>
                               </p:par>
                               <p:par>
-                                <p:cTn id="48" presetID="10" presetClass="entr" presetSubtype="0" fill="hold" grpId="2" nodeType="withEffect">
+                                <p:cTn id="48" presetID="10" presetClass="entr" presetSubtype="0" fill="hold" nodeType="withEffect">
                                   <p:stCondLst>
                                     <p:cond delay="0"/>
                                   </p:stCondLst>
@@ -24852,7 +25544,7 @@
                                 </p:cTn>
                               </p:par>
                               <p:par>
-                                <p:cTn id="51" presetID="10" presetClass="entr" presetSubtype="0" fill="hold" grpId="2" nodeType="withEffect">
+                                <p:cTn id="51" presetID="10" presetClass="entr" presetSubtype="0" fill="hold" nodeType="withEffect">
                                   <p:stCondLst>
                                     <p:cond delay="0"/>
                                   </p:stCondLst>
@@ -24887,7 +25579,7 @@
                                 </p:cTn>
                               </p:par>
                               <p:par>
-                                <p:cTn id="54" presetID="10" presetClass="entr" presetSubtype="0" fill="hold" grpId="2" nodeType="withEffect">
+                                <p:cTn id="54" presetID="10" presetClass="entr" presetSubtype="0" fill="hold" nodeType="withEffect">
                                   <p:stCondLst>
                                     <p:cond delay="0"/>
                                   </p:stCondLst>
@@ -24922,7 +25614,7 @@
                                 </p:cTn>
                               </p:par>
                               <p:par>
-                                <p:cTn id="57" presetID="10" presetClass="entr" presetSubtype="0" fill="hold" grpId="2" nodeType="withEffect">
+                                <p:cTn id="57" presetID="10" presetClass="entr" presetSubtype="0" fill="hold" nodeType="withEffect">
                                   <p:stCondLst>
                                     <p:cond delay="0"/>
                                   </p:stCondLst>
@@ -24957,7 +25649,7 @@
                                 </p:cTn>
                               </p:par>
                               <p:par>
-                                <p:cTn id="60" presetID="10" presetClass="entr" presetSubtype="0" fill="hold" grpId="2" nodeType="withEffect">
+                                <p:cTn id="60" presetID="10" presetClass="entr" presetSubtype="0" fill="hold" nodeType="withEffect">
                                   <p:stCondLst>
                                     <p:cond delay="0"/>
                                   </p:stCondLst>
@@ -25010,7 +25702,7 @@
                             </p:stCondLst>
                             <p:childTnLst>
                               <p:par>
-                                <p:cTn id="65" presetID="10" presetClass="entr" presetSubtype="0" fill="hold" grpId="3" nodeType="clickEffect">
+                                <p:cTn id="65" presetID="10" presetClass="entr" presetSubtype="0" fill="hold" nodeType="clickEffect">
                                   <p:stCondLst>
                                     <p:cond delay="0"/>
                                   </p:stCondLst>
@@ -25045,7 +25737,7 @@
                                 </p:cTn>
                               </p:par>
                               <p:par>
-                                <p:cTn id="68" presetID="10" presetClass="entr" presetSubtype="0" fill="hold" grpId="3" nodeType="withEffect">
+                                <p:cTn id="68" presetID="10" presetClass="entr" presetSubtype="0" fill="hold" nodeType="withEffect">
                                   <p:stCondLst>
                                     <p:cond delay="0"/>
                                   </p:stCondLst>
@@ -25080,7 +25772,7 @@
                                 </p:cTn>
                               </p:par>
                               <p:par>
-                                <p:cTn id="71" presetID="10" presetClass="entr" presetSubtype="0" fill="hold" grpId="3" nodeType="withEffect">
+                                <p:cTn id="71" presetID="10" presetClass="entr" presetSubtype="0" fill="hold" nodeType="withEffect">
                                   <p:stCondLst>
                                     <p:cond delay="0"/>
                                   </p:stCondLst>
@@ -25115,7 +25807,7 @@
                                 </p:cTn>
                               </p:par>
                               <p:par>
-                                <p:cTn id="74" presetID="10" presetClass="entr" presetSubtype="0" fill="hold" grpId="3" nodeType="withEffect">
+                                <p:cTn id="74" presetID="10" presetClass="entr" presetSubtype="0" fill="hold" nodeType="withEffect">
                                   <p:stCondLst>
                                     <p:cond delay="0"/>
                                   </p:stCondLst>
@@ -25150,7 +25842,7 @@
                                 </p:cTn>
                               </p:par>
                               <p:par>
-                                <p:cTn id="77" presetID="10" presetClass="entr" presetSubtype="0" fill="hold" grpId="3" nodeType="withEffect">
+                                <p:cTn id="77" presetID="10" presetClass="entr" presetSubtype="0" fill="hold" nodeType="withEffect">
                                   <p:stCondLst>
                                     <p:cond delay="0"/>
                                   </p:stCondLst>
@@ -25185,7 +25877,7 @@
                                 </p:cTn>
                               </p:par>
                               <p:par>
-                                <p:cTn id="80" presetID="10" presetClass="entr" presetSubtype="0" fill="hold" grpId="3" nodeType="withEffect">
+                                <p:cTn id="80" presetID="10" presetClass="entr" presetSubtype="0" fill="hold" nodeType="withEffect">
                                   <p:stCondLst>
                                     <p:cond delay="0"/>
                                   </p:stCondLst>
@@ -25238,7 +25930,7 @@
                             </p:stCondLst>
                             <p:childTnLst>
                               <p:par>
-                                <p:cTn id="85" presetID="10" presetClass="entr" presetSubtype="0" fill="hold" grpId="4" nodeType="clickEffect">
+                                <p:cTn id="85" presetID="10" presetClass="entr" presetSubtype="0" fill="hold" nodeType="clickEffect">
                                   <p:stCondLst>
                                     <p:cond delay="0"/>
                                   </p:stCondLst>
@@ -25311,6 +26003,7 @@
         <a:solidFill>
           <a:srgbClr val="F4F8FC"/>
         </a:solidFill>
+        <a:effectLst/>
       </p:bgPr>
     </p:bg>
     <p:spTree>
@@ -25346,6 +26039,13 @@
           </a:solidFill>
           <a:ln/>
         </p:spPr>
+        <p:txBody>
+          <a:bodyPr/>
+          <a:lstStyle/>
+          <a:p>
+            <a:endParaRPr lang="en-US"/>
+          </a:p>
+        </p:txBody>
       </p:sp>
       <p:sp>
         <p:nvSpPr>
@@ -25366,6 +26066,13 @@
           </a:solidFill>
           <a:ln/>
         </p:spPr>
+        <p:txBody>
+          <a:bodyPr/>
+          <a:lstStyle/>
+          <a:p>
+            <a:endParaRPr lang="en-US"/>
+          </a:p>
+        </p:txBody>
       </p:sp>
       <p:sp>
         <p:nvSpPr>
@@ -25388,11 +26095,11 @@
           <a:bodyPr wrap="square" lIns="0" tIns="0" rIns="0" bIns="0" rtlCol="0" anchor="ctr"/>
           <a:lstStyle/>
           <a:p>
-            <a:pPr indent="0" marL="0">
+            <a:pPr marL="0" indent="0">
               <a:buNone/>
             </a:pPr>
             <a:r>
-              <a:rPr lang="en-US" sz="1200" b="1" spc="300" kern="0" dirty="0">
+              <a:rPr lang="en-US" sz="1200" b="1" kern="0" spc="300" dirty="0">
                 <a:solidFill>
                   <a:srgbClr val="0284C7"/>
                 </a:solidFill>
@@ -25427,7 +26134,7 @@
           <a:bodyPr wrap="square" lIns="0" tIns="0" rIns="0" bIns="0" rtlCol="0" anchor="ctr"/>
           <a:lstStyle/>
           <a:p>
-            <a:pPr indent="0" marL="0">
+            <a:pPr marL="0" indent="0">
               <a:buNone/>
             </a:pPr>
             <a:r>
@@ -25466,7 +26173,7 @@
           <a:bodyPr wrap="square" lIns="0" tIns="0" rIns="0" bIns="0" rtlCol="0" anchor="ctr"/>
           <a:lstStyle/>
           <a:p>
-            <a:pPr indent="0" marL="0">
+            <a:pPr marL="0" indent="0">
               <a:buNone/>
             </a:pPr>
             <a:r>
@@ -25510,13 +26217,20 @@
             <a:prstDash val="solid"/>
           </a:ln>
           <a:effectLst>
-            <a:outerShdw sx="100000" sy="100000" kx="0" ky="0" algn="bl" rotWithShape="0" blurRad="88900" dist="25400" dir="5400000">
+            <a:outerShdw blurRad="88900" dist="25400" dir="5400000" algn="bl" rotWithShape="0">
               <a:srgbClr val="8FA3BC">
                 <a:alpha val="30000"/>
               </a:srgbClr>
             </a:outerShdw>
           </a:effectLst>
         </p:spPr>
+        <p:txBody>
+          <a:bodyPr/>
+          <a:lstStyle/>
+          <a:p>
+            <a:endParaRPr lang="en-US"/>
+          </a:p>
+        </p:txBody>
       </p:sp>
       <p:sp>
         <p:nvSpPr>
@@ -25537,17 +26251,24 @@
           </a:solidFill>
           <a:ln/>
         </p:spPr>
+        <p:txBody>
+          <a:bodyPr/>
+          <a:lstStyle/>
+          <a:p>
+            <a:endParaRPr lang="en-US"/>
+          </a:p>
+        </p:txBody>
       </p:sp>
       <p:pic>
         <p:nvPicPr>
-          <p:cNvPr id="9" name="Image 0" descr="preencoded.png">    </p:cNvPr>
+          <p:cNvPr id="9" name="Image 0" descr="preencoded.png"/>
           <p:cNvPicPr>
             <a:picLocks noChangeAspect="1"/>
           </p:cNvPicPr>
           <p:nvPr/>
         </p:nvPicPr>
         <p:blipFill>
-          <a:blip r:embed="rId1"/>
+          <a:blip r:embed="rId3"/>
           <a:stretch>
             <a:fillRect/>
           </a:stretch>
@@ -25583,7 +26304,7 @@
           <a:bodyPr wrap="square" lIns="0" tIns="0" rIns="0" bIns="0" rtlCol="0" anchor="ctr"/>
           <a:lstStyle/>
           <a:p>
-            <a:pPr indent="0" marL="0">
+            <a:pPr marL="0" indent="0">
               <a:buNone/>
             </a:pPr>
             <a:r>
@@ -25627,13 +26348,20 @@
             <a:prstDash val="solid"/>
           </a:ln>
           <a:effectLst>
-            <a:outerShdw sx="100000" sy="100000" kx="0" ky="0" algn="bl" rotWithShape="0" blurRad="88900" dist="25400" dir="5400000">
+            <a:outerShdw blurRad="88900" dist="25400" dir="5400000" algn="bl" rotWithShape="0">
               <a:srgbClr val="8FA3BC">
                 <a:alpha val="30000"/>
               </a:srgbClr>
             </a:outerShdw>
           </a:effectLst>
         </p:spPr>
+        <p:txBody>
+          <a:bodyPr/>
+          <a:lstStyle/>
+          <a:p>
+            <a:endParaRPr lang="en-US"/>
+          </a:p>
+        </p:txBody>
       </p:sp>
       <p:sp>
         <p:nvSpPr>
@@ -25654,17 +26382,24 @@
           </a:solidFill>
           <a:ln/>
         </p:spPr>
+        <p:txBody>
+          <a:bodyPr/>
+          <a:lstStyle/>
+          <a:p>
+            <a:endParaRPr lang="en-US"/>
+          </a:p>
+        </p:txBody>
       </p:sp>
       <p:pic>
         <p:nvPicPr>
-          <p:cNvPr id="13" name="Image 1" descr="preencoded.png">    </p:cNvPr>
+          <p:cNvPr id="13" name="Image 1" descr="preencoded.png"/>
           <p:cNvPicPr>
             <a:picLocks noChangeAspect="1"/>
           </p:cNvPicPr>
           <p:nvPr/>
         </p:nvPicPr>
         <p:blipFill>
-          <a:blip r:embed="rId2"/>
+          <a:blip r:embed="rId4"/>
           <a:stretch>
             <a:fillRect/>
           </a:stretch>
@@ -25700,7 +26435,7 @@
           <a:bodyPr wrap="square" lIns="0" tIns="0" rIns="0" bIns="0" rtlCol="0" anchor="ctr"/>
           <a:lstStyle/>
           <a:p>
-            <a:pPr indent="0" marL="0">
+            <a:pPr marL="0" indent="0">
               <a:buNone/>
             </a:pPr>
             <a:r>
@@ -25744,13 +26479,20 @@
             <a:prstDash val="solid"/>
           </a:ln>
           <a:effectLst>
-            <a:outerShdw sx="100000" sy="100000" kx="0" ky="0" algn="bl" rotWithShape="0" blurRad="88900" dist="25400" dir="5400000">
+            <a:outerShdw blurRad="88900" dist="25400" dir="5400000" algn="bl" rotWithShape="0">
               <a:srgbClr val="8FA3BC">
                 <a:alpha val="30000"/>
               </a:srgbClr>
             </a:outerShdw>
           </a:effectLst>
         </p:spPr>
+        <p:txBody>
+          <a:bodyPr/>
+          <a:lstStyle/>
+          <a:p>
+            <a:endParaRPr lang="en-US"/>
+          </a:p>
+        </p:txBody>
       </p:sp>
       <p:sp>
         <p:nvSpPr>
@@ -25771,17 +26513,24 @@
           </a:solidFill>
           <a:ln/>
         </p:spPr>
+        <p:txBody>
+          <a:bodyPr/>
+          <a:lstStyle/>
+          <a:p>
+            <a:endParaRPr lang="en-US"/>
+          </a:p>
+        </p:txBody>
       </p:sp>
       <p:pic>
         <p:nvPicPr>
-          <p:cNvPr id="17" name="Image 2" descr="preencoded.png">    </p:cNvPr>
+          <p:cNvPr id="17" name="Image 2" descr="preencoded.png"/>
           <p:cNvPicPr>
             <a:picLocks noChangeAspect="1"/>
           </p:cNvPicPr>
           <p:nvPr/>
         </p:nvPicPr>
         <p:blipFill>
-          <a:blip r:embed="rId3"/>
+          <a:blip r:embed="rId5"/>
           <a:stretch>
             <a:fillRect/>
           </a:stretch>
@@ -25817,7 +26566,7 @@
           <a:bodyPr wrap="square" lIns="0" tIns="0" rIns="0" bIns="0" rtlCol="0" anchor="ctr"/>
           <a:lstStyle/>
           <a:p>
-            <a:pPr indent="0" marL="0">
+            <a:pPr marL="0" indent="0">
               <a:buNone/>
             </a:pPr>
             <a:r>
@@ -25861,13 +26610,20 @@
             <a:prstDash val="solid"/>
           </a:ln>
           <a:effectLst>
-            <a:outerShdw sx="100000" sy="100000" kx="0" ky="0" algn="bl" rotWithShape="0" blurRad="88900" dist="25400" dir="5400000">
+            <a:outerShdw blurRad="88900" dist="25400" dir="5400000" algn="bl" rotWithShape="0">
               <a:srgbClr val="8FA3BC">
                 <a:alpha val="30000"/>
               </a:srgbClr>
             </a:outerShdw>
           </a:effectLst>
         </p:spPr>
+        <p:txBody>
+          <a:bodyPr/>
+          <a:lstStyle/>
+          <a:p>
+            <a:endParaRPr lang="en-US"/>
+          </a:p>
+        </p:txBody>
       </p:sp>
       <p:sp>
         <p:nvSpPr>
@@ -25888,17 +26644,24 @@
           </a:solidFill>
           <a:ln/>
         </p:spPr>
+        <p:txBody>
+          <a:bodyPr/>
+          <a:lstStyle/>
+          <a:p>
+            <a:endParaRPr lang="en-US"/>
+          </a:p>
+        </p:txBody>
       </p:sp>
       <p:pic>
         <p:nvPicPr>
-          <p:cNvPr id="21" name="Image 3" descr="preencoded.png">    </p:cNvPr>
+          <p:cNvPr id="21" name="Image 3" descr="preencoded.png"/>
           <p:cNvPicPr>
             <a:picLocks noChangeAspect="1"/>
           </p:cNvPicPr>
           <p:nvPr/>
         </p:nvPicPr>
         <p:blipFill>
-          <a:blip r:embed="rId4"/>
+          <a:blip r:embed="rId6"/>
           <a:stretch>
             <a:fillRect/>
           </a:stretch>
@@ -25934,7 +26697,7 @@
           <a:bodyPr wrap="square" lIns="0" tIns="0" rIns="0" bIns="0" rtlCol="0" anchor="ctr"/>
           <a:lstStyle/>
           <a:p>
-            <a:pPr indent="0" marL="0">
+            <a:pPr marL="0" indent="0">
               <a:buNone/>
             </a:pPr>
             <a:r>
@@ -25978,13 +26741,20 @@
             <a:prstDash val="solid"/>
           </a:ln>
           <a:effectLst>
-            <a:outerShdw sx="100000" sy="100000" kx="0" ky="0" algn="bl" rotWithShape="0" blurRad="88900" dist="25400" dir="5400000">
+            <a:outerShdw blurRad="88900" dist="25400" dir="5400000" algn="bl" rotWithShape="0">
               <a:srgbClr val="8FA3BC">
                 <a:alpha val="30000"/>
               </a:srgbClr>
             </a:outerShdw>
           </a:effectLst>
         </p:spPr>
+        <p:txBody>
+          <a:bodyPr/>
+          <a:lstStyle/>
+          <a:p>
+            <a:endParaRPr lang="en-US"/>
+          </a:p>
+        </p:txBody>
       </p:sp>
       <p:sp>
         <p:nvSpPr>
@@ -26005,17 +26775,24 @@
           </a:solidFill>
           <a:ln/>
         </p:spPr>
+        <p:txBody>
+          <a:bodyPr/>
+          <a:lstStyle/>
+          <a:p>
+            <a:endParaRPr lang="en-US"/>
+          </a:p>
+        </p:txBody>
       </p:sp>
       <p:pic>
         <p:nvPicPr>
-          <p:cNvPr id="25" name="Image 4" descr="preencoded.png">    </p:cNvPr>
+          <p:cNvPr id="25" name="Image 4" descr="preencoded.png"/>
           <p:cNvPicPr>
             <a:picLocks noChangeAspect="1"/>
           </p:cNvPicPr>
           <p:nvPr/>
         </p:nvPicPr>
         <p:blipFill>
-          <a:blip r:embed="rId5"/>
+          <a:blip r:embed="rId7"/>
           <a:stretch>
             <a:fillRect/>
           </a:stretch>
@@ -26051,7 +26828,7 @@
           <a:bodyPr wrap="square" lIns="0" tIns="0" rIns="0" bIns="0" rtlCol="0" anchor="ctr"/>
           <a:lstStyle/>
           <a:p>
-            <a:pPr indent="0" marL="0">
+            <a:pPr marL="0" indent="0">
               <a:buNone/>
             </a:pPr>
             <a:r>
@@ -26095,13 +26872,20 @@
             <a:prstDash val="solid"/>
           </a:ln>
           <a:effectLst>
-            <a:outerShdw sx="100000" sy="100000" kx="0" ky="0" algn="bl" rotWithShape="0" blurRad="88900" dist="25400" dir="5400000">
+            <a:outerShdw blurRad="88900" dist="25400" dir="5400000" algn="bl" rotWithShape="0">
               <a:srgbClr val="8FA3BC">
                 <a:alpha val="30000"/>
               </a:srgbClr>
             </a:outerShdw>
           </a:effectLst>
         </p:spPr>
+        <p:txBody>
+          <a:bodyPr/>
+          <a:lstStyle/>
+          <a:p>
+            <a:endParaRPr lang="en-US"/>
+          </a:p>
+        </p:txBody>
       </p:sp>
       <p:sp>
         <p:nvSpPr>
@@ -26122,17 +26906,24 @@
           </a:solidFill>
           <a:ln/>
         </p:spPr>
+        <p:txBody>
+          <a:bodyPr/>
+          <a:lstStyle/>
+          <a:p>
+            <a:endParaRPr lang="en-US"/>
+          </a:p>
+        </p:txBody>
       </p:sp>
       <p:pic>
         <p:nvPicPr>
-          <p:cNvPr id="29" name="Image 5" descr="preencoded.png">    </p:cNvPr>
+          <p:cNvPr id="29" name="Image 5" descr="preencoded.png"/>
           <p:cNvPicPr>
             <a:picLocks noChangeAspect="1"/>
           </p:cNvPicPr>
           <p:nvPr/>
         </p:nvPicPr>
         <p:blipFill>
-          <a:blip r:embed="rId6"/>
+          <a:blip r:embed="rId8"/>
           <a:stretch>
             <a:fillRect/>
           </a:stretch>
@@ -26168,7 +26959,7 @@
           <a:bodyPr wrap="square" lIns="0" tIns="0" rIns="0" bIns="0" rtlCol="0" anchor="ctr"/>
           <a:lstStyle/>
           <a:p>
-            <a:pPr indent="0" marL="0">
+            <a:pPr marL="0" indent="0">
               <a:buNone/>
             </a:pPr>
             <a:r>
@@ -26207,7 +26998,7 @@
           <a:bodyPr wrap="square" lIns="0" tIns="0" rIns="0" bIns="0" rtlCol="0" anchor="ctr"/>
           <a:lstStyle/>
           <a:p>
-            <a:pPr algn="ctr" indent="0" marL="0">
+            <a:pPr marL="0" indent="0" algn="ctr">
               <a:buNone/>
             </a:pPr>
             <a:r>
@@ -26221,9 +27012,6 @@
               </a:rPr>
               <a:t>Get them from the </a:t>
             </a:r>
-            <a:pPr algn="ctr" indent="0" marL="0">
-              <a:buNone/>
-            </a:pPr>
             <a:r>
               <a:rPr lang="en-US" sz="1450" b="1" dirty="0">
                 <a:solidFill>
@@ -26235,9 +27023,6 @@
               </a:rPr>
               <a:t>Cursor Marketplace</a:t>
             </a:r>
-            <a:pPr algn="ctr" indent="0" marL="0">
-              <a:buNone/>
-            </a:pPr>
             <a:r>
               <a:rPr lang="en-US" sz="1450" b="1" dirty="0">
                 <a:solidFill>
@@ -26274,7 +27059,7 @@
           <a:bodyPr wrap="square" lIns="0" tIns="0" rIns="0" bIns="0" rtlCol="0" anchor="ctr"/>
           <a:lstStyle/>
           <a:p>
-            <a:pPr algn="l" indent="0" marL="0">
+            <a:pPr marL="0" indent="0" algn="l">
               <a:buNone/>
             </a:pPr>
             <a:r>
@@ -26318,7 +27103,7 @@
                             </p:stCondLst>
                             <p:childTnLst>
                               <p:par>
-                                <p:cTn id="5" presetID="10" presetClass="entr" presetSubtype="0" fill="hold" grpId="0" nodeType="clickEffect">
+                                <p:cTn id="5" presetID="10" presetClass="entr" presetSubtype="0" fill="hold" nodeType="clickEffect">
                                   <p:stCondLst>
                                     <p:cond delay="0"/>
                                   </p:stCondLst>
@@ -26371,7 +27156,7 @@
                             </p:stCondLst>
                             <p:childTnLst>
                               <p:par>
-                                <p:cTn id="10" presetID="10" presetClass="entr" presetSubtype="0" fill="hold" grpId="1" nodeType="clickEffect">
+                                <p:cTn id="10" presetID="10" presetClass="entr" presetSubtype="0" fill="hold" nodeType="clickEffect">
                                   <p:stCondLst>
                                     <p:cond delay="0"/>
                                   </p:stCondLst>
@@ -26406,7 +27191,7 @@
                                 </p:cTn>
                               </p:par>
                               <p:par>
-                                <p:cTn id="13" presetID="10" presetClass="entr" presetSubtype="0" fill="hold" grpId="1" nodeType="withEffect">
+                                <p:cTn id="13" presetID="10" presetClass="entr" presetSubtype="0" fill="hold" nodeType="withEffect">
                                   <p:stCondLst>
                                     <p:cond delay="0"/>
                                   </p:stCondLst>
@@ -26441,7 +27226,7 @@
                                 </p:cTn>
                               </p:par>
                               <p:par>
-                                <p:cTn id="16" presetID="10" presetClass="entr" presetSubtype="0" fill="hold" grpId="1" nodeType="withEffect">
+                                <p:cTn id="16" presetID="10" presetClass="entr" presetSubtype="0" fill="hold" nodeType="withEffect">
                                   <p:stCondLst>
                                     <p:cond delay="0"/>
                                   </p:stCondLst>
@@ -26476,7 +27261,7 @@
                                 </p:cTn>
                               </p:par>
                               <p:par>
-                                <p:cTn id="19" presetID="10" presetClass="entr" presetSubtype="0" fill="hold" grpId="1" nodeType="withEffect">
+                                <p:cTn id="19" presetID="10" presetClass="entr" presetSubtype="0" fill="hold" nodeType="withEffect">
                                   <p:stCondLst>
                                     <p:cond delay="0"/>
                                   </p:stCondLst>
@@ -26511,7 +27296,7 @@
                                 </p:cTn>
                               </p:par>
                               <p:par>
-                                <p:cTn id="22" presetID="10" presetClass="entr" presetSubtype="0" fill="hold" grpId="1" nodeType="withEffect">
+                                <p:cTn id="22" presetID="10" presetClass="entr" presetSubtype="0" fill="hold" nodeType="withEffect">
                                   <p:stCondLst>
                                     <p:cond delay="0"/>
                                   </p:stCondLst>
@@ -26546,7 +27331,7 @@
                                 </p:cTn>
                               </p:par>
                               <p:par>
-                                <p:cTn id="25" presetID="10" presetClass="entr" presetSubtype="0" fill="hold" grpId="1" nodeType="withEffect">
+                                <p:cTn id="25" presetID="10" presetClass="entr" presetSubtype="0" fill="hold" nodeType="withEffect">
                                   <p:stCondLst>
                                     <p:cond delay="0"/>
                                   </p:stCondLst>
@@ -26581,7 +27366,7 @@
                                 </p:cTn>
                               </p:par>
                               <p:par>
-                                <p:cTn id="28" presetID="10" presetClass="entr" presetSubtype="0" fill="hold" grpId="1" nodeType="withEffect">
+                                <p:cTn id="28" presetID="10" presetClass="entr" presetSubtype="0" fill="hold" nodeType="withEffect">
                                   <p:stCondLst>
                                     <p:cond delay="0"/>
                                   </p:stCondLst>
@@ -26616,7 +27401,7 @@
                                 </p:cTn>
                               </p:par>
                               <p:par>
-                                <p:cTn id="31" presetID="10" presetClass="entr" presetSubtype="0" fill="hold" grpId="1" nodeType="withEffect">
+                                <p:cTn id="31" presetID="10" presetClass="entr" presetSubtype="0" fill="hold" nodeType="withEffect">
                                   <p:stCondLst>
                                     <p:cond delay="0"/>
                                   </p:stCondLst>
@@ -26651,7 +27436,7 @@
                                 </p:cTn>
                               </p:par>
                               <p:par>
-                                <p:cTn id="34" presetID="10" presetClass="entr" presetSubtype="0" fill="hold" grpId="1" nodeType="withEffect">
+                                <p:cTn id="34" presetID="10" presetClass="entr" presetSubtype="0" fill="hold" nodeType="withEffect">
                                   <p:stCondLst>
                                     <p:cond delay="0"/>
                                   </p:stCondLst>
@@ -26686,7 +27471,7 @@
                                 </p:cTn>
                               </p:par>
                               <p:par>
-                                <p:cTn id="37" presetID="10" presetClass="entr" presetSubtype="0" fill="hold" grpId="1" nodeType="withEffect">
+                                <p:cTn id="37" presetID="10" presetClass="entr" presetSubtype="0" fill="hold" nodeType="withEffect">
                                   <p:stCondLst>
                                     <p:cond delay="0"/>
                                   </p:stCondLst>
@@ -26721,7 +27506,7 @@
                                 </p:cTn>
                               </p:par>
                               <p:par>
-                                <p:cTn id="40" presetID="10" presetClass="entr" presetSubtype="0" fill="hold" grpId="1" nodeType="withEffect">
+                                <p:cTn id="40" presetID="10" presetClass="entr" presetSubtype="0" fill="hold" nodeType="withEffect">
                                   <p:stCondLst>
                                     <p:cond delay="0"/>
                                   </p:stCondLst>
@@ -26756,7 +27541,7 @@
                                 </p:cTn>
                               </p:par>
                               <p:par>
-                                <p:cTn id="43" presetID="10" presetClass="entr" presetSubtype="0" fill="hold" grpId="1" nodeType="withEffect">
+                                <p:cTn id="43" presetID="10" presetClass="entr" presetSubtype="0" fill="hold" nodeType="withEffect">
                                   <p:stCondLst>
                                     <p:cond delay="0"/>
                                   </p:stCondLst>
@@ -26809,7 +27594,7 @@
                             </p:stCondLst>
                             <p:childTnLst>
                               <p:par>
-                                <p:cTn id="48" presetID="10" presetClass="entr" presetSubtype="0" fill="hold" grpId="2" nodeType="clickEffect">
+                                <p:cTn id="48" presetID="10" presetClass="entr" presetSubtype="0" fill="hold" nodeType="clickEffect">
                                   <p:stCondLst>
                                     <p:cond delay="0"/>
                                   </p:stCondLst>
@@ -26844,7 +27629,7 @@
                                 </p:cTn>
                               </p:par>
                               <p:par>
-                                <p:cTn id="51" presetID="10" presetClass="entr" presetSubtype="0" fill="hold" grpId="2" nodeType="withEffect">
+                                <p:cTn id="51" presetID="10" presetClass="entr" presetSubtype="0" fill="hold" nodeType="withEffect">
                                   <p:stCondLst>
                                     <p:cond delay="0"/>
                                   </p:stCondLst>
@@ -26879,7 +27664,7 @@
                                 </p:cTn>
                               </p:par>
                               <p:par>
-                                <p:cTn id="54" presetID="10" presetClass="entr" presetSubtype="0" fill="hold" grpId="2" nodeType="withEffect">
+                                <p:cTn id="54" presetID="10" presetClass="entr" presetSubtype="0" fill="hold" nodeType="withEffect">
                                   <p:stCondLst>
                                     <p:cond delay="0"/>
                                   </p:stCondLst>
@@ -26914,7 +27699,7 @@
                                 </p:cTn>
                               </p:par>
                               <p:par>
-                                <p:cTn id="57" presetID="10" presetClass="entr" presetSubtype="0" fill="hold" grpId="2" nodeType="withEffect">
+                                <p:cTn id="57" presetID="10" presetClass="entr" presetSubtype="0" fill="hold" nodeType="withEffect">
                                   <p:stCondLst>
                                     <p:cond delay="0"/>
                                   </p:stCondLst>
@@ -26949,7 +27734,7 @@
                                 </p:cTn>
                               </p:par>
                               <p:par>
-                                <p:cTn id="60" presetID="10" presetClass="entr" presetSubtype="0" fill="hold" grpId="2" nodeType="withEffect">
+                                <p:cTn id="60" presetID="10" presetClass="entr" presetSubtype="0" fill="hold" nodeType="withEffect">
                                   <p:stCondLst>
                                     <p:cond delay="0"/>
                                   </p:stCondLst>
@@ -26984,7 +27769,7 @@
                                 </p:cTn>
                               </p:par>
                               <p:par>
-                                <p:cTn id="63" presetID="10" presetClass="entr" presetSubtype="0" fill="hold" grpId="2" nodeType="withEffect">
+                                <p:cTn id="63" presetID="10" presetClass="entr" presetSubtype="0" fill="hold" nodeType="withEffect">
                                   <p:stCondLst>
                                     <p:cond delay="0"/>
                                   </p:stCondLst>
@@ -27019,7 +27804,7 @@
                                 </p:cTn>
                               </p:par>
                               <p:par>
-                                <p:cTn id="66" presetID="10" presetClass="entr" presetSubtype="0" fill="hold" grpId="2" nodeType="withEffect">
+                                <p:cTn id="66" presetID="10" presetClass="entr" presetSubtype="0" fill="hold" nodeType="withEffect">
                                   <p:stCondLst>
                                     <p:cond delay="0"/>
                                   </p:stCondLst>
@@ -27054,7 +27839,7 @@
                                 </p:cTn>
                               </p:par>
                               <p:par>
-                                <p:cTn id="69" presetID="10" presetClass="entr" presetSubtype="0" fill="hold" grpId="2" nodeType="withEffect">
+                                <p:cTn id="69" presetID="10" presetClass="entr" presetSubtype="0" fill="hold" nodeType="withEffect">
                                   <p:stCondLst>
                                     <p:cond delay="0"/>
                                   </p:stCondLst>
@@ -27089,7 +27874,7 @@
                                 </p:cTn>
                               </p:par>
                               <p:par>
-                                <p:cTn id="72" presetID="10" presetClass="entr" presetSubtype="0" fill="hold" grpId="2" nodeType="withEffect">
+                                <p:cTn id="72" presetID="10" presetClass="entr" presetSubtype="0" fill="hold" nodeType="withEffect">
                                   <p:stCondLst>
                                     <p:cond delay="0"/>
                                   </p:stCondLst>
@@ -27124,7 +27909,7 @@
                                 </p:cTn>
                               </p:par>
                               <p:par>
-                                <p:cTn id="75" presetID="10" presetClass="entr" presetSubtype="0" fill="hold" grpId="2" nodeType="withEffect">
+                                <p:cTn id="75" presetID="10" presetClass="entr" presetSubtype="0" fill="hold" nodeType="withEffect">
                                   <p:stCondLst>
                                     <p:cond delay="0"/>
                                   </p:stCondLst>
@@ -27159,7 +27944,7 @@
                                 </p:cTn>
                               </p:par>
                               <p:par>
-                                <p:cTn id="78" presetID="10" presetClass="entr" presetSubtype="0" fill="hold" grpId="2" nodeType="withEffect">
+                                <p:cTn id="78" presetID="10" presetClass="entr" presetSubtype="0" fill="hold" nodeType="withEffect">
                                   <p:stCondLst>
                                     <p:cond delay="0"/>
                                   </p:stCondLst>
@@ -27194,7 +27979,7 @@
                                 </p:cTn>
                               </p:par>
                               <p:par>
-                                <p:cTn id="81" presetID="10" presetClass="entr" presetSubtype="0" fill="hold" grpId="2" nodeType="withEffect">
+                                <p:cTn id="81" presetID="10" presetClass="entr" presetSubtype="0" fill="hold" nodeType="withEffect">
                                   <p:stCondLst>
                                     <p:cond delay="0"/>
                                   </p:stCondLst>
@@ -27247,7 +28032,7 @@
                             </p:stCondLst>
                             <p:childTnLst>
                               <p:par>
-                                <p:cTn id="86" presetID="10" presetClass="entr" presetSubtype="0" fill="hold" grpId="3" nodeType="clickEffect">
+                                <p:cTn id="86" presetID="10" presetClass="entr" presetSubtype="0" fill="hold" nodeType="clickEffect">
                                   <p:stCondLst>
                                     <p:cond delay="0"/>
                                   </p:stCondLst>
@@ -27320,6 +28105,7 @@
         <a:solidFill>
           <a:srgbClr val="F4F8FC"/>
         </a:solidFill>
+        <a:effectLst/>
       </p:bgPr>
     </p:bg>
     <p:spTree>
@@ -27355,6 +28141,13 @@
           </a:solidFill>
           <a:ln/>
         </p:spPr>
+        <p:txBody>
+          <a:bodyPr/>
+          <a:lstStyle/>
+          <a:p>
+            <a:endParaRPr lang="en-US"/>
+          </a:p>
+        </p:txBody>
       </p:sp>
       <p:sp>
         <p:nvSpPr>
@@ -27375,6 +28168,13 @@
           </a:solidFill>
           <a:ln/>
         </p:spPr>
+        <p:txBody>
+          <a:bodyPr/>
+          <a:lstStyle/>
+          <a:p>
+            <a:endParaRPr lang="en-US"/>
+          </a:p>
+        </p:txBody>
       </p:sp>
       <p:sp>
         <p:nvSpPr>
@@ -27397,11 +28197,11 @@
           <a:bodyPr wrap="square" lIns="0" tIns="0" rIns="0" bIns="0" rtlCol="0" anchor="ctr"/>
           <a:lstStyle/>
           <a:p>
-            <a:pPr indent="0" marL="0">
+            <a:pPr marL="0" indent="0">
               <a:buNone/>
             </a:pPr>
             <a:r>
-              <a:rPr lang="en-US" sz="1200" b="1" spc="300" kern="0" dirty="0">
+              <a:rPr lang="en-US" sz="1200" b="1" kern="0" spc="300" dirty="0">
                 <a:solidFill>
                   <a:srgbClr val="0284C7"/>
                 </a:solidFill>
@@ -27436,7 +28236,7 @@
           <a:bodyPr wrap="square" lIns="0" tIns="0" rIns="0" bIns="0" rtlCol="0" anchor="ctr"/>
           <a:lstStyle/>
           <a:p>
-            <a:pPr indent="0" marL="0">
+            <a:pPr marL="0" indent="0">
               <a:buNone/>
             </a:pPr>
             <a:r>
@@ -27480,13 +28280,20 @@
             <a:prstDash val="solid"/>
           </a:ln>
           <a:effectLst>
-            <a:outerShdw sx="100000" sy="100000" kx="0" ky="0" algn="bl" rotWithShape="0" blurRad="88900" dist="25400" dir="5400000">
+            <a:outerShdw blurRad="88900" dist="25400" dir="5400000" algn="bl" rotWithShape="0">
               <a:srgbClr val="8FA3BC">
                 <a:alpha val="30000"/>
               </a:srgbClr>
             </a:outerShdw>
           </a:effectLst>
         </p:spPr>
+        <p:txBody>
+          <a:bodyPr/>
+          <a:lstStyle/>
+          <a:p>
+            <a:endParaRPr lang="en-US"/>
+          </a:p>
+        </p:txBody>
       </p:sp>
       <p:sp>
         <p:nvSpPr>
@@ -27507,17 +28314,24 @@
           </a:solidFill>
           <a:ln/>
         </p:spPr>
+        <p:txBody>
+          <a:bodyPr/>
+          <a:lstStyle/>
+          <a:p>
+            <a:endParaRPr lang="en-US"/>
+          </a:p>
+        </p:txBody>
       </p:sp>
       <p:pic>
         <p:nvPicPr>
-          <p:cNvPr id="8" name="Image 0" descr="preencoded.png">    </p:cNvPr>
+          <p:cNvPr id="8" name="Image 0" descr="preencoded.png"/>
           <p:cNvPicPr>
             <a:picLocks noChangeAspect="1"/>
           </p:cNvPicPr>
           <p:nvPr/>
         </p:nvPicPr>
         <p:blipFill>
-          <a:blip r:embed="rId1"/>
+          <a:blip r:embed="rId3"/>
           <a:stretch>
             <a:fillRect/>
           </a:stretch>
@@ -27553,7 +28367,7 @@
           <a:bodyPr wrap="square" lIns="0" tIns="0" rIns="0" bIns="0" rtlCol="0" anchor="ctr"/>
           <a:lstStyle/>
           <a:p>
-            <a:pPr algn="ctr" indent="0" marL="0">
+            <a:pPr marL="0" indent="0" algn="ctr">
               <a:buNone/>
             </a:pPr>
             <a:r>
@@ -27570,7 +28384,7 @@
             <a:endParaRPr lang="en-US" sz="1900" dirty="0"/>
           </a:p>
           <a:p>
-            <a:pPr algn="ctr" indent="0" marL="0">
+            <a:pPr marL="0" indent="0" algn="ctr">
               <a:buNone/>
             </a:pPr>
             <a:r>
@@ -27614,13 +28428,20 @@
             <a:prstDash val="solid"/>
           </a:ln>
           <a:effectLst>
-            <a:outerShdw sx="100000" sy="100000" kx="0" ky="0" algn="bl" rotWithShape="0" blurRad="88900" dist="25400" dir="5400000">
+            <a:outerShdw blurRad="88900" dist="25400" dir="5400000" algn="bl" rotWithShape="0">
               <a:srgbClr val="8FA3BC">
                 <a:alpha val="30000"/>
               </a:srgbClr>
             </a:outerShdw>
           </a:effectLst>
         </p:spPr>
+        <p:txBody>
+          <a:bodyPr/>
+          <a:lstStyle/>
+          <a:p>
+            <a:endParaRPr lang="en-US"/>
+          </a:p>
+        </p:txBody>
       </p:sp>
       <p:sp>
         <p:nvSpPr>
@@ -27641,17 +28462,24 @@
           </a:solidFill>
           <a:ln/>
         </p:spPr>
+        <p:txBody>
+          <a:bodyPr/>
+          <a:lstStyle/>
+          <a:p>
+            <a:endParaRPr lang="en-US"/>
+          </a:p>
+        </p:txBody>
       </p:sp>
       <p:pic>
         <p:nvPicPr>
-          <p:cNvPr id="12" name="Image 1" descr="preencoded.png">    </p:cNvPr>
+          <p:cNvPr id="12" name="Image 1" descr="preencoded.png"/>
           <p:cNvPicPr>
             <a:picLocks noChangeAspect="1"/>
           </p:cNvPicPr>
           <p:nvPr/>
         </p:nvPicPr>
         <p:blipFill>
-          <a:blip r:embed="rId2"/>
+          <a:blip r:embed="rId4"/>
           <a:stretch>
             <a:fillRect/>
           </a:stretch>
@@ -27687,7 +28515,7 @@
           <a:bodyPr wrap="square" lIns="0" tIns="0" rIns="0" bIns="0" rtlCol="0" anchor="ctr"/>
           <a:lstStyle/>
           <a:p>
-            <a:pPr indent="0" marL="0">
+            <a:pPr marL="0" indent="0">
               <a:buNone/>
             </a:pPr>
             <a:r>
@@ -27726,7 +28554,7 @@
           <a:bodyPr wrap="square" lIns="0" tIns="0" rIns="0" bIns="0" rtlCol="0" anchor="ctr"/>
           <a:lstStyle/>
           <a:p>
-            <a:pPr indent="0" marL="0">
+            <a:pPr marL="0" indent="0">
               <a:buNone/>
             </a:pPr>
             <a:r>
@@ -27770,13 +28598,20 @@
             <a:prstDash val="solid"/>
           </a:ln>
           <a:effectLst>
-            <a:outerShdw sx="100000" sy="100000" kx="0" ky="0" algn="bl" rotWithShape="0" blurRad="88900" dist="25400" dir="5400000">
+            <a:outerShdw blurRad="88900" dist="25400" dir="5400000" algn="bl" rotWithShape="0">
               <a:srgbClr val="8FA3BC">
                 <a:alpha val="30000"/>
               </a:srgbClr>
             </a:outerShdw>
           </a:effectLst>
         </p:spPr>
+        <p:txBody>
+          <a:bodyPr/>
+          <a:lstStyle/>
+          <a:p>
+            <a:endParaRPr lang="en-US"/>
+          </a:p>
+        </p:txBody>
       </p:sp>
       <p:sp>
         <p:nvSpPr>
@@ -27797,17 +28632,24 @@
           </a:solidFill>
           <a:ln/>
         </p:spPr>
+        <p:txBody>
+          <a:bodyPr/>
+          <a:lstStyle/>
+          <a:p>
+            <a:endParaRPr lang="en-US"/>
+          </a:p>
+        </p:txBody>
       </p:sp>
       <p:pic>
         <p:nvPicPr>
-          <p:cNvPr id="17" name="Image 2" descr="preencoded.png">    </p:cNvPr>
+          <p:cNvPr id="17" name="Image 2" descr="preencoded.png"/>
           <p:cNvPicPr>
             <a:picLocks noChangeAspect="1"/>
           </p:cNvPicPr>
           <p:nvPr/>
         </p:nvPicPr>
         <p:blipFill>
-          <a:blip r:embed="rId3"/>
+          <a:blip r:embed="rId5"/>
           <a:stretch>
             <a:fillRect/>
           </a:stretch>
@@ -27843,7 +28685,7 @@
           <a:bodyPr wrap="square" lIns="0" tIns="0" rIns="0" bIns="0" rtlCol="0" anchor="ctr"/>
           <a:lstStyle/>
           <a:p>
-            <a:pPr indent="0" marL="0">
+            <a:pPr marL="0" indent="0">
               <a:buNone/>
             </a:pPr>
             <a:r>
@@ -27882,7 +28724,7 @@
           <a:bodyPr wrap="square" lIns="0" tIns="0" rIns="0" bIns="0" rtlCol="0" anchor="ctr"/>
           <a:lstStyle/>
           <a:p>
-            <a:pPr indent="0" marL="0">
+            <a:pPr marL="0" indent="0">
               <a:buNone/>
             </a:pPr>
             <a:r>
@@ -27926,13 +28768,20 @@
             <a:prstDash val="solid"/>
           </a:ln>
           <a:effectLst>
-            <a:outerShdw sx="100000" sy="100000" kx="0" ky="0" algn="bl" rotWithShape="0" blurRad="88900" dist="25400" dir="5400000">
+            <a:outerShdw blurRad="88900" dist="25400" dir="5400000" algn="bl" rotWithShape="0">
               <a:srgbClr val="8FA3BC">
                 <a:alpha val="30000"/>
               </a:srgbClr>
             </a:outerShdw>
           </a:effectLst>
         </p:spPr>
+        <p:txBody>
+          <a:bodyPr/>
+          <a:lstStyle/>
+          <a:p>
+            <a:endParaRPr lang="en-US"/>
+          </a:p>
+        </p:txBody>
       </p:sp>
       <p:sp>
         <p:nvSpPr>
@@ -27953,17 +28802,24 @@
           </a:solidFill>
           <a:ln/>
         </p:spPr>
+        <p:txBody>
+          <a:bodyPr/>
+          <a:lstStyle/>
+          <a:p>
+            <a:endParaRPr lang="en-US"/>
+          </a:p>
+        </p:txBody>
       </p:sp>
       <p:pic>
         <p:nvPicPr>
-          <p:cNvPr id="22" name="Image 3" descr="preencoded.png">    </p:cNvPr>
+          <p:cNvPr id="22" name="Image 3" descr="preencoded.png"/>
           <p:cNvPicPr>
             <a:picLocks noChangeAspect="1"/>
           </p:cNvPicPr>
           <p:nvPr/>
         </p:nvPicPr>
         <p:blipFill>
-          <a:blip r:embed="rId4"/>
+          <a:blip r:embed="rId6"/>
           <a:stretch>
             <a:fillRect/>
           </a:stretch>
@@ -27999,7 +28855,7 @@
           <a:bodyPr wrap="square" lIns="0" tIns="0" rIns="0" bIns="0" rtlCol="0" anchor="ctr"/>
           <a:lstStyle/>
           <a:p>
-            <a:pPr indent="0" marL="0">
+            <a:pPr marL="0" indent="0">
               <a:buNone/>
             </a:pPr>
             <a:r>
@@ -28038,7 +28894,7 @@
           <a:bodyPr wrap="square" lIns="0" tIns="0" rIns="0" bIns="0" rtlCol="0" anchor="ctr"/>
           <a:lstStyle/>
           <a:p>
-            <a:pPr indent="0" marL="0">
+            <a:pPr marL="0" indent="0">
               <a:buNone/>
             </a:pPr>
             <a:r>
@@ -28077,7 +28933,7 @@
           <a:bodyPr wrap="square" lIns="0" tIns="0" rIns="0" bIns="0" rtlCol="0" anchor="ctr"/>
           <a:lstStyle/>
           <a:p>
-            <a:pPr algn="ctr" indent="0" marL="0">
+            <a:pPr marL="0" indent="0" algn="ctr">
               <a:buNone/>
             </a:pPr>
             <a:r>
@@ -28091,9 +28947,6 @@
               </a:rPr>
               <a:t>The most popular plugin  </a:t>
             </a:r>
-            <a:pPr algn="ctr" indent="0" marL="0">
-              <a:buNone/>
-            </a:pPr>
             <a:r>
               <a:rPr lang="en-US" sz="1400" b="1" dirty="0">
                 <a:solidFill>
@@ -28130,7 +28983,7 @@
           <a:bodyPr wrap="square" lIns="0" tIns="0" rIns="0" bIns="0" rtlCol="0" anchor="ctr"/>
           <a:lstStyle/>
           <a:p>
-            <a:pPr algn="l" indent="0" marL="0">
+            <a:pPr marL="0" indent="0" algn="l">
               <a:buNone/>
             </a:pPr>
             <a:r>
@@ -28174,7 +29027,7 @@
                             </p:stCondLst>
                             <p:childTnLst>
                               <p:par>
-                                <p:cTn id="5" presetID="10" presetClass="entr" presetSubtype="0" fill="hold" grpId="0" nodeType="clickEffect">
+                                <p:cTn id="5" presetID="10" presetClass="entr" presetSubtype="0" fill="hold" nodeType="clickEffect">
                                   <p:stCondLst>
                                     <p:cond delay="0"/>
                                   </p:stCondLst>
@@ -28209,7 +29062,7 @@
                                 </p:cTn>
                               </p:par>
                               <p:par>
-                                <p:cTn id="8" presetID="10" presetClass="entr" presetSubtype="0" fill="hold" grpId="0" nodeType="withEffect">
+                                <p:cTn id="8" presetID="10" presetClass="entr" presetSubtype="0" fill="hold" nodeType="withEffect">
                                   <p:stCondLst>
                                     <p:cond delay="0"/>
                                   </p:stCondLst>
@@ -28244,7 +29097,7 @@
                                 </p:cTn>
                               </p:par>
                               <p:par>
-                                <p:cTn id="11" presetID="10" presetClass="entr" presetSubtype="0" fill="hold" grpId="0" nodeType="withEffect">
+                                <p:cTn id="11" presetID="10" presetClass="entr" presetSubtype="0" fill="hold" nodeType="withEffect">
                                   <p:stCondLst>
                                     <p:cond delay="0"/>
                                   </p:stCondLst>
@@ -28279,7 +29132,7 @@
                                 </p:cTn>
                               </p:par>
                               <p:par>
-                                <p:cTn id="14" presetID="10" presetClass="entr" presetSubtype="0" fill="hold" grpId="0" nodeType="withEffect">
+                                <p:cTn id="14" presetID="10" presetClass="entr" presetSubtype="0" fill="hold" nodeType="withEffect">
                                   <p:stCondLst>
                                     <p:cond delay="0"/>
                                   </p:stCondLst>
@@ -28332,7 +29185,7 @@
                             </p:stCondLst>
                             <p:childTnLst>
                               <p:par>
-                                <p:cTn id="19" presetID="10" presetClass="entr" presetSubtype="0" fill="hold" grpId="1" nodeType="clickEffect">
+                                <p:cTn id="19" presetID="10" presetClass="entr" presetSubtype="0" fill="hold" nodeType="clickEffect">
                                   <p:stCondLst>
                                     <p:cond delay="0"/>
                                   </p:stCondLst>
@@ -28367,7 +29220,7 @@
                                 </p:cTn>
                               </p:par>
                               <p:par>
-                                <p:cTn id="22" presetID="10" presetClass="entr" presetSubtype="0" fill="hold" grpId="1" nodeType="withEffect">
+                                <p:cTn id="22" presetID="10" presetClass="entr" presetSubtype="0" fill="hold" nodeType="withEffect">
                                   <p:stCondLst>
                                     <p:cond delay="0"/>
                                   </p:stCondLst>
@@ -28402,7 +29255,7 @@
                                 </p:cTn>
                               </p:par>
                               <p:par>
-                                <p:cTn id="25" presetID="10" presetClass="entr" presetSubtype="0" fill="hold" grpId="1" nodeType="withEffect">
+                                <p:cTn id="25" presetID="10" presetClass="entr" presetSubtype="0" fill="hold" nodeType="withEffect">
                                   <p:stCondLst>
                                     <p:cond delay="0"/>
                                   </p:stCondLst>
@@ -28437,7 +29290,7 @@
                                 </p:cTn>
                               </p:par>
                               <p:par>
-                                <p:cTn id="28" presetID="10" presetClass="entr" presetSubtype="0" fill="hold" grpId="1" nodeType="withEffect">
+                                <p:cTn id="28" presetID="10" presetClass="entr" presetSubtype="0" fill="hold" nodeType="withEffect">
                                   <p:stCondLst>
                                     <p:cond delay="0"/>
                                   </p:stCondLst>
@@ -28472,7 +29325,7 @@
                                 </p:cTn>
                               </p:par>
                               <p:par>
-                                <p:cTn id="31" presetID="10" presetClass="entr" presetSubtype="0" fill="hold" grpId="1" nodeType="withEffect">
+                                <p:cTn id="31" presetID="10" presetClass="entr" presetSubtype="0" fill="hold" nodeType="withEffect">
                                   <p:stCondLst>
                                     <p:cond delay="0"/>
                                   </p:stCondLst>
@@ -28525,7 +29378,7 @@
                             </p:stCondLst>
                             <p:childTnLst>
                               <p:par>
-                                <p:cTn id="36" presetID="10" presetClass="entr" presetSubtype="0" fill="hold" grpId="2" nodeType="clickEffect">
+                                <p:cTn id="36" presetID="10" presetClass="entr" presetSubtype="0" fill="hold" nodeType="clickEffect">
                                   <p:stCondLst>
                                     <p:cond delay="0"/>
                                   </p:stCondLst>
@@ -28560,7 +29413,7 @@
                                 </p:cTn>
                               </p:par>
                               <p:par>
-                                <p:cTn id="39" presetID="10" presetClass="entr" presetSubtype="0" fill="hold" grpId="2" nodeType="withEffect">
+                                <p:cTn id="39" presetID="10" presetClass="entr" presetSubtype="0" fill="hold" nodeType="withEffect">
                                   <p:stCondLst>
                                     <p:cond delay="0"/>
                                   </p:stCondLst>
@@ -28595,7 +29448,7 @@
                                 </p:cTn>
                               </p:par>
                               <p:par>
-                                <p:cTn id="42" presetID="10" presetClass="entr" presetSubtype="0" fill="hold" grpId="2" nodeType="withEffect">
+                                <p:cTn id="42" presetID="10" presetClass="entr" presetSubtype="0" fill="hold" nodeType="withEffect">
                                   <p:stCondLst>
                                     <p:cond delay="0"/>
                                   </p:stCondLst>
@@ -28630,7 +29483,7 @@
                                 </p:cTn>
                               </p:par>
                               <p:par>
-                                <p:cTn id="45" presetID="10" presetClass="entr" presetSubtype="0" fill="hold" grpId="2" nodeType="withEffect">
+                                <p:cTn id="45" presetID="10" presetClass="entr" presetSubtype="0" fill="hold" nodeType="withEffect">
                                   <p:stCondLst>
                                     <p:cond delay="0"/>
                                   </p:stCondLst>
@@ -28665,7 +29518,7 @@
                                 </p:cTn>
                               </p:par>
                               <p:par>
-                                <p:cTn id="48" presetID="10" presetClass="entr" presetSubtype="0" fill="hold" grpId="2" nodeType="withEffect">
+                                <p:cTn id="48" presetID="10" presetClass="entr" presetSubtype="0" fill="hold" nodeType="withEffect">
                                   <p:stCondLst>
                                     <p:cond delay="0"/>
                                   </p:stCondLst>
@@ -28718,7 +29571,7 @@
                             </p:stCondLst>
                             <p:childTnLst>
                               <p:par>
-                                <p:cTn id="53" presetID="10" presetClass="entr" presetSubtype="0" fill="hold" grpId="3" nodeType="clickEffect">
+                                <p:cTn id="53" presetID="10" presetClass="entr" presetSubtype="0" fill="hold" nodeType="clickEffect">
                                   <p:stCondLst>
                                     <p:cond delay="0"/>
                                   </p:stCondLst>
@@ -28753,7 +29606,7 @@
                                 </p:cTn>
                               </p:par>
                               <p:par>
-                                <p:cTn id="56" presetID="10" presetClass="entr" presetSubtype="0" fill="hold" grpId="3" nodeType="withEffect">
+                                <p:cTn id="56" presetID="10" presetClass="entr" presetSubtype="0" fill="hold" nodeType="withEffect">
                                   <p:stCondLst>
                                     <p:cond delay="0"/>
                                   </p:stCondLst>
@@ -28788,7 +29641,7 @@
                                 </p:cTn>
                               </p:par>
                               <p:par>
-                                <p:cTn id="59" presetID="10" presetClass="entr" presetSubtype="0" fill="hold" grpId="3" nodeType="withEffect">
+                                <p:cTn id="59" presetID="10" presetClass="entr" presetSubtype="0" fill="hold" nodeType="withEffect">
                                   <p:stCondLst>
                                     <p:cond delay="0"/>
                                   </p:stCondLst>
@@ -28823,7 +29676,7 @@
                                 </p:cTn>
                               </p:par>
                               <p:par>
-                                <p:cTn id="62" presetID="10" presetClass="entr" presetSubtype="0" fill="hold" grpId="3" nodeType="withEffect">
+                                <p:cTn id="62" presetID="10" presetClass="entr" presetSubtype="0" fill="hold" nodeType="withEffect">
                                   <p:stCondLst>
                                     <p:cond delay="0"/>
                                   </p:stCondLst>
@@ -28858,7 +29711,7 @@
                                 </p:cTn>
                               </p:par>
                               <p:par>
-                                <p:cTn id="65" presetID="10" presetClass="entr" presetSubtype="0" fill="hold" grpId="3" nodeType="withEffect">
+                                <p:cTn id="65" presetID="10" presetClass="entr" presetSubtype="0" fill="hold" nodeType="withEffect">
                                   <p:stCondLst>
                                     <p:cond delay="0"/>
                                   </p:stCondLst>
@@ -28911,7 +29764,7 @@
                             </p:stCondLst>
                             <p:childTnLst>
                               <p:par>
-                                <p:cTn id="70" presetID="10" presetClass="entr" presetSubtype="0" fill="hold" grpId="4" nodeType="clickEffect">
+                                <p:cTn id="70" presetID="10" presetClass="entr" presetSubtype="0" fill="hold" nodeType="clickEffect">
                                   <p:stCondLst>
                                     <p:cond delay="0"/>
                                   </p:stCondLst>
@@ -28984,6 +29837,7 @@
         <a:solidFill>
           <a:srgbClr val="F4F8FC"/>
         </a:solidFill>
+        <a:effectLst/>
       </p:bgPr>
     </p:bg>
     <p:spTree>
@@ -29019,6 +29873,13 @@
           </a:solidFill>
           <a:ln/>
         </p:spPr>
+        <p:txBody>
+          <a:bodyPr/>
+          <a:lstStyle/>
+          <a:p>
+            <a:endParaRPr lang="en-US"/>
+          </a:p>
+        </p:txBody>
       </p:sp>
       <p:sp>
         <p:nvSpPr>
@@ -29039,6 +29900,13 @@
           </a:solidFill>
           <a:ln/>
         </p:spPr>
+        <p:txBody>
+          <a:bodyPr/>
+          <a:lstStyle/>
+          <a:p>
+            <a:endParaRPr lang="en-US"/>
+          </a:p>
+        </p:txBody>
       </p:sp>
       <p:sp>
         <p:nvSpPr>
@@ -29061,11 +29929,11 @@
           <a:bodyPr wrap="square" lIns="0" tIns="0" rIns="0" bIns="0" rtlCol="0" anchor="ctr"/>
           <a:lstStyle/>
           <a:p>
-            <a:pPr indent="0" marL="0">
+            <a:pPr marL="0" indent="0">
               <a:buNone/>
             </a:pPr>
             <a:r>
-              <a:rPr lang="en-US" sz="1200" b="1" spc="300" kern="0" dirty="0">
+              <a:rPr lang="en-US" sz="1200" b="1" kern="0" spc="300" dirty="0">
                 <a:solidFill>
                   <a:srgbClr val="0284C7"/>
                 </a:solidFill>
@@ -29100,7 +29968,7 @@
           <a:bodyPr wrap="square" lIns="0" tIns="0" rIns="0" bIns="0" rtlCol="0" anchor="ctr"/>
           <a:lstStyle/>
           <a:p>
-            <a:pPr indent="0" marL="0">
+            <a:pPr marL="0" indent="0">
               <a:buNone/>
             </a:pPr>
             <a:r>
@@ -29144,13 +30012,20 @@
             <a:prstDash val="solid"/>
           </a:ln>
           <a:effectLst>
-            <a:outerShdw sx="100000" sy="100000" kx="0" ky="0" algn="bl" rotWithShape="0" blurRad="88900" dist="25400" dir="5400000">
+            <a:outerShdw blurRad="88900" dist="25400" dir="5400000" algn="bl" rotWithShape="0">
               <a:srgbClr val="8FA3BC">
                 <a:alpha val="30000"/>
               </a:srgbClr>
             </a:outerShdw>
           </a:effectLst>
         </p:spPr>
+        <p:txBody>
+          <a:bodyPr/>
+          <a:lstStyle/>
+          <a:p>
+            <a:endParaRPr lang="en-US"/>
+          </a:p>
+        </p:txBody>
       </p:sp>
       <p:sp>
         <p:nvSpPr>
@@ -29171,17 +30046,24 @@
           </a:solidFill>
           <a:ln/>
         </p:spPr>
+        <p:txBody>
+          <a:bodyPr/>
+          <a:lstStyle/>
+          <a:p>
+            <a:endParaRPr lang="en-US"/>
+          </a:p>
+        </p:txBody>
       </p:sp>
       <p:pic>
         <p:nvPicPr>
-          <p:cNvPr id="8" name="Image 0" descr="preencoded.png">    </p:cNvPr>
+          <p:cNvPr id="8" name="Image 0" descr="preencoded.png"/>
           <p:cNvPicPr>
             <a:picLocks noChangeAspect="1"/>
           </p:cNvPicPr>
           <p:nvPr/>
         </p:nvPicPr>
         <p:blipFill>
-          <a:blip r:embed="rId1"/>
+          <a:blip r:embed="rId3"/>
           <a:stretch>
             <a:fillRect/>
           </a:stretch>
@@ -29217,7 +30099,7 @@
           <a:bodyPr wrap="square" lIns="0" tIns="0" rIns="0" bIns="0" rtlCol="0" anchor="ctr"/>
           <a:lstStyle/>
           <a:p>
-            <a:pPr algn="ctr" indent="0" marL="0">
+            <a:pPr marL="0" indent="0" algn="ctr">
               <a:buNone/>
             </a:pPr>
             <a:r>
@@ -29256,7 +30138,7 @@
           <a:bodyPr wrap="square" lIns="0" tIns="0" rIns="0" bIns="0" rtlCol="0" anchor="ctr"/>
           <a:lstStyle/>
           <a:p>
-            <a:pPr algn="ctr" indent="0" marL="0">
+            <a:pPr marL="0" indent="0" algn="ctr">
               <a:buNone/>
             </a:pPr>
             <a:r>
@@ -29293,17 +30175,24 @@
           </a:solidFill>
           <a:ln/>
         </p:spPr>
+        <p:txBody>
+          <a:bodyPr/>
+          <a:lstStyle/>
+          <a:p>
+            <a:endParaRPr lang="en-US"/>
+          </a:p>
+        </p:txBody>
       </p:sp>
       <p:pic>
         <p:nvPicPr>
-          <p:cNvPr id="12" name="Image 1" descr="preencoded.png">    </p:cNvPr>
+          <p:cNvPr id="12" name="Image 1" descr="preencoded.png"/>
           <p:cNvPicPr>
             <a:picLocks noChangeAspect="1"/>
           </p:cNvPicPr>
           <p:nvPr/>
         </p:nvPicPr>
         <p:blipFill>
-          <a:blip r:embed="rId2"/>
+          <a:blip r:embed="rId4"/>
           <a:stretch>
             <a:fillRect/>
           </a:stretch>
@@ -29344,13 +30233,20 @@
             <a:prstDash val="solid"/>
           </a:ln>
           <a:effectLst>
-            <a:outerShdw sx="100000" sy="100000" kx="0" ky="0" algn="bl" rotWithShape="0" blurRad="88900" dist="25400" dir="5400000">
+            <a:outerShdw blurRad="88900" dist="25400" dir="5400000" algn="bl" rotWithShape="0">
               <a:srgbClr val="8FA3BC">
                 <a:alpha val="30000"/>
               </a:srgbClr>
             </a:outerShdw>
           </a:effectLst>
         </p:spPr>
+        <p:txBody>
+          <a:bodyPr/>
+          <a:lstStyle/>
+          <a:p>
+            <a:endParaRPr lang="en-US"/>
+          </a:p>
+        </p:txBody>
       </p:sp>
       <p:sp>
         <p:nvSpPr>
@@ -29371,17 +30267,24 @@
           </a:solidFill>
           <a:ln/>
         </p:spPr>
+        <p:txBody>
+          <a:bodyPr/>
+          <a:lstStyle/>
+          <a:p>
+            <a:endParaRPr lang="en-US"/>
+          </a:p>
+        </p:txBody>
       </p:sp>
       <p:pic>
         <p:nvPicPr>
-          <p:cNvPr id="15" name="Image 2" descr="preencoded.png">    </p:cNvPr>
+          <p:cNvPr id="15" name="Image 2" descr="preencoded.png"/>
           <p:cNvPicPr>
             <a:picLocks noChangeAspect="1"/>
           </p:cNvPicPr>
           <p:nvPr/>
         </p:nvPicPr>
         <p:blipFill>
-          <a:blip r:embed="rId3"/>
+          <a:blip r:embed="rId5"/>
           <a:stretch>
             <a:fillRect/>
           </a:stretch>
@@ -29417,7 +30320,7 @@
           <a:bodyPr wrap="square" lIns="0" tIns="0" rIns="0" bIns="0" rtlCol="0" anchor="ctr"/>
           <a:lstStyle/>
           <a:p>
-            <a:pPr algn="ctr" indent="0" marL="0">
+            <a:pPr marL="0" indent="0" algn="ctr">
               <a:buNone/>
             </a:pPr>
             <a:r>
@@ -29456,7 +30359,7 @@
           <a:bodyPr wrap="square" lIns="0" tIns="0" rIns="0" bIns="0" rtlCol="0" anchor="ctr"/>
           <a:lstStyle/>
           <a:p>
-            <a:pPr algn="ctr" indent="0" marL="0">
+            <a:pPr marL="0" indent="0" algn="ctr">
               <a:buNone/>
             </a:pPr>
             <a:r>
@@ -29493,10 +30396,17 @@
           </a:solidFill>
           <a:ln/>
         </p:spPr>
+        <p:txBody>
+          <a:bodyPr/>
+          <a:lstStyle/>
+          <a:p>
+            <a:endParaRPr lang="en-US"/>
+          </a:p>
+        </p:txBody>
       </p:sp>
       <p:pic>
         <p:nvPicPr>
-          <p:cNvPr id="19" name="Image 3" descr="preencoded.png">    </p:cNvPr>
+          <p:cNvPr id="19" name="Image 3" descr="preencoded.png"/>
           <p:cNvPicPr>
             <a:picLocks noChangeAspect="1"/>
           </p:cNvPicPr>
@@ -29544,13 +30454,20 @@
             <a:prstDash val="solid"/>
           </a:ln>
           <a:effectLst>
-            <a:outerShdw sx="100000" sy="100000" kx="0" ky="0" algn="bl" rotWithShape="0" blurRad="88900" dist="25400" dir="5400000">
+            <a:outerShdw blurRad="88900" dist="25400" dir="5400000" algn="bl" rotWithShape="0">
               <a:srgbClr val="8FA3BC">
                 <a:alpha val="30000"/>
               </a:srgbClr>
             </a:outerShdw>
           </a:effectLst>
         </p:spPr>
+        <p:txBody>
+          <a:bodyPr/>
+          <a:lstStyle/>
+          <a:p>
+            <a:endParaRPr lang="en-US"/>
+          </a:p>
+        </p:txBody>
       </p:sp>
       <p:sp>
         <p:nvSpPr>
@@ -29571,17 +30488,24 @@
           </a:solidFill>
           <a:ln/>
         </p:spPr>
+        <p:txBody>
+          <a:bodyPr/>
+          <a:lstStyle/>
+          <a:p>
+            <a:endParaRPr lang="en-US"/>
+          </a:p>
+        </p:txBody>
       </p:sp>
       <p:pic>
         <p:nvPicPr>
-          <p:cNvPr id="22" name="Image 4" descr="preencoded.png">    </p:cNvPr>
+          <p:cNvPr id="22" name="Image 4" descr="preencoded.png"/>
           <p:cNvPicPr>
             <a:picLocks noChangeAspect="1"/>
           </p:cNvPicPr>
           <p:nvPr/>
         </p:nvPicPr>
         <p:blipFill>
-          <a:blip r:embed="rId5"/>
+          <a:blip r:embed="rId6"/>
           <a:stretch>
             <a:fillRect/>
           </a:stretch>
@@ -29617,7 +30541,7 @@
           <a:bodyPr wrap="square" lIns="0" tIns="0" rIns="0" bIns="0" rtlCol="0" anchor="ctr"/>
           <a:lstStyle/>
           <a:p>
-            <a:pPr algn="ctr" indent="0" marL="0">
+            <a:pPr marL="0" indent="0" algn="ctr">
               <a:buNone/>
             </a:pPr>
             <a:r>
@@ -29656,7 +30580,7 @@
           <a:bodyPr wrap="square" lIns="0" tIns="0" rIns="0" bIns="0" rtlCol="0" anchor="ctr"/>
           <a:lstStyle/>
           <a:p>
-            <a:pPr algn="ctr" indent="0" marL="0">
+            <a:pPr marL="0" indent="0" algn="ctr">
               <a:buNone/>
             </a:pPr>
             <a:r>
@@ -29695,7 +30619,7 @@
           <a:bodyPr wrap="square" lIns="0" tIns="0" rIns="0" bIns="0" rtlCol="0" anchor="ctr"/>
           <a:lstStyle/>
           <a:p>
-            <a:pPr algn="ctr" indent="0" marL="0">
+            <a:pPr marL="0" indent="0" algn="ctr">
               <a:buNone/>
             </a:pPr>
             <a:r>
@@ -29709,9 +30633,6 @@
               </a:rPr>
               <a:t>You stay in charge:  </a:t>
             </a:r>
-            <a:pPr algn="ctr" indent="0" marL="0">
-              <a:buNone/>
-            </a:pPr>
             <a:r>
               <a:rPr lang="en-US" sz="1600" b="1" dirty="0">
                 <a:solidFill>
@@ -29748,7 +30669,7 @@
           <a:bodyPr wrap="square" lIns="0" tIns="0" rIns="0" bIns="0" rtlCol="0" anchor="ctr"/>
           <a:lstStyle/>
           <a:p>
-            <a:pPr algn="l" indent="0" marL="0">
+            <a:pPr marL="0" indent="0" algn="l">
               <a:buNone/>
             </a:pPr>
             <a:r>
@@ -29792,7 +30713,7 @@
                             </p:stCondLst>
                             <p:childTnLst>
                               <p:par>
-                                <p:cTn id="5" presetID="10" presetClass="entr" presetSubtype="0" fill="hold" grpId="0" nodeType="clickEffect">
+                                <p:cTn id="5" presetID="10" presetClass="entr" presetSubtype="0" fill="hold" nodeType="clickEffect">
                                   <p:stCondLst>
                                     <p:cond delay="0"/>
                                   </p:stCondLst>
@@ -29827,7 +30748,7 @@
                                 </p:cTn>
                               </p:par>
                               <p:par>
-                                <p:cTn id="8" presetID="10" presetClass="entr" presetSubtype="0" fill="hold" grpId="0" nodeType="withEffect">
+                                <p:cTn id="8" presetID="10" presetClass="entr" presetSubtype="0" fill="hold" nodeType="withEffect">
                                   <p:stCondLst>
                                     <p:cond delay="0"/>
                                   </p:stCondLst>
@@ -29862,7 +30783,7 @@
                                 </p:cTn>
                               </p:par>
                               <p:par>
-                                <p:cTn id="11" presetID="10" presetClass="entr" presetSubtype="0" fill="hold" grpId="0" nodeType="withEffect">
+                                <p:cTn id="11" presetID="10" presetClass="entr" presetSubtype="0" fill="hold" nodeType="withEffect">
                                   <p:stCondLst>
                                     <p:cond delay="0"/>
                                   </p:stCondLst>
@@ -29897,7 +30818,7 @@
                                 </p:cTn>
                               </p:par>
                               <p:par>
-                                <p:cTn id="14" presetID="10" presetClass="entr" presetSubtype="0" fill="hold" grpId="0" nodeType="withEffect">
+                                <p:cTn id="14" presetID="10" presetClass="entr" presetSubtype="0" fill="hold" nodeType="withEffect">
                                   <p:stCondLst>
                                     <p:cond delay="0"/>
                                   </p:stCondLst>
@@ -29932,7 +30853,7 @@
                                 </p:cTn>
                               </p:par>
                               <p:par>
-                                <p:cTn id="17" presetID="10" presetClass="entr" presetSubtype="0" fill="hold" grpId="0" nodeType="withEffect">
+                                <p:cTn id="17" presetID="10" presetClass="entr" presetSubtype="0" fill="hold" nodeType="withEffect">
                                   <p:stCondLst>
                                     <p:cond delay="0"/>
                                   </p:stCondLst>
@@ -29985,7 +30906,7 @@
                             </p:stCondLst>
                             <p:childTnLst>
                               <p:par>
-                                <p:cTn id="22" presetID="10" presetClass="entr" presetSubtype="0" fill="hold" grpId="1" nodeType="clickEffect">
+                                <p:cTn id="22" presetID="10" presetClass="entr" presetSubtype="0" fill="hold" nodeType="clickEffect">
                                   <p:stCondLst>
                                     <p:cond delay="0"/>
                                   </p:stCondLst>
@@ -30020,7 +30941,7 @@
                                 </p:cTn>
                               </p:par>
                               <p:par>
-                                <p:cTn id="25" presetID="10" presetClass="entr" presetSubtype="0" fill="hold" grpId="1" nodeType="withEffect">
+                                <p:cTn id="25" presetID="10" presetClass="entr" presetSubtype="0" fill="hold" nodeType="withEffect">
                                   <p:stCondLst>
                                     <p:cond delay="0"/>
                                   </p:stCondLst>
@@ -30055,7 +30976,7 @@
                                 </p:cTn>
                               </p:par>
                               <p:par>
-                                <p:cTn id="28" presetID="10" presetClass="entr" presetSubtype="0" fill="hold" grpId="1" nodeType="withEffect">
+                                <p:cTn id="28" presetID="10" presetClass="entr" presetSubtype="0" fill="hold" nodeType="withEffect">
                                   <p:stCondLst>
                                     <p:cond delay="0"/>
                                   </p:stCondLst>
@@ -30090,7 +31011,7 @@
                                 </p:cTn>
                               </p:par>
                               <p:par>
-                                <p:cTn id="31" presetID="10" presetClass="entr" presetSubtype="0" fill="hold" grpId="1" nodeType="withEffect">
+                                <p:cTn id="31" presetID="10" presetClass="entr" presetSubtype="0" fill="hold" nodeType="withEffect">
                                   <p:stCondLst>
                                     <p:cond delay="0"/>
                                   </p:stCondLst>
@@ -30125,7 +31046,7 @@
                                 </p:cTn>
                               </p:par>
                               <p:par>
-                                <p:cTn id="34" presetID="10" presetClass="entr" presetSubtype="0" fill="hold" grpId="1" nodeType="withEffect">
+                                <p:cTn id="34" presetID="10" presetClass="entr" presetSubtype="0" fill="hold" nodeType="withEffect">
                                   <p:stCondLst>
                                     <p:cond delay="0"/>
                                   </p:stCondLst>
@@ -30178,7 +31099,7 @@
                             </p:stCondLst>
                             <p:childTnLst>
                               <p:par>
-                                <p:cTn id="39" presetID="10" presetClass="entr" presetSubtype="0" fill="hold" grpId="2" nodeType="clickEffect">
+                                <p:cTn id="39" presetID="10" presetClass="entr" presetSubtype="0" fill="hold" nodeType="clickEffect">
                                   <p:stCondLst>
                                     <p:cond delay="0"/>
                                   </p:stCondLst>
@@ -30213,7 +31134,7 @@
                                 </p:cTn>
                               </p:par>
                               <p:par>
-                                <p:cTn id="42" presetID="10" presetClass="entr" presetSubtype="0" fill="hold" grpId="2" nodeType="withEffect">
+                                <p:cTn id="42" presetID="10" presetClass="entr" presetSubtype="0" fill="hold" nodeType="withEffect">
                                   <p:stCondLst>
                                     <p:cond delay="0"/>
                                   </p:stCondLst>
@@ -30248,7 +31169,7 @@
                                 </p:cTn>
                               </p:par>
                               <p:par>
-                                <p:cTn id="45" presetID="10" presetClass="entr" presetSubtype="0" fill="hold" grpId="2" nodeType="withEffect">
+                                <p:cTn id="45" presetID="10" presetClass="entr" presetSubtype="0" fill="hold" nodeType="withEffect">
                                   <p:stCondLst>
                                     <p:cond delay="0"/>
                                   </p:stCondLst>
@@ -30283,7 +31204,7 @@
                                 </p:cTn>
                               </p:par>
                               <p:par>
-                                <p:cTn id="48" presetID="10" presetClass="entr" presetSubtype="0" fill="hold" grpId="2" nodeType="withEffect">
+                                <p:cTn id="48" presetID="10" presetClass="entr" presetSubtype="0" fill="hold" nodeType="withEffect">
                                   <p:stCondLst>
                                     <p:cond delay="0"/>
                                   </p:stCondLst>
@@ -30318,7 +31239,7 @@
                                 </p:cTn>
                               </p:par>
                               <p:par>
-                                <p:cTn id="51" presetID="10" presetClass="entr" presetSubtype="0" fill="hold" grpId="2" nodeType="withEffect">
+                                <p:cTn id="51" presetID="10" presetClass="entr" presetSubtype="0" fill="hold" nodeType="withEffect">
                                   <p:stCondLst>
                                     <p:cond delay="0"/>
                                   </p:stCondLst>
@@ -30371,7 +31292,7 @@
                             </p:stCondLst>
                             <p:childTnLst>
                               <p:par>
-                                <p:cTn id="56" presetID="10" presetClass="entr" presetSubtype="0" fill="hold" grpId="3" nodeType="clickEffect">
+                                <p:cTn id="56" presetID="10" presetClass="entr" presetSubtype="0" fill="hold" nodeType="clickEffect">
                                   <p:stCondLst>
                                     <p:cond delay="0"/>
                                   </p:stCondLst>
@@ -30406,7 +31327,7 @@
                                 </p:cTn>
                               </p:par>
                               <p:par>
-                                <p:cTn id="59" presetID="10" presetClass="entr" presetSubtype="0" fill="hold" grpId="3" nodeType="withEffect">
+                                <p:cTn id="59" presetID="10" presetClass="entr" presetSubtype="0" fill="hold" nodeType="withEffect">
                                   <p:stCondLst>
                                     <p:cond delay="0"/>
                                   </p:stCondLst>
@@ -30459,7 +31380,7 @@
                             </p:stCondLst>
                             <p:childTnLst>
                               <p:par>
-                                <p:cTn id="64" presetID="10" presetClass="entr" presetSubtype="0" fill="hold" grpId="4" nodeType="clickEffect">
+                                <p:cTn id="64" presetID="10" presetClass="entr" presetSubtype="0" fill="hold" nodeType="clickEffect">
                                   <p:stCondLst>
                                     <p:cond delay="0"/>
                                   </p:stCondLst>
@@ -30494,7 +31415,7 @@
                                 </p:cTn>
                               </p:par>
                               <p:par>
-                                <p:cTn id="67" presetID="10" presetClass="entr" presetSubtype="0" fill="hold" grpId="4" nodeType="withEffect">
+                                <p:cTn id="67" presetID="10" presetClass="entr" presetSubtype="0" fill="hold" nodeType="withEffect">
                                   <p:stCondLst>
                                     <p:cond delay="0"/>
                                   </p:stCondLst>
@@ -30547,7 +31468,7 @@
                             </p:stCondLst>
                             <p:childTnLst>
                               <p:par>
-                                <p:cTn id="72" presetID="10" presetClass="entr" presetSubtype="0" fill="hold" grpId="5" nodeType="clickEffect">
+                                <p:cTn id="72" presetID="10" presetClass="entr" presetSubtype="0" fill="hold" nodeType="clickEffect">
                                   <p:stCondLst>
                                     <p:cond delay="0"/>
                                   </p:stCondLst>
@@ -30905,4 +31826,319 @@
     </a:ext>
   </a:extLst>
 </a:theme>
+</file>
+
+<file path=ppt/theme/theme2.xml><?xml version="1.0" encoding="utf-8"?>
+<a:theme xmlns:a="http://schemas.openxmlformats.org/drawingml/2006/main" name="Office Theme">
+  <a:themeElements>
+    <a:clrScheme name="Office">
+      <a:dk1>
+        <a:sysClr val="windowText" lastClr="000000"/>
+      </a:dk1>
+      <a:lt1>
+        <a:sysClr val="window" lastClr="FFFFFF"/>
+      </a:lt1>
+      <a:dk2>
+        <a:srgbClr val="0E2841"/>
+      </a:dk2>
+      <a:lt2>
+        <a:srgbClr val="E8E8E8"/>
+      </a:lt2>
+      <a:accent1>
+        <a:srgbClr val="156082"/>
+      </a:accent1>
+      <a:accent2>
+        <a:srgbClr val="E97132"/>
+      </a:accent2>
+      <a:accent3>
+        <a:srgbClr val="196B24"/>
+      </a:accent3>
+      <a:accent4>
+        <a:srgbClr val="0F9ED5"/>
+      </a:accent4>
+      <a:accent5>
+        <a:srgbClr val="A02B93"/>
+      </a:accent5>
+      <a:accent6>
+        <a:srgbClr val="4EA72E"/>
+      </a:accent6>
+      <a:hlink>
+        <a:srgbClr val="467886"/>
+      </a:hlink>
+      <a:folHlink>
+        <a:srgbClr val="96607D"/>
+      </a:folHlink>
+    </a:clrScheme>
+    <a:fontScheme name="Office">
+      <a:majorFont>
+        <a:latin typeface="Aptos Display" panose="02110004020202020204"/>
+        <a:ea typeface=""/>
+        <a:cs typeface=""/>
+        <a:font script="Jpan" typeface="游ゴシック Light"/>
+        <a:font script="Hang" typeface="맑은 고딕"/>
+        <a:font script="Hans" typeface="等线 Light"/>
+        <a:font script="Hant" typeface="新細明體"/>
+        <a:font script="Arab" typeface="Times New Roman"/>
+        <a:font script="Hebr" typeface="Times New Roman"/>
+        <a:font script="Thai" typeface="Angsana New"/>
+        <a:font script="Ethi" typeface="Nyala"/>
+        <a:font script="Beng" typeface="Vrinda"/>
+        <a:font script="Gujr" typeface="Shruti"/>
+        <a:font script="Khmr" typeface="MoolBoran"/>
+        <a:font script="Knda" typeface="Tunga"/>
+        <a:font script="Guru" typeface="Raavi"/>
+        <a:font script="Cans" typeface="Euphemia"/>
+        <a:font script="Cher" typeface="Plantagenet Cherokee"/>
+        <a:font script="Yiii" typeface="Microsoft Yi Baiti"/>
+        <a:font script="Tibt" typeface="Microsoft Himalaya"/>
+        <a:font script="Thaa" typeface="MV Boli"/>
+        <a:font script="Deva" typeface="Mangal"/>
+        <a:font script="Telu" typeface="Gautami"/>
+        <a:font script="Taml" typeface="Latha"/>
+        <a:font script="Syrc" typeface="Estrangelo Edessa"/>
+        <a:font script="Orya" typeface="Kalinga"/>
+        <a:font script="Mlym" typeface="Kartika"/>
+        <a:font script="Laoo" typeface="DokChampa"/>
+        <a:font script="Sinh" typeface="Iskoola Pota"/>
+        <a:font script="Mong" typeface="Mongolian Baiti"/>
+        <a:font script="Viet" typeface="Times New Roman"/>
+        <a:font script="Uigh" typeface="Microsoft Uighur"/>
+        <a:font script="Geor" typeface="Sylfaen"/>
+        <a:font script="Armn" typeface="Arial"/>
+        <a:font script="Bugi" typeface="Leelawadee UI"/>
+        <a:font script="Bopo" typeface="Microsoft JhengHei"/>
+        <a:font script="Java" typeface="Javanese Text"/>
+        <a:font script="Lisu" typeface="Segoe UI"/>
+        <a:font script="Mymr" typeface="Myanmar Text"/>
+        <a:font script="Nkoo" typeface="Ebrima"/>
+        <a:font script="Olck" typeface="Nirmala UI"/>
+        <a:font script="Osma" typeface="Ebrima"/>
+        <a:font script="Phag" typeface="Phagspa"/>
+        <a:font script="Syrn" typeface="Estrangelo Edessa"/>
+        <a:font script="Syrj" typeface="Estrangelo Edessa"/>
+        <a:font script="Syre" typeface="Estrangelo Edessa"/>
+        <a:font script="Sora" typeface="Nirmala UI"/>
+        <a:font script="Tale" typeface="Microsoft Tai Le"/>
+        <a:font script="Talu" typeface="Microsoft New Tai Lue"/>
+        <a:font script="Tfng" typeface="Ebrima"/>
+      </a:majorFont>
+      <a:minorFont>
+        <a:latin typeface="Aptos" panose="02110004020202020204"/>
+        <a:ea typeface=""/>
+        <a:cs typeface=""/>
+        <a:font script="Jpan" typeface="游ゴシック"/>
+        <a:font script="Hang" typeface="맑은 고딕"/>
+        <a:font script="Hans" typeface="等线"/>
+        <a:font script="Hant" typeface="新細明體"/>
+        <a:font script="Arab" typeface="Arial"/>
+        <a:font script="Hebr" typeface="Arial"/>
+        <a:font script="Thai" typeface="Cordia New"/>
+        <a:font script="Ethi" typeface="Nyala"/>
+        <a:font script="Beng" typeface="Vrinda"/>
+        <a:font script="Gujr" typeface="Shruti"/>
+        <a:font script="Khmr" typeface="DaunPenh"/>
+        <a:font script="Knda" typeface="Tunga"/>
+        <a:font script="Guru" typeface="Raavi"/>
+        <a:font script="Cans" typeface="Euphemia"/>
+        <a:font script="Cher" typeface="Plantagenet Cherokee"/>
+        <a:font script="Yiii" typeface="Microsoft Yi Baiti"/>
+        <a:font script="Tibt" typeface="Microsoft Himalaya"/>
+        <a:font script="Thaa" typeface="MV Boli"/>
+        <a:font script="Deva" typeface="Mangal"/>
+        <a:font script="Telu" typeface="Gautami"/>
+        <a:font script="Taml" typeface="Latha"/>
+        <a:font script="Syrc" typeface="Estrangelo Edessa"/>
+        <a:font script="Orya" typeface="Kalinga"/>
+        <a:font script="Mlym" typeface="Kartika"/>
+        <a:font script="Laoo" typeface="DokChampa"/>
+        <a:font script="Sinh" typeface="Iskoola Pota"/>
+        <a:font script="Mong" typeface="Mongolian Baiti"/>
+        <a:font script="Viet" typeface="Arial"/>
+        <a:font script="Uigh" typeface="Microsoft Uighur"/>
+        <a:font script="Geor" typeface="Sylfaen"/>
+        <a:font script="Armn" typeface="Arial"/>
+        <a:font script="Bugi" typeface="Leelawadee UI"/>
+        <a:font script="Bopo" typeface="Microsoft JhengHei"/>
+        <a:font script="Java" typeface="Javanese Text"/>
+        <a:font script="Lisu" typeface="Segoe UI"/>
+        <a:font script="Mymr" typeface="Myanmar Text"/>
+        <a:font script="Nkoo" typeface="Ebrima"/>
+        <a:font script="Olck" typeface="Nirmala UI"/>
+        <a:font script="Osma" typeface="Ebrima"/>
+        <a:font script="Phag" typeface="Phagspa"/>
+        <a:font script="Syrn" typeface="Estrangelo Edessa"/>
+        <a:font script="Syrj" typeface="Estrangelo Edessa"/>
+        <a:font script="Syre" typeface="Estrangelo Edessa"/>
+        <a:font script="Sora" typeface="Nirmala UI"/>
+        <a:font script="Tale" typeface="Microsoft Tai Le"/>
+        <a:font script="Talu" typeface="Microsoft New Tai Lue"/>
+        <a:font script="Tfng" typeface="Ebrima"/>
+      </a:minorFont>
+    </a:fontScheme>
+    <a:fmtScheme name="Office">
+      <a:fillStyleLst>
+        <a:solidFill>
+          <a:schemeClr val="phClr"/>
+        </a:solidFill>
+        <a:gradFill rotWithShape="1">
+          <a:gsLst>
+            <a:gs pos="0">
+              <a:schemeClr val="phClr">
+                <a:lumMod val="110000"/>
+                <a:satMod val="105000"/>
+                <a:tint val="67000"/>
+              </a:schemeClr>
+            </a:gs>
+            <a:gs pos="50000">
+              <a:schemeClr val="phClr">
+                <a:lumMod val="105000"/>
+                <a:satMod val="103000"/>
+                <a:tint val="73000"/>
+              </a:schemeClr>
+            </a:gs>
+            <a:gs pos="100000">
+              <a:schemeClr val="phClr">
+                <a:lumMod val="105000"/>
+                <a:satMod val="109000"/>
+                <a:tint val="81000"/>
+              </a:schemeClr>
+            </a:gs>
+          </a:gsLst>
+          <a:lin ang="5400000" scaled="0"/>
+        </a:gradFill>
+        <a:gradFill rotWithShape="1">
+          <a:gsLst>
+            <a:gs pos="0">
+              <a:schemeClr val="phClr">
+                <a:satMod val="103000"/>
+                <a:lumMod val="102000"/>
+                <a:tint val="94000"/>
+              </a:schemeClr>
+            </a:gs>
+            <a:gs pos="50000">
+              <a:schemeClr val="phClr">
+                <a:satMod val="110000"/>
+                <a:lumMod val="100000"/>
+                <a:shade val="100000"/>
+              </a:schemeClr>
+            </a:gs>
+            <a:gs pos="100000">
+              <a:schemeClr val="phClr">
+                <a:lumMod val="99000"/>
+                <a:satMod val="120000"/>
+                <a:shade val="78000"/>
+              </a:schemeClr>
+            </a:gs>
+          </a:gsLst>
+          <a:lin ang="5400000" scaled="0"/>
+        </a:gradFill>
+      </a:fillStyleLst>
+      <a:lnStyleLst>
+        <a:ln w="12700" cap="flat" cmpd="sng" algn="ctr">
+          <a:solidFill>
+            <a:schemeClr val="phClr"/>
+          </a:solidFill>
+          <a:prstDash val="solid"/>
+          <a:miter lim="800000"/>
+        </a:ln>
+        <a:ln w="19050" cap="flat" cmpd="sng" algn="ctr">
+          <a:solidFill>
+            <a:schemeClr val="phClr"/>
+          </a:solidFill>
+          <a:prstDash val="solid"/>
+          <a:miter lim="800000"/>
+        </a:ln>
+        <a:ln w="25400" cap="flat" cmpd="sng" algn="ctr">
+          <a:solidFill>
+            <a:schemeClr val="phClr"/>
+          </a:solidFill>
+          <a:prstDash val="solid"/>
+          <a:miter lim="800000"/>
+        </a:ln>
+      </a:lnStyleLst>
+      <a:effectStyleLst>
+        <a:effectStyle>
+          <a:effectLst/>
+        </a:effectStyle>
+        <a:effectStyle>
+          <a:effectLst/>
+        </a:effectStyle>
+        <a:effectStyle>
+          <a:effectLst>
+            <a:outerShdw blurRad="57150" dist="19050" dir="5400000" algn="ctr" rotWithShape="0">
+              <a:srgbClr val="000000">
+                <a:alpha val="63000"/>
+              </a:srgbClr>
+            </a:outerShdw>
+          </a:effectLst>
+        </a:effectStyle>
+      </a:effectStyleLst>
+      <a:bgFillStyleLst>
+        <a:solidFill>
+          <a:schemeClr val="phClr"/>
+        </a:solidFill>
+        <a:solidFill>
+          <a:schemeClr val="phClr">
+            <a:tint val="95000"/>
+            <a:satMod val="170000"/>
+          </a:schemeClr>
+        </a:solidFill>
+        <a:gradFill rotWithShape="1">
+          <a:gsLst>
+            <a:gs pos="0">
+              <a:schemeClr val="phClr">
+                <a:tint val="93000"/>
+                <a:satMod val="150000"/>
+                <a:shade val="98000"/>
+                <a:lumMod val="102000"/>
+              </a:schemeClr>
+            </a:gs>
+            <a:gs pos="50000">
+              <a:schemeClr val="phClr">
+                <a:tint val="98000"/>
+                <a:satMod val="130000"/>
+                <a:shade val="90000"/>
+                <a:lumMod val="103000"/>
+              </a:schemeClr>
+            </a:gs>
+            <a:gs pos="100000">
+              <a:schemeClr val="phClr">
+                <a:shade val="63000"/>
+                <a:satMod val="120000"/>
+              </a:schemeClr>
+            </a:gs>
+          </a:gsLst>
+          <a:lin ang="5400000" scaled="0"/>
+        </a:gradFill>
+      </a:bgFillStyleLst>
+    </a:fmtScheme>
+  </a:themeElements>
+  <a:objectDefaults>
+    <a:lnDef>
+      <a:spPr/>
+      <a:bodyPr/>
+      <a:lstStyle/>
+      <a:style>
+        <a:lnRef idx="2">
+          <a:schemeClr val="accent1"/>
+        </a:lnRef>
+        <a:fillRef idx="0">
+          <a:schemeClr val="accent1"/>
+        </a:fillRef>
+        <a:effectRef idx="1">
+          <a:schemeClr val="accent1"/>
+        </a:effectRef>
+        <a:fontRef idx="minor">
+          <a:schemeClr val="tx1"/>
+        </a:fontRef>
+      </a:style>
+    </a:lnDef>
+  </a:objectDefaults>
+  <a:extraClrSchemeLst/>
+  <a:extLst>
+    <a:ext uri="{05A4C25C-085E-4340-85A3-A5531E510DB2}">
+      <thm15:themeFamily xmlns:thm15="http://schemas.microsoft.com/office/thememl/2012/main" name="Office Theme" id="{2E142A2C-CD16-42D6-873A-C26D2A0506FA}" vid="{1BDDFF52-6CD6-40A5-AB3C-68EB2F1E4D0A}"/>
+    </a:ext>
+  </a:extLst>
+</a:theme>
 </file>